--- a/발표자료_최종본_v6.pptx
+++ b/발표자료_최종본_v6.pptx
@@ -21,8 +21,8 @@
     <p:sldId id="264" r:id="rId11"/>
     <p:sldId id="265" r:id="rId12"/>
     <p:sldId id="266" r:id="rId13"/>
+    <p:sldId id="268" r:id="rId15"/>
     <p:sldId id="267" r:id="rId14"/>
-    <p:sldId id="268" r:id="rId15"/>
     <p:sldId id="269" r:id="rId16"/>
     <p:sldId id="270" r:id="rId17"/>
     <p:sldId id="281" r:id="rId32"/>
@@ -16873,7 +16873,7 @@
                 <a:cs typeface="Malgun Gothic"/>
                 <a:sym typeface="Malgun Gothic"/>
               </a:rPr>
-              <a:t>첫 번째 반전 — 걸음수는 위험군이 오히려 많다</a:t>
+              <a:t>Q1 · 첫 번째 반전 — 걸음수는 위험군이 오히려 많다</a:t>
             </a:r>
             <a:endParaRPr/>
           </a:p>
@@ -17143,6 +17143,22 @@
               <a:t>   시선을 돌리게 된 계기</a:t>
             </a:r>
             <a:endParaRPr/>
+          </a:p>
+          <a:p>
+            <a:pPr>
+              <a:spcBef>
+                <a:spcPts val="600"/>
+              </a:spcBef>
+            </a:pPr>
+            <a:r>
+              <a:rPr sz="1400" b="1">
+                <a:solidFill>
+                  <a:srgbClr val="666666"/>
+                </a:solidFill>
+                <a:latin typeface="맑은 고딕"/>
+              </a:rPr>
+              <a:t>수면효율은 정상 81.8 &gt; 경도 80.3 &gt; 치매 79.1%로 완만히 감소 — 평균 차이는 크지 않다</a:t>
+            </a:r>
           </a:p>
         </p:txBody>
       </p:sp>
@@ -17373,7 +17389,7 @@
                 <a:cs typeface="맑은 고딕"/>
                 <a:sym typeface="맑은 고딕"/>
               </a:rPr>
-              <a:t>핵심 신호는 '생활 패턴의 불규칙함'</a:t>
+              <a:t>Q3 · 핵심 신호는 '생활 패턴의 불규칙함'</a:t>
             </a:r>
             <a:endParaRPr lang="en-US" sz="3000" b="1" i="0" u="none" strike="noStrike" cap="none">
               <a:solidFill>
@@ -17910,7 +17926,7 @@
                 <a:cs typeface="Malgun Gothic"/>
                 <a:sym typeface="Malgun Gothic"/>
               </a:rPr>
-              <a:t>모델 성능 — 랜덤포레스트 vs 로지스틱 회귀</a:t>
+              <a:t>Q2 · 걸러낼 수 있는가 — 랜덤포레스트 vs 로지스틱 회귀</a:t>
             </a:r>
             <a:endParaRPr/>
           </a:p>

--- a/발표자료_최종본_v6.pptx
+++ b/발표자료_최종본_v6.pptx
@@ -2,15 +2,13 @@
 <file path=ppt/presentation.xml><?xml version="1.0" encoding="utf-8"?>
 <p:presentation xmlns:r="http://schemas.openxmlformats.org/officeDocument/2006/relationships" xmlns:c="http://schemas.openxmlformats.org/drawingml/2006/chart" xmlns:a="http://schemas.openxmlformats.org/drawingml/2006/main" xmlns:dgm="http://schemas.openxmlformats.org/drawingml/2006/diagram" xmlns:dsp="http://schemas.microsoft.com/office/drawing/2008/diagram" xmlns:p="http://schemas.openxmlformats.org/presentationml/2006/main" strictFirstAndLastChars="0" saveSubsetFonts="1" autoCompressPictures="0">
   <p:sldMasterIdLst>
-    <p:sldMasterId id="2147483660" r:id="rId1"/>
+    <p:sldMasterId id="2147483663" r:id="rId1"/>
   </p:sldMasterIdLst>
   <p:notesMasterIdLst>
     <p:notesMasterId r:id="rId2"/>
   </p:notesMasterIdLst>
   <p:sldIdLst>
     <p:sldId id="256" r:id="rId3"/>
-    <p:sldId id="279" r:id="rId30"/>
-    <p:sldId id="280" r:id="rId31"/>
     <p:sldId id="257" r:id="rId4"/>
     <p:sldId id="258" r:id="rId5"/>
     <p:sldId id="259" r:id="rId6"/>
@@ -21,20 +19,22 @@
     <p:sldId id="264" r:id="rId11"/>
     <p:sldId id="265" r:id="rId12"/>
     <p:sldId id="266" r:id="rId13"/>
+    <p:sldId id="267" r:id="rId14"/>
     <p:sldId id="268" r:id="rId15"/>
-    <p:sldId id="267" r:id="rId14"/>
     <p:sldId id="269" r:id="rId16"/>
     <p:sldId id="270" r:id="rId17"/>
-    <p:sldId id="281" r:id="rId32"/>
     <p:sldId id="271" r:id="rId18"/>
     <p:sldId id="272" r:id="rId19"/>
     <p:sldId id="273" r:id="rId20"/>
     <p:sldId id="274" r:id="rId21"/>
-    <p:sldId id="282" r:id="rId33"/>
     <p:sldId id="275" r:id="rId22"/>
     <p:sldId id="276" r:id="rId23"/>
     <p:sldId id="277" r:id="rId24"/>
     <p:sldId id="278" r:id="rId25"/>
+    <p:sldId id="279" r:id="rId26"/>
+    <p:sldId id="280" r:id="rId27"/>
+    <p:sldId id="281" r:id="rId28"/>
+    <p:sldId id="282" r:id="rId29"/>
   </p:sldIdLst>
   <p:sldSz cx="12192000" cy="6858000"/>
   <p:notesSz cx="6858000" cy="9144000"/>
@@ -1602,7 +1602,9 @@
               <a:defRPr/>
             </a:pPr>
             <a:r>
-              <a:rPr lang="en-US"/>
+              <a:rPr lang="en-US">
+                <a:latin typeface="맑은 고딕"/>
+              </a:rPr>
               <a:t>안녕하세요, 찾아조입니다. 저희는 병원 검사 없이 웨어러블 생활 기록만으로 치매 위험 신호를 걸러내는 스크리닝 서비스를 만들었습니다.</a:t>
             </a:r>
             <a:endParaRPr/>
@@ -1717,7 +1719,9 @@
               <a:defRPr/>
             </a:pPr>
             <a:r>
-              <a:rPr lang="ko-KR" altLang="en-US"/>
+              <a:rPr lang="ko-KR" altLang="en-US">
+                <a:latin typeface="맑은 고딕"/>
+              </a:rPr>
               <a:t/>
             </a:r>
             <a:endParaRPr lang="ko-KR" altLang="en-US"/>
@@ -1875,7 +1879,9 @@
               <a:defRPr/>
             </a:pPr>
             <a:r>
-              <a:rPr lang="en-US"/>
+              <a:rPr lang="en-US">
+                <a:latin typeface="맑은 고딕"/>
+              </a:rPr>
               <a:t>저희도 처음에 의외였고, 그래서 숨기지 않고 그대로 보여드립니다. 이 반전이 분석의 방향을 바꿨습니다.</a:t>
             </a:r>
             <a:endParaRPr/>
@@ -1938,113 +1944,6 @@
 </file>
 
 <file path=ppt/notesSlides/notesSlide12.xml><?xml version="1.0" encoding="utf-8"?>
-<p:notes xmlns:r="http://schemas.openxmlformats.org/officeDocument/2006/relationships" xmlns:c="http://schemas.openxmlformats.org/drawingml/2006/chart" xmlns:a="http://schemas.openxmlformats.org/drawingml/2006/main" xmlns:dgm="http://schemas.openxmlformats.org/drawingml/2006/diagram" xmlns:dsp="http://schemas.microsoft.com/office/drawing/2008/diagram" xmlns:p="http://schemas.openxmlformats.org/presentationml/2006/main" showMasterSp="0" showMasterPhAnim="0">
-  <p:cSld>
-    <p:spTree>
-      <p:nvGrpSpPr>
-        <p:cNvPr id="1" name=""/>
-        <p:cNvGrpSpPr/>
-        <p:nvPr/>
-      </p:nvGrpSpPr>
-      <p:grpSpPr>
-        <a:xfrm>
-          <a:off x="0" y="0"/>
-          <a:ext cx="0" cy="0"/>
-          <a:chOff x="0" y="0"/>
-          <a:chExt cx="0" cy="0"/>
-        </a:xfrm>
-      </p:grpSpPr>
-      <p:sp>
-        <p:nvSpPr>
-          <p:cNvPr id="214" name="Google Shape;214;p12:notes"/>
-          <p:cNvSpPr txBox="1">
-            <a:spLocks noGrp="1"/>
-          </p:cNvSpPr>
-          <p:nvPr>
-            <p:ph type="body" idx="1"/>
-          </p:nvPr>
-        </p:nvSpPr>
-        <p:spPr>
-          <a:xfrm>
-            <a:off x="685800" y="4343400"/>
-            <a:ext cx="5486400" cy="4114800"/>
-          </a:xfrm>
-          <a:prstGeom prst="rect">
-            <a:avLst/>
-          </a:prstGeom>
-        </p:spPr>
-        <p:txBody>
-          <a:bodyPr wrap="square" lIns="91424" tIns="45700" rIns="91424" bIns="45700" anchor="t" anchorCtr="0">
-            <a:noAutofit/>
-          </a:bodyPr>
-          <a:lstStyle/>
-          <a:p>
-            <a:pPr marL="0" lvl="0" indent="0" algn="l" rtl="0">
-              <a:spcBef>
-                <a:spcPts val="0"/>
-              </a:spcBef>
-              <a:spcAft>
-                <a:spcPts val="0"/>
-              </a:spcAft>
-              <a:buNone/>
-              <a:defRPr/>
-            </a:pPr>
-            <a:r>
-              <a:rPr lang="ko-KR" altLang="en-US"/>
-              <a:t/>
-            </a:r>
-            <a:endParaRPr lang="ko-KR" altLang="en-US"/>
-          </a:p>
-        </p:txBody>
-      </p:sp>
-      <p:sp>
-        <p:nvSpPr>
-          <p:cNvPr id="215" name="Google Shape;215;p12:notes"/>
-          <p:cNvSpPr>
-            <a:spLocks noGrp="1" noRot="1" noChangeAspect="1" noTextEdit="1"/>
-          </p:cNvSpPr>
-          <p:nvPr>
-            <p:ph type="sldImg" idx="2"/>
-          </p:nvPr>
-        </p:nvSpPr>
-        <p:spPr>
-          <a:xfrm>
-            <a:off x="1143000" y="685800"/>
-            <a:ext cx="4572000" cy="3429000"/>
-          </a:xfrm>
-          <a:custGeom>
-            <a:avLst/>
-            <a:gdLst/>
-            <a:rect l="l" t="t" r="r" b="b"/>
-            <a:pathLst>
-              <a:path w="120000" h="120000" extrusionOk="0">
-                <a:moveTo>
-                  <a:pt x="0" y="0"/>
-                </a:moveTo>
-                <a:lnTo>
-                  <a:pt x="120000" y="0"/>
-                </a:lnTo>
-                <a:lnTo>
-                  <a:pt x="120000" y="120000"/>
-                </a:lnTo>
-                <a:lnTo>
-                  <a:pt x="0" y="120000"/>
-                </a:lnTo>
-                <a:close/>
-              </a:path>
-            </a:pathLst>
-          </a:custGeom>
-        </p:spPr>
-      </p:sp>
-    </p:spTree>
-  </p:cSld>
-  <p:clrMapOvr>
-    <a:masterClrMapping/>
-  </p:clrMapOvr>
-</p:notes>
-</file>
-
-<file path=ppt/notesSlides/notesSlide13.xml><?xml version="1.0" encoding="utf-8"?>
 <p:notes xmlns:r="http://schemas.openxmlformats.org/officeDocument/2006/relationships" xmlns:c="http://schemas.openxmlformats.org/drawingml/2006/chart" xmlns:a="http://schemas.openxmlformats.org/drawingml/2006/main" xmlns:dgm="http://schemas.openxmlformats.org/drawingml/2006/diagram" xmlns:dsp="http://schemas.microsoft.com/office/drawing/2008/diagram" xmlns:p="http://schemas.openxmlformats.org/presentationml/2006/main" showMasterSp="0" showMasterPhAnim="0">
   <p:cSld>
     <p:spTree>
@@ -2148,7 +2047,9 @@
               <a:defRPr/>
             </a:pPr>
             <a:r>
-              <a:rPr lang="en-US"/>
+              <a:rPr lang="en-US">
+                <a:latin typeface="맑은 고딕"/>
+              </a:rPr>
               <a:t>질문 대비: 정확도가 베이스라인보다 낮은 이유 — 무조건 정상 찍는 모델은 위험군을 한 명도 못 잡습니다. 스크리닝 도구로는 무의미합니다.</a:t>
             </a:r>
             <a:endParaRPr/>
@@ -2201,6 +2102,115 @@
             <a:endParaRPr lang="ko-KR" altLang="en-US"/>
           </a:p>
         </p:txBody>
+      </p:sp>
+    </p:spTree>
+  </p:cSld>
+  <p:clrMapOvr>
+    <a:masterClrMapping/>
+  </p:clrMapOvr>
+</p:notes>
+</file>
+
+<file path=ppt/notesSlides/notesSlide13.xml><?xml version="1.0" encoding="utf-8"?>
+<p:notes xmlns:r="http://schemas.openxmlformats.org/officeDocument/2006/relationships" xmlns:c="http://schemas.openxmlformats.org/drawingml/2006/chart" xmlns:a="http://schemas.openxmlformats.org/drawingml/2006/main" xmlns:dgm="http://schemas.openxmlformats.org/drawingml/2006/diagram" xmlns:dsp="http://schemas.microsoft.com/office/drawing/2008/diagram" xmlns:p="http://schemas.openxmlformats.org/presentationml/2006/main" showMasterSp="0" showMasterPhAnim="0">
+  <p:cSld>
+    <p:spTree>
+      <p:nvGrpSpPr>
+        <p:cNvPr id="1" name=""/>
+        <p:cNvGrpSpPr/>
+        <p:nvPr/>
+      </p:nvGrpSpPr>
+      <p:grpSpPr>
+        <a:xfrm>
+          <a:off x="0" y="0"/>
+          <a:ext cx="0" cy="0"/>
+          <a:chOff x="0" y="0"/>
+          <a:chExt cx="0" cy="0"/>
+        </a:xfrm>
+      </p:grpSpPr>
+      <p:sp>
+        <p:nvSpPr>
+          <p:cNvPr id="214" name="Google Shape;214;p12:notes"/>
+          <p:cNvSpPr txBox="1">
+            <a:spLocks noGrp="1"/>
+          </p:cNvSpPr>
+          <p:nvPr>
+            <p:ph type="body" idx="1"/>
+          </p:nvPr>
+        </p:nvSpPr>
+        <p:spPr>
+          <a:xfrm>
+            <a:off x="685800" y="4343400"/>
+            <a:ext cx="5486400" cy="4114800"/>
+          </a:xfrm>
+          <a:prstGeom prst="rect">
+            <a:avLst/>
+          </a:prstGeom>
+        </p:spPr>
+        <p:txBody>
+          <a:bodyPr wrap="square" lIns="91424" tIns="45700" rIns="91424" bIns="45700" anchor="t" anchorCtr="0">
+            <a:noAutofit/>
+          </a:bodyPr>
+          <a:lstStyle/>
+          <a:p>
+            <a:pPr marL="0" lvl="0" indent="0" algn="l" rtl="0">
+              <a:spcBef>
+                <a:spcPts val="0"/>
+              </a:spcBef>
+              <a:spcAft>
+                <a:spcPts val="0"/>
+              </a:spcAft>
+              <a:buNone/>
+              <a:defRPr/>
+            </a:pPr>
+            <a:r>
+              <a:rPr lang="ko-KR" altLang="en-US">
+                <a:latin typeface="맑은 고딕"/>
+              </a:rPr>
+              <a:t/>
+            </a:r>
+            <a:endParaRPr lang="ko-KR" altLang="en-US"/>
+          </a:p>
+        </p:txBody>
+      </p:sp>
+      <p:sp>
+        <p:nvSpPr>
+          <p:cNvPr id="215" name="Google Shape;215;p12:notes"/>
+          <p:cNvSpPr>
+            <a:spLocks noGrp="1" noRot="1" noChangeAspect="1" noTextEdit="1"/>
+          </p:cNvSpPr>
+          <p:nvPr>
+            <p:ph type="sldImg" idx="2"/>
+          </p:nvPr>
+        </p:nvSpPr>
+        <p:spPr>
+          <a:xfrm>
+            <a:off x="1143000" y="685800"/>
+            <a:ext cx="4572000" cy="3429000"/>
+          </a:xfrm>
+          <a:custGeom>
+            <a:avLst/>
+            <a:gdLst/>
+            <a:rect l="l" t="t" r="r" b="b"/>
+            <a:pathLst>
+              <a:path w="120000" h="120000" extrusionOk="0">
+                <a:moveTo>
+                  <a:pt x="0" y="0"/>
+                </a:moveTo>
+                <a:lnTo>
+                  <a:pt x="120000" y="0"/>
+                </a:lnTo>
+                <a:lnTo>
+                  <a:pt x="120000" y="120000"/>
+                </a:lnTo>
+                <a:lnTo>
+                  <a:pt x="0" y="120000"/>
+                </a:lnTo>
+                <a:close/>
+              </a:path>
+            </a:pathLst>
+          </a:custGeom>
+        </p:spPr>
       </p:sp>
     </p:spTree>
   </p:cSld>
@@ -2314,7 +2324,9 @@
               <a:defRPr/>
             </a:pPr>
             <a:r>
-              <a:rPr lang="en-US"/>
+              <a:rPr lang="en-US">
+                <a:latin typeface="맑은 고딕"/>
+              </a:rPr>
               <a:t>게이트 질문 대비: 검증의 목적은 무엇을 주장해도 되는지 정하는 것이었고, 정확히 그렇게 작동했습니다. 검증 결과가 실제로 서비스 문구를 바꿨습니다.</a:t>
             </a:r>
             <a:endParaRPr/>
@@ -2429,7 +2441,9 @@
               <a:defRPr/>
             </a:pPr>
             <a:r>
-              <a:rPr lang="ko-KR" altLang="en-US"/>
+              <a:rPr lang="ko-KR" altLang="en-US">
+                <a:latin typeface="맑은 고딕"/>
+              </a:rPr>
               <a:t/>
             </a:r>
             <a:endParaRPr lang="ko-KR" altLang="en-US"/>
@@ -2536,7 +2550,9 @@
               <a:defRPr/>
             </a:pPr>
             <a:r>
-              <a:rPr lang="ko-KR" altLang="en-US"/>
+              <a:rPr lang="ko-KR" altLang="en-US">
+                <a:latin typeface="맑은 고딕"/>
+              </a:rPr>
               <a:t/>
             </a:r>
             <a:endParaRPr lang="ko-KR" altLang="en-US"/>
@@ -2643,7 +2659,9 @@
               <a:defRPr/>
             </a:pPr>
             <a:r>
-              <a:rPr lang="ko-KR" altLang="en-US"/>
+              <a:rPr lang="ko-KR" altLang="en-US">
+                <a:latin typeface="맑은 고딕"/>
+              </a:rPr>
               <a:t/>
             </a:r>
             <a:endParaRPr lang="ko-KR" altLang="en-US"/>
@@ -2750,7 +2768,9 @@
               <a:defRPr/>
             </a:pPr>
             <a:r>
-              <a:rPr lang="ko-KR" altLang="en-US"/>
+              <a:rPr lang="ko-KR" altLang="en-US">
+                <a:latin typeface="맑은 고딕"/>
+              </a:rPr>
               <a:t/>
             </a:r>
             <a:endParaRPr lang="ko-KR" altLang="en-US"/>
@@ -2857,7 +2877,9 @@
               <a:defRPr/>
             </a:pPr>
             <a:r>
-              <a:rPr lang="ko-KR" altLang="en-US"/>
+              <a:rPr lang="ko-KR" altLang="en-US">
+                <a:latin typeface="맑은 고딕"/>
+              </a:rPr>
               <a:t/>
             </a:r>
             <a:endParaRPr lang="ko-KR" altLang="en-US"/>
@@ -2964,7 +2986,9 @@
               <a:defRPr/>
             </a:pPr>
             <a:r>
-              <a:rPr lang="ko-KR" altLang="en-US"/>
+              <a:rPr lang="ko-KR" altLang="en-US">
+                <a:latin typeface="맑은 고딕"/>
+              </a:rPr>
               <a:t/>
             </a:r>
             <a:endParaRPr lang="ko-KR" altLang="en-US"/>
@@ -3122,7 +3146,9 @@
               <a:defRPr/>
             </a:pPr>
             <a:r>
-              <a:rPr lang="en-US"/>
+              <a:rPr lang="en-US">
+                <a:latin typeface="맑은 고딕"/>
+              </a:rPr>
               <a:t>상용화 관점 질문 대비: 업로드가 일회성으로 사라지지 않고 DB에 쌓이며, 검진 확진 결과가 연결된 데이터만 재학습에 씁니다. 라벨 없이 학습하면 모델이 자기 예측을 정답처럼 배우는 오염이 생기기 때문입니다. 전체 루프(적재→라벨→재학습→모델 교체)를 실제로 구현하고 테스트까지 마쳤습니다.</a:t>
             </a:r>
             <a:endParaRPr lang="en-US"/>
@@ -3152,7 +3178,9 @@
               <a:defRPr/>
             </a:pPr>
             <a:r>
-              <a:rPr lang="en-US"/>
+              <a:rPr lang="en-US">
+                <a:latin typeface="맑은 고딕"/>
+              </a:rPr>
               <a:t>[적재 상세 — 구체적으로 어떻게 저장되냐는 질문 대비]</a:t>
             </a:r>
             <a:endParaRPr lang="en-US"/>
@@ -3169,7 +3197,9 @@
               <a:defRPr/>
             </a:pPr>
             <a:r>
-              <a:rPr lang="en-US"/>
+              <a:rPr lang="en-US">
+                <a:latin typeface="맑은 고딕"/>
+              </a:rPr>
               <a:t>예측 API가 응답을 돌려주기 직전에 자동 실행: ① uuid로 무작위 12자리 익명 ID 발급(개인 식별 정보 없음) ② uploads 테이블에 요약 1행(시각/일수/위험점수/판정, 확진 라벨 자리는 NULL로 시작) ③ upload_daily 테이블에 하루 기록=1행씩(58일치면 58행, 날짜/걸음수/수면효율 등 22개 컬럼 원본 그대로) ④ 한 트랜잭션으로 커밋, ID는 응답에 담아 반환(검진 결과 연결 시 사용). DB는 SQLite 파일(data/service.db) 하나 — 설치 불필요. 적재 실패해도 예측 응답은 정상(부가 기능). 확인은 /uploads/stats API 또는 DB 파일 직접 조회.</a:t>
             </a:r>
             <a:endParaRPr/>
@@ -3284,7 +3314,9 @@
               <a:defRPr/>
             </a:pPr>
             <a:r>
-              <a:rPr lang="ko-KR" altLang="en-US"/>
+              <a:rPr lang="ko-KR" altLang="en-US">
+                <a:latin typeface="맑은 고딕"/>
+              </a:rPr>
               <a:t/>
             </a:r>
             <a:endParaRPr lang="ko-KR" altLang="en-US"/>
@@ -3391,7 +3423,9 @@
               <a:defRPr/>
             </a:pPr>
             <a:r>
-              <a:rPr lang="ko-KR" altLang="en-US"/>
+              <a:rPr lang="ko-KR" altLang="en-US">
+                <a:latin typeface="맑은 고딕"/>
+              </a:rPr>
               <a:t/>
             </a:r>
             <a:endParaRPr lang="ko-KR" altLang="en-US"/>
@@ -3498,7 +3532,9 @@
               <a:defRPr/>
             </a:pPr>
             <a:r>
-              <a:rPr lang="ko-KR" altLang="en-US"/>
+              <a:rPr lang="ko-KR" altLang="en-US">
+                <a:latin typeface="맑은 고딕"/>
+              </a:rPr>
               <a:t/>
             </a:r>
             <a:endParaRPr lang="ko-KR" altLang="en-US"/>
@@ -3656,7 +3692,9 @@
               <a:defRPr/>
             </a:pPr>
             <a:r>
-              <a:rPr lang="en-US"/>
+              <a:rPr lang="en-US">
+                <a:latin typeface="맑은 고딕"/>
+              </a:rPr>
               <a:t>치매(알츠하이머병)는 단순 노화가 아니라 실제 사망원인 6위 질환입니다. 당뇨병, 고혈압보다 높습니다.</a:t>
             </a:r>
             <a:endParaRPr/>
@@ -3822,7 +3860,9 @@
               <a:defRPr/>
             </a:pPr>
             <a:r>
-              <a:rPr lang="en-US"/>
+              <a:rPr lang="en-US">
+                <a:latin typeface="맑은 고딕"/>
+              </a:rPr>
               <a:t>다른 만성질환은 관리가 되며 증가세가 둔화되는 동안, 알츠하이머병 사망률만 10년 새 175% 급증했습니다. 왜 하필 지금, 왜 하필 치매인가에 대한 답입니다.</a:t>
             </a:r>
             <a:endParaRPr/>
@@ -3937,7 +3977,9 @@
               <a:defRPr/>
             </a:pPr>
             <a:r>
-              <a:rPr lang="ko-KR" altLang="en-US"/>
+              <a:rPr lang="ko-KR" altLang="en-US">
+                <a:latin typeface="맑은 고딕"/>
+              </a:rPr>
               <a:t/>
             </a:r>
             <a:endParaRPr lang="ko-KR" altLang="en-US"/>
@@ -4095,7 +4137,9 @@
               <a:defRPr/>
             </a:pPr>
             <a:r>
-              <a:rPr lang="en-US"/>
+              <a:rPr lang="en-US">
+                <a:latin typeface="맑은 고딕"/>
+              </a:rPr>
               <a:t>고령·여성·농촌·독거·저학력일수록 유병률이 높습니다. 정기 검진에 의존하는 현재 체계는 정작 고위험군을 놓치기 쉽습니다. 여기가 저희 프로젝트의 출발점입니다.</a:t>
             </a:r>
             <a:endParaRPr/>
@@ -4210,7 +4254,9 @@
               <a:defRPr/>
             </a:pPr>
             <a:r>
-              <a:rPr lang="ko-KR" altLang="en-US"/>
+              <a:rPr lang="ko-KR" altLang="en-US">
+                <a:latin typeface="맑은 고딕"/>
+              </a:rPr>
               <a:t/>
             </a:r>
             <a:endParaRPr lang="ko-KR" altLang="en-US"/>
@@ -4368,7 +4414,9 @@
               <a:defRPr/>
             </a:pPr>
             <a:r>
-              <a:rPr lang="en-US"/>
+              <a:rPr lang="en-US">
+                <a:latin typeface="맑은 고딕"/>
+              </a:rPr>
               <a:t>핵심 설계 결정 하나: MMSE 점수는 의사가 진단 라벨을 매길 때 쓴 검사라, 입력에 넣으면 정답을 보고 정답을 맞히는 셈입니다. 병원 검사 없이 걸러낸다는 취지에 맞게 활동·수면 기록만 씁니다.</a:t>
             </a:r>
             <a:endParaRPr/>
@@ -4483,7 +4531,9 @@
               <a:defRPr/>
             </a:pPr>
             <a:r>
-              <a:rPr lang="ko-KR" altLang="en-US"/>
+              <a:rPr lang="ko-KR" altLang="en-US">
+                <a:latin typeface="맑은 고딕"/>
+              </a:rPr>
               <a:t/>
             </a:r>
             <a:endParaRPr lang="ko-KR" altLang="en-US"/>
@@ -14194,6 +14244,10 @@
               <a:buNone/>
             </a:pPr>
             <a:r>
+              <a:rPr>
+                <a:latin typeface="맑은 고딕"/>
+                <a:ea typeface="맑은 고딕"/>
+              </a:rPr>
               <a:t/>
             </a:r>
             <a:endParaRPr b="0" i="0" sz="1800" u="none" cap="none" strike="noStrike">
@@ -14210,167 +14264,181 @@
       </p:sp>
       <p:sp>
         <p:nvSpPr>
-          <p:cNvPr id="90" name="Google Shape;90;p1"/>
+          <p:cNvPr id="90" name="TextBox 89"/>
           <p:cNvSpPr txBox="1"/>
           <p:nvPr/>
         </p:nvSpPr>
         <p:spPr>
           <a:xfrm>
-            <a:off x="914400" y="2194560"/>
-            <a:ext cx="10332720" cy="707886"/>
+            <a:off x="640080" y="1874519"/>
+            <a:ext cx="10881360" cy="548640"/>
           </a:xfrm>
           <a:prstGeom prst="rect">
             <a:avLst/>
           </a:prstGeom>
           <a:noFill/>
-          <a:ln>
-            <a:noFill/>
-          </a:ln>
         </p:spPr>
         <p:txBody>
-          <a:bodyPr anchorCtr="0" anchor="t" bIns="45700" lIns="91425" spcFirstLastPara="1" rIns="91425" wrap="square" tIns="45700">
+          <a:bodyPr wrap="square">
             <a:spAutoFit/>
           </a:bodyPr>
           <a:lstStyle/>
           <a:p>
-            <a:pPr indent="0" lvl="0" marL="0" marR="0" rtl="0" algn="ctr">
-              <a:spcBef>
-                <a:spcPts val="0"/>
-              </a:spcBef>
-              <a:spcAft>
-                <a:spcPts val="0"/>
-              </a:spcAft>
-              <a:buNone/>
-            </a:pPr>
+            <a:pPr algn="ctr"/>
             <a:r>
-              <a:rPr b="1" i="0" lang="en-US" sz="4000" u="none" cap="none" strike="noStrike">
+              <a:rPr sz="2400" b="1">
                 <a:solidFill>
-                  <a:srgbClr val="FFFFFF"/>
+                  <a:srgbClr val="BFD4F0"/>
                 </a:solidFill>
-                <a:latin typeface="Malgun Gothic"/>
-                <a:ea typeface="Malgun Gothic"/>
-                <a:cs typeface="Malgun Gothic"/>
-                <a:sym typeface="Malgun Gothic"/>
+                <a:latin typeface="맑은 고딕"/>
+                <a:ea typeface="맑은 고딕"/>
               </a:rPr>
-              <a:t>치매 위험 조기 스크리닝 서비스</a:t>
+              <a:t>웨어러블 라이프로그 데이터 분석 기반</a:t>
             </a:r>
-            <a:endParaRPr b="1" i="0" sz="4000" u="none" cap="none" strike="noStrike">
-              <a:solidFill>
-                <a:srgbClr val="FFFFFF"/>
-              </a:solidFill>
-              <a:latin typeface="Malgun Gothic"/>
-              <a:ea typeface="Malgun Gothic"/>
-              <a:cs typeface="Malgun Gothic"/>
-              <a:sym typeface="Malgun Gothic"/>
-            </a:endParaRPr>
           </a:p>
         </p:txBody>
       </p:sp>
       <p:sp>
         <p:nvSpPr>
-          <p:cNvPr id="91" name="Google Shape;91;p1"/>
+          <p:cNvPr id="91" name="TextBox 90"/>
           <p:cNvSpPr txBox="1"/>
           <p:nvPr/>
         </p:nvSpPr>
         <p:spPr>
           <a:xfrm>
-            <a:off x="914400" y="3474720"/>
-            <a:ext cx="10332720" cy="640080"/>
+            <a:off x="640080" y="2377440"/>
+            <a:ext cx="10881360" cy="914400"/>
           </a:xfrm>
           <a:prstGeom prst="rect">
             <a:avLst/>
           </a:prstGeom>
           <a:noFill/>
-          <a:ln>
-            <a:noFill/>
-          </a:ln>
         </p:spPr>
         <p:txBody>
-          <a:bodyPr anchorCtr="0" anchor="t" bIns="45700" lIns="91425" spcFirstLastPara="1" rIns="91425" wrap="square" tIns="45700">
+          <a:bodyPr wrap="square">
             <a:spAutoFit/>
           </a:bodyPr>
           <a:lstStyle/>
           <a:p>
-            <a:pPr indent="0" lvl="0" marL="0" marR="0" rtl="0" algn="ctr">
-              <a:spcBef>
-                <a:spcPts val="0"/>
-              </a:spcBef>
-              <a:spcAft>
-                <a:spcPts val="0"/>
-              </a:spcAft>
-              <a:buNone/>
-            </a:pPr>
+            <a:pPr algn="ctr"/>
             <a:r>
-              <a:rPr b="1" i="0" lang="en-US" sz="2000" u="none" cap="none" strike="noStrike">
+              <a:rPr sz="4400" b="1">
                 <a:solidFill>
-                  <a:srgbClr val="BFD4F0"/>
+                  <a:srgbClr val="FFFFFF"/>
                 </a:solidFill>
-                <a:latin typeface="Malgun Gothic"/>
-                <a:ea typeface="Malgun Gothic"/>
-                <a:cs typeface="Malgun Gothic"/>
-                <a:sym typeface="Malgun Gothic"/>
+                <a:latin typeface="맑은 고딕"/>
+                <a:ea typeface="맑은 고딕"/>
               </a:rPr>
-              <a:t>웨어러블 생활 기록만으로, 병원에 가볼 이유를 먼저 알려주는 서비스</a:t>
+              <a:t>치매 위험 조기 스크리닝 서비스</a:t>
             </a:r>
-            <a:endParaRPr/>
           </a:p>
         </p:txBody>
       </p:sp>
       <p:sp>
         <p:nvSpPr>
-          <p:cNvPr id="92" name="Google Shape;92;p1"/>
+          <p:cNvPr id="92" name="TextBox 91"/>
           <p:cNvSpPr txBox="1"/>
           <p:nvPr/>
         </p:nvSpPr>
         <p:spPr>
           <a:xfrm>
-            <a:off x="914400" y="5120640"/>
-            <a:ext cx="10332720" cy="461665"/>
+            <a:off x="640080" y="3520440"/>
+            <a:ext cx="10881360" cy="548640"/>
           </a:xfrm>
           <a:prstGeom prst="rect">
             <a:avLst/>
           </a:prstGeom>
           <a:noFill/>
-          <a:ln>
-            <a:noFill/>
-          </a:ln>
         </p:spPr>
         <p:txBody>
-          <a:bodyPr anchorCtr="0" anchor="t" bIns="45700" lIns="91425" spcFirstLastPara="1" rIns="91425" wrap="square" tIns="45700">
+          <a:bodyPr wrap="square">
             <a:spAutoFit/>
           </a:bodyPr>
           <a:lstStyle/>
           <a:p>
-            <a:pPr indent="0" lvl="0" marL="0" marR="0" rtl="0" algn="ctr">
-              <a:spcBef>
-                <a:spcPts val="0"/>
-              </a:spcBef>
-              <a:spcAft>
-                <a:spcPts val="0"/>
-              </a:spcAft>
-              <a:buNone/>
-            </a:pPr>
+            <a:pPr algn="ctr"/>
             <a:r>
-              <a:rPr b="1" i="0" lang="en-US" sz="2400" u="none" cap="none" strike="noStrike">
+              <a:rPr sz="1700" b="1">
+                <a:solidFill>
+                  <a:srgbClr val="BFD4F0"/>
+                </a:solidFill>
+                <a:latin typeface="맑은 고딕"/>
+                <a:ea typeface="맑은 고딕"/>
+              </a:rPr>
+              <a:t>활동·수면 기록만으로 치매 위험 신호를 걸러내, 병원에 가볼 이유를 먼저 알려주는 서비스</a:t>
+            </a:r>
+          </a:p>
+        </p:txBody>
+      </p:sp>
+      <p:sp>
+        <p:nvSpPr>
+          <p:cNvPr id="93" name="TextBox 92"/>
+          <p:cNvSpPr txBox="1"/>
+          <p:nvPr/>
+        </p:nvSpPr>
+        <p:spPr>
+          <a:xfrm>
+            <a:off x="640080" y="4892040"/>
+            <a:ext cx="10881360" cy="502920"/>
+          </a:xfrm>
+          <a:prstGeom prst="rect">
+            <a:avLst/>
+          </a:prstGeom>
+          <a:noFill/>
+        </p:spPr>
+        <p:txBody>
+          <a:bodyPr wrap="square">
+            <a:spAutoFit/>
+          </a:bodyPr>
+          <a:lstStyle/>
+          <a:p>
+            <a:pPr algn="ctr"/>
+            <a:r>
+              <a:rPr sz="2000" b="1">
                 <a:solidFill>
                   <a:srgbClr val="FFFFFF"/>
                 </a:solidFill>
-                <a:latin typeface="Arial"/>
-                <a:ea typeface="Arial"/>
-                <a:cs typeface="Arial"/>
-                <a:sym typeface="Arial"/>
+                <a:latin typeface="맑은 고딕"/>
+                <a:ea typeface="맑은 고딕"/>
               </a:rPr>
-              <a:t>팀 찾아조</a:t>
+              <a:t>팀  찾아조</a:t>
             </a:r>
-            <a:endParaRPr b="1" i="0" sz="2400" u="none" cap="none" strike="noStrike">
-              <a:solidFill>
-                <a:srgbClr val="FFFFFF"/>
-              </a:solidFill>
-              <a:latin typeface="Arial"/>
-              <a:ea typeface="Arial"/>
-              <a:cs typeface="Arial"/>
-              <a:sym typeface="Arial"/>
-            </a:endParaRPr>
+          </a:p>
+        </p:txBody>
+      </p:sp>
+      <p:sp>
+        <p:nvSpPr>
+          <p:cNvPr id="94" name="TextBox 93"/>
+          <p:cNvSpPr txBox="1"/>
+          <p:nvPr/>
+        </p:nvSpPr>
+        <p:spPr>
+          <a:xfrm>
+            <a:off x="640080" y="5440680"/>
+            <a:ext cx="10881360" cy="502920"/>
+          </a:xfrm>
+          <a:prstGeom prst="rect">
+            <a:avLst/>
+          </a:prstGeom>
+          <a:noFill/>
+        </p:spPr>
+        <p:txBody>
+          <a:bodyPr wrap="square">
+            <a:spAutoFit/>
+          </a:bodyPr>
+          <a:lstStyle/>
+          <a:p>
+            <a:pPr algn="ctr"/>
+            <a:r>
+              <a:rPr sz="1500" b="1">
+                <a:solidFill>
+                  <a:srgbClr val="BFD4F0"/>
+                </a:solidFill>
+                <a:latin typeface="맑은 고딕"/>
+                <a:ea typeface="맑은 고딕"/>
+              </a:rPr>
+              <a:t>이제민(팀장·총괄) · 조성기(전처리·모델링) · 박용민(데이터 수집) · 정상천(통계·시각화)</a:t>
+            </a:r>
           </a:p>
         </p:txBody>
       </p:sp>
@@ -14443,6 +14511,10 @@
               <a:buNone/>
             </a:pPr>
             <a:r>
+              <a:rPr>
+                <a:latin typeface="맑은 고딕"/>
+                <a:ea typeface="맑은 고딕"/>
+              </a:rPr>
               <a:t/>
             </a:r>
             <a:endParaRPr b="0" i="0" sz="1800" u="none" cap="none" strike="noStrike">
@@ -14496,8 +14568,8 @@
                 <a:solidFill>
                   <a:srgbClr val="2A78D6"/>
                 </a:solidFill>
-                <a:latin typeface="Malgun Gothic"/>
-                <a:ea typeface="Malgun Gothic"/>
+                <a:latin typeface="맑은 고딕"/>
+                <a:ea typeface="맑은 고딕"/>
                 <a:cs typeface="Malgun Gothic"/>
                 <a:sym typeface="Malgun Gothic"/>
               </a:rPr>
@@ -14546,8 +14618,8 @@
                 <a:solidFill>
                   <a:srgbClr val="104281"/>
                 </a:solidFill>
-                <a:latin typeface="Malgun Gothic"/>
-                <a:ea typeface="Malgun Gothic"/>
+                <a:latin typeface="맑은 고딕"/>
+                <a:ea typeface="맑은 고딕"/>
                 <a:cs typeface="Malgun Gothic"/>
                 <a:sym typeface="Malgun Gothic"/>
               </a:rPr>
@@ -14598,8 +14670,8 @@
                           <a:solidFill>
                             <a:srgbClr val="104281"/>
                           </a:solidFill>
-                          <a:latin typeface="Malgun Gothic"/>
-                          <a:ea typeface="Malgun Gothic"/>
+                          <a:latin typeface="맑은 고딕"/>
+                          <a:ea typeface="맑은 고딕"/>
                           <a:cs typeface="Malgun Gothic"/>
                           <a:sym typeface="Malgun Gothic"/>
                         </a:rPr>
@@ -14641,8 +14713,8 @@
                           <a:solidFill>
                             <a:srgbClr val="202020"/>
                           </a:solidFill>
-                          <a:latin typeface="Malgun Gothic"/>
-                          <a:ea typeface="Malgun Gothic"/>
+                          <a:latin typeface="맑은 고딕"/>
+                          <a:ea typeface="맑은 고딕"/>
                           <a:cs typeface="Malgun Gothic"/>
                           <a:sym typeface="Malgun Gothic"/>
                         </a:rPr>
@@ -14678,8 +14750,8 @@
                           <a:solidFill>
                             <a:srgbClr val="104281"/>
                           </a:solidFill>
-                          <a:latin typeface="Malgun Gothic"/>
-                          <a:ea typeface="Malgun Gothic"/>
+                          <a:latin typeface="맑은 고딕"/>
+                          <a:ea typeface="맑은 고딕"/>
                           <a:cs typeface="Malgun Gothic"/>
                           <a:sym typeface="Malgun Gothic"/>
                         </a:rPr>
@@ -14713,8 +14785,8 @@
                           <a:solidFill>
                             <a:srgbClr val="202020"/>
                           </a:solidFill>
-                          <a:latin typeface="Malgun Gothic"/>
-                          <a:ea typeface="Malgun Gothic"/>
+                          <a:latin typeface="맑은 고딕"/>
+                          <a:ea typeface="맑은 고딕"/>
                           <a:cs typeface="Malgun Gothic"/>
                           <a:sym typeface="Malgun Gothic"/>
                         </a:rPr>
@@ -14758,8 +14830,8 @@
                           <a:solidFill>
                             <a:srgbClr val="104281"/>
                           </a:solidFill>
-                          <a:latin typeface="Malgun Gothic"/>
-                          <a:ea typeface="Malgun Gothic"/>
+                          <a:latin typeface="맑은 고딕"/>
+                          <a:ea typeface="맑은 고딕"/>
                           <a:cs typeface="Malgun Gothic"/>
                           <a:sym typeface="Malgun Gothic"/>
                         </a:rPr>
@@ -14793,8 +14865,8 @@
                           <a:solidFill>
                             <a:srgbClr val="202020"/>
                           </a:solidFill>
-                          <a:latin typeface="Malgun Gothic"/>
-                          <a:ea typeface="Malgun Gothic"/>
+                          <a:latin typeface="맑은 고딕"/>
+                          <a:ea typeface="맑은 고딕"/>
                           <a:cs typeface="Malgun Gothic"/>
                           <a:sym typeface="Malgun Gothic"/>
                         </a:rPr>
@@ -14817,8 +14889,8 @@
                           <a:solidFill>
                             <a:srgbClr val="202020"/>
                           </a:solidFill>
-                          <a:latin typeface="Malgun Gothic"/>
-                          <a:ea typeface="Malgun Gothic"/>
+                          <a:latin typeface="맑은 고딕"/>
+                          <a:ea typeface="맑은 고딕"/>
                           <a:cs typeface="Malgun Gothic"/>
                           <a:sym typeface="Malgun Gothic"/>
                         </a:rPr>
@@ -14862,8 +14934,8 @@
                           <a:solidFill>
                             <a:srgbClr val="104281"/>
                           </a:solidFill>
-                          <a:latin typeface="Malgun Gothic"/>
-                          <a:ea typeface="Malgun Gothic"/>
+                          <a:latin typeface="맑은 고딕"/>
+                          <a:ea typeface="맑은 고딕"/>
                           <a:cs typeface="Malgun Gothic"/>
                           <a:sym typeface="Malgun Gothic"/>
                         </a:rPr>
@@ -14897,8 +14969,8 @@
                           <a:solidFill>
                             <a:srgbClr val="202020"/>
                           </a:solidFill>
-                          <a:latin typeface="Malgun Gothic"/>
-                          <a:ea typeface="Malgun Gothic"/>
+                          <a:latin typeface="맑은 고딕"/>
+                          <a:ea typeface="맑은 고딕"/>
                           <a:cs typeface="Malgun Gothic"/>
                           <a:sym typeface="Malgun Gothic"/>
                         </a:rPr>
@@ -14934,8 +15006,8 @@
                           <a:solidFill>
                             <a:srgbClr val="104281"/>
                           </a:solidFill>
-                          <a:latin typeface="Malgun Gothic"/>
-                          <a:ea typeface="Malgun Gothic"/>
+                          <a:latin typeface="맑은 고딕"/>
+                          <a:ea typeface="맑은 고딕"/>
                           <a:cs typeface="Malgun Gothic"/>
                           <a:sym typeface="Malgun Gothic"/>
                         </a:rPr>
@@ -14969,8 +15041,8 @@
                           <a:solidFill>
                             <a:srgbClr val="202020"/>
                           </a:solidFill>
-                          <a:latin typeface="Malgun Gothic"/>
-                          <a:ea typeface="Malgun Gothic"/>
+                          <a:latin typeface="맑은 고딕"/>
+                          <a:ea typeface="맑은 고딕"/>
                           <a:cs typeface="Malgun Gothic"/>
                           <a:sym typeface="Malgun Gothic"/>
                         </a:rPr>
@@ -14993,8 +15065,8 @@
                           <a:solidFill>
                             <a:srgbClr val="202020"/>
                           </a:solidFill>
-                          <a:latin typeface="Malgun Gothic"/>
-                          <a:ea typeface="Malgun Gothic"/>
+                          <a:latin typeface="맑은 고딕"/>
+                          <a:ea typeface="맑은 고딕"/>
                           <a:cs typeface="Malgun Gothic"/>
                           <a:sym typeface="Malgun Gothic"/>
                         </a:rPr>
@@ -15053,8 +15125,8 @@
                 <a:solidFill>
                   <a:srgbClr val="666666"/>
                 </a:solidFill>
-                <a:latin typeface="Malgun Gothic"/>
-                <a:ea typeface="Malgun Gothic"/>
+                <a:latin typeface="맑은 고딕"/>
+                <a:ea typeface="맑은 고딕"/>
                 <a:cs typeface="Malgun Gothic"/>
                 <a:sym typeface="Malgun Gothic"/>
               </a:rPr>
@@ -15271,8 +15343,8 @@
         </p:nvSpPr>
         <p:spPr>
           <a:xfrm>
-            <a:off x="1097280" y="1654449"/>
-            <a:ext cx="10859368" cy="4858725"/>
+            <a:off x="878314" y="1246799"/>
+            <a:ext cx="10859368" cy="5611201"/>
           </a:xfrm>
           <a:prstGeom prst="rect">
             <a:avLst/>
@@ -15656,9 +15728,9 @@
                 <a:cs typeface="맑은 고딕"/>
                 <a:sym typeface="맑은 고딕"/>
               </a:rPr>
-              <a:t>전처리 기준은 전부 코드로 고정 — 같은 원본을 넣으면 누가 실행해도 같은 표가 나온다</a:t>
+              <a:t>전처리 기준은 전부 코드로 고정 </a:t>
             </a:r>
-            <a:endParaRPr sz="2000" b="1" i="0" u="none" strike="noStrike" cap="none">
+            <a:endParaRPr lang="en-US" sz="2000" b="1" i="0" u="none" strike="noStrike" cap="none">
               <a:solidFill>
                 <a:srgbClr val="ff0000"/>
               </a:solidFill>
@@ -15801,8 +15873,8 @@
                 <a:solidFill>
                   <a:srgbClr val="2A78D6"/>
                 </a:solidFill>
-                <a:latin typeface="Malgun Gothic"/>
-                <a:ea typeface="Malgun Gothic"/>
+                <a:latin typeface="맑은 고딕"/>
+                <a:ea typeface="맑은 고딕"/>
                 <a:cs typeface="Malgun Gothic"/>
                 <a:sym typeface="Malgun Gothic"/>
               </a:rPr>
@@ -15859,8 +15931,8 @@
                 <a:solidFill>
                   <a:srgbClr val="104281"/>
                 </a:solidFill>
-                <a:latin typeface="Malgun Gothic"/>
-                <a:ea typeface="Malgun Gothic"/>
+                <a:latin typeface="맑은 고딕"/>
+                <a:ea typeface="맑은 고딕"/>
                 <a:cs typeface="Malgun Gothic"/>
                 <a:sym typeface="Malgun Gothic"/>
               </a:rPr>
@@ -15917,8 +15989,8 @@
                 <a:solidFill>
                   <a:srgbClr val="666666"/>
                 </a:solidFill>
-                <a:latin typeface="Malgun Gothic"/>
-                <a:ea typeface="Malgun Gothic"/>
+                <a:latin typeface="맑은 고딕"/>
+                <a:ea typeface="맑은 고딕"/>
                 <a:cs typeface="Malgun Gothic"/>
                 <a:sym typeface="Malgun Gothic"/>
               </a:rPr>
@@ -15975,8 +16047,8 @@
                 <a:solidFill>
                   <a:srgbClr val="2A78D6"/>
                 </a:solidFill>
-                <a:latin typeface="Malgun Gothic"/>
-                <a:ea typeface="Malgun Gothic"/>
+                <a:latin typeface="맑은 고딕"/>
+                <a:ea typeface="맑은 고딕"/>
                 <a:cs typeface="Malgun Gothic"/>
                 <a:sym typeface="Malgun Gothic"/>
               </a:rPr>
@@ -16033,8 +16105,8 @@
                 <a:solidFill>
                   <a:srgbClr val="202020"/>
                 </a:solidFill>
-                <a:latin typeface="Malgun Gothic"/>
-                <a:ea typeface="Malgun Gothic"/>
+                <a:latin typeface="맑은 고딕"/>
+                <a:ea typeface="맑은 고딕"/>
                 <a:cs typeface="Malgun Gothic"/>
                 <a:sym typeface="Malgun Gothic"/>
               </a:rPr>
@@ -16091,8 +16163,8 @@
                 <a:solidFill>
                   <a:srgbClr val="2A78D6"/>
                 </a:solidFill>
-                <a:latin typeface="Malgun Gothic"/>
-                <a:ea typeface="Malgun Gothic"/>
+                <a:latin typeface="맑은 고딕"/>
+                <a:ea typeface="맑은 고딕"/>
                 <a:cs typeface="Malgun Gothic"/>
                 <a:sym typeface="Malgun Gothic"/>
               </a:rPr>
@@ -16149,8 +16221,8 @@
                 <a:solidFill>
                   <a:srgbClr val="202020"/>
                 </a:solidFill>
-                <a:latin typeface="Malgun Gothic"/>
-                <a:ea typeface="Malgun Gothic"/>
+                <a:latin typeface="맑은 고딕"/>
+                <a:ea typeface="맑은 고딕"/>
                 <a:cs typeface="Malgun Gothic"/>
                 <a:sym typeface="Malgun Gothic"/>
               </a:rPr>
@@ -16207,8 +16279,8 @@
                 <a:solidFill>
                   <a:srgbClr val="2A78D6"/>
                 </a:solidFill>
-                <a:latin typeface="Malgun Gothic"/>
-                <a:ea typeface="Malgun Gothic"/>
+                <a:latin typeface="맑은 고딕"/>
+                <a:ea typeface="맑은 고딕"/>
                 <a:cs typeface="Malgun Gothic"/>
                 <a:sym typeface="Malgun Gothic"/>
               </a:rPr>
@@ -16265,8 +16337,8 @@
                 <a:solidFill>
                   <a:srgbClr val="202020"/>
                 </a:solidFill>
-                <a:latin typeface="Malgun Gothic"/>
-                <a:ea typeface="Malgun Gothic"/>
+                <a:latin typeface="맑은 고딕"/>
+                <a:ea typeface="맑은 고딕"/>
                 <a:cs typeface="Malgun Gothic"/>
                 <a:sym typeface="Malgun Gothic"/>
               </a:rPr>
@@ -16323,8 +16395,8 @@
                 <a:solidFill>
                   <a:srgbClr val="2A78D6"/>
                 </a:solidFill>
-                <a:latin typeface="Malgun Gothic"/>
-                <a:ea typeface="Malgun Gothic"/>
+                <a:latin typeface="맑은 고딕"/>
+                <a:ea typeface="맑은 고딕"/>
                 <a:cs typeface="Malgun Gothic"/>
                 <a:sym typeface="Malgun Gothic"/>
               </a:rPr>
@@ -16381,8 +16453,8 @@
                 <a:solidFill>
                   <a:srgbClr val="202020"/>
                 </a:solidFill>
-                <a:latin typeface="Malgun Gothic"/>
-                <a:ea typeface="Malgun Gothic"/>
+                <a:latin typeface="맑은 고딕"/>
+                <a:ea typeface="맑은 고딕"/>
                 <a:cs typeface="Malgun Gothic"/>
                 <a:sym typeface="Malgun Gothic"/>
               </a:rPr>
@@ -16413,8 +16485,8 @@
                 <a:solidFill>
                   <a:srgbClr val="FF0000"/>
                 </a:solidFill>
-                <a:latin typeface="Malgun Gothic"/>
-                <a:ea typeface="Malgun Gothic"/>
+                <a:latin typeface="맑은 고딕"/>
+                <a:ea typeface="맑은 고딕"/>
                 <a:cs typeface="Malgun Gothic"/>
                 <a:sym typeface="Malgun Gothic"/>
               </a:rPr>
@@ -16471,8 +16543,8 @@
                 <a:solidFill>
                   <a:srgbClr val="2A78D6"/>
                 </a:solidFill>
-                <a:latin typeface="Malgun Gothic"/>
-                <a:ea typeface="Malgun Gothic"/>
+                <a:latin typeface="맑은 고딕"/>
+                <a:ea typeface="맑은 고딕"/>
                 <a:cs typeface="Malgun Gothic"/>
                 <a:sym typeface="Malgun Gothic"/>
               </a:rPr>
@@ -16529,8 +16601,8 @@
                 <a:solidFill>
                   <a:srgbClr val="202020"/>
                 </a:solidFill>
-                <a:latin typeface="Malgun Gothic"/>
-                <a:ea typeface="Malgun Gothic"/>
+                <a:latin typeface="맑은 고딕"/>
+                <a:ea typeface="맑은 고딕"/>
                 <a:cs typeface="Malgun Gothic"/>
                 <a:sym typeface="Malgun Gothic"/>
               </a:rPr>
@@ -16561,8 +16633,8 @@
                 <a:solidFill>
                   <a:srgbClr val="FF0000"/>
                 </a:solidFill>
-                <a:latin typeface="Malgun Gothic"/>
-                <a:ea typeface="Malgun Gothic"/>
+                <a:latin typeface="맑은 고딕"/>
+                <a:ea typeface="맑은 고딕"/>
                 <a:cs typeface="Malgun Gothic"/>
                 <a:sym typeface="Malgun Gothic"/>
               </a:rPr>
@@ -16619,8 +16691,8 @@
                 <a:solidFill>
                   <a:srgbClr val="666666"/>
                 </a:solidFill>
-                <a:latin typeface="Malgun Gothic"/>
-                <a:ea typeface="Malgun Gothic"/>
+                <a:latin typeface="맑은 고딕"/>
+                <a:ea typeface="맑은 고딕"/>
                 <a:cs typeface="Malgun Gothic"/>
                 <a:sym typeface="Malgun Gothic"/>
               </a:rPr>
@@ -16682,6 +16754,10 @@
               <a:buNone/>
             </a:pPr>
             <a:r>
+              <a:rPr>
+                <a:latin typeface="맑은 고딕"/>
+                <a:ea typeface="맑은 고딕"/>
+              </a:rPr>
               <a:t/>
             </a:r>
             <a:endParaRPr b="0" i="0" sz="1800" u="none" cap="none" strike="noStrike">
@@ -16765,6 +16841,10 @@
               <a:buNone/>
             </a:pPr>
             <a:r>
+              <a:rPr>
+                <a:latin typeface="맑은 고딕"/>
+                <a:ea typeface="맑은 고딕"/>
+              </a:rPr>
               <a:t/>
             </a:r>
             <a:endParaRPr b="0" i="0" sz="1800" u="none" cap="none" strike="noStrike">
@@ -16818,8 +16898,8 @@
                 <a:solidFill>
                   <a:srgbClr val="2A78D6"/>
                 </a:solidFill>
-                <a:latin typeface="Malgun Gothic"/>
-                <a:ea typeface="Malgun Gothic"/>
+                <a:latin typeface="맑은 고딕"/>
+                <a:ea typeface="맑은 고딕"/>
                 <a:cs typeface="Malgun Gothic"/>
                 <a:sym typeface="Malgun Gothic"/>
               </a:rPr>
@@ -16868,8 +16948,8 @@
                 <a:solidFill>
                   <a:srgbClr val="104281"/>
                 </a:solidFill>
-                <a:latin typeface="Malgun Gothic"/>
-                <a:ea typeface="Malgun Gothic"/>
+                <a:latin typeface="맑은 고딕"/>
+                <a:ea typeface="맑은 고딕"/>
                 <a:cs typeface="Malgun Gothic"/>
                 <a:sym typeface="Malgun Gothic"/>
               </a:rPr>
@@ -16945,8 +17025,8 @@
                 <a:solidFill>
                   <a:srgbClr val="666666"/>
                 </a:solidFill>
-                <a:latin typeface="Malgun Gothic"/>
-                <a:ea typeface="Malgun Gothic"/>
+                <a:latin typeface="맑은 고딕"/>
+                <a:ea typeface="맑은 고딕"/>
                 <a:cs typeface="Malgun Gothic"/>
                 <a:sym typeface="Malgun Gothic"/>
               </a:rPr>
@@ -16969,8 +17049,8 @@
                 <a:solidFill>
                   <a:srgbClr val="C44E52"/>
                 </a:solidFill>
-                <a:latin typeface="Malgun Gothic"/>
-                <a:ea typeface="Malgun Gothic"/>
+                <a:latin typeface="맑은 고딕"/>
+                <a:ea typeface="맑은 고딕"/>
                 <a:cs typeface="Malgun Gothic"/>
                 <a:sym typeface="Malgun Gothic"/>
               </a:rPr>
@@ -16989,6 +17069,10 @@
               <a:buNone/>
             </a:pPr>
             <a:r>
+              <a:rPr>
+                <a:latin typeface="맑은 고딕"/>
+                <a:ea typeface="맑은 고딕"/>
+              </a:rPr>
               <a:t/>
             </a:r>
             <a:endParaRPr b="1" i="0" sz="2100" u="none" cap="none" strike="noStrike">
@@ -17016,8 +17100,8 @@
                 <a:solidFill>
                   <a:srgbClr val="202020"/>
                 </a:solidFill>
-                <a:latin typeface="Malgun Gothic"/>
-                <a:ea typeface="Malgun Gothic"/>
+                <a:latin typeface="맑은 고딕"/>
+                <a:ea typeface="맑은 고딕"/>
                 <a:cs typeface="Malgun Gothic"/>
                 <a:sym typeface="Malgun Gothic"/>
               </a:rPr>
@@ -17040,8 +17124,8 @@
                 <a:solidFill>
                   <a:srgbClr val="202020"/>
                 </a:solidFill>
-                <a:latin typeface="Malgun Gothic"/>
-                <a:ea typeface="Malgun Gothic"/>
+                <a:latin typeface="맑은 고딕"/>
+                <a:ea typeface="맑은 고딕"/>
                 <a:cs typeface="Malgun Gothic"/>
                 <a:sym typeface="Malgun Gothic"/>
               </a:rPr>
@@ -17060,6 +17144,10 @@
               <a:buNone/>
             </a:pPr>
             <a:r>
+              <a:rPr>
+                <a:latin typeface="맑은 고딕"/>
+                <a:ea typeface="맑은 고딕"/>
+              </a:rPr>
               <a:t/>
             </a:r>
             <a:endParaRPr b="1" i="0" sz="1900" u="none" cap="none" strike="noStrike">
@@ -17087,8 +17175,8 @@
                 <a:solidFill>
                   <a:srgbClr val="104281"/>
                 </a:solidFill>
-                <a:latin typeface="Malgun Gothic"/>
-                <a:ea typeface="Malgun Gothic"/>
+                <a:latin typeface="맑은 고딕"/>
+                <a:ea typeface="맑은 고딕"/>
                 <a:cs typeface="Malgun Gothic"/>
                 <a:sym typeface="Malgun Gothic"/>
               </a:rPr>
@@ -17111,8 +17199,8 @@
                 <a:solidFill>
                   <a:srgbClr val="104281"/>
                 </a:solidFill>
-                <a:latin typeface="Malgun Gothic"/>
-                <a:ea typeface="Malgun Gothic"/>
+                <a:latin typeface="맑은 고딕"/>
+                <a:ea typeface="맑은 고딕"/>
                 <a:cs typeface="Malgun Gothic"/>
                 <a:sym typeface="Malgun Gothic"/>
               </a:rPr>
@@ -17135,8 +17223,8 @@
                 <a:solidFill>
                   <a:srgbClr val="104281"/>
                 </a:solidFill>
-                <a:latin typeface="Malgun Gothic"/>
-                <a:ea typeface="Malgun Gothic"/>
+                <a:latin typeface="맑은 고딕"/>
+                <a:ea typeface="맑은 고딕"/>
                 <a:cs typeface="Malgun Gothic"/>
                 <a:sym typeface="Malgun Gothic"/>
               </a:rPr>
@@ -17156,6 +17244,7 @@
                   <a:srgbClr val="666666"/>
                 </a:solidFill>
                 <a:latin typeface="맑은 고딕"/>
+                <a:ea typeface="맑은 고딕"/>
               </a:rPr>
               <a:t>수면효율은 정상 81.8 &gt; 경도 80.3 &gt; 치매 79.1%로 완만히 감소 — 평균 차이는 크지 않다</a:t>
             </a:r>
@@ -17201,8 +17290,8 @@
                 <a:solidFill>
                   <a:srgbClr val="666666"/>
                 </a:solidFill>
-                <a:latin typeface="Malgun Gothic"/>
-                <a:ea typeface="Malgun Gothic"/>
+                <a:latin typeface="맑은 고딕"/>
+                <a:ea typeface="맑은 고딕"/>
                 <a:cs typeface="Malgun Gothic"/>
                 <a:sym typeface="Malgun Gothic"/>
               </a:rPr>
@@ -17221,6 +17310,741 @@
 </file>
 
 <file path=ppt/slides/slide14.xml><?xml version="1.0" encoding="utf-8"?>
+<p:sld xmlns:a="http://schemas.openxmlformats.org/drawingml/2006/main" xmlns:r="http://schemas.openxmlformats.org/officeDocument/2006/relationships" xmlns:mc="http://schemas.openxmlformats.org/markup-compatibility/2006" xmlns:mv="urn:schemas-microsoft-com:mac:vml" xmlns:p="http://schemas.openxmlformats.org/presentationml/2006/main" xmlns:c="http://schemas.openxmlformats.org/drawingml/2006/chart" xmlns:dgm="http://schemas.openxmlformats.org/drawingml/2006/diagram" xmlns:o="urn:schemas-microsoft-com:office:office" xmlns:v="urn:schemas-microsoft-com:vml" xmlns:pvml="urn:schemas-microsoft-com:office:powerpoint" xmlns:com="http://schemas.openxmlformats.org/drawingml/2006/compatibility" xmlns:p14="http://schemas.microsoft.com/office/powerpoint/2010/main" xmlns:p15="http://schemas.microsoft.com/office/powerpoint/2012/main" xmlns:ahyp="http://schemas.microsoft.com/office/drawing/2018/hyperlinkcolor">
+  <p:cSld>
+    <p:spTree>
+      <p:nvGrpSpPr>
+        <p:cNvPr id="227" name="Shape 227"/>
+        <p:cNvGrpSpPr/>
+        <p:nvPr/>
+      </p:nvGrpSpPr>
+      <p:grpSpPr>
+        <a:xfrm>
+          <a:off x="0" y="0"/>
+          <a:ext cx="0" cy="0"/>
+          <a:chOff x="0" y="0"/>
+          <a:chExt cx="0" cy="0"/>
+        </a:xfrm>
+      </p:grpSpPr>
+      <p:sp>
+        <p:nvSpPr>
+          <p:cNvPr id="228" name="Google Shape;228;p13"/>
+          <p:cNvSpPr/>
+          <p:nvPr/>
+        </p:nvSpPr>
+        <p:spPr>
+          <a:xfrm>
+            <a:off x="0" y="0"/>
+            <a:ext cx="12191695" cy="146304"/>
+          </a:xfrm>
+          <a:prstGeom prst="rect">
+            <a:avLst/>
+          </a:prstGeom>
+          <a:solidFill>
+            <a:srgbClr val="104281"/>
+          </a:solidFill>
+          <a:ln>
+            <a:noFill/>
+          </a:ln>
+          <a:effectLst>
+            <a:outerShdw blurRad="40000" rotWithShape="0" dir="5400000" dist="23000">
+              <a:srgbClr val="000000">
+                <a:alpha val="34902"/>
+              </a:srgbClr>
+            </a:outerShdw>
+          </a:effectLst>
+        </p:spPr>
+        <p:txBody>
+          <a:bodyPr anchorCtr="0" anchor="ctr" bIns="45700" lIns="91425" spcFirstLastPara="1" rIns="91425" wrap="square" tIns="45700">
+            <a:noAutofit/>
+          </a:bodyPr>
+          <a:lstStyle/>
+          <a:p>
+            <a:pPr indent="0" lvl="0" marL="0" marR="0" rtl="0" algn="ctr">
+              <a:spcBef>
+                <a:spcPts val="0"/>
+              </a:spcBef>
+              <a:spcAft>
+                <a:spcPts val="0"/>
+              </a:spcAft>
+              <a:buNone/>
+            </a:pPr>
+            <a:r>
+              <a:rPr>
+                <a:latin typeface="맑은 고딕"/>
+                <a:ea typeface="맑은 고딕"/>
+              </a:rPr>
+              <a:t/>
+            </a:r>
+            <a:endParaRPr b="0" i="0" sz="1800" u="none" cap="none" strike="noStrike">
+              <a:solidFill>
+                <a:schemeClr val="lt1"/>
+              </a:solidFill>
+              <a:latin typeface="Calibri"/>
+              <a:ea typeface="Calibri"/>
+              <a:cs typeface="Calibri"/>
+              <a:sym typeface="Calibri"/>
+            </a:endParaRPr>
+          </a:p>
+        </p:txBody>
+      </p:sp>
+      <p:sp>
+        <p:nvSpPr>
+          <p:cNvPr id="229" name="Google Shape;229;p13"/>
+          <p:cNvSpPr txBox="1"/>
+          <p:nvPr/>
+        </p:nvSpPr>
+        <p:spPr>
+          <a:xfrm>
+            <a:off x="502920" y="292608"/>
+            <a:ext cx="10515600" cy="334137"/>
+          </a:xfrm>
+          <a:prstGeom prst="rect">
+            <a:avLst/>
+          </a:prstGeom>
+          <a:noFill/>
+          <a:ln>
+            <a:noFill/>
+          </a:ln>
+        </p:spPr>
+        <p:txBody>
+          <a:bodyPr anchorCtr="0" anchor="t" bIns="45700" lIns="91425" spcFirstLastPara="1" rIns="91425" wrap="square" tIns="45700">
+            <a:spAutoFit/>
+          </a:bodyPr>
+          <a:lstStyle/>
+          <a:p>
+            <a:pPr indent="0" lvl="0" marL="0" marR="0" rtl="0" algn="l">
+              <a:spcBef>
+                <a:spcPts val="0"/>
+              </a:spcBef>
+              <a:spcAft>
+                <a:spcPts val="0"/>
+              </a:spcAft>
+              <a:buNone/>
+            </a:pPr>
+            <a:r>
+              <a:rPr b="1" i="0" lang="en-US" sz="1600" u="none" cap="none" strike="noStrike">
+                <a:solidFill>
+                  <a:srgbClr val="2A78D6"/>
+                </a:solidFill>
+                <a:latin typeface="맑은 고딕"/>
+                <a:ea typeface="맑은 고딕"/>
+                <a:cs typeface="Malgun Gothic"/>
+                <a:sym typeface="Malgun Gothic"/>
+              </a:rPr>
+              <a:t>03. 분석 결과</a:t>
+            </a:r>
+            <a:endParaRPr/>
+          </a:p>
+        </p:txBody>
+      </p:sp>
+      <p:sp>
+        <p:nvSpPr>
+          <p:cNvPr id="230" name="Google Shape;230;p13"/>
+          <p:cNvSpPr txBox="1"/>
+          <p:nvPr/>
+        </p:nvSpPr>
+        <p:spPr>
+          <a:xfrm>
+            <a:off x="502920" y="621792"/>
+            <a:ext cx="11155680" cy="547878"/>
+          </a:xfrm>
+          <a:prstGeom prst="rect">
+            <a:avLst/>
+          </a:prstGeom>
+          <a:noFill/>
+          <a:ln>
+            <a:noFill/>
+          </a:ln>
+        </p:spPr>
+        <p:txBody>
+          <a:bodyPr anchorCtr="0" anchor="t" bIns="45700" lIns="91425" spcFirstLastPara="1" rIns="91425" wrap="square" tIns="45700">
+            <a:spAutoFit/>
+          </a:bodyPr>
+          <a:lstStyle/>
+          <a:p>
+            <a:pPr indent="0" lvl="0" marL="0" marR="0" rtl="0" algn="l">
+              <a:spcBef>
+                <a:spcPts val="0"/>
+              </a:spcBef>
+              <a:spcAft>
+                <a:spcPts val="0"/>
+              </a:spcAft>
+              <a:buNone/>
+            </a:pPr>
+            <a:r>
+              <a:rPr b="1" i="0" lang="en-US" sz="3000" u="none" cap="none" strike="noStrike">
+                <a:solidFill>
+                  <a:srgbClr val="104281"/>
+                </a:solidFill>
+                <a:latin typeface="맑은 고딕"/>
+                <a:ea typeface="맑은 고딕"/>
+                <a:cs typeface="Malgun Gothic"/>
+                <a:sym typeface="Malgun Gothic"/>
+              </a:rPr>
+              <a:t>Q2 · 걸러낼 수 있는가 — 랜덤포레스트 vs 로지스틱 회귀</a:t>
+            </a:r>
+            <a:endParaRPr/>
+          </a:p>
+        </p:txBody>
+      </p:sp>
+      <p:sp>
+        <p:nvSpPr>
+          <p:cNvPr id="231" name="Google Shape;231;p13"/>
+          <p:cNvSpPr txBox="1"/>
+          <p:nvPr/>
+        </p:nvSpPr>
+        <p:spPr>
+          <a:xfrm>
+            <a:off x="11475720" y="6446520"/>
+            <a:ext cx="640080" cy="266700"/>
+          </a:xfrm>
+          <a:prstGeom prst="rect">
+            <a:avLst/>
+          </a:prstGeom>
+          <a:noFill/>
+          <a:ln>
+            <a:noFill/>
+          </a:ln>
+        </p:spPr>
+        <p:txBody>
+          <a:bodyPr anchorCtr="0" anchor="t" bIns="45700" lIns="91425" spcFirstLastPara="1" rIns="91425" wrap="square" tIns="45700">
+            <a:spAutoFit/>
+          </a:bodyPr>
+          <a:lstStyle/>
+          <a:p>
+            <a:pPr indent="0" lvl="0" marL="0" marR="0" rtl="0" algn="r">
+              <a:spcBef>
+                <a:spcPts val="0"/>
+              </a:spcBef>
+              <a:spcAft>
+                <a:spcPts val="0"/>
+              </a:spcAft>
+              <a:buNone/>
+            </a:pPr>
+            <a:r>
+              <a:rPr b="0" i="0" lang="en-US" sz="1200" u="none" cap="none" strike="noStrike">
+                <a:solidFill>
+                  <a:srgbClr val="666666"/>
+                </a:solidFill>
+                <a:latin typeface="맑은 고딕"/>
+                <a:ea typeface="맑은 고딕"/>
+                <a:cs typeface="Malgun Gothic"/>
+                <a:sym typeface="Malgun Gothic"/>
+              </a:rPr>
+              <a:t>15</a:t>
+            </a:r>
+            <a:endParaRPr/>
+          </a:p>
+        </p:txBody>
+      </p:sp>
+      <p:graphicFrame>
+        <p:nvGraphicFramePr>
+          <p:cNvPr id="232" name="Google Shape;232;p13"/>
+          <p:cNvGraphicFramePr/>
+          <p:nvPr/>
+        </p:nvGraphicFramePr>
+        <p:xfrm>
+          <a:off x="731520" y="1645920"/>
+          <a:ext cx="3000000" cy="3000000"/>
+        </p:xfrm>
+        <a:graphic>
+          <a:graphicData uri="http://schemas.openxmlformats.org/drawingml/2006/table">
+            <a:tbl>
+              <a:tblPr bandRow="1" firstRow="1">
+                <a:noFill/>
+                <a:tableStyleId>{3DE3693A-EF05-4C50-91A9-67FE5D2D02F8}</a:tableStyleId>
+              </a:tblPr>
+              <a:tblGrid>
+                <a:gridCol w="3941650"/>
+                <a:gridCol w="2217175"/>
+                <a:gridCol w="2217175"/>
+                <a:gridCol w="2217175"/>
+              </a:tblGrid>
+              <a:tr h="548650">
+                <a:tc>
+                  <a:txBody>
+                    <a:bodyPr/>
+                    <a:lstStyle/>
+                    <a:p>
+                      <a:pPr indent="0" lvl="0" marL="0" marR="0" rtl="0" algn="l">
+                        <a:spcBef>
+                          <a:spcPts val="0"/>
+                        </a:spcBef>
+                        <a:spcAft>
+                          <a:spcPts val="0"/>
+                        </a:spcAft>
+                        <a:buNone/>
+                      </a:pPr>
+                      <a:r>
+                        <a:rPr>
+                          <a:latin typeface="맑은 고딕"/>
+                          <a:ea typeface="맑은 고딕"/>
+                        </a:rPr>
+                        <a:t/>
+                      </a:r>
+                      <a:endParaRPr sz="1800" u="none" cap="none" strike="noStrike"/>
+                    </a:p>
+                  </a:txBody>
+                  <a:tcPr marT="45725" marB="45725" marR="91450" marL="91450" anchor="ctr">
+                    <a:solidFill>
+                      <a:srgbClr val="104281"/>
+                    </a:solidFill>
+                  </a:tcPr>
+                </a:tc>
+                <a:tc>
+                  <a:txBody>
+                    <a:bodyPr/>
+                    <a:lstStyle/>
+                    <a:p>
+                      <a:pPr indent="0" lvl="0" marL="0" marR="0" rtl="0" algn="l">
+                        <a:spcBef>
+                          <a:spcPts val="0"/>
+                        </a:spcBef>
+                        <a:spcAft>
+                          <a:spcPts val="0"/>
+                        </a:spcAft>
+                        <a:buNone/>
+                      </a:pPr>
+                      <a:r>
+                        <a:rPr b="1" lang="en-US" sz="1700" u="none" cap="none" strike="noStrike">
+                          <a:solidFill>
+                            <a:srgbClr val="FFFFFF"/>
+                          </a:solidFill>
+                          <a:latin typeface="맑은 고딕"/>
+                          <a:ea typeface="맑은 고딕"/>
+                          <a:cs typeface="Malgun Gothic"/>
+                          <a:sym typeface="Malgun Gothic"/>
+                        </a:rPr>
+                        <a:t>정확도</a:t>
+                      </a:r>
+                      <a:endParaRPr/>
+                    </a:p>
+                  </a:txBody>
+                  <a:tcPr marT="45725" marB="45725" marR="91450" marL="91450" anchor="ctr">
+                    <a:solidFill>
+                      <a:srgbClr val="104281"/>
+                    </a:solidFill>
+                  </a:tcPr>
+                </a:tc>
+                <a:tc>
+                  <a:txBody>
+                    <a:bodyPr/>
+                    <a:lstStyle/>
+                    <a:p>
+                      <a:pPr indent="0" lvl="0" marL="0" marR="0" rtl="0" algn="l">
+                        <a:spcBef>
+                          <a:spcPts val="0"/>
+                        </a:spcBef>
+                        <a:spcAft>
+                          <a:spcPts val="0"/>
+                        </a:spcAft>
+                        <a:buNone/>
+                      </a:pPr>
+                      <a:r>
+                        <a:rPr b="1" lang="en-US" sz="1700" u="none" cap="none" strike="noStrike">
+                          <a:solidFill>
+                            <a:srgbClr val="FFFFFF"/>
+                          </a:solidFill>
+                          <a:latin typeface="맑은 고딕"/>
+                          <a:ea typeface="맑은 고딕"/>
+                          <a:cs typeface="Malgun Gothic"/>
+                          <a:sym typeface="Malgun Gothic"/>
+                        </a:rPr>
+                        <a:t>위험군 재현율</a:t>
+                      </a:r>
+                      <a:endParaRPr/>
+                    </a:p>
+                  </a:txBody>
+                  <a:tcPr marT="45725" marB="45725" marR="91450" marL="91450" anchor="ctr">
+                    <a:solidFill>
+                      <a:srgbClr val="104281"/>
+                    </a:solidFill>
+                  </a:tcPr>
+                </a:tc>
+                <a:tc>
+                  <a:txBody>
+                    <a:bodyPr/>
+                    <a:lstStyle/>
+                    <a:p>
+                      <a:pPr indent="0" lvl="0" marL="0" marR="0" rtl="0" algn="l">
+                        <a:spcBef>
+                          <a:spcPts val="0"/>
+                        </a:spcBef>
+                        <a:spcAft>
+                          <a:spcPts val="0"/>
+                        </a:spcAft>
+                        <a:buNone/>
+                      </a:pPr>
+                      <a:r>
+                        <a:rPr b="1" lang="en-US" sz="1700" u="none" cap="none" strike="noStrike">
+                          <a:solidFill>
+                            <a:srgbClr val="FFFFFF"/>
+                          </a:solidFill>
+                          <a:latin typeface="맑은 고딕"/>
+                          <a:ea typeface="맑은 고딕"/>
+                          <a:cs typeface="Malgun Gothic"/>
+                          <a:sym typeface="Malgun Gothic"/>
+                        </a:rPr>
+                        <a:t>AUC</a:t>
+                      </a:r>
+                      <a:endParaRPr/>
+                    </a:p>
+                  </a:txBody>
+                  <a:tcPr marT="45725" marB="45725" marR="91450" marL="91450" anchor="ctr">
+                    <a:solidFill>
+                      <a:srgbClr val="104281"/>
+                    </a:solidFill>
+                  </a:tcPr>
+                </a:tc>
+              </a:tr>
+              <a:tr h="548650">
+                <a:tc>
+                  <a:txBody>
+                    <a:bodyPr/>
+                    <a:lstStyle/>
+                    <a:p>
+                      <a:pPr indent="0" lvl="0" marL="0" marR="0" rtl="0" algn="l">
+                        <a:spcBef>
+                          <a:spcPts val="0"/>
+                        </a:spcBef>
+                        <a:spcAft>
+                          <a:spcPts val="0"/>
+                        </a:spcAft>
+                        <a:buNone/>
+                      </a:pPr>
+                      <a:r>
+                        <a:rPr b="1" lang="en-US" sz="1600" u="none" cap="none" strike="noStrike">
+                          <a:solidFill>
+                            <a:srgbClr val="202020"/>
+                          </a:solidFill>
+                          <a:latin typeface="맑은 고딕"/>
+                          <a:ea typeface="맑은 고딕"/>
+                          <a:cs typeface="Malgun Gothic"/>
+                          <a:sym typeface="Malgun Gothic"/>
+                        </a:rPr>
+                        <a:t>RandomForest</a:t>
+                      </a:r>
+                      <a:endParaRPr/>
+                    </a:p>
+                  </a:txBody>
+                  <a:tcPr marT="45725" marB="45725" marR="91450" marL="91450" anchor="ctr">
+                    <a:solidFill>
+                      <a:srgbClr val="FFFFFF"/>
+                    </a:solidFill>
+                  </a:tcPr>
+                </a:tc>
+                <a:tc>
+                  <a:txBody>
+                    <a:bodyPr/>
+                    <a:lstStyle/>
+                    <a:p>
+                      <a:pPr indent="0" lvl="0" marL="0" marR="0" rtl="0" algn="l">
+                        <a:spcBef>
+                          <a:spcPts val="0"/>
+                        </a:spcBef>
+                        <a:spcAft>
+                          <a:spcPts val="0"/>
+                        </a:spcAft>
+                        <a:buNone/>
+                      </a:pPr>
+                      <a:r>
+                        <a:rPr b="1" lang="en-US" sz="1600" u="none" cap="none" strike="noStrike">
+                          <a:solidFill>
+                            <a:srgbClr val="202020"/>
+                          </a:solidFill>
+                          <a:latin typeface="맑은 고딕"/>
+                          <a:ea typeface="맑은 고딕"/>
+                          <a:cs typeface="Malgun Gothic"/>
+                          <a:sym typeface="Malgun Gothic"/>
+                        </a:rPr>
+                        <a:t>58.0%</a:t>
+                      </a:r>
+                      <a:endParaRPr/>
+                    </a:p>
+                  </a:txBody>
+                  <a:tcPr marT="45725" marB="45725" marR="91450" marL="91450" anchor="ctr">
+                    <a:solidFill>
+                      <a:srgbClr val="FFFFFF"/>
+                    </a:solidFill>
+                  </a:tcPr>
+                </a:tc>
+                <a:tc>
+                  <a:txBody>
+                    <a:bodyPr/>
+                    <a:lstStyle/>
+                    <a:p>
+                      <a:pPr indent="0" lvl="0" marL="0" marR="0" rtl="0" algn="l">
+                        <a:spcBef>
+                          <a:spcPts val="0"/>
+                        </a:spcBef>
+                        <a:spcAft>
+                          <a:spcPts val="0"/>
+                        </a:spcAft>
+                        <a:buNone/>
+                      </a:pPr>
+                      <a:r>
+                        <a:rPr b="1" lang="en-US" sz="1600" u="none" cap="none" strike="noStrike">
+                          <a:solidFill>
+                            <a:srgbClr val="202020"/>
+                          </a:solidFill>
+                          <a:latin typeface="맑은 고딕"/>
+                          <a:ea typeface="맑은 고딕"/>
+                          <a:cs typeface="Malgun Gothic"/>
+                          <a:sym typeface="Malgun Gothic"/>
+                        </a:rPr>
+                        <a:t>38.7%</a:t>
+                      </a:r>
+                      <a:endParaRPr/>
+                    </a:p>
+                  </a:txBody>
+                  <a:tcPr marT="45725" marB="45725" marR="91450" marL="91450" anchor="ctr">
+                    <a:solidFill>
+                      <a:srgbClr val="FFFFFF"/>
+                    </a:solidFill>
+                  </a:tcPr>
+                </a:tc>
+                <a:tc>
+                  <a:txBody>
+                    <a:bodyPr/>
+                    <a:lstStyle/>
+                    <a:p>
+                      <a:pPr indent="0" lvl="0" marL="0" marR="0" rtl="0" algn="l">
+                        <a:spcBef>
+                          <a:spcPts val="0"/>
+                        </a:spcBef>
+                        <a:spcAft>
+                          <a:spcPts val="0"/>
+                        </a:spcAft>
+                        <a:buNone/>
+                      </a:pPr>
+                      <a:r>
+                        <a:rPr b="1" lang="en-US" sz="1600" u="none" cap="none" strike="noStrike">
+                          <a:solidFill>
+                            <a:srgbClr val="202020"/>
+                          </a:solidFill>
+                          <a:latin typeface="맑은 고딕"/>
+                          <a:ea typeface="맑은 고딕"/>
+                          <a:cs typeface="Malgun Gothic"/>
+                          <a:sym typeface="Malgun Gothic"/>
+                        </a:rPr>
+                        <a:t>0.549</a:t>
+                      </a:r>
+                      <a:endParaRPr/>
+                    </a:p>
+                  </a:txBody>
+                  <a:tcPr marT="45725" marB="45725" marR="91450" marL="91450" anchor="ctr">
+                    <a:solidFill>
+                      <a:srgbClr val="FFFFFF"/>
+                    </a:solidFill>
+                  </a:tcPr>
+                </a:tc>
+              </a:tr>
+              <a:tr h="548650">
+                <a:tc>
+                  <a:txBody>
+                    <a:bodyPr/>
+                    <a:lstStyle/>
+                    <a:p>
+                      <a:pPr indent="0" lvl="0" marL="0" marR="0" rtl="0" algn="l">
+                        <a:spcBef>
+                          <a:spcPts val="0"/>
+                        </a:spcBef>
+                        <a:spcAft>
+                          <a:spcPts val="0"/>
+                        </a:spcAft>
+                        <a:buNone/>
+                      </a:pPr>
+                      <a:r>
+                        <a:rPr b="1" lang="en-US" sz="1600" u="none" cap="none" strike="noStrike">
+                          <a:solidFill>
+                            <a:srgbClr val="C44E52"/>
+                          </a:solidFill>
+                          <a:latin typeface="맑은 고딕"/>
+                          <a:ea typeface="맑은 고딕"/>
+                          <a:cs typeface="Malgun Gothic"/>
+                          <a:sym typeface="Malgun Gothic"/>
+                        </a:rPr>
+                        <a:t>로지스틱 회귀 (최종 채택)</a:t>
+                      </a:r>
+                      <a:endParaRPr/>
+                    </a:p>
+                  </a:txBody>
+                  <a:tcPr marT="45725" marB="45725" marR="91450" marL="91450" anchor="ctr">
+                    <a:solidFill>
+                      <a:srgbClr val="EEF3FB"/>
+                    </a:solidFill>
+                  </a:tcPr>
+                </a:tc>
+                <a:tc>
+                  <a:txBody>
+                    <a:bodyPr/>
+                    <a:lstStyle/>
+                    <a:p>
+                      <a:pPr indent="0" lvl="0" marL="0" marR="0" rtl="0" algn="l">
+                        <a:spcBef>
+                          <a:spcPts val="0"/>
+                        </a:spcBef>
+                        <a:spcAft>
+                          <a:spcPts val="0"/>
+                        </a:spcAft>
+                        <a:buNone/>
+                      </a:pPr>
+                      <a:r>
+                        <a:rPr b="1" lang="en-US" sz="1600" u="none" cap="none" strike="noStrike">
+                          <a:solidFill>
+                            <a:srgbClr val="C44E52"/>
+                          </a:solidFill>
+                          <a:latin typeface="맑은 고딕"/>
+                          <a:ea typeface="맑은 고딕"/>
+                          <a:cs typeface="Malgun Gothic"/>
+                          <a:sym typeface="Malgun Gothic"/>
+                        </a:rPr>
+                        <a:t>60.2%</a:t>
+                      </a:r>
+                      <a:endParaRPr/>
+                    </a:p>
+                  </a:txBody>
+                  <a:tcPr marT="45725" marB="45725" marR="91450" marL="91450" anchor="ctr">
+                    <a:solidFill>
+                      <a:srgbClr val="EEF3FB"/>
+                    </a:solidFill>
+                  </a:tcPr>
+                </a:tc>
+                <a:tc>
+                  <a:txBody>
+                    <a:bodyPr/>
+                    <a:lstStyle/>
+                    <a:p>
+                      <a:pPr indent="0" lvl="0" marL="0" marR="0" rtl="0" algn="l">
+                        <a:spcBef>
+                          <a:spcPts val="0"/>
+                        </a:spcBef>
+                        <a:spcAft>
+                          <a:spcPts val="0"/>
+                        </a:spcAft>
+                        <a:buNone/>
+                      </a:pPr>
+                      <a:r>
+                        <a:rPr b="1" lang="en-US" sz="1600" u="none" cap="none" strike="noStrike">
+                          <a:solidFill>
+                            <a:srgbClr val="C44E52"/>
+                          </a:solidFill>
+                          <a:latin typeface="맑은 고딕"/>
+                          <a:ea typeface="맑은 고딕"/>
+                          <a:cs typeface="Malgun Gothic"/>
+                          <a:sym typeface="Malgun Gothic"/>
+                        </a:rPr>
+                        <a:t>52.7%</a:t>
+                      </a:r>
+                      <a:endParaRPr/>
+                    </a:p>
+                  </a:txBody>
+                  <a:tcPr marT="45725" marB="45725" marR="91450" marL="91450" anchor="ctr">
+                    <a:solidFill>
+                      <a:srgbClr val="EEF3FB"/>
+                    </a:solidFill>
+                  </a:tcPr>
+                </a:tc>
+                <a:tc>
+                  <a:txBody>
+                    <a:bodyPr/>
+                    <a:lstStyle/>
+                    <a:p>
+                      <a:pPr indent="0" lvl="0" marL="0" marR="0" rtl="0" algn="l">
+                        <a:spcBef>
+                          <a:spcPts val="0"/>
+                        </a:spcBef>
+                        <a:spcAft>
+                          <a:spcPts val="0"/>
+                        </a:spcAft>
+                        <a:buNone/>
+                      </a:pPr>
+                      <a:r>
+                        <a:rPr b="1" lang="en-US" sz="1600" u="none" cap="none" strike="noStrike">
+                          <a:solidFill>
+                            <a:srgbClr val="C44E52"/>
+                          </a:solidFill>
+                          <a:latin typeface="맑은 고딕"/>
+                          <a:ea typeface="맑은 고딕"/>
+                          <a:cs typeface="Malgun Gothic"/>
+                          <a:sym typeface="Malgun Gothic"/>
+                        </a:rPr>
+                        <a:t>0.601</a:t>
+                      </a:r>
+                      <a:endParaRPr/>
+                    </a:p>
+                  </a:txBody>
+                  <a:tcPr marT="45725" marB="45725" marR="91450" marL="91450" anchor="ctr">
+                    <a:solidFill>
+                      <a:srgbClr val="EEF3FB"/>
+                    </a:solidFill>
+                  </a:tcPr>
+                </a:tc>
+              </a:tr>
+            </a:tbl>
+          </a:graphicData>
+        </a:graphic>
+      </p:graphicFrame>
+      <p:sp>
+        <p:nvSpPr>
+          <p:cNvPr id="233" name="Google Shape;233;p13"/>
+          <p:cNvSpPr txBox="1"/>
+          <p:nvPr/>
+        </p:nvSpPr>
+        <p:spPr>
+          <a:xfrm>
+            <a:off x="777240" y="4519405"/>
+            <a:ext cx="10698480" cy="1470743"/>
+          </a:xfrm>
+          <a:prstGeom prst="rect">
+            <a:avLst/>
+          </a:prstGeom>
+          <a:noFill/>
+          <a:ln>
+            <a:noFill/>
+          </a:ln>
+        </p:spPr>
+        <p:txBody>
+          <a:bodyPr anchorCtr="0" anchor="t" bIns="45700" lIns="91425" spcFirstLastPara="1" rIns="91425" wrap="square" tIns="45700">
+            <a:spAutoFit/>
+          </a:bodyPr>
+          <a:lstStyle/>
+          <a:p>
+            <a:pPr indent="0" lvl="0" marL="0" marR="0" rtl="0" algn="l">
+              <a:spcBef>
+                <a:spcPts val="0"/>
+              </a:spcBef>
+              <a:spcAft>
+                <a:spcPts val="0"/>
+              </a:spcAft>
+              <a:buNone/>
+            </a:pPr>
+            <a:r>
+              <a:rPr b="1" i="0" lang="en-US" sz="1700" u="none" cap="none" strike="noStrike">
+                <a:solidFill>
+                  <a:srgbClr val="104281"/>
+                </a:solidFill>
+                <a:latin typeface="맑은 고딕"/>
+                <a:ea typeface="맑은 고딕"/>
+                <a:cs typeface="Malgun Gothic"/>
+                <a:sym typeface="Malgun Gothic"/>
+              </a:rPr>
+              <a:t>174명 소표본에서는 단순한 모델이 잡음에 덜 흔들린다 — 50회 반복 비교에서 로지스틱 회귀가 모든 지표 우위</a:t>
+            </a:r>
+            <a:endParaRPr/>
+          </a:p>
+        </p:txBody>
+      </p:sp>
+    </p:spTree>
+  </p:cSld>
+  <p:clrMapOvr>
+    <a:masterClrMapping/>
+  </p:clrMapOvr>
+</p:sld>
+</file>
+
+<file path=ppt/slides/slide15.xml><?xml version="1.0" encoding="utf-8"?>
 <p:sld xmlns:r="http://schemas.openxmlformats.org/officeDocument/2006/relationships" xmlns:c="http://schemas.openxmlformats.org/drawingml/2006/chart" xmlns:a="http://schemas.openxmlformats.org/drawingml/2006/main" xmlns:dgm="http://schemas.openxmlformats.org/drawingml/2006/diagram" xmlns:dsp="http://schemas.microsoft.com/office/drawing/2008/diagram" xmlns:p="http://schemas.openxmlformats.org/presentationml/2006/main">
   <p:cSld>
     <p:spTree>
@@ -17757,733 +18581,6 @@
 </p:sld>
 </file>
 
-<file path=ppt/slides/slide15.xml><?xml version="1.0" encoding="utf-8"?>
-<p:sld xmlns:a="http://schemas.openxmlformats.org/drawingml/2006/main" xmlns:r="http://schemas.openxmlformats.org/officeDocument/2006/relationships" xmlns:mc="http://schemas.openxmlformats.org/markup-compatibility/2006" xmlns:mv="urn:schemas-microsoft-com:mac:vml" xmlns:p="http://schemas.openxmlformats.org/presentationml/2006/main" xmlns:c="http://schemas.openxmlformats.org/drawingml/2006/chart" xmlns:dgm="http://schemas.openxmlformats.org/drawingml/2006/diagram" xmlns:o="urn:schemas-microsoft-com:office:office" xmlns:v="urn:schemas-microsoft-com:vml" xmlns:pvml="urn:schemas-microsoft-com:office:powerpoint" xmlns:com="http://schemas.openxmlformats.org/drawingml/2006/compatibility" xmlns:p14="http://schemas.microsoft.com/office/powerpoint/2010/main" xmlns:p15="http://schemas.microsoft.com/office/powerpoint/2012/main" xmlns:ahyp="http://schemas.microsoft.com/office/drawing/2018/hyperlinkcolor">
-  <p:cSld>
-    <p:spTree>
-      <p:nvGrpSpPr>
-        <p:cNvPr id="227" name="Shape 227"/>
-        <p:cNvGrpSpPr/>
-        <p:nvPr/>
-      </p:nvGrpSpPr>
-      <p:grpSpPr>
-        <a:xfrm>
-          <a:off x="0" y="0"/>
-          <a:ext cx="0" cy="0"/>
-          <a:chOff x="0" y="0"/>
-          <a:chExt cx="0" cy="0"/>
-        </a:xfrm>
-      </p:grpSpPr>
-      <p:sp>
-        <p:nvSpPr>
-          <p:cNvPr id="228" name="Google Shape;228;p13"/>
-          <p:cNvSpPr/>
-          <p:nvPr/>
-        </p:nvSpPr>
-        <p:spPr>
-          <a:xfrm>
-            <a:off x="0" y="0"/>
-            <a:ext cx="12191695" cy="146304"/>
-          </a:xfrm>
-          <a:prstGeom prst="rect">
-            <a:avLst/>
-          </a:prstGeom>
-          <a:solidFill>
-            <a:srgbClr val="104281"/>
-          </a:solidFill>
-          <a:ln>
-            <a:noFill/>
-          </a:ln>
-          <a:effectLst>
-            <a:outerShdw blurRad="40000" rotWithShape="0" dir="5400000" dist="23000">
-              <a:srgbClr val="000000">
-                <a:alpha val="34902"/>
-              </a:srgbClr>
-            </a:outerShdw>
-          </a:effectLst>
-        </p:spPr>
-        <p:txBody>
-          <a:bodyPr anchorCtr="0" anchor="ctr" bIns="45700" lIns="91425" spcFirstLastPara="1" rIns="91425" wrap="square" tIns="45700">
-            <a:noAutofit/>
-          </a:bodyPr>
-          <a:lstStyle/>
-          <a:p>
-            <a:pPr indent="0" lvl="0" marL="0" marR="0" rtl="0" algn="ctr">
-              <a:spcBef>
-                <a:spcPts val="0"/>
-              </a:spcBef>
-              <a:spcAft>
-                <a:spcPts val="0"/>
-              </a:spcAft>
-              <a:buNone/>
-            </a:pPr>
-            <a:r>
-              <a:t/>
-            </a:r>
-            <a:endParaRPr b="0" i="0" sz="1800" u="none" cap="none" strike="noStrike">
-              <a:solidFill>
-                <a:schemeClr val="lt1"/>
-              </a:solidFill>
-              <a:latin typeface="Calibri"/>
-              <a:ea typeface="Calibri"/>
-              <a:cs typeface="Calibri"/>
-              <a:sym typeface="Calibri"/>
-            </a:endParaRPr>
-          </a:p>
-        </p:txBody>
-      </p:sp>
-      <p:sp>
-        <p:nvSpPr>
-          <p:cNvPr id="229" name="Google Shape;229;p13"/>
-          <p:cNvSpPr txBox="1"/>
-          <p:nvPr/>
-        </p:nvSpPr>
-        <p:spPr>
-          <a:xfrm>
-            <a:off x="502920" y="292608"/>
-            <a:ext cx="10515600" cy="334137"/>
-          </a:xfrm>
-          <a:prstGeom prst="rect">
-            <a:avLst/>
-          </a:prstGeom>
-          <a:noFill/>
-          <a:ln>
-            <a:noFill/>
-          </a:ln>
-        </p:spPr>
-        <p:txBody>
-          <a:bodyPr anchorCtr="0" anchor="t" bIns="45700" lIns="91425" spcFirstLastPara="1" rIns="91425" wrap="square" tIns="45700">
-            <a:spAutoFit/>
-          </a:bodyPr>
-          <a:lstStyle/>
-          <a:p>
-            <a:pPr indent="0" lvl="0" marL="0" marR="0" rtl="0" algn="l">
-              <a:spcBef>
-                <a:spcPts val="0"/>
-              </a:spcBef>
-              <a:spcAft>
-                <a:spcPts val="0"/>
-              </a:spcAft>
-              <a:buNone/>
-            </a:pPr>
-            <a:r>
-              <a:rPr b="1" i="0" lang="en-US" sz="1600" u="none" cap="none" strike="noStrike">
-                <a:solidFill>
-                  <a:srgbClr val="2A78D6"/>
-                </a:solidFill>
-                <a:latin typeface="Malgun Gothic"/>
-                <a:ea typeface="Malgun Gothic"/>
-                <a:cs typeface="Malgun Gothic"/>
-                <a:sym typeface="Malgun Gothic"/>
-              </a:rPr>
-              <a:t>03. 분석 결과</a:t>
-            </a:r>
-            <a:endParaRPr/>
-          </a:p>
-        </p:txBody>
-      </p:sp>
-      <p:sp>
-        <p:nvSpPr>
-          <p:cNvPr id="230" name="Google Shape;230;p13"/>
-          <p:cNvSpPr txBox="1"/>
-          <p:nvPr/>
-        </p:nvSpPr>
-        <p:spPr>
-          <a:xfrm>
-            <a:off x="502920" y="621792"/>
-            <a:ext cx="11155680" cy="547878"/>
-          </a:xfrm>
-          <a:prstGeom prst="rect">
-            <a:avLst/>
-          </a:prstGeom>
-          <a:noFill/>
-          <a:ln>
-            <a:noFill/>
-          </a:ln>
-        </p:spPr>
-        <p:txBody>
-          <a:bodyPr anchorCtr="0" anchor="t" bIns="45700" lIns="91425" spcFirstLastPara="1" rIns="91425" wrap="square" tIns="45700">
-            <a:spAutoFit/>
-          </a:bodyPr>
-          <a:lstStyle/>
-          <a:p>
-            <a:pPr indent="0" lvl="0" marL="0" marR="0" rtl="0" algn="l">
-              <a:spcBef>
-                <a:spcPts val="0"/>
-              </a:spcBef>
-              <a:spcAft>
-                <a:spcPts val="0"/>
-              </a:spcAft>
-              <a:buNone/>
-            </a:pPr>
-            <a:r>
-              <a:rPr b="1" i="0" lang="en-US" sz="3000" u="none" cap="none" strike="noStrike">
-                <a:solidFill>
-                  <a:srgbClr val="104281"/>
-                </a:solidFill>
-                <a:latin typeface="Malgun Gothic"/>
-                <a:ea typeface="Malgun Gothic"/>
-                <a:cs typeface="Malgun Gothic"/>
-                <a:sym typeface="Malgun Gothic"/>
-              </a:rPr>
-              <a:t>Q2 · 걸러낼 수 있는가 — 랜덤포레스트 vs 로지스틱 회귀</a:t>
-            </a:r>
-            <a:endParaRPr/>
-          </a:p>
-        </p:txBody>
-      </p:sp>
-      <p:sp>
-        <p:nvSpPr>
-          <p:cNvPr id="231" name="Google Shape;231;p13"/>
-          <p:cNvSpPr txBox="1"/>
-          <p:nvPr/>
-        </p:nvSpPr>
-        <p:spPr>
-          <a:xfrm>
-            <a:off x="11475720" y="6446520"/>
-            <a:ext cx="640080" cy="266700"/>
-          </a:xfrm>
-          <a:prstGeom prst="rect">
-            <a:avLst/>
-          </a:prstGeom>
-          <a:noFill/>
-          <a:ln>
-            <a:noFill/>
-          </a:ln>
-        </p:spPr>
-        <p:txBody>
-          <a:bodyPr anchorCtr="0" anchor="t" bIns="45700" lIns="91425" spcFirstLastPara="1" rIns="91425" wrap="square" tIns="45700">
-            <a:spAutoFit/>
-          </a:bodyPr>
-          <a:lstStyle/>
-          <a:p>
-            <a:pPr indent="0" lvl="0" marL="0" marR="0" rtl="0" algn="r">
-              <a:spcBef>
-                <a:spcPts val="0"/>
-              </a:spcBef>
-              <a:spcAft>
-                <a:spcPts val="0"/>
-              </a:spcAft>
-              <a:buNone/>
-            </a:pPr>
-            <a:r>
-              <a:rPr b="0" i="0" lang="en-US" sz="1200" u="none" cap="none" strike="noStrike">
-                <a:solidFill>
-                  <a:srgbClr val="666666"/>
-                </a:solidFill>
-                <a:latin typeface="Malgun Gothic"/>
-                <a:ea typeface="Malgun Gothic"/>
-                <a:cs typeface="Malgun Gothic"/>
-                <a:sym typeface="Malgun Gothic"/>
-              </a:rPr>
-              <a:t>15</a:t>
-            </a:r>
-            <a:endParaRPr/>
-          </a:p>
-        </p:txBody>
-      </p:sp>
-      <p:graphicFrame>
-        <p:nvGraphicFramePr>
-          <p:cNvPr id="232" name="Google Shape;232;p13"/>
-          <p:cNvGraphicFramePr/>
-          <p:nvPr/>
-        </p:nvGraphicFramePr>
-        <p:xfrm>
-          <a:off x="731520" y="1645920"/>
-          <a:ext cx="3000000" cy="3000000"/>
-        </p:xfrm>
-        <a:graphic>
-          <a:graphicData uri="http://schemas.openxmlformats.org/drawingml/2006/table">
-            <a:tbl>
-              <a:tblPr bandRow="1" firstRow="1">
-                <a:noFill/>
-                <a:tableStyleId>{3DE3693A-EF05-4C50-91A9-67FE5D2D02F8}</a:tableStyleId>
-              </a:tblPr>
-              <a:tblGrid>
-                <a:gridCol w="3941650"/>
-                <a:gridCol w="2217175"/>
-                <a:gridCol w="2217175"/>
-                <a:gridCol w="2217175"/>
-              </a:tblGrid>
-              <a:tr h="548650">
-                <a:tc>
-                  <a:txBody>
-                    <a:bodyPr/>
-                    <a:lstStyle/>
-                    <a:p>
-                      <a:pPr indent="0" lvl="0" marL="0" marR="0" rtl="0" algn="l">
-                        <a:spcBef>
-                          <a:spcPts val="0"/>
-                        </a:spcBef>
-                        <a:spcAft>
-                          <a:spcPts val="0"/>
-                        </a:spcAft>
-                        <a:buNone/>
-                      </a:pPr>
-                      <a:r>
-                        <a:t/>
-                      </a:r>
-                      <a:endParaRPr sz="1800" u="none" cap="none" strike="noStrike"/>
-                    </a:p>
-                  </a:txBody>
-                  <a:tcPr marT="45725" marB="45725" marR="91450" marL="91450" anchor="ctr">
-                    <a:solidFill>
-                      <a:srgbClr val="104281"/>
-                    </a:solidFill>
-                  </a:tcPr>
-                </a:tc>
-                <a:tc>
-                  <a:txBody>
-                    <a:bodyPr/>
-                    <a:lstStyle/>
-                    <a:p>
-                      <a:pPr indent="0" lvl="0" marL="0" marR="0" rtl="0" algn="l">
-                        <a:spcBef>
-                          <a:spcPts val="0"/>
-                        </a:spcBef>
-                        <a:spcAft>
-                          <a:spcPts val="0"/>
-                        </a:spcAft>
-                        <a:buNone/>
-                      </a:pPr>
-                      <a:r>
-                        <a:rPr b="1" lang="en-US" sz="1700" u="none" cap="none" strike="noStrike">
-                          <a:solidFill>
-                            <a:srgbClr val="FFFFFF"/>
-                          </a:solidFill>
-                          <a:latin typeface="Malgun Gothic"/>
-                          <a:ea typeface="Malgun Gothic"/>
-                          <a:cs typeface="Malgun Gothic"/>
-                          <a:sym typeface="Malgun Gothic"/>
-                        </a:rPr>
-                        <a:t>정확도</a:t>
-                      </a:r>
-                      <a:endParaRPr/>
-                    </a:p>
-                  </a:txBody>
-                  <a:tcPr marT="45725" marB="45725" marR="91450" marL="91450" anchor="ctr">
-                    <a:solidFill>
-                      <a:srgbClr val="104281"/>
-                    </a:solidFill>
-                  </a:tcPr>
-                </a:tc>
-                <a:tc>
-                  <a:txBody>
-                    <a:bodyPr/>
-                    <a:lstStyle/>
-                    <a:p>
-                      <a:pPr indent="0" lvl="0" marL="0" marR="0" rtl="0" algn="l">
-                        <a:spcBef>
-                          <a:spcPts val="0"/>
-                        </a:spcBef>
-                        <a:spcAft>
-                          <a:spcPts val="0"/>
-                        </a:spcAft>
-                        <a:buNone/>
-                      </a:pPr>
-                      <a:r>
-                        <a:rPr b="1" lang="en-US" sz="1700" u="none" cap="none" strike="noStrike">
-                          <a:solidFill>
-                            <a:srgbClr val="FFFFFF"/>
-                          </a:solidFill>
-                          <a:latin typeface="Malgun Gothic"/>
-                          <a:ea typeface="Malgun Gothic"/>
-                          <a:cs typeface="Malgun Gothic"/>
-                          <a:sym typeface="Malgun Gothic"/>
-                        </a:rPr>
-                        <a:t>위험군 재현율</a:t>
-                      </a:r>
-                      <a:endParaRPr/>
-                    </a:p>
-                  </a:txBody>
-                  <a:tcPr marT="45725" marB="45725" marR="91450" marL="91450" anchor="ctr">
-                    <a:solidFill>
-                      <a:srgbClr val="104281"/>
-                    </a:solidFill>
-                  </a:tcPr>
-                </a:tc>
-                <a:tc>
-                  <a:txBody>
-                    <a:bodyPr/>
-                    <a:lstStyle/>
-                    <a:p>
-                      <a:pPr indent="0" lvl="0" marL="0" marR="0" rtl="0" algn="l">
-                        <a:spcBef>
-                          <a:spcPts val="0"/>
-                        </a:spcBef>
-                        <a:spcAft>
-                          <a:spcPts val="0"/>
-                        </a:spcAft>
-                        <a:buNone/>
-                      </a:pPr>
-                      <a:r>
-                        <a:rPr b="1" lang="en-US" sz="1700" u="none" cap="none" strike="noStrike">
-                          <a:solidFill>
-                            <a:srgbClr val="FFFFFF"/>
-                          </a:solidFill>
-                          <a:latin typeface="Malgun Gothic"/>
-                          <a:ea typeface="Malgun Gothic"/>
-                          <a:cs typeface="Malgun Gothic"/>
-                          <a:sym typeface="Malgun Gothic"/>
-                        </a:rPr>
-                        <a:t>AUC</a:t>
-                      </a:r>
-                      <a:endParaRPr/>
-                    </a:p>
-                  </a:txBody>
-                  <a:tcPr marT="45725" marB="45725" marR="91450" marL="91450" anchor="ctr">
-                    <a:solidFill>
-                      <a:srgbClr val="104281"/>
-                    </a:solidFill>
-                  </a:tcPr>
-                </a:tc>
-              </a:tr>
-              <a:tr h="548650">
-                <a:tc>
-                  <a:txBody>
-                    <a:bodyPr/>
-                    <a:lstStyle/>
-                    <a:p>
-                      <a:pPr indent="0" lvl="0" marL="0" marR="0" rtl="0" algn="l">
-                        <a:spcBef>
-                          <a:spcPts val="0"/>
-                        </a:spcBef>
-                        <a:spcAft>
-                          <a:spcPts val="0"/>
-                        </a:spcAft>
-                        <a:buNone/>
-                      </a:pPr>
-                      <a:r>
-                        <a:rPr b="1" lang="en-US" sz="1600" u="none" cap="none" strike="noStrike">
-                          <a:solidFill>
-                            <a:srgbClr val="202020"/>
-                          </a:solidFill>
-                          <a:latin typeface="Malgun Gothic"/>
-                          <a:ea typeface="Malgun Gothic"/>
-                          <a:cs typeface="Malgun Gothic"/>
-                          <a:sym typeface="Malgun Gothic"/>
-                        </a:rPr>
-                        <a:t>RandomForest</a:t>
-                      </a:r>
-                      <a:endParaRPr/>
-                    </a:p>
-                  </a:txBody>
-                  <a:tcPr marT="45725" marB="45725" marR="91450" marL="91450" anchor="ctr">
-                    <a:solidFill>
-                      <a:srgbClr val="FFFFFF"/>
-                    </a:solidFill>
-                  </a:tcPr>
-                </a:tc>
-                <a:tc>
-                  <a:txBody>
-                    <a:bodyPr/>
-                    <a:lstStyle/>
-                    <a:p>
-                      <a:pPr indent="0" lvl="0" marL="0" marR="0" rtl="0" algn="l">
-                        <a:spcBef>
-                          <a:spcPts val="0"/>
-                        </a:spcBef>
-                        <a:spcAft>
-                          <a:spcPts val="0"/>
-                        </a:spcAft>
-                        <a:buNone/>
-                      </a:pPr>
-                      <a:r>
-                        <a:rPr b="1" lang="en-US" sz="1600" u="none" cap="none" strike="noStrike">
-                          <a:solidFill>
-                            <a:srgbClr val="202020"/>
-                          </a:solidFill>
-                          <a:latin typeface="Malgun Gothic"/>
-                          <a:ea typeface="Malgun Gothic"/>
-                          <a:cs typeface="Malgun Gothic"/>
-                          <a:sym typeface="Malgun Gothic"/>
-                        </a:rPr>
-                        <a:t>58.0%</a:t>
-                      </a:r>
-                      <a:endParaRPr/>
-                    </a:p>
-                  </a:txBody>
-                  <a:tcPr marT="45725" marB="45725" marR="91450" marL="91450" anchor="ctr">
-                    <a:solidFill>
-                      <a:srgbClr val="FFFFFF"/>
-                    </a:solidFill>
-                  </a:tcPr>
-                </a:tc>
-                <a:tc>
-                  <a:txBody>
-                    <a:bodyPr/>
-                    <a:lstStyle/>
-                    <a:p>
-                      <a:pPr indent="0" lvl="0" marL="0" marR="0" rtl="0" algn="l">
-                        <a:spcBef>
-                          <a:spcPts val="0"/>
-                        </a:spcBef>
-                        <a:spcAft>
-                          <a:spcPts val="0"/>
-                        </a:spcAft>
-                        <a:buNone/>
-                      </a:pPr>
-                      <a:r>
-                        <a:rPr b="1" lang="en-US" sz="1600" u="none" cap="none" strike="noStrike">
-                          <a:solidFill>
-                            <a:srgbClr val="202020"/>
-                          </a:solidFill>
-                          <a:latin typeface="Malgun Gothic"/>
-                          <a:ea typeface="Malgun Gothic"/>
-                          <a:cs typeface="Malgun Gothic"/>
-                          <a:sym typeface="Malgun Gothic"/>
-                        </a:rPr>
-                        <a:t>38.7%</a:t>
-                      </a:r>
-                      <a:endParaRPr/>
-                    </a:p>
-                  </a:txBody>
-                  <a:tcPr marT="45725" marB="45725" marR="91450" marL="91450" anchor="ctr">
-                    <a:solidFill>
-                      <a:srgbClr val="FFFFFF"/>
-                    </a:solidFill>
-                  </a:tcPr>
-                </a:tc>
-                <a:tc>
-                  <a:txBody>
-                    <a:bodyPr/>
-                    <a:lstStyle/>
-                    <a:p>
-                      <a:pPr indent="0" lvl="0" marL="0" marR="0" rtl="0" algn="l">
-                        <a:spcBef>
-                          <a:spcPts val="0"/>
-                        </a:spcBef>
-                        <a:spcAft>
-                          <a:spcPts val="0"/>
-                        </a:spcAft>
-                        <a:buNone/>
-                      </a:pPr>
-                      <a:r>
-                        <a:rPr b="1" lang="en-US" sz="1600" u="none" cap="none" strike="noStrike">
-                          <a:solidFill>
-                            <a:srgbClr val="202020"/>
-                          </a:solidFill>
-                          <a:latin typeface="Malgun Gothic"/>
-                          <a:ea typeface="Malgun Gothic"/>
-                          <a:cs typeface="Malgun Gothic"/>
-                          <a:sym typeface="Malgun Gothic"/>
-                        </a:rPr>
-                        <a:t>0.549</a:t>
-                      </a:r>
-                      <a:endParaRPr/>
-                    </a:p>
-                  </a:txBody>
-                  <a:tcPr marT="45725" marB="45725" marR="91450" marL="91450" anchor="ctr">
-                    <a:solidFill>
-                      <a:srgbClr val="FFFFFF"/>
-                    </a:solidFill>
-                  </a:tcPr>
-                </a:tc>
-              </a:tr>
-              <a:tr h="548650">
-                <a:tc>
-                  <a:txBody>
-                    <a:bodyPr/>
-                    <a:lstStyle/>
-                    <a:p>
-                      <a:pPr indent="0" lvl="0" marL="0" marR="0" rtl="0" algn="l">
-                        <a:spcBef>
-                          <a:spcPts val="0"/>
-                        </a:spcBef>
-                        <a:spcAft>
-                          <a:spcPts val="0"/>
-                        </a:spcAft>
-                        <a:buNone/>
-                      </a:pPr>
-                      <a:r>
-                        <a:rPr b="1" lang="en-US" sz="1600" u="none" cap="none" strike="noStrike">
-                          <a:solidFill>
-                            <a:srgbClr val="C44E52"/>
-                          </a:solidFill>
-                          <a:latin typeface="Malgun Gothic"/>
-                          <a:ea typeface="Malgun Gothic"/>
-                          <a:cs typeface="Malgun Gothic"/>
-                          <a:sym typeface="Malgun Gothic"/>
-                        </a:rPr>
-                        <a:t>로지스틱 회귀 (최종 채택)</a:t>
-                      </a:r>
-                      <a:endParaRPr/>
-                    </a:p>
-                  </a:txBody>
-                  <a:tcPr marT="45725" marB="45725" marR="91450" marL="91450" anchor="ctr">
-                    <a:solidFill>
-                      <a:srgbClr val="EEF3FB"/>
-                    </a:solidFill>
-                  </a:tcPr>
-                </a:tc>
-                <a:tc>
-                  <a:txBody>
-                    <a:bodyPr/>
-                    <a:lstStyle/>
-                    <a:p>
-                      <a:pPr indent="0" lvl="0" marL="0" marR="0" rtl="0" algn="l">
-                        <a:spcBef>
-                          <a:spcPts val="0"/>
-                        </a:spcBef>
-                        <a:spcAft>
-                          <a:spcPts val="0"/>
-                        </a:spcAft>
-                        <a:buNone/>
-                      </a:pPr>
-                      <a:r>
-                        <a:rPr b="1" lang="en-US" sz="1600" u="none" cap="none" strike="noStrike">
-                          <a:solidFill>
-                            <a:srgbClr val="C44E52"/>
-                          </a:solidFill>
-                          <a:latin typeface="Malgun Gothic"/>
-                          <a:ea typeface="Malgun Gothic"/>
-                          <a:cs typeface="Malgun Gothic"/>
-                          <a:sym typeface="Malgun Gothic"/>
-                        </a:rPr>
-                        <a:t>60.2%</a:t>
-                      </a:r>
-                      <a:endParaRPr/>
-                    </a:p>
-                  </a:txBody>
-                  <a:tcPr marT="45725" marB="45725" marR="91450" marL="91450" anchor="ctr">
-                    <a:solidFill>
-                      <a:srgbClr val="EEF3FB"/>
-                    </a:solidFill>
-                  </a:tcPr>
-                </a:tc>
-                <a:tc>
-                  <a:txBody>
-                    <a:bodyPr/>
-                    <a:lstStyle/>
-                    <a:p>
-                      <a:pPr indent="0" lvl="0" marL="0" marR="0" rtl="0" algn="l">
-                        <a:spcBef>
-                          <a:spcPts val="0"/>
-                        </a:spcBef>
-                        <a:spcAft>
-                          <a:spcPts val="0"/>
-                        </a:spcAft>
-                        <a:buNone/>
-                      </a:pPr>
-                      <a:r>
-                        <a:rPr b="1" lang="en-US" sz="1600" u="none" cap="none" strike="noStrike">
-                          <a:solidFill>
-                            <a:srgbClr val="C44E52"/>
-                          </a:solidFill>
-                          <a:latin typeface="Malgun Gothic"/>
-                          <a:ea typeface="Malgun Gothic"/>
-                          <a:cs typeface="Malgun Gothic"/>
-                          <a:sym typeface="Malgun Gothic"/>
-                        </a:rPr>
-                        <a:t>52.7%</a:t>
-                      </a:r>
-                      <a:endParaRPr/>
-                    </a:p>
-                  </a:txBody>
-                  <a:tcPr marT="45725" marB="45725" marR="91450" marL="91450" anchor="ctr">
-                    <a:solidFill>
-                      <a:srgbClr val="EEF3FB"/>
-                    </a:solidFill>
-                  </a:tcPr>
-                </a:tc>
-                <a:tc>
-                  <a:txBody>
-                    <a:bodyPr/>
-                    <a:lstStyle/>
-                    <a:p>
-                      <a:pPr indent="0" lvl="0" marL="0" marR="0" rtl="0" algn="l">
-                        <a:spcBef>
-                          <a:spcPts val="0"/>
-                        </a:spcBef>
-                        <a:spcAft>
-                          <a:spcPts val="0"/>
-                        </a:spcAft>
-                        <a:buNone/>
-                      </a:pPr>
-                      <a:r>
-                        <a:rPr b="1" lang="en-US" sz="1600" u="none" cap="none" strike="noStrike">
-                          <a:solidFill>
-                            <a:srgbClr val="C44E52"/>
-                          </a:solidFill>
-                          <a:latin typeface="Malgun Gothic"/>
-                          <a:ea typeface="Malgun Gothic"/>
-                          <a:cs typeface="Malgun Gothic"/>
-                          <a:sym typeface="Malgun Gothic"/>
-                        </a:rPr>
-                        <a:t>0.601</a:t>
-                      </a:r>
-                      <a:endParaRPr/>
-                    </a:p>
-                  </a:txBody>
-                  <a:tcPr marT="45725" marB="45725" marR="91450" marL="91450" anchor="ctr">
-                    <a:solidFill>
-                      <a:srgbClr val="EEF3FB"/>
-                    </a:solidFill>
-                  </a:tcPr>
-                </a:tc>
-              </a:tr>
-            </a:tbl>
-          </a:graphicData>
-        </a:graphic>
-      </p:graphicFrame>
-      <p:sp>
-        <p:nvSpPr>
-          <p:cNvPr id="233" name="Google Shape;233;p13"/>
-          <p:cNvSpPr txBox="1"/>
-          <p:nvPr/>
-        </p:nvSpPr>
-        <p:spPr>
-          <a:xfrm>
-            <a:off x="777240" y="4519405"/>
-            <a:ext cx="10698480" cy="1470743"/>
-          </a:xfrm>
-          <a:prstGeom prst="rect">
-            <a:avLst/>
-          </a:prstGeom>
-          <a:noFill/>
-          <a:ln>
-            <a:noFill/>
-          </a:ln>
-        </p:spPr>
-        <p:txBody>
-          <a:bodyPr anchorCtr="0" anchor="t" bIns="45700" lIns="91425" spcFirstLastPara="1" rIns="91425" wrap="square" tIns="45700">
-            <a:spAutoFit/>
-          </a:bodyPr>
-          <a:lstStyle/>
-          <a:p>
-            <a:pPr indent="0" lvl="0" marL="0" marR="0" rtl="0" algn="l">
-              <a:spcBef>
-                <a:spcPts val="0"/>
-              </a:spcBef>
-              <a:spcAft>
-                <a:spcPts val="0"/>
-              </a:spcAft>
-              <a:buNone/>
-            </a:pPr>
-            <a:r>
-              <a:rPr b="1" i="0" lang="en-US" sz="1700" u="none" cap="none" strike="noStrike">
-                <a:solidFill>
-                  <a:srgbClr val="104281"/>
-                </a:solidFill>
-                <a:latin typeface="맑은 고딕"/>
-                <a:ea typeface="Malgun Gothic"/>
-                <a:cs typeface="Malgun Gothic"/>
-                <a:sym typeface="Malgun Gothic"/>
-              </a:rPr>
-              <a:t>174명 소표본에서는 단순한 모델이 잡음에 덜 흔들린다 — 50회 반복 비교에서 로지스틱 회귀가 모든 지표 우위</a:t>
-            </a:r>
-            <a:endParaRPr/>
-          </a:p>
-        </p:txBody>
-      </p:sp>
-    </p:spTree>
-  </p:cSld>
-  <p:clrMapOvr>
-    <a:masterClrMapping/>
-  </p:clrMapOvr>
-</p:sld>
-</file>
-
 <file path=ppt/slides/slide16.xml><?xml version="1.0" encoding="utf-8"?>
 <p:sld xmlns:a="http://schemas.openxmlformats.org/drawingml/2006/main" xmlns:r="http://schemas.openxmlformats.org/officeDocument/2006/relationships" xmlns:mc="http://schemas.openxmlformats.org/markup-compatibility/2006" xmlns:mv="urn:schemas-microsoft-com:mac:vml" xmlns:p="http://schemas.openxmlformats.org/presentationml/2006/main" xmlns:c="http://schemas.openxmlformats.org/drawingml/2006/chart" xmlns:dgm="http://schemas.openxmlformats.org/drawingml/2006/diagram" xmlns:o="urn:schemas-microsoft-com:office:office" xmlns:v="urn:schemas-microsoft-com:vml" xmlns:pvml="urn:schemas-microsoft-com:office:powerpoint" xmlns:com="http://schemas.openxmlformats.org/drawingml/2006/compatibility" xmlns:p14="http://schemas.microsoft.com/office/powerpoint/2010/main" xmlns:p15="http://schemas.microsoft.com/office/powerpoint/2012/main" xmlns:ahyp="http://schemas.microsoft.com/office/drawing/2018/hyperlinkcolor">
   <p:cSld>
@@ -18545,6 +18642,10 @@
               <a:buNone/>
             </a:pPr>
             <a:r>
+              <a:rPr>
+                <a:latin typeface="맑은 고딕"/>
+                <a:ea typeface="맑은 고딕"/>
+              </a:rPr>
               <a:t/>
             </a:r>
             <a:endParaRPr b="0" i="0" sz="1800" u="none" cap="none" strike="noStrike">
@@ -18598,8 +18699,8 @@
                 <a:solidFill>
                   <a:srgbClr val="2A78D6"/>
                 </a:solidFill>
-                <a:latin typeface="Malgun Gothic"/>
-                <a:ea typeface="Malgun Gothic"/>
+                <a:latin typeface="맑은 고딕"/>
+                <a:ea typeface="맑은 고딕"/>
                 <a:cs typeface="Malgun Gothic"/>
                 <a:sym typeface="Malgun Gothic"/>
               </a:rPr>
@@ -18656,8 +18757,8 @@
                 <a:solidFill>
                   <a:srgbClr val="104281"/>
                 </a:solidFill>
-                <a:latin typeface="Malgun Gothic"/>
-                <a:ea typeface="Malgun Gothic"/>
+                <a:latin typeface="맑은 고딕"/>
+                <a:ea typeface="맑은 고딕"/>
                 <a:cs typeface="Malgun Gothic"/>
                 <a:sym typeface="Malgun Gothic"/>
               </a:rPr>
@@ -18714,8 +18815,8 @@
                 <a:solidFill>
                   <a:srgbClr val="202020"/>
                 </a:solidFill>
-                <a:latin typeface="Malgun Gothic"/>
-                <a:ea typeface="Malgun Gothic"/>
+                <a:latin typeface="맑은 고딕"/>
+                <a:ea typeface="맑은 고딕"/>
                 <a:cs typeface="Malgun Gothic"/>
                 <a:sym typeface="Malgun Gothic"/>
               </a:rPr>
@@ -18742,6 +18843,10 @@
               <a:buNone/>
             </a:pPr>
             <a:r>
+              <a:rPr>
+                <a:latin typeface="맑은 고딕"/>
+                <a:ea typeface="맑은 고딕"/>
+              </a:rPr>
               <a:t/>
             </a:r>
             <a:endParaRPr b="1" i="0" sz="1800" u="none" cap="none" strike="noStrike">
@@ -18769,8 +18874,8 @@
                 <a:solidFill>
                   <a:srgbClr val="202020"/>
                 </a:solidFill>
-                <a:latin typeface="Malgun Gothic"/>
-                <a:ea typeface="Malgun Gothic"/>
+                <a:latin typeface="맑은 고딕"/>
+                <a:ea typeface="맑은 고딕"/>
                 <a:cs typeface="Malgun Gothic"/>
                 <a:sym typeface="Malgun Gothic"/>
               </a:rPr>
@@ -18801,8 +18906,8 @@
                 <a:solidFill>
                   <a:srgbClr val="202020"/>
                 </a:solidFill>
-                <a:latin typeface="Malgun Gothic"/>
-                <a:ea typeface="Malgun Gothic"/>
+                <a:latin typeface="맑은 고딕"/>
+                <a:ea typeface="맑은 고딕"/>
                 <a:cs typeface="Malgun Gothic"/>
                 <a:sym typeface="Malgun Gothic"/>
               </a:rPr>
@@ -18829,6 +18934,10 @@
               <a:buNone/>
             </a:pPr>
             <a:r>
+              <a:rPr>
+                <a:latin typeface="맑은 고딕"/>
+                <a:ea typeface="맑은 고딕"/>
+              </a:rPr>
               <a:t/>
             </a:r>
             <a:endParaRPr b="1" i="0" sz="1800" u="none" cap="none" strike="noStrike">
@@ -18856,8 +18965,8 @@
                 <a:solidFill>
                   <a:srgbClr val="C44E52"/>
                 </a:solidFill>
-                <a:latin typeface="Malgun Gothic"/>
-                <a:ea typeface="Malgun Gothic"/>
+                <a:latin typeface="맑은 고딕"/>
+                <a:ea typeface="맑은 고딕"/>
                 <a:cs typeface="Malgun Gothic"/>
                 <a:sym typeface="Malgun Gothic"/>
               </a:rPr>
@@ -18884,6 +18993,10 @@
               <a:buNone/>
             </a:pPr>
             <a:r>
+              <a:rPr>
+                <a:latin typeface="맑은 고딕"/>
+                <a:ea typeface="맑은 고딕"/>
+              </a:rPr>
               <a:t/>
             </a:r>
             <a:endParaRPr b="1" i="0" sz="1800" u="none" cap="none" strike="noStrike">
@@ -18911,8 +19024,8 @@
                 <a:solidFill>
                   <a:srgbClr val="104281"/>
                 </a:solidFill>
-                <a:latin typeface="Malgun Gothic"/>
-                <a:ea typeface="Malgun Gothic"/>
+                <a:latin typeface="맑은 고딕"/>
+                <a:ea typeface="맑은 고딕"/>
                 <a:cs typeface="Malgun Gothic"/>
                 <a:sym typeface="Malgun Gothic"/>
               </a:rPr>
@@ -18943,8 +19056,8 @@
                 <a:solidFill>
                   <a:srgbClr val="202020"/>
                 </a:solidFill>
-                <a:latin typeface="Malgun Gothic"/>
-                <a:ea typeface="Malgun Gothic"/>
+                <a:latin typeface="맑은 고딕"/>
+                <a:ea typeface="맑은 고딕"/>
                 <a:cs typeface="Malgun Gothic"/>
                 <a:sym typeface="Malgun Gothic"/>
               </a:rPr>
@@ -18975,8 +19088,8 @@
                 <a:solidFill>
                   <a:srgbClr val="202020"/>
                 </a:solidFill>
-                <a:latin typeface="Malgun Gothic"/>
-                <a:ea typeface="Malgun Gothic"/>
+                <a:latin typeface="맑은 고딕"/>
+                <a:ea typeface="맑은 고딕"/>
                 <a:cs typeface="Malgun Gothic"/>
                 <a:sym typeface="Malgun Gothic"/>
               </a:rPr>
@@ -19033,8 +19146,8 @@
                 <a:solidFill>
                   <a:srgbClr val="666666"/>
                 </a:solidFill>
-                <a:latin typeface="Malgun Gothic"/>
-                <a:ea typeface="Malgun Gothic"/>
+                <a:latin typeface="맑은 고딕"/>
+                <a:ea typeface="맑은 고딕"/>
                 <a:cs typeface="Malgun Gothic"/>
                 <a:sym typeface="Malgun Gothic"/>
               </a:rPr>
@@ -19828,6 +19941,7 @@
                   <a:srgbClr val="2A78D6"/>
                 </a:solidFill>
                 <a:latin typeface="맑은 고딕"/>
+                <a:ea typeface="맑은 고딕"/>
               </a:rPr>
               <a:t>05. 서비스</a:t>
             </a:r>
@@ -19867,6 +19981,7 @@
                   <a:srgbClr val="104281"/>
                 </a:solidFill>
                 <a:latin typeface="맑은 고딕"/>
+                <a:ea typeface="맑은 고딕"/>
               </a:rPr>
               <a:t>분석이 말해준 것 — 그래서 이 서비스다</a:t>
             </a:r>
@@ -19908,6 +20023,7 @@
                             <a:srgbClr val="FFFFFF"/>
                           </a:solidFill>
                           <a:latin typeface="맑은 고딕"/>
+                          <a:ea typeface="맑은 고딕"/>
                         </a:rPr>
                         <a:t>분석·검증 결과</a:t>
                       </a:r>
@@ -19930,6 +20046,7 @@
                             <a:srgbClr val="FFFFFF"/>
                           </a:solidFill>
                           <a:latin typeface="맑은 고딕"/>
+                          <a:ea typeface="맑은 고딕"/>
                         </a:rPr>
                         <a:t>도출된 필요성</a:t>
                       </a:r>
@@ -19952,6 +20069,7 @@
                             <a:srgbClr val="FFFFFF"/>
                           </a:solidFill>
                           <a:latin typeface="맑은 고딕"/>
+                          <a:ea typeface="맑은 고딕"/>
                         </a:rPr>
                         <a:t>서비스 기능</a:t>
                       </a:r>
@@ -19976,12 +20094,17 @@
                             <a:srgbClr val="104281"/>
                           </a:solidFill>
                           <a:latin typeface="맑은 고딕"/>
+                          <a:ea typeface="맑은 고딕"/>
                         </a:rPr>
                         <a:t>생활 패턴의 불규칙함이</a:t>
                       </a:r>
                     </a:p>
                     <a:p>
                       <a:r>
+                        <a:rPr>
+                          <a:latin typeface="맑은 고딕"/>
+                          <a:ea typeface="맑은 고딕"/>
+                        </a:rPr>
                         <a:t>위험군을 가른다 (Q3)</a:t>
                       </a:r>
                     </a:p>
@@ -20003,12 +20126,17 @@
                             <a:srgbClr val="202020"/>
                           </a:solidFill>
                           <a:latin typeface="맑은 고딕"/>
+                          <a:ea typeface="맑은 고딕"/>
                         </a:rPr>
                         <a:t>병원 밖 일상 기록으로</a:t>
                       </a:r>
                     </a:p>
                     <a:p>
                       <a:r>
+                        <a:rPr>
+                          <a:latin typeface="맑은 고딕"/>
+                          <a:ea typeface="맑은 고딕"/>
+                        </a:rPr>
                         <a:t>위험 신호 감지 가능</a:t>
                       </a:r>
                     </a:p>
@@ -20030,12 +20158,17 @@
                             <a:srgbClr val="202020"/>
                           </a:solidFill>
                           <a:latin typeface="맑은 고딕"/>
+                          <a:ea typeface="맑은 고딕"/>
                         </a:rPr>
                         <a:t>웨어러블 기록 업로드</a:t>
                       </a:r>
                     </a:p>
                     <a:p>
                       <a:r>
+                        <a:rPr>
+                          <a:latin typeface="맑은 고딕"/>
+                          <a:ea typeface="맑은 고딕"/>
+                        </a:rPr>
                         <a:t>→ 위험 점수·근거 제시</a:t>
                       </a:r>
                     </a:p>
@@ -20059,12 +20192,17 @@
                             <a:srgbClr val="104281"/>
                           </a:solidFill>
                           <a:latin typeface="맑은 고딕"/>
+                          <a:ea typeface="맑은 고딕"/>
                         </a:rPr>
                         <a:t>경도인지장애 단독 신호는</a:t>
                       </a:r>
                     </a:p>
                     <a:p>
                       <a:r>
+                        <a:rPr>
+                          <a:latin typeface="맑은 고딕"/>
+                          <a:ea typeface="맑은 고딕"/>
+                        </a:rPr>
                         <a:t>미확인 (Q4)</a:t>
                       </a:r>
                     </a:p>
@@ -20086,12 +20224,17 @@
                             <a:srgbClr val="202020"/>
                           </a:solidFill>
                           <a:latin typeface="맑은 고딕"/>
+                          <a:ea typeface="맑은 고딕"/>
                         </a:rPr>
                         <a:t>진단이 아닌 '위험군</a:t>
                       </a:r>
                     </a:p>
                     <a:p>
                       <a:r>
+                        <a:rPr>
+                          <a:latin typeface="맑은 고딕"/>
+                          <a:ea typeface="맑은 고딕"/>
+                        </a:rPr>
                         <a:t>스크리닝'으로 범위 한정</a:t>
                       </a:r>
                     </a:p>
@@ -20113,12 +20256,17 @@
                             <a:srgbClr val="202020"/>
                           </a:solidFill>
                           <a:latin typeface="맑은 고딕"/>
+                          <a:ea typeface="맑은 고딕"/>
                         </a:rPr>
                         <a:t>참고용 판정 + 한계 고지를</a:t>
                       </a:r>
                     </a:p>
                     <a:p>
                       <a:r>
+                        <a:rPr>
+                          <a:latin typeface="맑은 고딕"/>
+                          <a:ea typeface="맑은 고딕"/>
+                        </a:rPr>
                         <a:t>모든 화면에 명시</a:t>
                       </a:r>
                     </a:p>
@@ -20142,12 +20290,17 @@
                             <a:srgbClr val="104281"/>
                           </a:solidFill>
                           <a:latin typeface="맑은 고딕"/>
+                          <a:ea typeface="맑은 고딕"/>
                         </a:rPr>
                         <a:t>위험군 구분 능력은</a:t>
                       </a:r>
                     </a:p>
                     <a:p>
                       <a:r>
+                        <a:rPr>
+                          <a:latin typeface="맑은 고딕"/>
+                          <a:ea typeface="맑은 고딕"/>
+                        </a:rPr>
                         <a:t>통계적으로 유효 (Q5)</a:t>
                       </a:r>
                     </a:p>
@@ -20169,12 +20322,17 @@
                             <a:srgbClr val="202020"/>
                           </a:solidFill>
                           <a:latin typeface="맑은 고딕"/>
+                          <a:ea typeface="맑은 고딕"/>
                         </a:rPr>
                         <a:t>걸러낸 위험군을 검진으로</a:t>
                       </a:r>
                     </a:p>
                     <a:p>
                       <a:r>
+                        <a:rPr>
+                          <a:latin typeface="맑은 고딕"/>
+                          <a:ea typeface="맑은 고딕"/>
+                        </a:rPr>
                         <a:t>연결할 통로 필요</a:t>
                       </a:r>
                     </a:p>
@@ -20196,12 +20354,17 @@
                             <a:srgbClr val="202020"/>
                           </a:solidFill>
                           <a:latin typeface="맑은 고딕"/>
+                          <a:ea typeface="맑은 고딕"/>
                         </a:rPr>
                         <a:t>치매안심센터 지도 안내</a:t>
                       </a:r>
                     </a:p>
                     <a:p>
                       <a:r>
+                        <a:rPr>
+                          <a:latin typeface="맑은 고딕"/>
+                          <a:ea typeface="맑은 고딕"/>
+                        </a:rPr>
                         <a:t>(전국 317곳 공공데이터)</a:t>
                       </a:r>
                     </a:p>
@@ -20250,6 +20413,7 @@
                   <a:srgbClr val="104281"/>
                 </a:solidFill>
                 <a:latin typeface="맑은 고딕"/>
+                <a:ea typeface="맑은 고딕"/>
               </a:rPr>
               <a:t>"생활 패턴의 불규칙함이 위험 신호임을 확인했고, 이를 활용해 위험군을 조기에 걸러</a:t>
             </a:r>
@@ -20266,6 +20430,7 @@
                   <a:srgbClr val="104281"/>
                 </a:solidFill>
                 <a:latin typeface="맑은 고딕"/>
+                <a:ea typeface="맑은 고딕"/>
               </a:rPr>
               <a:t>  병원 검진으로 연결하는 스크리닝 서비스를 기획하였다"</a:t>
             </a:r>
@@ -20305,6 +20470,7 @@
                   <a:srgbClr val="666666"/>
                 </a:solidFill>
                 <a:latin typeface="맑은 고딕"/>
+                <a:ea typeface="맑은 고딕"/>
               </a:rPr>
               <a:t>18</a:t>
             </a:r>
@@ -21284,7 +21450,7 @@
 </file>
 
 <file path=ppt/slides/slide2.xml><?xml version="1.0" encoding="utf-8"?>
-<p:sld xmlns:a="http://schemas.openxmlformats.org/drawingml/2006/main" xmlns:p="http://schemas.openxmlformats.org/presentationml/2006/main" xmlns:r="http://schemas.openxmlformats.org/officeDocument/2006/relationships">
+<p:sld xmlns:r="http://schemas.openxmlformats.org/officeDocument/2006/relationships" xmlns:c="http://schemas.openxmlformats.org/drawingml/2006/chart" xmlns:a="http://schemas.openxmlformats.org/drawingml/2006/main" xmlns:dgm="http://schemas.openxmlformats.org/drawingml/2006/diagram" xmlns:dsp="http://schemas.microsoft.com/office/drawing/2008/diagram" xmlns:p="http://schemas.openxmlformats.org/presentationml/2006/main">
   <p:cSld>
     <p:spTree>
       <p:nvGrpSpPr>
@@ -21292,24 +21458,14 @@
         <p:cNvGrpSpPr/>
         <p:nvPr/>
       </p:nvGrpSpPr>
-      <p:grpSpPr/>
-      <p:sp>
-        <p:nvSpPr>
-          <p:cNvPr id="2" name="Title 1"/>
-          <p:cNvSpPr>
-            <a:spLocks noGrp="1"/>
-          </p:cNvSpPr>
-          <p:nvPr>
-            <p:ph type="title"/>
-          </p:nvPr>
-        </p:nvSpPr>
-        <p:spPr/>
-        <p:txBody>
-          <a:bodyPr/>
-          <a:lstStyle/>
-          <a:p/>
-        </p:txBody>
-      </p:sp>
+      <p:grpSpPr>
+        <a:xfrm>
+          <a:off x="0" y="0"/>
+          <a:ext cx="0" cy="0"/>
+          <a:chOff x="0" y="0"/>
+          <a:chExt cx="0" cy="0"/>
+        </a:xfrm>
+      </p:grpSpPr>
       <p:sp>
         <p:nvSpPr>
           <p:cNvPr id="3" name="Rectangle 2"/>
@@ -21346,10 +21502,13 @@
           </a:fontRef>
         </p:style>
         <p:txBody>
-          <a:bodyPr rtlCol="0" anchor="ctr"/>
+          <a:bodyPr anchor="ctr"/>
           <a:lstStyle/>
           <a:p>
-            <a:pPr algn="ctr"/>
+            <a:pPr algn="ctr">
+              <a:defRPr/>
+            </a:pPr>
+            <a:endParaRPr lang="ko-KR" altLang="en-US"/>
           </a:p>
         </p:txBody>
       </p:sp>
@@ -21362,7 +21521,7 @@
         <p:spPr>
           <a:xfrm>
             <a:off x="502920" y="292608"/>
-            <a:ext cx="10515600" cy="365760"/>
+            <a:ext cx="10515600" cy="296037"/>
           </a:xfrm>
           <a:prstGeom prst="rect">
             <a:avLst/>
@@ -21379,16 +21538,24 @@
               <a:spcAft>
                 <a:spcPts val="600"/>
               </a:spcAft>
+              <a:defRPr/>
             </a:pPr>
             <a:r>
               <a:rPr sz="1400" b="1">
                 <a:solidFill>
-                  <a:srgbClr val="2A78D6"/>
+                  <a:srgbClr val="2a78d6"/>
                 </a:solidFill>
                 <a:latin typeface="맑은 고딕"/>
+                <a:ea typeface="맑은 고딕"/>
               </a:rPr>
               <a:t>SCHEDULE</a:t>
             </a:r>
+            <a:endParaRPr sz="1400" b="1">
+              <a:solidFill>
+                <a:srgbClr val="2a78d6"/>
+              </a:solidFill>
+              <a:latin typeface="맑은 고딕"/>
+            </a:endParaRPr>
           </a:p>
         </p:txBody>
       </p:sp>
@@ -21401,7 +21568,7 @@
         <p:spPr>
           <a:xfrm>
             <a:off x="502920" y="621792"/>
-            <a:ext cx="11155680" cy="731520"/>
+            <a:ext cx="11155680" cy="547878"/>
           </a:xfrm>
           <a:prstGeom prst="rect">
             <a:avLst/>
@@ -21418,6 +21585,7 @@
               <a:spcAft>
                 <a:spcPts val="600"/>
               </a:spcAft>
+              <a:defRPr/>
             </a:pPr>
             <a:r>
               <a:rPr sz="3000" b="1">
@@ -21425,9 +21593,16 @@
                   <a:srgbClr val="104281"/>
                 </a:solidFill>
                 <a:latin typeface="맑은 고딕"/>
+                <a:ea typeface="맑은 고딕"/>
               </a:rPr>
               <a:t>프로젝트 일정</a:t>
             </a:r>
+            <a:endParaRPr sz="3000" b="1">
+              <a:solidFill>
+                <a:srgbClr val="104281"/>
+              </a:solidFill>
+              <a:latin typeface="맑은 고딕"/>
+            </a:endParaRPr>
           </a:p>
         </p:txBody>
       </p:sp>
@@ -21440,7 +21615,7 @@
         <p:spPr>
           <a:xfrm>
             <a:off x="11475720" y="6446520"/>
-            <a:ext cx="640080" cy="320040"/>
+            <a:ext cx="640080" cy="266700"/>
           </a:xfrm>
           <a:prstGeom prst="rect">
             <a:avLst/>
@@ -21457,6 +21632,7 @@
               <a:spcAft>
                 <a:spcPts val="600"/>
               </a:spcAft>
+              <a:defRPr/>
             </a:pPr>
             <a:r>
               <a:rPr sz="1200" b="0">
@@ -21464,61 +21640,16 @@
                   <a:srgbClr val="666666"/>
                 </a:solidFill>
                 <a:latin typeface="맑은 고딕"/>
+                <a:ea typeface="맑은 고딕"/>
               </a:rPr>
               <a:t>2</a:t>
             </a:r>
-          </a:p>
-        </p:txBody>
-      </p:sp>
-      <p:sp>
-        <p:nvSpPr>
-          <p:cNvPr id="9" name="Rectangle 8"/>
-          <p:cNvSpPr/>
-          <p:nvPr/>
-        </p:nvSpPr>
-        <p:spPr>
-          <a:xfrm>
-            <a:off x="731520" y="1600200"/>
-            <a:ext cx="10698480" cy="502920"/>
-          </a:xfrm>
-          <a:prstGeom prst="rect">
-            <a:avLst/>
-          </a:prstGeom>
-          <a:solidFill>
-            <a:srgbClr val="104281"/>
-          </a:solidFill>
-          <a:ln>
-            <a:noFill/>
-          </a:ln>
-        </p:spPr>
-        <p:style>
-          <a:lnRef idx="1">
-            <a:schemeClr val="accent1"/>
-          </a:lnRef>
-          <a:fillRef idx="3">
-            <a:schemeClr val="accent1"/>
-          </a:fillRef>
-          <a:effectRef idx="2">
-            <a:schemeClr val="accent1"/>
-          </a:effectRef>
-          <a:fontRef idx="minor">
-            <a:schemeClr val="lt1"/>
-          </a:fontRef>
-        </p:style>
-        <p:txBody>
-          <a:bodyPr rtlCol="0" anchor="ctr"/>
-          <a:lstStyle/>
-          <a:p>
-            <a:pPr algn="ctr"/>
-            <a:r>
-              <a:rPr sz="1500" b="1">
-                <a:solidFill>
-                  <a:srgbClr val="FFFFFF"/>
-                </a:solidFill>
-                <a:latin typeface="맑은 고딕"/>
-              </a:rPr>
-              <a:t>주제 선정 → 데이터 확보 → 전처리 → 분석 → 해석 → 서비스 기획 → DB 구축 → 구현 → 발표</a:t>
-            </a:r>
+            <a:endParaRPr sz="1200" b="0">
+              <a:solidFill>
+                <a:srgbClr val="666666"/>
+              </a:solidFill>
+              <a:latin typeface="맑은 고딕"/>
+            </a:endParaRPr>
           </a:p>
         </p:txBody>
       </p:sp>
@@ -21531,8 +21662,8 @@
           <p:nvPr/>
         </p:nvGraphicFramePr>
         <p:xfrm>
-          <a:off x="731520" y="2331720"/>
-          <a:ext cx="10698480" cy="2926080"/>
+          <a:off x="731520" y="1565340"/>
+          <a:ext cx="10698480" cy="4316512"/>
         </p:xfrm>
         <a:graphic>
           <a:graphicData uri="http://schemas.openxmlformats.org/drawingml/2006/table">
@@ -21545,274 +21676,382 @@
                 <a:gridCol w="3017520"/>
                 <a:gridCol w="5486400"/>
               </a:tblGrid>
-              <a:tr h="731520">
+              <a:tr h="1079128">
                 <a:tc>
                   <a:txBody>
-                    <a:bodyPr/>
-                    <a:lstStyle/>
+                    <a:bodyPr vert="horz" lIns="109728" tIns="109728" rIns="91440" bIns="45720" anchor="t" anchorCtr="0"/>
                     <a:p>
+                      <a:pPr lvl="0">
+                        <a:defRPr/>
+                      </a:pPr>
                       <a:r>
                         <a:rPr sz="1500" b="1">
                           <a:solidFill>
                             <a:srgbClr val="104281"/>
                           </a:solidFill>
                           <a:latin typeface="맑은 고딕"/>
+                          <a:ea typeface="맑은 고딕"/>
                         </a:rPr>
                         <a:t>1일차  8/13(목)</a:t>
                       </a:r>
+                      <a:endParaRPr sz="1500" b="1">
+                        <a:solidFill>
+                          <a:srgbClr val="104281"/>
+                        </a:solidFill>
+                        <a:latin typeface="맑은 고딕"/>
+                      </a:endParaRPr>
                     </a:p>
                   </a:txBody>
-                  <a:tcPr marL="109728" marT="109728">
+                  <a:tcPr marL="109728" marR="91440" marT="109728">
                     <a:solidFill>
-                      <a:srgbClr val="EEF3FB"/>
+                      <a:srgbClr val="eef3fb"/>
                     </a:solidFill>
                   </a:tcPr>
                 </a:tc>
                 <a:tc>
                   <a:txBody>
-                    <a:bodyPr/>
-                    <a:lstStyle/>
+                    <a:bodyPr vert="horz" lIns="109728" tIns="109728" rIns="91440" bIns="45720" anchor="t" anchorCtr="0"/>
                     <a:p>
+                      <a:pPr lvl="0">
+                        <a:defRPr/>
+                      </a:pPr>
                       <a:r>
                         <a:rPr sz="1500" b="1">
                           <a:solidFill>
                             <a:srgbClr val="202020"/>
                           </a:solidFill>
                           <a:latin typeface="맑은 고딕"/>
+                          <a:ea typeface="맑은 고딕"/>
                         </a:rPr>
                         <a:t>데이터 수집·전처리</a:t>
                       </a:r>
+                      <a:endParaRPr sz="1500" b="1">
+                        <a:solidFill>
+                          <a:srgbClr val="202020"/>
+                        </a:solidFill>
+                        <a:latin typeface="맑은 고딕"/>
+                      </a:endParaRPr>
                     </a:p>
                   </a:txBody>
-                  <a:tcPr marL="109728" marT="109728">
+                  <a:tcPr marL="109728" marR="91440" marT="109728">
                     <a:solidFill>
-                      <a:srgbClr val="FFFFFF"/>
+                      <a:srgbClr val="ffffff"/>
                     </a:solidFill>
                   </a:tcPr>
                 </a:tc>
                 <a:tc>
                   <a:txBody>
-                    <a:bodyPr/>
-                    <a:lstStyle/>
+                    <a:bodyPr vert="horz" lIns="109728" tIns="109728" rIns="91440" bIns="45720" anchor="t" anchorCtr="0"/>
                     <a:p>
+                      <a:pPr lvl="0">
+                        <a:defRPr/>
+                      </a:pPr>
                       <a:r>
                         <a:rPr sz="1500" b="1">
                           <a:solidFill>
                             <a:srgbClr val="202020"/>
                           </a:solidFill>
                           <a:latin typeface="맑은 고딕"/>
+                          <a:ea typeface="맑은 고딕"/>
                         </a:rPr>
                         <a:t>AI Hub 데이터 확보·구조 확인, 라이프로그 정제, 사람 단위 지표 생성</a:t>
                       </a:r>
+                      <a:endParaRPr sz="1500" b="1">
+                        <a:solidFill>
+                          <a:srgbClr val="202020"/>
+                        </a:solidFill>
+                        <a:latin typeface="맑은 고딕"/>
+                      </a:endParaRPr>
                     </a:p>
                   </a:txBody>
-                  <a:tcPr marL="109728" marT="109728">
+                  <a:tcPr marL="109728" marR="91440" marT="109728">
                     <a:solidFill>
-                      <a:srgbClr val="FFFFFF"/>
+                      <a:srgbClr val="ffffff"/>
                     </a:solidFill>
                   </a:tcPr>
                 </a:tc>
               </a:tr>
-              <a:tr h="731520">
+              <a:tr h="1079128">
                 <a:tc>
                   <a:txBody>
-                    <a:bodyPr/>
-                    <a:lstStyle/>
+                    <a:bodyPr vert="horz" lIns="109728" tIns="109728" rIns="91440" bIns="45720" anchor="t" anchorCtr="0"/>
                     <a:p>
+                      <a:pPr lvl="0">
+                        <a:defRPr/>
+                      </a:pPr>
                       <a:r>
                         <a:rPr sz="1500" b="1">
                           <a:solidFill>
                             <a:srgbClr val="104281"/>
                           </a:solidFill>
                           <a:latin typeface="맑은 고딕"/>
+                          <a:ea typeface="맑은 고딕"/>
                         </a:rPr>
                         <a:t>2일차  8/14(금)</a:t>
                       </a:r>
+                      <a:endParaRPr sz="1500" b="1">
+                        <a:solidFill>
+                          <a:srgbClr val="104281"/>
+                        </a:solidFill>
+                        <a:latin typeface="맑은 고딕"/>
+                      </a:endParaRPr>
                     </a:p>
                   </a:txBody>
-                  <a:tcPr marL="109728" marT="109728">
+                  <a:tcPr marL="109728" marR="91440" marT="109728">
                     <a:solidFill>
-                      <a:srgbClr val="EEF3FB"/>
+                      <a:srgbClr val="eef3fb"/>
                     </a:solidFill>
                   </a:tcPr>
                 </a:tc>
                 <a:tc>
                   <a:txBody>
-                    <a:bodyPr/>
-                    <a:lstStyle/>
+                    <a:bodyPr vert="horz" lIns="109728" tIns="109728" rIns="91440" bIns="45720" anchor="t" anchorCtr="0"/>
                     <a:p>
+                      <a:pPr lvl="0">
+                        <a:defRPr/>
+                      </a:pPr>
                       <a:r>
                         <a:rPr sz="1500" b="1">
                           <a:solidFill>
                             <a:srgbClr val="202020"/>
                           </a:solidFill>
                           <a:latin typeface="맑은 고딕"/>
+                          <a:ea typeface="맑은 고딕"/>
                         </a:rPr>
                         <a:t>분석 및 해석</a:t>
                       </a:r>
+                      <a:endParaRPr sz="1500" b="1">
+                        <a:solidFill>
+                          <a:srgbClr val="202020"/>
+                        </a:solidFill>
+                        <a:latin typeface="맑은 고딕"/>
+                      </a:endParaRPr>
                     </a:p>
                   </a:txBody>
-                  <a:tcPr marL="109728" marT="109728">
+                  <a:tcPr marL="109728" marR="91440" marT="109728">
                     <a:solidFill>
-                      <a:srgbClr val="FFFFFF"/>
+                      <a:srgbClr val="ffffff"/>
                     </a:solidFill>
                   </a:tcPr>
                 </a:tc>
                 <a:tc>
                   <a:txBody>
-                    <a:bodyPr/>
-                    <a:lstStyle/>
+                    <a:bodyPr vert="horz" lIns="109728" tIns="109728" rIns="91440" bIns="45720" anchor="t" anchorCtr="0"/>
                     <a:p>
+                      <a:pPr lvl="0">
+                        <a:defRPr/>
+                      </a:pPr>
                       <a:r>
                         <a:rPr sz="1500" b="1">
                           <a:solidFill>
                             <a:srgbClr val="202020"/>
                           </a:solidFill>
                           <a:latin typeface="맑은 고딕"/>
+                          <a:ea typeface="맑은 고딕"/>
                         </a:rPr>
                         <a:t>모델 학습·비교, Q4·Q5 검증, 결과 해석 확정</a:t>
                       </a:r>
+                      <a:endParaRPr sz="1500" b="1">
+                        <a:solidFill>
+                          <a:srgbClr val="202020"/>
+                        </a:solidFill>
+                        <a:latin typeface="맑은 고딕"/>
+                      </a:endParaRPr>
                     </a:p>
                   </a:txBody>
-                  <a:tcPr marL="109728" marT="109728">
+                  <a:tcPr marL="109728" marR="91440" marT="109728">
                     <a:solidFill>
-                      <a:srgbClr val="FFFFFF"/>
+                      <a:srgbClr val="ffffff"/>
                     </a:solidFill>
                   </a:tcPr>
                 </a:tc>
               </a:tr>
-              <a:tr h="731520">
+              <a:tr h="1079128">
                 <a:tc>
                   <a:txBody>
-                    <a:bodyPr/>
-                    <a:lstStyle/>
+                    <a:bodyPr vert="horz" lIns="109728" tIns="109728" rIns="91440" bIns="45720" anchor="t" anchorCtr="0"/>
                     <a:p>
+                      <a:pPr lvl="0">
+                        <a:defRPr/>
+                      </a:pPr>
                       <a:r>
                         <a:rPr sz="1500" b="1">
                           <a:solidFill>
                             <a:srgbClr val="104281"/>
                           </a:solidFill>
                           <a:latin typeface="맑은 고딕"/>
+                          <a:ea typeface="맑은 고딕"/>
                         </a:rPr>
                         <a:t>3일차  8/18(화)</a:t>
                       </a:r>
+                      <a:endParaRPr sz="1500" b="1">
+                        <a:solidFill>
+                          <a:srgbClr val="104281"/>
+                        </a:solidFill>
+                        <a:latin typeface="맑은 고딕"/>
+                      </a:endParaRPr>
                     </a:p>
                   </a:txBody>
-                  <a:tcPr marL="109728" marT="109728">
+                  <a:tcPr marL="109728" marR="91440" marT="109728">
                     <a:solidFill>
-                      <a:srgbClr val="EEF3FB"/>
+                      <a:srgbClr val="eef3fb"/>
                     </a:solidFill>
                   </a:tcPr>
                 </a:tc>
                 <a:tc>
                   <a:txBody>
-                    <a:bodyPr/>
-                    <a:lstStyle/>
+                    <a:bodyPr vert="horz" lIns="109728" tIns="109728" rIns="91440" bIns="45720" anchor="t" anchorCtr="0"/>
                     <a:p>
+                      <a:pPr lvl="0">
+                        <a:defRPr/>
+                      </a:pPr>
                       <a:r>
                         <a:rPr sz="1500" b="1">
                           <a:solidFill>
                             <a:srgbClr val="202020"/>
                           </a:solidFill>
                           <a:latin typeface="맑은 고딕"/>
+                          <a:ea typeface="맑은 고딕"/>
                         </a:rPr>
                         <a:t>서비스 기획·DB 구축·구현</a:t>
                       </a:r>
+                      <a:endParaRPr sz="1500" b="1">
+                        <a:solidFill>
+                          <a:srgbClr val="202020"/>
+                        </a:solidFill>
+                        <a:latin typeface="맑은 고딕"/>
+                      </a:endParaRPr>
                     </a:p>
                   </a:txBody>
-                  <a:tcPr marL="109728" marT="109728">
+                  <a:tcPr marL="109728" marR="91440" marT="109728">
                     <a:solidFill>
-                      <a:srgbClr val="FFFFFF"/>
+                      <a:srgbClr val="ffffff"/>
                     </a:solidFill>
                   </a:tcPr>
                 </a:tc>
                 <a:tc>
                   <a:txBody>
-                    <a:bodyPr/>
-                    <a:lstStyle/>
+                    <a:bodyPr vert="horz" lIns="109728" tIns="109728" rIns="91440" bIns="45720" anchor="t" anchorCtr="0"/>
                     <a:p>
+                      <a:pPr lvl="0">
+                        <a:defRPr/>
+                      </a:pPr>
                       <a:r>
                         <a:rPr sz="1500" b="1">
                           <a:solidFill>
                             <a:srgbClr val="202020"/>
                           </a:solidFill>
                           <a:latin typeface="맑은 고딕"/>
+                          <a:ea typeface="맑은 고딕"/>
                         </a:rPr>
                         <a:t>FastAPI 서비스 구현, 치매안심센터 연동, Oracle 적재, 발표자료 제작</a:t>
                       </a:r>
+                      <a:endParaRPr sz="1500" b="1">
+                        <a:solidFill>
+                          <a:srgbClr val="202020"/>
+                        </a:solidFill>
+                        <a:latin typeface="맑은 고딕"/>
+                      </a:endParaRPr>
                     </a:p>
                   </a:txBody>
-                  <a:tcPr marL="109728" marT="109728">
+                  <a:tcPr marL="109728" marR="91440" marT="109728">
                     <a:solidFill>
-                      <a:srgbClr val="FFFFFF"/>
+                      <a:srgbClr val="ffffff"/>
                     </a:solidFill>
                   </a:tcPr>
                 </a:tc>
               </a:tr>
-              <a:tr h="731520">
+              <a:tr h="1079128">
                 <a:tc>
                   <a:txBody>
-                    <a:bodyPr/>
-                    <a:lstStyle/>
+                    <a:bodyPr vert="horz" lIns="109728" tIns="109728" rIns="91440" bIns="45720" anchor="t" anchorCtr="0"/>
                     <a:p>
+                      <a:pPr lvl="0">
+                        <a:defRPr/>
+                      </a:pPr>
                       <a:r>
                         <a:rPr sz="1500" b="1">
                           <a:solidFill>
                             <a:srgbClr val="104281"/>
                           </a:solidFill>
                           <a:latin typeface="맑은 고딕"/>
+                          <a:ea typeface="맑은 고딕"/>
                         </a:rPr>
                         <a:t>4일차  8/19(수)</a:t>
                       </a:r>
+                      <a:endParaRPr sz="1500" b="1">
+                        <a:solidFill>
+                          <a:srgbClr val="104281"/>
+                        </a:solidFill>
+                        <a:latin typeface="맑은 고딕"/>
+                      </a:endParaRPr>
                     </a:p>
                   </a:txBody>
-                  <a:tcPr marL="109728" marT="109728">
+                  <a:tcPr marL="109728" marR="91440" marT="109728">
                     <a:solidFill>
-                      <a:srgbClr val="EEF3FB"/>
+                      <a:srgbClr val="eef3fb"/>
                     </a:solidFill>
                   </a:tcPr>
                 </a:tc>
                 <a:tc>
                   <a:txBody>
-                    <a:bodyPr/>
-                    <a:lstStyle/>
+                    <a:bodyPr vert="horz" lIns="109728" tIns="109728" rIns="91440" bIns="45720" anchor="t" anchorCtr="0"/>
                     <a:p>
+                      <a:pPr lvl="0">
+                        <a:defRPr/>
+                      </a:pPr>
                       <a:r>
                         <a:rPr sz="1500" b="1">
                           <a:solidFill>
                             <a:srgbClr val="202020"/>
                           </a:solidFill>
                           <a:latin typeface="맑은 고딕"/>
+                          <a:ea typeface="맑은 고딕"/>
                         </a:rPr>
                         <a:t>완성 및 발표 준비</a:t>
                       </a:r>
+                      <a:endParaRPr sz="1500" b="1">
+                        <a:solidFill>
+                          <a:srgbClr val="202020"/>
+                        </a:solidFill>
+                        <a:latin typeface="맑은 고딕"/>
+                      </a:endParaRPr>
                     </a:p>
                   </a:txBody>
-                  <a:tcPr marL="109728" marT="109728">
+                  <a:tcPr marL="109728" marR="91440" marT="109728">
                     <a:solidFill>
-                      <a:srgbClr val="FFFFFF"/>
+                      <a:srgbClr val="ffffff"/>
                     </a:solidFill>
                   </a:tcPr>
                 </a:tc>
                 <a:tc>
                   <a:txBody>
-                    <a:bodyPr/>
-                    <a:lstStyle/>
+                    <a:bodyPr vert="horz" lIns="109728" tIns="109728" rIns="91440" bIns="45720" anchor="t" anchorCtr="0"/>
                     <a:p>
+                      <a:pPr lvl="0">
+                        <a:defRPr/>
+                      </a:pPr>
                       <a:r>
                         <a:rPr sz="1500" b="1">
                           <a:solidFill>
                             <a:srgbClr val="202020"/>
                           </a:solidFill>
                           <a:latin typeface="맑은 고딕"/>
+                          <a:ea typeface="맑은 고딕"/>
                         </a:rPr>
                         <a:t>발표자료 완성, 대본·예상 질의응답 정리, 시연 리허설</a:t>
                       </a:r>
+                      <a:endParaRPr sz="1500" b="1">
+                        <a:solidFill>
+                          <a:srgbClr val="202020"/>
+                        </a:solidFill>
+                        <a:latin typeface="맑은 고딕"/>
+                      </a:endParaRPr>
                     </a:p>
                   </a:txBody>
-                  <a:tcPr marL="109728" marT="109728">
+                  <a:tcPr marL="109728" marR="91440" marT="109728">
                     <a:solidFill>
-                      <a:srgbClr val="FFFFFF"/>
+                      <a:srgbClr val="ffffff"/>
                     </a:solidFill>
                   </a:tcPr>
                 </a:tc>
@@ -21821,45 +22060,19 @@
           </a:graphicData>
         </a:graphic>
       </p:graphicFrame>
-      <p:sp>
-        <p:nvSpPr>
-          <p:cNvPr id="11" name="TextBox 10"/>
-          <p:cNvSpPr txBox="1"/>
-          <p:nvPr/>
-        </p:nvSpPr>
-        <p:spPr>
-          <a:xfrm>
-            <a:off x="731520" y="5212080"/>
-            <a:ext cx="10515600" cy="457200"/>
-          </a:xfrm>
-          <a:prstGeom prst="rect">
-            <a:avLst/>
-          </a:prstGeom>
-          <a:noFill/>
-        </p:spPr>
-        <p:txBody>
-          <a:bodyPr wrap="none">
-            <a:spAutoFit/>
-          </a:bodyPr>
-          <a:lstStyle/>
-          <a:p>
-            <a:r>
-              <a:rPr sz="1300" b="1">
-                <a:solidFill>
-                  <a:srgbClr val="666666"/>
-                </a:solidFill>
-                <a:latin typeface="맑은 고딕"/>
-              </a:rPr>
-              <a:t>8/15(토) 광복절 · 8/17(월) 대체공휴일  |  최종 발표: 8/20(목) 16:00</a:t>
-            </a:r>
-          </a:p>
-        </p:txBody>
-      </p:sp>
     </p:spTree>
   </p:cSld>
   <p:clrMapOvr>
     <a:masterClrMapping/>
   </p:clrMapOvr>
+  <mc:AlternateContent xmlns:mc="http://schemas.openxmlformats.org/markup-compatibility/2006">
+    <mc:Choice xmlns:p14="http://schemas.microsoft.com/office/powerpoint/2010/main" Requires="p14">
+      <p:transition xmlns:mc="http://schemas.openxmlformats.org/markup-compatibility/2006" xmlns:p14="http://schemas.microsoft.com/office/powerpoint/2010/main" mc:Ignorable="p14" p14:dur="500"/>
+    </mc:Choice>
+    <mc:Fallback>
+      <p:transition/>
+    </mc:Fallback>
+  </mc:AlternateContent>
 </p:sld>
 </file>
 
@@ -21924,6 +22137,10 @@
               <a:buNone/>
             </a:pPr>
             <a:r>
+              <a:rPr>
+                <a:latin typeface="맑은 고딕"/>
+                <a:ea typeface="맑은 고딕"/>
+              </a:rPr>
               <a:t/>
             </a:r>
             <a:endParaRPr b="0" i="0" sz="1800" u="none" cap="none" strike="noStrike">
@@ -21977,8 +22194,8 @@
                 <a:solidFill>
                   <a:srgbClr val="2A78D6"/>
                 </a:solidFill>
-                <a:latin typeface="Malgun Gothic"/>
-                <a:ea typeface="Malgun Gothic"/>
+                <a:latin typeface="맑은 고딕"/>
+                <a:ea typeface="맑은 고딕"/>
                 <a:cs typeface="Malgun Gothic"/>
                 <a:sym typeface="Malgun Gothic"/>
               </a:rPr>
@@ -22035,8 +22252,8 @@
                 <a:solidFill>
                   <a:srgbClr val="104281"/>
                 </a:solidFill>
-                <a:latin typeface="Malgun Gothic"/>
-                <a:ea typeface="Malgun Gothic"/>
+                <a:latin typeface="맑은 고딕"/>
+                <a:ea typeface="맑은 고딕"/>
                 <a:cs typeface="Malgun Gothic"/>
                 <a:sym typeface="Malgun Gothic"/>
               </a:rPr>
@@ -22089,6 +22306,10 @@
               <a:buNone/>
             </a:pPr>
             <a:r>
+              <a:rPr>
+                <a:latin typeface="맑은 고딕"/>
+                <a:ea typeface="맑은 고딕"/>
+              </a:rPr>
               <a:t/>
             </a:r>
             <a:endParaRPr b="1" i="0" sz="2600" u="none" cap="none" strike="noStrike">
@@ -22116,8 +22337,8 @@
                 <a:solidFill>
                   <a:srgbClr val="202020"/>
                 </a:solidFill>
-                <a:latin typeface="Malgun Gothic"/>
-                <a:ea typeface="Malgun Gothic"/>
+                <a:latin typeface="맑은 고딕"/>
+                <a:ea typeface="맑은 고딕"/>
                 <a:cs typeface="Malgun Gothic"/>
                 <a:sym typeface="Malgun Gothic"/>
               </a:rPr>
@@ -22144,6 +22365,10 @@
               <a:buNone/>
             </a:pPr>
             <a:r>
+              <a:rPr>
+                <a:latin typeface="맑은 고딕"/>
+                <a:ea typeface="맑은 고딕"/>
+              </a:rPr>
               <a:t/>
             </a:r>
             <a:endParaRPr b="1" i="0" sz="2600" u="none" cap="none" strike="noStrike">
@@ -22171,8 +22396,8 @@
                 <a:solidFill>
                   <a:srgbClr val="202020"/>
                 </a:solidFill>
-                <a:latin typeface="Malgun Gothic"/>
-                <a:ea typeface="Malgun Gothic"/>
+                <a:latin typeface="맑은 고딕"/>
+                <a:ea typeface="맑은 고딕"/>
                 <a:cs typeface="Malgun Gothic"/>
                 <a:sym typeface="Malgun Gothic"/>
               </a:rPr>
@@ -22203,8 +22428,8 @@
                 <a:solidFill>
                   <a:srgbClr val="666666"/>
                 </a:solidFill>
-                <a:latin typeface="Malgun Gothic"/>
-                <a:ea typeface="Malgun Gothic"/>
+                <a:latin typeface="맑은 고딕"/>
+                <a:ea typeface="맑은 고딕"/>
                 <a:cs typeface="Malgun Gothic"/>
                 <a:sym typeface="Malgun Gothic"/>
               </a:rPr>
@@ -22231,6 +22456,10 @@
               <a:buNone/>
             </a:pPr>
             <a:r>
+              <a:rPr>
+                <a:latin typeface="맑은 고딕"/>
+                <a:ea typeface="맑은 고딕"/>
+              </a:rPr>
               <a:t/>
             </a:r>
             <a:endParaRPr b="1" i="0" sz="2100" u="none" cap="none" strike="noStrike">
@@ -22258,8 +22487,8 @@
                 <a:solidFill>
                   <a:srgbClr val="202020"/>
                 </a:solidFill>
-                <a:latin typeface="Malgun Gothic"/>
-                <a:ea typeface="Malgun Gothic"/>
+                <a:latin typeface="맑은 고딕"/>
+                <a:ea typeface="맑은 고딕"/>
                 <a:cs typeface="Malgun Gothic"/>
                 <a:sym typeface="Malgun Gothic"/>
               </a:rPr>
@@ -22290,8 +22519,8 @@
                 <a:solidFill>
                   <a:srgbClr val="202020"/>
                 </a:solidFill>
-                <a:latin typeface="Malgun Gothic"/>
-                <a:ea typeface="Malgun Gothic"/>
+                <a:latin typeface="맑은 고딕"/>
+                <a:ea typeface="맑은 고딕"/>
                 <a:cs typeface="Malgun Gothic"/>
                 <a:sym typeface="Malgun Gothic"/>
               </a:rPr>
@@ -22318,6 +22547,10 @@
               <a:buNone/>
             </a:pPr>
             <a:r>
+              <a:rPr>
+                <a:latin typeface="맑은 고딕"/>
+                <a:ea typeface="맑은 고딕"/>
+              </a:rPr>
               <a:t/>
             </a:r>
             <a:endParaRPr b="1" i="0" sz="2000" u="none" cap="none" strike="noStrike">
@@ -22341,6 +22574,10 @@
               <a:buNone/>
             </a:pPr>
             <a:r>
+              <a:rPr>
+                <a:latin typeface="맑은 고딕"/>
+                <a:ea typeface="맑은 고딕"/>
+              </a:rPr>
               <a:t/>
             </a:r>
             <a:endParaRPr b="1" i="0" sz="2000" u="none" cap="none" strike="noStrike">
@@ -22394,8 +22631,8 @@
                 <a:solidFill>
                   <a:srgbClr val="666666"/>
                 </a:solidFill>
-                <a:latin typeface="Malgun Gothic"/>
-                <a:ea typeface="Malgun Gothic"/>
+                <a:latin typeface="맑은 고딕"/>
+                <a:ea typeface="맑은 고딕"/>
                 <a:cs typeface="Malgun Gothic"/>
                 <a:sym typeface="Malgun Gothic"/>
               </a:rPr>
@@ -22482,6 +22719,10 @@
               <a:buNone/>
             </a:pPr>
             <a:r>
+              <a:rPr>
+                <a:latin typeface="맑은 고딕"/>
+                <a:ea typeface="맑은 고딕"/>
+              </a:rPr>
               <a:t/>
             </a:r>
             <a:endParaRPr b="0" i="0" sz="1800" u="none" cap="none" strike="noStrike">
@@ -22535,8 +22776,8 @@
                 <a:solidFill>
                   <a:srgbClr val="2A78D6"/>
                 </a:solidFill>
-                <a:latin typeface="Malgun Gothic"/>
-                <a:ea typeface="Malgun Gothic"/>
+                <a:latin typeface="맑은 고딕"/>
+                <a:ea typeface="맑은 고딕"/>
                 <a:cs typeface="Malgun Gothic"/>
                 <a:sym typeface="Malgun Gothic"/>
               </a:rPr>
@@ -22585,8 +22826,8 @@
                 <a:solidFill>
                   <a:srgbClr val="104281"/>
                 </a:solidFill>
-                <a:latin typeface="Malgun Gothic"/>
-                <a:ea typeface="Malgun Gothic"/>
+                <a:latin typeface="맑은 고딕"/>
+                <a:ea typeface="맑은 고딕"/>
                 <a:cs typeface="Malgun Gothic"/>
                 <a:sym typeface="Malgun Gothic"/>
               </a:rPr>
@@ -22689,8 +22930,8 @@
                 <a:solidFill>
                   <a:srgbClr val="666666"/>
                 </a:solidFill>
-                <a:latin typeface="Malgun Gothic"/>
-                <a:ea typeface="Malgun Gothic"/>
+                <a:latin typeface="맑은 고딕"/>
+                <a:ea typeface="맑은 고딕"/>
                 <a:cs typeface="Malgun Gothic"/>
                 <a:sym typeface="Malgun Gothic"/>
               </a:rPr>
@@ -22769,6 +23010,10 @@
               <a:buNone/>
             </a:pPr>
             <a:r>
+              <a:rPr>
+                <a:latin typeface="맑은 고딕"/>
+                <a:ea typeface="맑은 고딕"/>
+              </a:rPr>
               <a:t/>
             </a:r>
             <a:endParaRPr b="0" i="0" sz="1800" u="none" cap="none" strike="noStrike">
@@ -22822,8 +23067,8 @@
                 <a:solidFill>
                   <a:srgbClr val="2A78D6"/>
                 </a:solidFill>
-                <a:latin typeface="Malgun Gothic"/>
-                <a:ea typeface="Malgun Gothic"/>
+                <a:latin typeface="맑은 고딕"/>
+                <a:ea typeface="맑은 고딕"/>
                 <a:cs typeface="Malgun Gothic"/>
                 <a:sym typeface="Malgun Gothic"/>
               </a:rPr>
@@ -22872,8 +23117,8 @@
                 <a:solidFill>
                   <a:srgbClr val="104281"/>
                 </a:solidFill>
-                <a:latin typeface="Malgun Gothic"/>
-                <a:ea typeface="Malgun Gothic"/>
+                <a:latin typeface="맑은 고딕"/>
+                <a:ea typeface="맑은 고딕"/>
                 <a:cs typeface="Malgun Gothic"/>
                 <a:sym typeface="Malgun Gothic"/>
               </a:rPr>
@@ -22976,8 +23221,8 @@
                 <a:solidFill>
                   <a:srgbClr val="666666"/>
                 </a:solidFill>
-                <a:latin typeface="Malgun Gothic"/>
-                <a:ea typeface="Malgun Gothic"/>
+                <a:latin typeface="맑은 고딕"/>
+                <a:ea typeface="맑은 고딕"/>
                 <a:cs typeface="Malgun Gothic"/>
                 <a:sym typeface="Malgun Gothic"/>
               </a:rPr>
@@ -23098,6 +23343,7 @@
                   <a:srgbClr val="2A78D6"/>
                 </a:solidFill>
                 <a:latin typeface="맑은 고딕"/>
+                <a:ea typeface="맑은 고딕"/>
               </a:rPr>
               <a:t>05. 서비스</a:t>
             </a:r>
@@ -23137,6 +23383,7 @@
                   <a:srgbClr val="104281"/>
                 </a:solidFill>
                 <a:latin typeface="맑은 고딕"/>
+                <a:ea typeface="맑은 고딕"/>
               </a:rPr>
               <a:t>데이터베이스 구축 — Oracle XE + SQLite</a:t>
             </a:r>
@@ -23178,6 +23425,7 @@
                             <a:srgbClr val="FFFFFF"/>
                           </a:solidFill>
                           <a:latin typeface="맑은 고딕"/>
+                          <a:ea typeface="맑은 고딕"/>
                         </a:rPr>
                         <a:t>테이블</a:t>
                       </a:r>
@@ -23200,6 +23448,7 @@
                             <a:srgbClr val="FFFFFF"/>
                           </a:solidFill>
                           <a:latin typeface="맑은 고딕"/>
+                          <a:ea typeface="맑은 고딕"/>
                         </a:rPr>
                         <a:t>내용</a:t>
                       </a:r>
@@ -23222,6 +23471,7 @@
                             <a:srgbClr val="FFFFFF"/>
                           </a:solidFill>
                           <a:latin typeface="맑은 고딕"/>
+                          <a:ea typeface="맑은 고딕"/>
                         </a:rPr>
                         <a:t>규모</a:t>
                       </a:r>
@@ -23246,6 +23496,7 @@
                             <a:srgbClr val="104281"/>
                           </a:solidFill>
                           <a:latin typeface="맑은 고딕"/>
+                          <a:ea typeface="맑은 고딕"/>
                         </a:rPr>
                         <a:t>TBL_RAW_ACTIVITY / SLEEP</a:t>
                       </a:r>
@@ -23268,6 +23519,7 @@
                             <a:srgbClr val="202020"/>
                           </a:solidFill>
                           <a:latin typeface="맑은 고딕"/>
+                          <a:ea typeface="맑은 고딕"/>
                         </a:rPr>
                         <a:t>원천 라이프로그 보관 (Oracle 스테이징)</a:t>
                       </a:r>
@@ -23290,6 +23542,7 @@
                             <a:srgbClr val="202020"/>
                           </a:solidFill>
                           <a:latin typeface="맑은 고딕"/>
+                          <a:ea typeface="맑은 고딕"/>
                         </a:rPr>
                         <a:t>각 12,183행</a:t>
                       </a:r>
@@ -23314,6 +23567,7 @@
                             <a:srgbClr val="104281"/>
                           </a:solidFill>
                           <a:latin typeface="맑은 고딕"/>
+                          <a:ea typeface="맑은 고딕"/>
                         </a:rPr>
                         <a:t>TBL_RAW_MMSE / LABEL</a:t>
                       </a:r>
@@ -23336,6 +23590,7 @@
                             <a:srgbClr val="202020"/>
                           </a:solidFill>
                           <a:latin typeface="맑은 고딕"/>
+                          <a:ea typeface="맑은 고딕"/>
                         </a:rPr>
                         <a:t>검사·진단 원천 보관 — MMSE는 학습 입력에서 제외</a:t>
                       </a:r>
@@ -23358,6 +23613,7 @@
                             <a:srgbClr val="202020"/>
                           </a:solidFill>
                           <a:latin typeface="맑은 고딕"/>
+                          <a:ea typeface="맑은 고딕"/>
                         </a:rPr>
                         <a:t>각 174행</a:t>
                       </a:r>
@@ -23382,6 +23638,7 @@
                             <a:srgbClr val="104281"/>
                           </a:solidFill>
                           <a:latin typeface="맑은 고딕"/>
+                          <a:ea typeface="맑은 고딕"/>
                         </a:rPr>
                         <a:t>TBL_DEMENTIA_CENTER</a:t>
                       </a:r>
@@ -23404,6 +23661,7 @@
                             <a:srgbClr val="202020"/>
                           </a:solidFill>
                           <a:latin typeface="맑은 고딕"/>
+                          <a:ea typeface="맑은 고딕"/>
                         </a:rPr>
                         <a:t>치매안심센터 공공데이터 — 서비스 지도 안내에 사용</a:t>
                       </a:r>
@@ -23426,6 +23684,7 @@
                             <a:srgbClr val="202020"/>
                           </a:solidFill>
                           <a:latin typeface="맑은 고딕"/>
+                          <a:ea typeface="맑은 고딕"/>
                         </a:rPr>
                         <a:t>317행</a:t>
                       </a:r>
@@ -23450,6 +23709,7 @@
                             <a:srgbClr val="104281"/>
                           </a:solidFill>
                           <a:latin typeface="맑은 고딕"/>
+                          <a:ea typeface="맑은 고딕"/>
                         </a:rPr>
                         <a:t>uploads / upload_daily</a:t>
                       </a:r>
@@ -23472,6 +23732,7 @@
                             <a:srgbClr val="202020"/>
                           </a:solidFill>
                           <a:latin typeface="맑은 고딕"/>
+                          <a:ea typeface="맑은 고딕"/>
                         </a:rPr>
                         <a:t>서비스 업로드 자동 적재 (SQLite) — 재학습 재료</a:t>
                       </a:r>
@@ -23494,6 +23755,7 @@
                             <a:srgbClr val="202020"/>
                           </a:solidFill>
                           <a:latin typeface="맑은 고딕"/>
+                          <a:ea typeface="맑은 고딕"/>
                         </a:rPr>
                         <a:t>실시간 누적</a:t>
                       </a:r>
@@ -23543,6 +23805,7 @@
                   <a:srgbClr val="104281"/>
                 </a:solidFill>
                 <a:latin typeface="맑은 고딕"/>
+                <a:ea typeface="맑은 고딕"/>
               </a:rPr>
               <a:t>원천 보관(Oracle) · 서비스 조회(센터 데이터) · 신규 수집(업로드 적재) — 세 층으로 분리 구축</a:t>
             </a:r>
@@ -23582,6 +23845,7 @@
                   <a:srgbClr val="666666"/>
                 </a:solidFill>
                 <a:latin typeface="맑은 고딕"/>
+                <a:ea typeface="맑은 고딕"/>
               </a:rPr>
               <a:t>23</a:t>
             </a:r>
@@ -23652,8 +23916,8 @@
                 <a:solidFill>
                   <a:srgbClr val="2A78D6"/>
                 </a:solidFill>
-                <a:latin typeface="Malgun Gothic"/>
-                <a:ea typeface="Malgun Gothic"/>
+                <a:latin typeface="맑은 고딕"/>
+                <a:ea typeface="맑은 고딕"/>
                 <a:cs typeface="Malgun Gothic"/>
                 <a:sym typeface="Malgun Gothic"/>
               </a:rPr>
@@ -23710,8 +23974,8 @@
                 <a:solidFill>
                   <a:srgbClr val="104281"/>
                 </a:solidFill>
-                <a:latin typeface="Malgun Gothic"/>
-                <a:ea typeface="Malgun Gothic"/>
+                <a:latin typeface="맑은 고딕"/>
+                <a:ea typeface="맑은 고딕"/>
                 <a:cs typeface="Malgun Gothic"/>
                 <a:sym typeface="Malgun Gothic"/>
               </a:rPr>
@@ -23768,8 +24032,8 @@
                 <a:solidFill>
                   <a:srgbClr val="666666"/>
                 </a:solidFill>
-                <a:latin typeface="Malgun Gothic"/>
-                <a:ea typeface="Malgun Gothic"/>
+                <a:latin typeface="맑은 고딕"/>
+                <a:ea typeface="맑은 고딕"/>
                 <a:cs typeface="Malgun Gothic"/>
                 <a:sym typeface="Malgun Gothic"/>
               </a:rPr>
@@ -23826,8 +24090,8 @@
                 <a:solidFill>
                   <a:srgbClr val="202020"/>
                 </a:solidFill>
-                <a:latin typeface="Malgun Gothic"/>
-                <a:ea typeface="Malgun Gothic"/>
+                <a:latin typeface="맑은 고딕"/>
+                <a:ea typeface="맑은 고딕"/>
                 <a:cs typeface="Malgun Gothic"/>
                 <a:sym typeface="Malgun Gothic"/>
               </a:rPr>
@@ -23858,8 +24122,8 @@
                 <a:solidFill>
                   <a:srgbClr val="202020"/>
                 </a:solidFill>
-                <a:latin typeface="Malgun Gothic"/>
-                <a:ea typeface="Malgun Gothic"/>
+                <a:latin typeface="맑은 고딕"/>
+                <a:ea typeface="맑은 고딕"/>
                 <a:cs typeface="Malgun Gothic"/>
                 <a:sym typeface="Malgun Gothic"/>
               </a:rPr>
@@ -23886,6 +24150,10 @@
               <a:buNone/>
             </a:pPr>
             <a:r>
+              <a:rPr>
+                <a:latin typeface="맑은 고딕"/>
+                <a:ea typeface="맑은 고딕"/>
+              </a:rPr>
               <a:t/>
             </a:r>
             <a:endParaRPr b="1" i="0" sz="1700" u="none" cap="none" strike="noStrike">
@@ -23913,8 +24181,8 @@
                 <a:solidFill>
                   <a:srgbClr val="2A78D6"/>
                 </a:solidFill>
-                <a:latin typeface="Malgun Gothic"/>
-                <a:ea typeface="Malgun Gothic"/>
+                <a:latin typeface="맑은 고딕"/>
+                <a:ea typeface="맑은 고딕"/>
                 <a:cs typeface="Malgun Gothic"/>
                 <a:sym typeface="Malgun Gothic"/>
               </a:rPr>
@@ -23988,8 +24256,8 @@
                 <a:solidFill>
                   <a:srgbClr val="104281"/>
                 </a:solidFill>
-                <a:latin typeface="Malgun Gothic"/>
-                <a:ea typeface="Malgun Gothic"/>
+                <a:latin typeface="맑은 고딕"/>
+                <a:ea typeface="맑은 고딕"/>
                 <a:cs typeface="Malgun Gothic"/>
                 <a:sym typeface="Malgun Gothic"/>
               </a:rPr>
@@ -24020,8 +24288,8 @@
                 <a:solidFill>
                   <a:srgbClr val="202020"/>
                 </a:solidFill>
-                <a:latin typeface="Malgun Gothic"/>
-                <a:ea typeface="Malgun Gothic"/>
+                <a:latin typeface="맑은 고딕"/>
+                <a:ea typeface="맑은 고딕"/>
                 <a:cs typeface="Malgun Gothic"/>
                 <a:sym typeface="Malgun Gothic"/>
               </a:rPr>
@@ -24086,6 +24354,10 @@
               <a:buNone/>
             </a:pPr>
             <a:r>
+              <a:rPr>
+                <a:latin typeface="맑은 고딕"/>
+                <a:ea typeface="맑은 고딕"/>
+              </a:rPr>
               <a:t/>
             </a:r>
             <a:endParaRPr b="1" i="0" sz="2000" u="none" cap="none" strike="noStrike">
@@ -24156,8 +24428,8 @@
                 <a:solidFill>
                   <a:srgbClr val="104281"/>
                 </a:solidFill>
-                <a:latin typeface="Malgun Gothic"/>
-                <a:ea typeface="Malgun Gothic"/>
+                <a:latin typeface="맑은 고딕"/>
+                <a:ea typeface="맑은 고딕"/>
                 <a:cs typeface="Malgun Gothic"/>
                 <a:sym typeface="Malgun Gothic"/>
               </a:rPr>
@@ -24188,8 +24460,8 @@
                 <a:solidFill>
                   <a:srgbClr val="202020"/>
                 </a:solidFill>
-                <a:latin typeface="Malgun Gothic"/>
-                <a:ea typeface="Malgun Gothic"/>
+                <a:latin typeface="맑은 고딕"/>
+                <a:ea typeface="맑은 고딕"/>
                 <a:cs typeface="Malgun Gothic"/>
                 <a:sym typeface="Malgun Gothic"/>
               </a:rPr>
@@ -24220,8 +24492,8 @@
                 <a:solidFill>
                   <a:srgbClr val="202020"/>
                 </a:solidFill>
-                <a:latin typeface="Malgun Gothic"/>
-                <a:ea typeface="Malgun Gothic"/>
+                <a:latin typeface="맑은 고딕"/>
+                <a:ea typeface="맑은 고딕"/>
                 <a:cs typeface="Malgun Gothic"/>
                 <a:sym typeface="Malgun Gothic"/>
               </a:rPr>
@@ -24286,6 +24558,10 @@
               <a:buNone/>
             </a:pPr>
             <a:r>
+              <a:rPr>
+                <a:latin typeface="맑은 고딕"/>
+                <a:ea typeface="맑은 고딕"/>
+              </a:rPr>
               <a:t/>
             </a:r>
             <a:endParaRPr b="1" i="0" sz="2000" u="none" cap="none" strike="noStrike">
@@ -24356,8 +24632,8 @@
                 <a:solidFill>
                   <a:srgbClr val="104281"/>
                 </a:solidFill>
-                <a:latin typeface="Malgun Gothic"/>
-                <a:ea typeface="Malgun Gothic"/>
+                <a:latin typeface="맑은 고딕"/>
+                <a:ea typeface="맑은 고딕"/>
                 <a:cs typeface="Malgun Gothic"/>
                 <a:sym typeface="Malgun Gothic"/>
               </a:rPr>
@@ -24388,8 +24664,8 @@
                 <a:solidFill>
                   <a:srgbClr val="202020"/>
                 </a:solidFill>
-                <a:latin typeface="Malgun Gothic"/>
-                <a:ea typeface="Malgun Gothic"/>
+                <a:latin typeface="맑은 고딕"/>
+                <a:ea typeface="맑은 고딕"/>
                 <a:cs typeface="Malgun Gothic"/>
                 <a:sym typeface="Malgun Gothic"/>
               </a:rPr>
@@ -24454,6 +24730,10 @@
               <a:buNone/>
             </a:pPr>
             <a:r>
+              <a:rPr>
+                <a:latin typeface="맑은 고딕"/>
+                <a:ea typeface="맑은 고딕"/>
+              </a:rPr>
               <a:t/>
             </a:r>
             <a:endParaRPr b="1" i="0" sz="2000" u="none" cap="none" strike="noStrike">
@@ -24524,8 +24804,8 @@
                 <a:solidFill>
                   <a:srgbClr val="104281"/>
                 </a:solidFill>
-                <a:latin typeface="Malgun Gothic"/>
-                <a:ea typeface="Malgun Gothic"/>
+                <a:latin typeface="맑은 고딕"/>
+                <a:ea typeface="맑은 고딕"/>
                 <a:cs typeface="Malgun Gothic"/>
                 <a:sym typeface="Malgun Gothic"/>
               </a:rPr>
@@ -24556,8 +24836,8 @@
                 <a:solidFill>
                   <a:srgbClr val="202020"/>
                 </a:solidFill>
-                <a:latin typeface="Malgun Gothic"/>
-                <a:ea typeface="Malgun Gothic"/>
+                <a:latin typeface="맑은 고딕"/>
+                <a:ea typeface="맑은 고딕"/>
                 <a:cs typeface="Malgun Gothic"/>
                 <a:sym typeface="Malgun Gothic"/>
               </a:rPr>
@@ -24588,8 +24868,8 @@
                 <a:solidFill>
                   <a:srgbClr val="202020"/>
                 </a:solidFill>
-                <a:latin typeface="Malgun Gothic"/>
-                <a:ea typeface="Malgun Gothic"/>
+                <a:latin typeface="맑은 고딕"/>
+                <a:ea typeface="맑은 고딕"/>
                 <a:cs typeface="Malgun Gothic"/>
                 <a:sym typeface="Malgun Gothic"/>
               </a:rPr>
@@ -24654,6 +24934,10 @@
               <a:buNone/>
             </a:pPr>
             <a:r>
+              <a:rPr>
+                <a:latin typeface="맑은 고딕"/>
+                <a:ea typeface="맑은 고딕"/>
+              </a:rPr>
               <a:t/>
             </a:r>
             <a:endParaRPr b="1" i="0" sz="2000" u="none" cap="none" strike="noStrike">
@@ -24724,8 +25008,8 @@
                 <a:solidFill>
                   <a:srgbClr val="2E7D43"/>
                 </a:solidFill>
-                <a:latin typeface="Malgun Gothic"/>
-                <a:ea typeface="Malgun Gothic"/>
+                <a:latin typeface="맑은 고딕"/>
+                <a:ea typeface="맑은 고딕"/>
                 <a:cs typeface="Malgun Gothic"/>
                 <a:sym typeface="Malgun Gothic"/>
               </a:rPr>
@@ -24756,8 +25040,8 @@
                 <a:solidFill>
                   <a:srgbClr val="202020"/>
                 </a:solidFill>
-                <a:latin typeface="Malgun Gothic"/>
-                <a:ea typeface="Malgun Gothic"/>
+                <a:latin typeface="맑은 고딕"/>
+                <a:ea typeface="맑은 고딕"/>
                 <a:cs typeface="Malgun Gothic"/>
                 <a:sym typeface="Malgun Gothic"/>
               </a:rPr>
@@ -24788,8 +25072,8 @@
                 <a:solidFill>
                   <a:srgbClr val="202020"/>
                 </a:solidFill>
-                <a:latin typeface="Malgun Gothic"/>
-                <a:ea typeface="Malgun Gothic"/>
+                <a:latin typeface="맑은 고딕"/>
+                <a:ea typeface="맑은 고딕"/>
                 <a:cs typeface="Malgun Gothic"/>
                 <a:sym typeface="Malgun Gothic"/>
               </a:rPr>
@@ -24864,8 +25148,8 @@
                 <a:solidFill>
                   <a:srgbClr val="104281"/>
                 </a:solidFill>
-                <a:latin typeface="Malgun Gothic"/>
-                <a:ea typeface="Malgun Gothic"/>
+                <a:latin typeface="맑은 고딕"/>
+                <a:ea typeface="맑은 고딕"/>
                 <a:cs typeface="Malgun Gothic"/>
                 <a:sym typeface="Malgun Gothic"/>
               </a:rPr>
@@ -24927,6 +25211,10 @@
               <a:buNone/>
             </a:pPr>
             <a:r>
+              <a:rPr>
+                <a:latin typeface="맑은 고딕"/>
+                <a:ea typeface="맑은 고딕"/>
+              </a:rPr>
               <a:t/>
             </a:r>
             <a:endParaRPr b="0" i="0" sz="1800" u="none" cap="none" strike="noStrike">
@@ -25010,6 +25298,10 @@
               <a:buNone/>
             </a:pPr>
             <a:r>
+              <a:rPr>
+                <a:latin typeface="맑은 고딕"/>
+                <a:ea typeface="맑은 고딕"/>
+              </a:rPr>
               <a:t/>
             </a:r>
             <a:endParaRPr b="0" i="0" sz="1800" u="none" cap="none" strike="noStrike">
@@ -25063,8 +25355,8 @@
                 <a:solidFill>
                   <a:srgbClr val="2A78D6"/>
                 </a:solidFill>
-                <a:latin typeface="Malgun Gothic"/>
-                <a:ea typeface="Malgun Gothic"/>
+                <a:latin typeface="맑은 고딕"/>
+                <a:ea typeface="맑은 고딕"/>
                 <a:cs typeface="Malgun Gothic"/>
                 <a:sym typeface="Malgun Gothic"/>
               </a:rPr>
@@ -25121,8 +25413,8 @@
                 <a:solidFill>
                   <a:srgbClr val="104281"/>
                 </a:solidFill>
-                <a:latin typeface="Malgun Gothic"/>
-                <a:ea typeface="Malgun Gothic"/>
+                <a:latin typeface="맑은 고딕"/>
+                <a:ea typeface="맑은 고딕"/>
                 <a:cs typeface="Malgun Gothic"/>
                 <a:sym typeface="Malgun Gothic"/>
               </a:rPr>
@@ -25179,8 +25471,8 @@
                 <a:solidFill>
                   <a:srgbClr val="2A78D6"/>
                 </a:solidFill>
-                <a:latin typeface="Malgun Gothic"/>
-                <a:ea typeface="Malgun Gothic"/>
+                <a:latin typeface="맑은 고딕"/>
+                <a:ea typeface="맑은 고딕"/>
                 <a:cs typeface="Malgun Gothic"/>
                 <a:sym typeface="Malgun Gothic"/>
               </a:rPr>
@@ -25211,8 +25503,8 @@
                 <a:solidFill>
                   <a:srgbClr val="202020"/>
                 </a:solidFill>
-                <a:latin typeface="Malgun Gothic"/>
-                <a:ea typeface="Malgun Gothic"/>
+                <a:latin typeface="맑은 고딕"/>
+                <a:ea typeface="맑은 고딕"/>
                 <a:cs typeface="Malgun Gothic"/>
                 <a:sym typeface="Malgun Gothic"/>
               </a:rPr>
@@ -25243,8 +25535,8 @@
                 <a:solidFill>
                   <a:srgbClr val="202020"/>
                 </a:solidFill>
-                <a:latin typeface="Malgun Gothic"/>
-                <a:ea typeface="Malgun Gothic"/>
+                <a:latin typeface="맑은 고딕"/>
+                <a:ea typeface="맑은 고딕"/>
                 <a:cs typeface="Malgun Gothic"/>
                 <a:sym typeface="Malgun Gothic"/>
               </a:rPr>
@@ -25271,6 +25563,10 @@
               <a:buNone/>
             </a:pPr>
             <a:r>
+              <a:rPr>
+                <a:latin typeface="맑은 고딕"/>
+                <a:ea typeface="맑은 고딕"/>
+              </a:rPr>
               <a:t/>
             </a:r>
             <a:endParaRPr b="1" i="0" sz="1800" u="none" cap="none" strike="noStrike">
@@ -25298,8 +25594,8 @@
                 <a:solidFill>
                   <a:srgbClr val="2A78D6"/>
                 </a:solidFill>
-                <a:latin typeface="Malgun Gothic"/>
-                <a:ea typeface="Malgun Gothic"/>
+                <a:latin typeface="맑은 고딕"/>
+                <a:ea typeface="맑은 고딕"/>
                 <a:cs typeface="Malgun Gothic"/>
                 <a:sym typeface="Malgun Gothic"/>
               </a:rPr>
@@ -25330,8 +25626,8 @@
                 <a:solidFill>
                   <a:srgbClr val="202020"/>
                 </a:solidFill>
-                <a:latin typeface="Malgun Gothic"/>
-                <a:ea typeface="Malgun Gothic"/>
+                <a:latin typeface="맑은 고딕"/>
+                <a:ea typeface="맑은 고딕"/>
                 <a:cs typeface="Malgun Gothic"/>
                 <a:sym typeface="Malgun Gothic"/>
               </a:rPr>
@@ -25362,8 +25658,8 @@
                 <a:solidFill>
                   <a:srgbClr val="202020"/>
                 </a:solidFill>
-                <a:latin typeface="Malgun Gothic"/>
-                <a:ea typeface="Malgun Gothic"/>
+                <a:latin typeface="맑은 고딕"/>
+                <a:ea typeface="맑은 고딕"/>
                 <a:cs typeface="Malgun Gothic"/>
                 <a:sym typeface="Malgun Gothic"/>
               </a:rPr>
@@ -25394,8 +25690,8 @@
                 <a:solidFill>
                   <a:srgbClr val="202020"/>
                 </a:solidFill>
-                <a:latin typeface="Malgun Gothic"/>
-                <a:ea typeface="Malgun Gothic"/>
+                <a:latin typeface="맑은 고딕"/>
+                <a:ea typeface="맑은 고딕"/>
                 <a:cs typeface="Malgun Gothic"/>
                 <a:sym typeface="Malgun Gothic"/>
               </a:rPr>
@@ -25422,6 +25718,10 @@
               <a:buNone/>
             </a:pPr>
             <a:r>
+              <a:rPr>
+                <a:latin typeface="맑은 고딕"/>
+                <a:ea typeface="맑은 고딕"/>
+              </a:rPr>
               <a:t/>
             </a:r>
             <a:endParaRPr b="1" i="0" sz="1800" u="none" cap="none" strike="noStrike">
@@ -25449,8 +25749,8 @@
                 <a:solidFill>
                   <a:srgbClr val="2A78D6"/>
                 </a:solidFill>
-                <a:latin typeface="Malgun Gothic"/>
-                <a:ea typeface="Malgun Gothic"/>
+                <a:latin typeface="맑은 고딕"/>
+                <a:ea typeface="맑은 고딕"/>
                 <a:cs typeface="Malgun Gothic"/>
                 <a:sym typeface="Malgun Gothic"/>
               </a:rPr>
@@ -25481,8 +25781,8 @@
                 <a:solidFill>
                   <a:srgbClr val="104281"/>
                 </a:solidFill>
-                <a:latin typeface="Malgun Gothic"/>
-                <a:ea typeface="Malgun Gothic"/>
+                <a:latin typeface="맑은 고딕"/>
+                <a:ea typeface="맑은 고딕"/>
                 <a:cs typeface="Malgun Gothic"/>
                 <a:sym typeface="Malgun Gothic"/>
               </a:rPr>
@@ -25513,8 +25813,8 @@
                 <a:solidFill>
                   <a:srgbClr val="104281"/>
                 </a:solidFill>
-                <a:latin typeface="Malgun Gothic"/>
-                <a:ea typeface="Malgun Gothic"/>
+                <a:latin typeface="맑은 고딕"/>
+                <a:ea typeface="맑은 고딕"/>
                 <a:cs typeface="Malgun Gothic"/>
                 <a:sym typeface="Malgun Gothic"/>
               </a:rPr>
@@ -25571,8 +25871,8 @@
                 <a:solidFill>
                   <a:srgbClr val="666666"/>
                 </a:solidFill>
-                <a:latin typeface="Malgun Gothic"/>
-                <a:ea typeface="Malgun Gothic"/>
+                <a:latin typeface="맑은 고딕"/>
+                <a:ea typeface="맑은 고딕"/>
                 <a:cs typeface="Malgun Gothic"/>
                 <a:sym typeface="Malgun Gothic"/>
               </a:rPr>
@@ -25659,6 +25959,10 @@
               <a:buNone/>
             </a:pPr>
             <a:r>
+              <a:rPr>
+                <a:latin typeface="맑은 고딕"/>
+                <a:ea typeface="맑은 고딕"/>
+              </a:rPr>
               <a:t/>
             </a:r>
             <a:endParaRPr b="0" i="0" sz="1800" u="none" cap="none" strike="noStrike">
@@ -25712,8 +26016,8 @@
                 <a:solidFill>
                   <a:srgbClr val="2A78D6"/>
                 </a:solidFill>
-                <a:latin typeface="Malgun Gothic"/>
-                <a:ea typeface="Malgun Gothic"/>
+                <a:latin typeface="맑은 고딕"/>
+                <a:ea typeface="맑은 고딕"/>
                 <a:cs typeface="Malgun Gothic"/>
                 <a:sym typeface="Malgun Gothic"/>
               </a:rPr>
@@ -25770,8 +26074,8 @@
                 <a:solidFill>
                   <a:srgbClr val="104281"/>
                 </a:solidFill>
-                <a:latin typeface="Malgun Gothic"/>
-                <a:ea typeface="Malgun Gothic"/>
+                <a:latin typeface="맑은 고딕"/>
+                <a:ea typeface="맑은 고딕"/>
                 <a:cs typeface="Malgun Gothic"/>
                 <a:sym typeface="Malgun Gothic"/>
               </a:rPr>
@@ -25828,8 +26132,8 @@
                 <a:solidFill>
                   <a:srgbClr val="104281"/>
                 </a:solidFill>
-                <a:latin typeface="Malgun Gothic"/>
-                <a:ea typeface="Malgun Gothic"/>
+                <a:latin typeface="맑은 고딕"/>
+                <a:ea typeface="맑은 고딕"/>
                 <a:cs typeface="Malgun Gothic"/>
                 <a:sym typeface="Malgun Gothic"/>
               </a:rPr>
@@ -25860,8 +26164,8 @@
                 <a:solidFill>
                   <a:srgbClr val="202020"/>
                 </a:solidFill>
-                <a:latin typeface="Malgun Gothic"/>
-                <a:ea typeface="Malgun Gothic"/>
+                <a:latin typeface="맑은 고딕"/>
+                <a:ea typeface="맑은 고딕"/>
                 <a:cs typeface="Malgun Gothic"/>
                 <a:sym typeface="Malgun Gothic"/>
               </a:rPr>
@@ -25888,6 +26192,10 @@
               <a:buNone/>
             </a:pPr>
             <a:r>
+              <a:rPr>
+                <a:latin typeface="맑은 고딕"/>
+                <a:ea typeface="맑은 고딕"/>
+              </a:rPr>
               <a:t/>
             </a:r>
             <a:endParaRPr b="1" i="0" sz="1800" u="none" cap="none" strike="noStrike">
@@ -25915,8 +26223,8 @@
                 <a:solidFill>
                   <a:srgbClr val="104281"/>
                 </a:solidFill>
-                <a:latin typeface="Malgun Gothic"/>
-                <a:ea typeface="Malgun Gothic"/>
+                <a:latin typeface="맑은 고딕"/>
+                <a:ea typeface="맑은 고딕"/>
                 <a:cs typeface="Malgun Gothic"/>
                 <a:sym typeface="Malgun Gothic"/>
               </a:rPr>
@@ -25947,8 +26255,8 @@
                 <a:solidFill>
                   <a:srgbClr val="202020"/>
                 </a:solidFill>
-                <a:latin typeface="Malgun Gothic"/>
-                <a:ea typeface="Malgun Gothic"/>
+                <a:latin typeface="맑은 고딕"/>
+                <a:ea typeface="맑은 고딕"/>
                 <a:cs typeface="Malgun Gothic"/>
                 <a:sym typeface="Malgun Gothic"/>
               </a:rPr>
@@ -25979,8 +26287,8 @@
                 <a:solidFill>
                   <a:srgbClr val="202020"/>
                 </a:solidFill>
-                <a:latin typeface="Malgun Gothic"/>
-                <a:ea typeface="Malgun Gothic"/>
+                <a:latin typeface="맑은 고딕"/>
+                <a:ea typeface="맑은 고딕"/>
                 <a:cs typeface="Malgun Gothic"/>
                 <a:sym typeface="Malgun Gothic"/>
               </a:rPr>
@@ -26011,8 +26319,8 @@
                 <a:solidFill>
                   <a:srgbClr val="202020"/>
                 </a:solidFill>
-                <a:latin typeface="Malgun Gothic"/>
-                <a:ea typeface="Malgun Gothic"/>
+                <a:latin typeface="맑은 고딕"/>
+                <a:ea typeface="맑은 고딕"/>
                 <a:cs typeface="Malgun Gothic"/>
                 <a:sym typeface="Malgun Gothic"/>
               </a:rPr>
@@ -26043,8 +26351,8 @@
                 <a:solidFill>
                   <a:srgbClr val="202020"/>
                 </a:solidFill>
-                <a:latin typeface="Malgun Gothic"/>
-                <a:ea typeface="Malgun Gothic"/>
+                <a:latin typeface="맑은 고딕"/>
+                <a:ea typeface="맑은 고딕"/>
                 <a:cs typeface="Malgun Gothic"/>
                 <a:sym typeface="Malgun Gothic"/>
               </a:rPr>
@@ -26071,6 +26379,10 @@
               <a:buNone/>
             </a:pPr>
             <a:r>
+              <a:rPr>
+                <a:latin typeface="맑은 고딕"/>
+                <a:ea typeface="맑은 고딕"/>
+              </a:rPr>
               <a:t/>
             </a:r>
             <a:endParaRPr b="1" i="0" sz="1800" u="none" cap="none" strike="noStrike">
@@ -26098,8 +26410,8 @@
                 <a:solidFill>
                   <a:srgbClr val="FF0000"/>
                 </a:solidFill>
-                <a:latin typeface="Malgun Gothic"/>
-                <a:ea typeface="Malgun Gothic"/>
+                <a:latin typeface="맑은 고딕"/>
+                <a:ea typeface="맑은 고딕"/>
                 <a:cs typeface="Malgun Gothic"/>
                 <a:sym typeface="Malgun Gothic"/>
               </a:rPr>
@@ -26156,8 +26468,8 @@
                 <a:solidFill>
                   <a:srgbClr val="666666"/>
                 </a:solidFill>
-                <a:latin typeface="Malgun Gothic"/>
-                <a:ea typeface="Malgun Gothic"/>
+                <a:latin typeface="맑은 고딕"/>
+                <a:ea typeface="맑은 고딕"/>
                 <a:cs typeface="Malgun Gothic"/>
                 <a:sym typeface="Malgun Gothic"/>
               </a:rPr>
@@ -26244,6 +26556,10 @@
               <a:buNone/>
             </a:pPr>
             <a:r>
+              <a:rPr>
+                <a:latin typeface="맑은 고딕"/>
+                <a:ea typeface="맑은 고딕"/>
+              </a:rPr>
               <a:t/>
             </a:r>
             <a:endParaRPr b="0" i="0" sz="1800" u="none" cap="none" strike="noStrike">
@@ -26297,8 +26613,8 @@
                 <a:solidFill>
                   <a:srgbClr val="FFFFFF"/>
                 </a:solidFill>
-                <a:latin typeface="Malgun Gothic"/>
-                <a:ea typeface="Malgun Gothic"/>
+                <a:latin typeface="맑은 고딕"/>
+                <a:ea typeface="맑은 고딕"/>
                 <a:cs typeface="Malgun Gothic"/>
                 <a:sym typeface="Malgun Gothic"/>
               </a:rPr>
@@ -26355,8 +26671,8 @@
                 <a:solidFill>
                   <a:srgbClr val="BFD4F0"/>
                 </a:solidFill>
-                <a:latin typeface="Malgun Gothic"/>
-                <a:ea typeface="Malgun Gothic"/>
+                <a:latin typeface="맑은 고딕"/>
+                <a:ea typeface="맑은 고딕"/>
                 <a:cs typeface="Malgun Gothic"/>
                 <a:sym typeface="Malgun Gothic"/>
               </a:rPr>
@@ -26383,7 +26699,7 @@
 </file>
 
 <file path=ppt/slides/slide3.xml><?xml version="1.0" encoding="utf-8"?>
-<p:sld xmlns:a="http://schemas.openxmlformats.org/drawingml/2006/main" xmlns:p="http://schemas.openxmlformats.org/presentationml/2006/main" xmlns:r="http://schemas.openxmlformats.org/officeDocument/2006/relationships">
+<p:sld xmlns:r="http://schemas.openxmlformats.org/officeDocument/2006/relationships" xmlns:c="http://schemas.openxmlformats.org/drawingml/2006/chart" xmlns:a="http://schemas.openxmlformats.org/drawingml/2006/main" xmlns:dgm="http://schemas.openxmlformats.org/drawingml/2006/diagram" xmlns:dsp="http://schemas.microsoft.com/office/drawing/2008/diagram" xmlns:p="http://schemas.openxmlformats.org/presentationml/2006/main">
   <p:cSld>
     <p:spTree>
       <p:nvGrpSpPr>
@@ -26391,24 +26707,14 @@
         <p:cNvGrpSpPr/>
         <p:nvPr/>
       </p:nvGrpSpPr>
-      <p:grpSpPr/>
-      <p:sp>
-        <p:nvSpPr>
-          <p:cNvPr id="2" name="Title 1"/>
-          <p:cNvSpPr>
-            <a:spLocks noGrp="1"/>
-          </p:cNvSpPr>
-          <p:nvPr>
-            <p:ph type="title"/>
-          </p:nvPr>
-        </p:nvSpPr>
-        <p:spPr/>
-        <p:txBody>
-          <a:bodyPr/>
-          <a:lstStyle/>
-          <a:p/>
-        </p:txBody>
-      </p:sp>
+      <p:grpSpPr>
+        <a:xfrm>
+          <a:off x="0" y="0"/>
+          <a:ext cx="0" cy="0"/>
+          <a:chOff x="0" y="0"/>
+          <a:chExt cx="0" cy="0"/>
+        </a:xfrm>
+      </p:grpSpPr>
       <p:sp>
         <p:nvSpPr>
           <p:cNvPr id="3" name="Rectangle 2"/>
@@ -26445,10 +26751,13 @@
           </a:fontRef>
         </p:style>
         <p:txBody>
-          <a:bodyPr rtlCol="0" anchor="ctr"/>
+          <a:bodyPr anchor="ctr"/>
           <a:lstStyle/>
           <a:p>
-            <a:pPr algn="ctr"/>
+            <a:pPr algn="ctr">
+              <a:defRPr/>
+            </a:pPr>
+            <a:endParaRPr lang="ko-KR" altLang="en-US"/>
           </a:p>
         </p:txBody>
       </p:sp>
@@ -26461,7 +26770,7 @@
         <p:spPr>
           <a:xfrm>
             <a:off x="502920" y="292608"/>
-            <a:ext cx="10515600" cy="365760"/>
+            <a:ext cx="10515600" cy="296037"/>
           </a:xfrm>
           <a:prstGeom prst="rect">
             <a:avLst/>
@@ -26478,16 +26787,24 @@
               <a:spcAft>
                 <a:spcPts val="600"/>
               </a:spcAft>
+              <a:defRPr/>
             </a:pPr>
             <a:r>
               <a:rPr sz="1400" b="1">
                 <a:solidFill>
-                  <a:srgbClr val="2A78D6"/>
+                  <a:srgbClr val="2a78d6"/>
                 </a:solidFill>
                 <a:latin typeface="맑은 고딕"/>
+                <a:ea typeface="맑은 고딕"/>
               </a:rPr>
               <a:t>TEAM</a:t>
             </a:r>
+            <a:endParaRPr sz="1400" b="1">
+              <a:solidFill>
+                <a:srgbClr val="2a78d6"/>
+              </a:solidFill>
+              <a:latin typeface="맑은 고딕"/>
+            </a:endParaRPr>
           </a:p>
         </p:txBody>
       </p:sp>
@@ -26500,7 +26817,7 @@
         <p:spPr>
           <a:xfrm>
             <a:off x="502920" y="621792"/>
-            <a:ext cx="11155680" cy="731520"/>
+            <a:ext cx="11155680" cy="547878"/>
           </a:xfrm>
           <a:prstGeom prst="rect">
             <a:avLst/>
@@ -26517,6 +26834,7 @@
               <a:spcAft>
                 <a:spcPts val="600"/>
               </a:spcAft>
+              <a:defRPr/>
             </a:pPr>
             <a:r>
               <a:rPr sz="3000" b="1">
@@ -26524,9 +26842,16 @@
                   <a:srgbClr val="104281"/>
                 </a:solidFill>
                 <a:latin typeface="맑은 고딕"/>
+                <a:ea typeface="맑은 고딕"/>
               </a:rPr>
               <a:t>팀원 소개 및 업무 분장 — 찾아조</a:t>
             </a:r>
+            <a:endParaRPr sz="3000" b="1">
+              <a:solidFill>
+                <a:srgbClr val="104281"/>
+              </a:solidFill>
+              <a:latin typeface="맑은 고딕"/>
+            </a:endParaRPr>
           </a:p>
         </p:txBody>
       </p:sp>
@@ -26556,21 +26881,30 @@
               <a:tr h="658368">
                 <a:tc>
                   <a:txBody>
-                    <a:bodyPr/>
-                    <a:lstStyle/>
+                    <a:bodyPr vert="horz" lIns="109728" tIns="91440" rIns="91440" bIns="45720" anchor="t" anchorCtr="0"/>
                     <a:p>
+                      <a:pPr lvl="0">
+                        <a:defRPr/>
+                      </a:pPr>
                       <a:r>
                         <a:rPr sz="1500" b="1">
                           <a:solidFill>
-                            <a:srgbClr val="FFFFFF"/>
+                            <a:srgbClr val="ffffff"/>
                           </a:solidFill>
                           <a:latin typeface="맑은 고딕"/>
+                          <a:ea typeface="맑은 고딕"/>
                         </a:rPr>
                         <a:t>이름</a:t>
                       </a:r>
+                      <a:endParaRPr sz="1500" b="1">
+                        <a:solidFill>
+                          <a:srgbClr val="ffffff"/>
+                        </a:solidFill>
+                        <a:latin typeface="맑은 고딕"/>
+                      </a:endParaRPr>
                     </a:p>
                   </a:txBody>
-                  <a:tcPr marL="109728" marT="91440">
+                  <a:tcPr marL="109728" marR="91440" marT="91440">
                     <a:solidFill>
                       <a:srgbClr val="104281"/>
                     </a:solidFill>
@@ -26578,21 +26912,30 @@
                 </a:tc>
                 <a:tc>
                   <a:txBody>
-                    <a:bodyPr/>
-                    <a:lstStyle/>
+                    <a:bodyPr vert="horz" lIns="109728" tIns="91440" rIns="91440" bIns="45720" anchor="t" anchorCtr="0"/>
                     <a:p>
+                      <a:pPr lvl="0">
+                        <a:defRPr/>
+                      </a:pPr>
                       <a:r>
                         <a:rPr sz="1500" b="1">
                           <a:solidFill>
-                            <a:srgbClr val="FFFFFF"/>
+                            <a:srgbClr val="ffffff"/>
                           </a:solidFill>
                           <a:latin typeface="맑은 고딕"/>
+                          <a:ea typeface="맑은 고딕"/>
                         </a:rPr>
                         <a:t>담당 역할</a:t>
                       </a:r>
+                      <a:endParaRPr sz="1500" b="1">
+                        <a:solidFill>
+                          <a:srgbClr val="ffffff"/>
+                        </a:solidFill>
+                        <a:latin typeface="맑은 고딕"/>
+                      </a:endParaRPr>
                     </a:p>
                   </a:txBody>
-                  <a:tcPr marL="109728" marT="91440">
+                  <a:tcPr marL="109728" marR="91440" marT="91440">
                     <a:solidFill>
                       <a:srgbClr val="104281"/>
                     </a:solidFill>
@@ -26600,21 +26943,30 @@
                 </a:tc>
                 <a:tc>
                   <a:txBody>
-                    <a:bodyPr/>
-                    <a:lstStyle/>
+                    <a:bodyPr vert="horz" lIns="109728" tIns="91440" rIns="91440" bIns="45720" anchor="t" anchorCtr="0"/>
                     <a:p>
+                      <a:pPr lvl="0">
+                        <a:defRPr/>
+                      </a:pPr>
                       <a:r>
                         <a:rPr sz="1500" b="1">
                           <a:solidFill>
-                            <a:srgbClr val="FFFFFF"/>
+                            <a:srgbClr val="ffffff"/>
                           </a:solidFill>
                           <a:latin typeface="맑은 고딕"/>
+                          <a:ea typeface="맑은 고딕"/>
                         </a:rPr>
                         <a:t>주요 수행 업무</a:t>
                       </a:r>
+                      <a:endParaRPr sz="1500" b="1">
+                        <a:solidFill>
+                          <a:srgbClr val="ffffff"/>
+                        </a:solidFill>
+                        <a:latin typeface="맑은 고딕"/>
+                      </a:endParaRPr>
                     </a:p>
                   </a:txBody>
-                  <a:tcPr marL="109728" marT="91440">
+                  <a:tcPr marL="109728" marR="91440" marT="91440">
                     <a:solidFill>
                       <a:srgbClr val="104281"/>
                     </a:solidFill>
@@ -26624,67 +26976,94 @@
               <a:tr h="658368">
                 <a:tc>
                   <a:txBody>
-                    <a:bodyPr/>
-                    <a:lstStyle/>
+                    <a:bodyPr vert="horz" lIns="109728" tIns="91440" rIns="91440" bIns="45720" anchor="t" anchorCtr="0"/>
                     <a:p>
+                      <a:pPr lvl="0">
+                        <a:defRPr/>
+                      </a:pPr>
                       <a:r>
                         <a:rPr sz="1500" b="1">
                           <a:solidFill>
                             <a:srgbClr val="104281"/>
                           </a:solidFill>
                           <a:latin typeface="맑은 고딕"/>
+                          <a:ea typeface="맑은 고딕"/>
                         </a:rPr>
                         <a:t>이제민</a:t>
                       </a:r>
+                      <a:endParaRPr sz="1500" b="1">
+                        <a:solidFill>
+                          <a:srgbClr val="104281"/>
+                        </a:solidFill>
+                        <a:latin typeface="맑은 고딕"/>
+                      </a:endParaRPr>
                     </a:p>
                   </a:txBody>
-                  <a:tcPr marL="109728" marT="91440">
+                  <a:tcPr marL="109728" marR="91440" marT="91440">
                     <a:solidFill>
-                      <a:srgbClr val="EEF3FB"/>
+                      <a:srgbClr val="eef3fb"/>
                     </a:solidFill>
                   </a:tcPr>
                 </a:tc>
                 <a:tc>
                   <a:txBody>
-                    <a:bodyPr/>
-                    <a:lstStyle/>
+                    <a:bodyPr vert="horz" lIns="109728" tIns="91440" rIns="91440" bIns="45720" anchor="t" anchorCtr="0"/>
                     <a:p>
+                      <a:pPr lvl="0">
+                        <a:defRPr/>
+                      </a:pPr>
                       <a:r>
                         <a:rPr sz="1500" b="1">
                           <a:solidFill>
                             <a:srgbClr val="202020"/>
                           </a:solidFill>
                           <a:latin typeface="맑은 고딕"/>
+                          <a:ea typeface="맑은 고딕"/>
                         </a:rPr>
                         <a:t>팀장 · 총괄</a:t>
                       </a:r>
+                      <a:endParaRPr sz="1500" b="1">
+                        <a:solidFill>
+                          <a:srgbClr val="202020"/>
+                        </a:solidFill>
+                        <a:latin typeface="맑은 고딕"/>
+                      </a:endParaRPr>
                     </a:p>
                   </a:txBody>
-                  <a:tcPr marL="109728" marT="91440">
+                  <a:tcPr marL="109728" marR="91440" marT="91440">
                     <a:solidFill>
-                      <a:srgbClr val="FFFFFF"/>
+                      <a:srgbClr val="ffffff"/>
                     </a:solidFill>
                   </a:tcPr>
                 </a:tc>
                 <a:tc>
                   <a:txBody>
-                    <a:bodyPr/>
-                    <a:lstStyle/>
+                    <a:bodyPr vert="horz" lIns="109728" tIns="91440" rIns="91440" bIns="45720" anchor="t" anchorCtr="0"/>
                     <a:p>
+                      <a:pPr lvl="0">
+                        <a:defRPr/>
+                      </a:pPr>
                       <a:r>
                         <a:rPr sz="1500" b="1">
                           <a:solidFill>
                             <a:srgbClr val="202020"/>
                           </a:solidFill>
                           <a:latin typeface="맑은 고딕"/>
+                          <a:ea typeface="맑은 고딕"/>
                         </a:rPr>
                         <a:t>일정 관리, 산출물 취합, 검증 방향 결정, 발표 총괄</a:t>
                       </a:r>
+                      <a:endParaRPr sz="1500" b="1">
+                        <a:solidFill>
+                          <a:srgbClr val="202020"/>
+                        </a:solidFill>
+                        <a:latin typeface="맑은 고딕"/>
+                      </a:endParaRPr>
                     </a:p>
                   </a:txBody>
-                  <a:tcPr marL="109728" marT="91440">
+                  <a:tcPr marL="109728" marR="91440" marT="91440">
                     <a:solidFill>
-                      <a:srgbClr val="FFFFFF"/>
+                      <a:srgbClr val="ffffff"/>
                     </a:solidFill>
                   </a:tcPr>
                 </a:tc>
@@ -26692,67 +27071,94 @@
               <a:tr h="658368">
                 <a:tc>
                   <a:txBody>
-                    <a:bodyPr/>
-                    <a:lstStyle/>
+                    <a:bodyPr vert="horz" lIns="109728" tIns="91440" rIns="91440" bIns="45720" anchor="t" anchorCtr="0"/>
                     <a:p>
+                      <a:pPr lvl="0">
+                        <a:defRPr/>
+                      </a:pPr>
                       <a:r>
                         <a:rPr sz="1500" b="1">
                           <a:solidFill>
                             <a:srgbClr val="104281"/>
                           </a:solidFill>
                           <a:latin typeface="맑은 고딕"/>
+                          <a:ea typeface="맑은 고딕"/>
                         </a:rPr>
                         <a:t>조성기</a:t>
                       </a:r>
+                      <a:endParaRPr sz="1500" b="1">
+                        <a:solidFill>
+                          <a:srgbClr val="104281"/>
+                        </a:solidFill>
+                        <a:latin typeface="맑은 고딕"/>
+                      </a:endParaRPr>
                     </a:p>
                   </a:txBody>
-                  <a:tcPr marL="109728" marT="91440">
+                  <a:tcPr marL="109728" marR="91440" marT="91440">
                     <a:solidFill>
-                      <a:srgbClr val="EEF3FB"/>
+                      <a:srgbClr val="eef3fb"/>
                     </a:solidFill>
                   </a:tcPr>
                 </a:tc>
                 <a:tc>
                   <a:txBody>
-                    <a:bodyPr/>
-                    <a:lstStyle/>
+                    <a:bodyPr vert="horz" lIns="109728" tIns="91440" rIns="91440" bIns="45720" anchor="t" anchorCtr="0"/>
                     <a:p>
+                      <a:pPr lvl="0">
+                        <a:defRPr/>
+                      </a:pPr>
                       <a:r>
                         <a:rPr sz="1500" b="1">
                           <a:solidFill>
                             <a:srgbClr val="202020"/>
                           </a:solidFill>
                           <a:latin typeface="맑은 고딕"/>
+                          <a:ea typeface="맑은 고딕"/>
                         </a:rPr>
                         <a:t>전처리 및 모델링</a:t>
                       </a:r>
+                      <a:endParaRPr sz="1500" b="1">
+                        <a:solidFill>
+                          <a:srgbClr val="202020"/>
+                        </a:solidFill>
+                        <a:latin typeface="맑은 고딕"/>
+                      </a:endParaRPr>
                     </a:p>
                   </a:txBody>
-                  <a:tcPr marL="109728" marT="91440">
+                  <a:tcPr marL="109728" marR="91440" marT="91440">
                     <a:solidFill>
-                      <a:srgbClr val="FFFFFF"/>
+                      <a:srgbClr val="ffffff"/>
                     </a:solidFill>
                   </a:tcPr>
                 </a:tc>
                 <a:tc>
                   <a:txBody>
-                    <a:bodyPr/>
-                    <a:lstStyle/>
+                    <a:bodyPr vert="horz" lIns="109728" tIns="91440" rIns="91440" bIns="45720" anchor="t" anchorCtr="0"/>
                     <a:p>
+                      <a:pPr lvl="0">
+                        <a:defRPr/>
+                      </a:pPr>
                       <a:r>
                         <a:rPr sz="1500" b="1">
                           <a:solidFill>
                             <a:srgbClr val="202020"/>
                           </a:solidFill>
                           <a:latin typeface="맑은 고딕"/>
+                          <a:ea typeface="맑은 고딕"/>
                         </a:rPr>
                         <a:t>라이프로그 정제, 피처 설계, 모델 학습·비교, Q4·Q5 검증</a:t>
                       </a:r>
+                      <a:endParaRPr sz="1500" b="1">
+                        <a:solidFill>
+                          <a:srgbClr val="202020"/>
+                        </a:solidFill>
+                        <a:latin typeface="맑은 고딕"/>
+                      </a:endParaRPr>
                     </a:p>
                   </a:txBody>
-                  <a:tcPr marL="109728" marT="91440">
+                  <a:tcPr marL="109728" marR="91440" marT="91440">
                     <a:solidFill>
-                      <a:srgbClr val="FFFFFF"/>
+                      <a:srgbClr val="ffffff"/>
                     </a:solidFill>
                   </a:tcPr>
                 </a:tc>
@@ -26760,67 +27166,94 @@
               <a:tr h="658368">
                 <a:tc>
                   <a:txBody>
-                    <a:bodyPr/>
-                    <a:lstStyle/>
+                    <a:bodyPr vert="horz" lIns="109728" tIns="91440" rIns="91440" bIns="45720" anchor="t" anchorCtr="0"/>
                     <a:p>
+                      <a:pPr lvl="0">
+                        <a:defRPr/>
+                      </a:pPr>
                       <a:r>
                         <a:rPr sz="1500" b="1">
                           <a:solidFill>
                             <a:srgbClr val="104281"/>
                           </a:solidFill>
                           <a:latin typeface="맑은 고딕"/>
+                          <a:ea typeface="맑은 고딕"/>
                         </a:rPr>
                         <a:t>박용민</a:t>
                       </a:r>
+                      <a:endParaRPr sz="1500" b="1">
+                        <a:solidFill>
+                          <a:srgbClr val="104281"/>
+                        </a:solidFill>
+                        <a:latin typeface="맑은 고딕"/>
+                      </a:endParaRPr>
                     </a:p>
                   </a:txBody>
-                  <a:tcPr marL="109728" marT="91440">
+                  <a:tcPr marL="109728" marR="91440" marT="91440">
                     <a:solidFill>
-                      <a:srgbClr val="EEF3FB"/>
+                      <a:srgbClr val="eef3fb"/>
                     </a:solidFill>
                   </a:tcPr>
                 </a:tc>
                 <a:tc>
                   <a:txBody>
-                    <a:bodyPr/>
-                    <a:lstStyle/>
+                    <a:bodyPr vert="horz" lIns="109728" tIns="91440" rIns="91440" bIns="45720" anchor="t" anchorCtr="0"/>
                     <a:p>
+                      <a:pPr lvl="0">
+                        <a:defRPr/>
+                      </a:pPr>
                       <a:r>
                         <a:rPr sz="1500" b="1">
                           <a:solidFill>
                             <a:srgbClr val="202020"/>
                           </a:solidFill>
                           <a:latin typeface="맑은 고딕"/>
+                          <a:ea typeface="맑은 고딕"/>
                         </a:rPr>
                         <a:t>데이터 수집</a:t>
                       </a:r>
+                      <a:endParaRPr sz="1500" b="1">
+                        <a:solidFill>
+                          <a:srgbClr val="202020"/>
+                        </a:solidFill>
+                        <a:latin typeface="맑은 고딕"/>
+                      </a:endParaRPr>
                     </a:p>
                   </a:txBody>
-                  <a:tcPr marL="109728" marT="91440">
+                  <a:tcPr marL="109728" marR="91440" marT="91440">
                     <a:solidFill>
-                      <a:srgbClr val="FFFFFF"/>
+                      <a:srgbClr val="ffffff"/>
                     </a:solidFill>
                   </a:tcPr>
                 </a:tc>
                 <a:tc>
                   <a:txBody>
-                    <a:bodyPr/>
-                    <a:lstStyle/>
+                    <a:bodyPr vert="horz" lIns="109728" tIns="91440" rIns="91440" bIns="45720" anchor="t" anchorCtr="0"/>
                     <a:p>
+                      <a:pPr lvl="0">
+                        <a:defRPr/>
+                      </a:pPr>
                       <a:r>
                         <a:rPr sz="1500" b="1">
                           <a:solidFill>
                             <a:srgbClr val="202020"/>
                           </a:solidFill>
                           <a:latin typeface="맑은 고딕"/>
+                          <a:ea typeface="맑은 고딕"/>
                         </a:rPr>
                         <a:t>AI Hub 데이터 확보, 공공데이터(치매안심센터) 연동, 추가 데이터 조사</a:t>
                       </a:r>
+                      <a:endParaRPr sz="1500" b="1">
+                        <a:solidFill>
+                          <a:srgbClr val="202020"/>
+                        </a:solidFill>
+                        <a:latin typeface="맑은 고딕"/>
+                      </a:endParaRPr>
                     </a:p>
                   </a:txBody>
-                  <a:tcPr marL="109728" marT="91440">
+                  <a:tcPr marL="109728" marR="91440" marT="91440">
                     <a:solidFill>
-                      <a:srgbClr val="FFFFFF"/>
+                      <a:srgbClr val="ffffff"/>
                     </a:solidFill>
                   </a:tcPr>
                 </a:tc>
@@ -26828,67 +27261,94 @@
               <a:tr h="658368">
                 <a:tc>
                   <a:txBody>
-                    <a:bodyPr/>
-                    <a:lstStyle/>
+                    <a:bodyPr vert="horz" lIns="109728" tIns="91440" rIns="91440" bIns="45720" anchor="t" anchorCtr="0"/>
                     <a:p>
+                      <a:pPr lvl="0">
+                        <a:defRPr/>
+                      </a:pPr>
                       <a:r>
                         <a:rPr sz="1500" b="1">
                           <a:solidFill>
                             <a:srgbClr val="104281"/>
                           </a:solidFill>
                           <a:latin typeface="맑은 고딕"/>
+                          <a:ea typeface="맑은 고딕"/>
                         </a:rPr>
                         <a:t>정상천</a:t>
                       </a:r>
+                      <a:endParaRPr sz="1500" b="1">
+                        <a:solidFill>
+                          <a:srgbClr val="104281"/>
+                        </a:solidFill>
+                        <a:latin typeface="맑은 고딕"/>
+                      </a:endParaRPr>
                     </a:p>
                   </a:txBody>
-                  <a:tcPr marL="109728" marT="91440">
+                  <a:tcPr marL="109728" marR="91440" marT="91440">
                     <a:solidFill>
-                      <a:srgbClr val="EEF3FB"/>
+                      <a:srgbClr val="eef3fb"/>
                     </a:solidFill>
                   </a:tcPr>
                 </a:tc>
                 <a:tc>
                   <a:txBody>
-                    <a:bodyPr/>
-                    <a:lstStyle/>
+                    <a:bodyPr vert="horz" lIns="109728" tIns="91440" rIns="91440" bIns="45720" anchor="t" anchorCtr="0"/>
                     <a:p>
+                      <a:pPr lvl="0">
+                        <a:defRPr/>
+                      </a:pPr>
                       <a:r>
                         <a:rPr sz="1500" b="1">
                           <a:solidFill>
                             <a:srgbClr val="202020"/>
                           </a:solidFill>
                           <a:latin typeface="맑은 고딕"/>
+                          <a:ea typeface="맑은 고딕"/>
                         </a:rPr>
                         <a:t>통계 및 시각화</a:t>
                       </a:r>
+                      <a:endParaRPr sz="1500" b="1">
+                        <a:solidFill>
+                          <a:srgbClr val="202020"/>
+                        </a:solidFill>
+                        <a:latin typeface="맑은 고딕"/>
+                      </a:endParaRPr>
                     </a:p>
                   </a:txBody>
-                  <a:tcPr marL="109728" marT="91440">
+                  <a:tcPr marL="109728" marR="91440" marT="91440">
                     <a:solidFill>
-                      <a:srgbClr val="FFFFFF"/>
+                      <a:srgbClr val="ffffff"/>
                     </a:solidFill>
                   </a:tcPr>
                 </a:tc>
                 <a:tc>
                   <a:txBody>
-                    <a:bodyPr/>
-                    <a:lstStyle/>
+                    <a:bodyPr vert="horz" lIns="109728" tIns="91440" rIns="91440" bIns="45720" anchor="t" anchorCtr="0"/>
                     <a:p>
+                      <a:pPr lvl="0">
+                        <a:defRPr/>
+                      </a:pPr>
                       <a:r>
                         <a:rPr sz="1500" b="1">
                           <a:solidFill>
                             <a:srgbClr val="202020"/>
                           </a:solidFill>
                           <a:latin typeface="맑은 고딕"/>
+                          <a:ea typeface="맑은 고딕"/>
                         </a:rPr>
                         <a:t>문제인식 통계 시각화, 분석 그래프, 발표자료 제작</a:t>
                       </a:r>
+                      <a:endParaRPr sz="1500" b="1">
+                        <a:solidFill>
+                          <a:srgbClr val="202020"/>
+                        </a:solidFill>
+                        <a:latin typeface="맑은 고딕"/>
+                      </a:endParaRPr>
                     </a:p>
                   </a:txBody>
-                  <a:tcPr marL="109728" marT="91440">
+                  <a:tcPr marL="109728" marR="91440" marT="91440">
                     <a:solidFill>
-                      <a:srgbClr val="FFFFFF"/>
+                      <a:srgbClr val="ffffff"/>
                     </a:solidFill>
                   </a:tcPr>
                 </a:tc>
@@ -26906,7 +27366,7 @@
         <p:spPr>
           <a:xfrm>
             <a:off x="731520" y="5394960"/>
-            <a:ext cx="10515600" cy="457200"/>
+            <a:ext cx="10515600" cy="289560"/>
           </a:xfrm>
           <a:prstGeom prst="rect">
             <a:avLst/>
@@ -26923,6 +27383,7 @@
               <a:spcAft>
                 <a:spcPts val="600"/>
               </a:spcAft>
+              <a:defRPr/>
             </a:pPr>
             <a:r>
               <a:rPr sz="1300" b="0">
@@ -26930,9 +27391,16 @@
                   <a:srgbClr val="666666"/>
                 </a:solidFill>
                 <a:latin typeface="맑은 고딕"/>
+                <a:ea typeface="맑은 고딕"/>
               </a:rPr>
               <a:t>주 담당은 있지만 서비스 점검·발표 준비는 전원이 함께 수행</a:t>
             </a:r>
+            <a:endParaRPr sz="1300" b="0">
+              <a:solidFill>
+                <a:srgbClr val="666666"/>
+              </a:solidFill>
+              <a:latin typeface="맑은 고딕"/>
+            </a:endParaRPr>
           </a:p>
         </p:txBody>
       </p:sp>
@@ -26945,7 +27413,7 @@
         <p:spPr>
           <a:xfrm>
             <a:off x="11475720" y="6446520"/>
-            <a:ext cx="640080" cy="320040"/>
+            <a:ext cx="640080" cy="266700"/>
           </a:xfrm>
           <a:prstGeom prst="rect">
             <a:avLst/>
@@ -26962,6 +27430,7 @@
               <a:spcAft>
                 <a:spcPts val="600"/>
               </a:spcAft>
+              <a:defRPr/>
             </a:pPr>
             <a:r>
               <a:rPr sz="1200" b="0">
@@ -26969,9 +27438,16 @@
                   <a:srgbClr val="666666"/>
                 </a:solidFill>
                 <a:latin typeface="맑은 고딕"/>
+                <a:ea typeface="맑은 고딕"/>
               </a:rPr>
               <a:t>3</a:t>
             </a:r>
+            <a:endParaRPr sz="1200" b="0">
+              <a:solidFill>
+                <a:srgbClr val="666666"/>
+              </a:solidFill>
+              <a:latin typeface="맑은 고딕"/>
+            </a:endParaRPr>
           </a:p>
         </p:txBody>
       </p:sp>
@@ -26980,6 +27456,14 @@
   <p:clrMapOvr>
     <a:masterClrMapping/>
   </p:clrMapOvr>
+  <mc:AlternateContent xmlns:mc="http://schemas.openxmlformats.org/markup-compatibility/2006">
+    <mc:Choice xmlns:p14="http://schemas.microsoft.com/office/powerpoint/2010/main" Requires="p14">
+      <p:transition xmlns:mc="http://schemas.openxmlformats.org/markup-compatibility/2006" xmlns:p14="http://schemas.microsoft.com/office/powerpoint/2010/main" mc:Ignorable="p14" p14:dur="500"/>
+    </mc:Choice>
+    <mc:Fallback>
+      <p:transition/>
+    </mc:Fallback>
+  </mc:AlternateContent>
 </p:sld>
 </file>
 
@@ -27044,6 +27528,10 @@
               <a:buNone/>
             </a:pPr>
             <a:r>
+              <a:rPr>
+                <a:latin typeface="맑은 고딕"/>
+                <a:ea typeface="맑은 고딕"/>
+              </a:rPr>
               <a:t/>
             </a:r>
             <a:endParaRPr b="0" i="0" sz="1800" u="none" cap="none" strike="noStrike">
@@ -27097,8 +27585,8 @@
                 <a:solidFill>
                   <a:srgbClr val="2A78D6"/>
                 </a:solidFill>
-                <a:latin typeface="Malgun Gothic"/>
-                <a:ea typeface="Malgun Gothic"/>
+                <a:latin typeface="맑은 고딕"/>
+                <a:ea typeface="맑은 고딕"/>
                 <a:cs typeface="Malgun Gothic"/>
                 <a:sym typeface="Malgun Gothic"/>
               </a:rPr>
@@ -27147,8 +27635,8 @@
                 <a:solidFill>
                   <a:srgbClr val="104281"/>
                 </a:solidFill>
-                <a:latin typeface="Malgun Gothic"/>
-                <a:ea typeface="Malgun Gothic"/>
+                <a:latin typeface="맑은 고딕"/>
+                <a:ea typeface="맑은 고딕"/>
                 <a:cs typeface="Malgun Gothic"/>
                 <a:sym typeface="Malgun Gothic"/>
               </a:rPr>
@@ -27197,8 +27685,8 @@
                 <a:solidFill>
                   <a:srgbClr val="202020"/>
                 </a:solidFill>
-                <a:latin typeface="Malgun Gothic"/>
-                <a:ea typeface="Malgun Gothic"/>
+                <a:latin typeface="맑은 고딕"/>
+                <a:ea typeface="맑은 고딕"/>
                 <a:cs typeface="Malgun Gothic"/>
                 <a:sym typeface="Malgun Gothic"/>
               </a:rPr>
@@ -27247,8 +27735,8 @@
                 <a:solidFill>
                   <a:srgbClr val="666666"/>
                 </a:solidFill>
-                <a:latin typeface="Malgun Gothic"/>
-                <a:ea typeface="Malgun Gothic"/>
+                <a:latin typeface="맑은 고딕"/>
+                <a:ea typeface="맑은 고딕"/>
                 <a:cs typeface="Malgun Gothic"/>
                 <a:sym typeface="Malgun Gothic"/>
               </a:rPr>
@@ -27305,8 +27793,8 @@
                 <a:solidFill>
                   <a:srgbClr val="202020"/>
                 </a:solidFill>
-                <a:latin typeface="Malgun Gothic"/>
-                <a:ea typeface="Malgun Gothic"/>
+                <a:latin typeface="맑은 고딕"/>
+                <a:ea typeface="맑은 고딕"/>
                 <a:cs typeface="Malgun Gothic"/>
                 <a:sym typeface="Malgun Gothic"/>
               </a:rPr>
@@ -27355,8 +27843,8 @@
                 <a:solidFill>
                   <a:srgbClr val="666666"/>
                 </a:solidFill>
-                <a:latin typeface="Malgun Gothic"/>
-                <a:ea typeface="Malgun Gothic"/>
+                <a:latin typeface="맑은 고딕"/>
+                <a:ea typeface="맑은 고딕"/>
                 <a:cs typeface="Malgun Gothic"/>
                 <a:sym typeface="Malgun Gothic"/>
               </a:rPr>
@@ -27405,8 +27893,8 @@
                 <a:solidFill>
                   <a:srgbClr val="202020"/>
                 </a:solidFill>
-                <a:latin typeface="Malgun Gothic"/>
-                <a:ea typeface="Malgun Gothic"/>
+                <a:latin typeface="맑은 고딕"/>
+                <a:ea typeface="맑은 고딕"/>
                 <a:cs typeface="Malgun Gothic"/>
                 <a:sym typeface="Malgun Gothic"/>
               </a:rPr>
@@ -27455,8 +27943,8 @@
                 <a:solidFill>
                   <a:srgbClr val="666666"/>
                 </a:solidFill>
-                <a:latin typeface="Malgun Gothic"/>
-                <a:ea typeface="Malgun Gothic"/>
+                <a:latin typeface="맑은 고딕"/>
+                <a:ea typeface="맑은 고딕"/>
                 <a:cs typeface="Malgun Gothic"/>
                 <a:sym typeface="Malgun Gothic"/>
               </a:rPr>
@@ -27505,8 +27993,8 @@
                 <a:solidFill>
                   <a:srgbClr val="202020"/>
                 </a:solidFill>
-                <a:latin typeface="Malgun Gothic"/>
-                <a:ea typeface="Malgun Gothic"/>
+                <a:latin typeface="맑은 고딕"/>
+                <a:ea typeface="맑은 고딕"/>
                 <a:cs typeface="Malgun Gothic"/>
                 <a:sym typeface="Malgun Gothic"/>
               </a:rPr>
@@ -27555,8 +28043,8 @@
                 <a:solidFill>
                   <a:srgbClr val="666666"/>
                 </a:solidFill>
-                <a:latin typeface="Malgun Gothic"/>
-                <a:ea typeface="Malgun Gothic"/>
+                <a:latin typeface="맑은 고딕"/>
+                <a:ea typeface="맑은 고딕"/>
                 <a:cs typeface="Malgun Gothic"/>
                 <a:sym typeface="Malgun Gothic"/>
               </a:rPr>
@@ -27605,8 +28093,8 @@
                 <a:solidFill>
                   <a:srgbClr val="202020"/>
                 </a:solidFill>
-                <a:latin typeface="Malgun Gothic"/>
-                <a:ea typeface="Malgun Gothic"/>
+                <a:latin typeface="맑은 고딕"/>
+                <a:ea typeface="맑은 고딕"/>
                 <a:cs typeface="Malgun Gothic"/>
                 <a:sym typeface="Malgun Gothic"/>
               </a:rPr>
@@ -27655,8 +28143,8 @@
                 <a:solidFill>
                   <a:srgbClr val="666666"/>
                 </a:solidFill>
-                <a:latin typeface="Malgun Gothic"/>
-                <a:ea typeface="Malgun Gothic"/>
+                <a:latin typeface="맑은 고딕"/>
+                <a:ea typeface="맑은 고딕"/>
                 <a:cs typeface="Malgun Gothic"/>
                 <a:sym typeface="Malgun Gothic"/>
               </a:rPr>
@@ -27705,8 +28193,8 @@
                 <a:solidFill>
                   <a:srgbClr val="202020"/>
                 </a:solidFill>
-                <a:latin typeface="Malgun Gothic"/>
-                <a:ea typeface="Malgun Gothic"/>
+                <a:latin typeface="맑은 고딕"/>
+                <a:ea typeface="맑은 고딕"/>
                 <a:cs typeface="Malgun Gothic"/>
                 <a:sym typeface="Malgun Gothic"/>
               </a:rPr>
@@ -27763,8 +28251,8 @@
                 <a:solidFill>
                   <a:srgbClr val="666666"/>
                 </a:solidFill>
-                <a:latin typeface="Malgun Gothic"/>
-                <a:ea typeface="Malgun Gothic"/>
+                <a:latin typeface="맑은 고딕"/>
+                <a:ea typeface="맑은 고딕"/>
                 <a:cs typeface="Malgun Gothic"/>
                 <a:sym typeface="Malgun Gothic"/>
               </a:rPr>
@@ -27813,8 +28301,8 @@
                 <a:solidFill>
                   <a:srgbClr val="666666"/>
                 </a:solidFill>
-                <a:latin typeface="Malgun Gothic"/>
-                <a:ea typeface="Malgun Gothic"/>
+                <a:latin typeface="맑은 고딕"/>
+                <a:ea typeface="맑은 고딕"/>
                 <a:cs typeface="Malgun Gothic"/>
                 <a:sym typeface="Malgun Gothic"/>
               </a:rPr>
@@ -27893,6 +28381,10 @@
               <a:buNone/>
             </a:pPr>
             <a:r>
+              <a:rPr>
+                <a:latin typeface="맑은 고딕"/>
+                <a:ea typeface="맑은 고딕"/>
+              </a:rPr>
               <a:t/>
             </a:r>
             <a:endParaRPr b="0" i="0" sz="1800" u="none" cap="none" strike="noStrike">
@@ -27946,8 +28438,8 @@
                 <a:solidFill>
                   <a:srgbClr val="2A78D6"/>
                 </a:solidFill>
-                <a:latin typeface="Malgun Gothic"/>
-                <a:ea typeface="Malgun Gothic"/>
+                <a:latin typeface="맑은 고딕"/>
+                <a:ea typeface="맑은 고딕"/>
                 <a:cs typeface="Malgun Gothic"/>
                 <a:sym typeface="Malgun Gothic"/>
               </a:rPr>
@@ -27996,8 +28488,8 @@
                 <a:solidFill>
                   <a:srgbClr val="104281"/>
                 </a:solidFill>
-                <a:latin typeface="Malgun Gothic"/>
-                <a:ea typeface="Malgun Gothic"/>
+                <a:latin typeface="맑은 고딕"/>
+                <a:ea typeface="맑은 고딕"/>
                 <a:cs typeface="Malgun Gothic"/>
                 <a:sym typeface="Malgun Gothic"/>
               </a:rPr>
@@ -28073,8 +28565,8 @@
                 <a:solidFill>
                   <a:srgbClr val="666666"/>
                 </a:solidFill>
-                <a:latin typeface="Malgun Gothic"/>
-                <a:ea typeface="Malgun Gothic"/>
+                <a:latin typeface="맑은 고딕"/>
+                <a:ea typeface="맑은 고딕"/>
                 <a:cs typeface="Malgun Gothic"/>
                 <a:sym typeface="Malgun Gothic"/>
               </a:rPr>
@@ -28153,6 +28645,10 @@
               <a:buNone/>
             </a:pPr>
             <a:r>
+              <a:rPr>
+                <a:latin typeface="맑은 고딕"/>
+                <a:ea typeface="맑은 고딕"/>
+              </a:rPr>
               <a:t/>
             </a:r>
             <a:endParaRPr b="0" i="0" sz="1800" u="none" cap="none" strike="noStrike">
@@ -28206,8 +28702,8 @@
                 <a:solidFill>
                   <a:srgbClr val="2A78D6"/>
                 </a:solidFill>
-                <a:latin typeface="Malgun Gothic"/>
-                <a:ea typeface="Malgun Gothic"/>
+                <a:latin typeface="맑은 고딕"/>
+                <a:ea typeface="맑은 고딕"/>
                 <a:cs typeface="Malgun Gothic"/>
                 <a:sym typeface="Malgun Gothic"/>
               </a:rPr>
@@ -28256,8 +28752,8 @@
                 <a:solidFill>
                   <a:srgbClr val="104281"/>
                 </a:solidFill>
-                <a:latin typeface="Malgun Gothic"/>
-                <a:ea typeface="Malgun Gothic"/>
+                <a:latin typeface="맑은 고딕"/>
+                <a:ea typeface="맑은 고딕"/>
                 <a:cs typeface="Malgun Gothic"/>
                 <a:sym typeface="Malgun Gothic"/>
               </a:rPr>
@@ -28333,8 +28829,8 @@
                 <a:solidFill>
                   <a:srgbClr val="666666"/>
                 </a:solidFill>
-                <a:latin typeface="Malgun Gothic"/>
-                <a:ea typeface="Malgun Gothic"/>
+                <a:latin typeface="맑은 고딕"/>
+                <a:ea typeface="맑은 고딕"/>
                 <a:cs typeface="Malgun Gothic"/>
                 <a:sym typeface="Malgun Gothic"/>
               </a:rPr>
@@ -28413,6 +28909,10 @@
               <a:buNone/>
             </a:pPr>
             <a:r>
+              <a:rPr>
+                <a:latin typeface="맑은 고딕"/>
+                <a:ea typeface="맑은 고딕"/>
+              </a:rPr>
               <a:t/>
             </a:r>
             <a:endParaRPr b="0" i="0" sz="1800" u="none" cap="none" strike="noStrike">
@@ -28466,8 +28966,8 @@
                 <a:solidFill>
                   <a:srgbClr val="2A78D6"/>
                 </a:solidFill>
-                <a:latin typeface="Malgun Gothic"/>
-                <a:ea typeface="Malgun Gothic"/>
+                <a:latin typeface="맑은 고딕"/>
+                <a:ea typeface="맑은 고딕"/>
                 <a:cs typeface="Malgun Gothic"/>
                 <a:sym typeface="Malgun Gothic"/>
               </a:rPr>
@@ -28516,8 +29016,8 @@
                 <a:solidFill>
                   <a:srgbClr val="104281"/>
                 </a:solidFill>
-                <a:latin typeface="Malgun Gothic"/>
-                <a:ea typeface="Malgun Gothic"/>
+                <a:latin typeface="맑은 고딕"/>
+                <a:ea typeface="맑은 고딕"/>
                 <a:cs typeface="Malgun Gothic"/>
                 <a:sym typeface="Malgun Gothic"/>
               </a:rPr>
@@ -28566,8 +29066,8 @@
                 <a:solidFill>
                   <a:srgbClr val="FF0000"/>
                 </a:solidFill>
-                <a:latin typeface="Malgun Gothic"/>
-                <a:ea typeface="Malgun Gothic"/>
+                <a:latin typeface="맑은 고딕"/>
+                <a:ea typeface="맑은 고딕"/>
                 <a:cs typeface="Malgun Gothic"/>
                 <a:sym typeface="Malgun Gothic"/>
               </a:rPr>
@@ -28670,8 +29170,8 @@
                 <a:solidFill>
                   <a:srgbClr val="666666"/>
                 </a:solidFill>
-                <a:latin typeface="Malgun Gothic"/>
-                <a:ea typeface="Malgun Gothic"/>
+                <a:latin typeface="맑은 고딕"/>
+                <a:ea typeface="맑은 고딕"/>
                 <a:cs typeface="Malgun Gothic"/>
                 <a:sym typeface="Malgun Gothic"/>
               </a:rPr>
@@ -28750,6 +29250,10 @@
               <a:buNone/>
             </a:pPr>
             <a:r>
+              <a:rPr>
+                <a:latin typeface="맑은 고딕"/>
+                <a:ea typeface="맑은 고딕"/>
+              </a:rPr>
               <a:t/>
             </a:r>
             <a:endParaRPr b="0" i="0" sz="1800" u="none" cap="none" strike="noStrike">
@@ -28803,8 +29307,8 @@
                 <a:solidFill>
                   <a:srgbClr val="2A78D6"/>
                 </a:solidFill>
-                <a:latin typeface="Malgun Gothic"/>
-                <a:ea typeface="Malgun Gothic"/>
+                <a:latin typeface="맑은 고딕"/>
+                <a:ea typeface="맑은 고딕"/>
                 <a:cs typeface="Malgun Gothic"/>
                 <a:sym typeface="Malgun Gothic"/>
               </a:rPr>
@@ -28861,8 +29365,8 @@
                 <a:solidFill>
                   <a:srgbClr val="104281"/>
                 </a:solidFill>
-                <a:latin typeface="Malgun Gothic"/>
-                <a:ea typeface="Malgun Gothic"/>
+                <a:latin typeface="맑은 고딕"/>
+                <a:ea typeface="맑은 고딕"/>
                 <a:cs typeface="Malgun Gothic"/>
                 <a:sym typeface="Malgun Gothic"/>
               </a:rPr>
@@ -28946,8 +29450,8 @@
                 <a:solidFill>
                   <a:srgbClr val="FF0000"/>
                 </a:solidFill>
-                <a:latin typeface="Malgun Gothic"/>
-                <a:ea typeface="Malgun Gothic"/>
+                <a:latin typeface="맑은 고딕"/>
+                <a:ea typeface="맑은 고딕"/>
                 <a:cs typeface="Malgun Gothic"/>
                 <a:sym typeface="Malgun Gothic"/>
               </a:rPr>
@@ -29004,8 +29508,8 @@
                 <a:solidFill>
                   <a:srgbClr val="666666"/>
                 </a:solidFill>
-                <a:latin typeface="Malgun Gothic"/>
-                <a:ea typeface="Malgun Gothic"/>
+                <a:latin typeface="맑은 고딕"/>
+                <a:ea typeface="맑은 고딕"/>
                 <a:cs typeface="Malgun Gothic"/>
                 <a:sym typeface="Malgun Gothic"/>
               </a:rPr>
@@ -29092,6 +29596,10 @@
               <a:buNone/>
             </a:pPr>
             <a:r>
+              <a:rPr>
+                <a:latin typeface="맑은 고딕"/>
+                <a:ea typeface="맑은 고딕"/>
+              </a:rPr>
               <a:t/>
             </a:r>
             <a:endParaRPr b="0" i="0" sz="1800" u="none" cap="none" strike="noStrike">
@@ -29145,8 +29653,8 @@
                 <a:solidFill>
                   <a:srgbClr val="2A78D6"/>
                 </a:solidFill>
-                <a:latin typeface="Malgun Gothic"/>
-                <a:ea typeface="Malgun Gothic"/>
+                <a:latin typeface="맑은 고딕"/>
+                <a:ea typeface="맑은 고딕"/>
                 <a:cs typeface="Malgun Gothic"/>
                 <a:sym typeface="Malgun Gothic"/>
               </a:rPr>
@@ -29203,8 +29711,8 @@
                 <a:solidFill>
                   <a:srgbClr val="104281"/>
                 </a:solidFill>
-                <a:latin typeface="Malgun Gothic"/>
-                <a:ea typeface="Malgun Gothic"/>
+                <a:latin typeface="맑은 고딕"/>
+                <a:ea typeface="맑은 고딕"/>
                 <a:cs typeface="Malgun Gothic"/>
                 <a:sym typeface="Malgun Gothic"/>
               </a:rPr>
@@ -29261,8 +29769,8 @@
                 <a:solidFill>
                   <a:srgbClr val="202020"/>
                 </a:solidFill>
-                <a:latin typeface="Malgun Gothic"/>
-                <a:ea typeface="Malgun Gothic"/>
+                <a:latin typeface="맑은 고딕"/>
+                <a:ea typeface="맑은 고딕"/>
                 <a:cs typeface="Malgun Gothic"/>
                 <a:sym typeface="Malgun Gothic"/>
               </a:rPr>
@@ -29289,6 +29797,10 @@
               <a:buNone/>
             </a:pPr>
             <a:r>
+              <a:rPr>
+                <a:latin typeface="맑은 고딕"/>
+                <a:ea typeface="맑은 고딕"/>
+              </a:rPr>
               <a:t/>
             </a:r>
             <a:endParaRPr b="1" i="0" sz="2300" u="none" cap="none" strike="noStrike">
@@ -29316,8 +29828,8 @@
                 <a:solidFill>
                   <a:srgbClr val="202020"/>
                 </a:solidFill>
-                <a:latin typeface="Malgun Gothic"/>
-                <a:ea typeface="Malgun Gothic"/>
+                <a:latin typeface="맑은 고딕"/>
+                <a:ea typeface="맑은 고딕"/>
                 <a:cs typeface="Malgun Gothic"/>
                 <a:sym typeface="Malgun Gothic"/>
               </a:rPr>
@@ -29344,6 +29856,10 @@
               <a:buNone/>
             </a:pPr>
             <a:r>
+              <a:rPr>
+                <a:latin typeface="맑은 고딕"/>
+                <a:ea typeface="맑은 고딕"/>
+              </a:rPr>
               <a:t/>
             </a:r>
             <a:endParaRPr b="1" i="0" sz="2300" u="none" cap="none" strike="noStrike">
@@ -29371,8 +29887,8 @@
                 <a:solidFill>
                   <a:srgbClr val="202020"/>
                 </a:solidFill>
-                <a:latin typeface="Malgun Gothic"/>
-                <a:ea typeface="Malgun Gothic"/>
+                <a:latin typeface="맑은 고딕"/>
+                <a:ea typeface="맑은 고딕"/>
                 <a:cs typeface="Malgun Gothic"/>
                 <a:sym typeface="Malgun Gothic"/>
               </a:rPr>
@@ -29399,6 +29915,10 @@
               <a:buNone/>
             </a:pPr>
             <a:r>
+              <a:rPr>
+                <a:latin typeface="맑은 고딕"/>
+                <a:ea typeface="맑은 고딕"/>
+              </a:rPr>
               <a:t/>
             </a:r>
             <a:endParaRPr b="1" i="0" sz="1900" u="none" cap="none" strike="noStrike">
@@ -29426,8 +29946,8 @@
                 <a:solidFill>
                   <a:srgbClr val="104281"/>
                 </a:solidFill>
-                <a:latin typeface="Malgun Gothic"/>
-                <a:ea typeface="Malgun Gothic"/>
+                <a:latin typeface="맑은 고딕"/>
+                <a:ea typeface="맑은 고딕"/>
                 <a:cs typeface="Malgun Gothic"/>
                 <a:sym typeface="Malgun Gothic"/>
               </a:rPr>
@@ -29458,8 +29978,8 @@
                 <a:solidFill>
                   <a:srgbClr val="104281"/>
                 </a:solidFill>
-                <a:latin typeface="Malgun Gothic"/>
-                <a:ea typeface="Malgun Gothic"/>
+                <a:latin typeface="맑은 고딕"/>
+                <a:ea typeface="맑은 고딕"/>
                 <a:cs typeface="Malgun Gothic"/>
                 <a:sym typeface="Malgun Gothic"/>
               </a:rPr>
@@ -29486,6 +30006,10 @@
               <a:buNone/>
             </a:pPr>
             <a:r>
+              <a:rPr>
+                <a:latin typeface="맑은 고딕"/>
+                <a:ea typeface="맑은 고딕"/>
+              </a:rPr>
               <a:t/>
             </a:r>
             <a:endParaRPr b="1" i="0" sz="1900" u="none" cap="none" strike="noStrike">
@@ -29513,8 +30037,8 @@
                 <a:solidFill>
                   <a:srgbClr val="FF0000"/>
                 </a:solidFill>
-                <a:latin typeface="Malgun Gothic"/>
-                <a:ea typeface="Malgun Gothic"/>
+                <a:latin typeface="맑은 고딕"/>
+                <a:ea typeface="맑은 고딕"/>
                 <a:cs typeface="Malgun Gothic"/>
                 <a:sym typeface="Malgun Gothic"/>
               </a:rPr>
@@ -29571,8 +30095,8 @@
                 <a:solidFill>
                   <a:srgbClr val="666666"/>
                 </a:solidFill>
-                <a:latin typeface="Malgun Gothic"/>
-                <a:ea typeface="Malgun Gothic"/>
+                <a:latin typeface="맑은 고딕"/>
+                <a:ea typeface="맑은 고딕"/>
                 <a:cs typeface="Malgun Gothic"/>
                 <a:sym typeface="Malgun Gothic"/>
               </a:rPr>

--- a/발표자료_최종본_v6.pptx
+++ b/발표자료_최종본_v6.pptx
@@ -15163,62 +15163,6 @@
       </p:grpSpPr>
       <p:sp>
         <p:nvSpPr>
-          <p:cNvPr id="178" name="Google Shape;178;p9"/>
-          <p:cNvSpPr/>
-          <p:nvPr/>
-        </p:nvSpPr>
-        <p:spPr>
-          <a:xfrm>
-            <a:off x="0" y="0"/>
-            <a:ext cx="12191695" cy="146304"/>
-          </a:xfrm>
-          <a:prstGeom prst="rect">
-            <a:avLst/>
-          </a:prstGeom>
-          <a:solidFill>
-            <a:srgbClr val="104281"/>
-          </a:solidFill>
-          <a:ln>
-            <a:noFill/>
-          </a:ln>
-          <a:effectLst>
-            <a:outerShdw blurRad="40000" dist="23000" dir="5400000" rotWithShape="0">
-              <a:srgbClr val="000000">
-                <a:alpha val="34900"/>
-              </a:srgbClr>
-            </a:outerShdw>
-          </a:effectLst>
-        </p:spPr>
-        <p:txBody>
-          <a:bodyPr wrap="square" lIns="91424" tIns="45700" rIns="91424" bIns="45700" anchor="ctr" anchorCtr="0">
-            <a:noAutofit/>
-          </a:bodyPr>
-          <a:lstStyle/>
-          <a:p>
-            <a:pPr marL="0" marR="0" lvl="0" indent="0" algn="ctr" rtl="0">
-              <a:spcBef>
-                <a:spcPts val="0"/>
-              </a:spcBef>
-              <a:spcAft>
-                <a:spcPts val="0"/>
-              </a:spcAft>
-              <a:buNone/>
-              <a:defRPr/>
-            </a:pPr>
-            <a:endParaRPr sz="1800" b="0" i="0" u="none" strike="noStrike" cap="none">
-              <a:solidFill>
-                <a:schemeClr val="lt1"/>
-              </a:solidFill>
-              <a:latin typeface="Calibri"/>
-              <a:ea typeface="Calibri"/>
-              <a:cs typeface="Calibri"/>
-              <a:sym typeface="Calibri"/>
-            </a:endParaRPr>
-          </a:p>
-        </p:txBody>
-      </p:sp>
-      <p:sp>
-        <p:nvSpPr>
           <p:cNvPr id="179" name="Google Shape;179;p9"/>
           <p:cNvSpPr txBox="1"/>
           <p:nvPr/>
@@ -15337,413 +15281,6 @@
       </p:sp>
       <p:sp>
         <p:nvSpPr>
-          <p:cNvPr id="181" name="Google Shape;181;p9"/>
-          <p:cNvSpPr txBox="1"/>
-          <p:nvPr/>
-        </p:nvSpPr>
-        <p:spPr>
-          <a:xfrm>
-            <a:off x="878314" y="1246799"/>
-            <a:ext cx="10859368" cy="5611201"/>
-          </a:xfrm>
-          <a:prstGeom prst="rect">
-            <a:avLst/>
-          </a:prstGeom>
-          <a:noFill/>
-          <a:ln>
-            <a:noFill/>
-          </a:ln>
-        </p:spPr>
-        <p:txBody>
-          <a:bodyPr wrap="square" lIns="91424" tIns="45700" rIns="91424" bIns="45700" anchor="t" anchorCtr="0">
-            <a:spAutoFit/>
-          </a:bodyPr>
-          <a:lstStyle/>
-          <a:p>
-            <a:pPr marL="0" marR="0" lvl="0" indent="0" algn="l" rtl="0">
-              <a:spcBef>
-                <a:spcPts val="0"/>
-              </a:spcBef>
-              <a:spcAft>
-                <a:spcPts val="0"/>
-              </a:spcAft>
-              <a:buNone/>
-              <a:defRPr/>
-            </a:pPr>
-            <a:r>
-              <a:rPr lang="en-US" sz="2200" b="1" i="0" u="none" strike="noStrike" cap="none">
-                <a:solidFill>
-                  <a:srgbClr val="202020"/>
-                </a:solidFill>
-                <a:latin typeface="맑은 고딕"/>
-                <a:ea typeface="맑은 고딕"/>
-                <a:cs typeface="맑은 고딕"/>
-                <a:sym typeface="맑은 고딕"/>
-              </a:rPr>
-              <a:t>① 신뢰 필터 — 반지 미착용이 긴 날(180분 이상)은 그날 기록 전체를 제외</a:t>
-            </a:r>
-            <a:endParaRPr lang="en-US" sz="2200" b="1" i="0" u="none" strike="noStrike" cap="none">
-              <a:solidFill>
-                <a:srgbClr val="202020"/>
-              </a:solidFill>
-              <a:latin typeface="맑은 고딕"/>
-              <a:ea typeface="맑은 고딕"/>
-              <a:cs typeface="맑은 고딕"/>
-              <a:sym typeface="맑은 고딕"/>
-            </a:endParaRPr>
-          </a:p>
-          <a:p>
-            <a:pPr marL="0" marR="0" lvl="0" indent="0" algn="l" rtl="0">
-              <a:spcBef>
-                <a:spcPts val="600"/>
-              </a:spcBef>
-              <a:spcAft>
-                <a:spcPts val="0"/>
-              </a:spcAft>
-              <a:buNone/>
-              <a:defRPr/>
-            </a:pPr>
-            <a:endParaRPr sz="2200" b="1" i="0" u="none" strike="noStrike" cap="none">
-              <a:solidFill>
-                <a:srgbClr val="202020"/>
-              </a:solidFill>
-              <a:latin typeface="맑은 고딕"/>
-              <a:ea typeface="맑은 고딕"/>
-              <a:cs typeface="맑은 고딕"/>
-              <a:sym typeface="맑은 고딕"/>
-            </a:endParaRPr>
-          </a:p>
-          <a:p>
-            <a:pPr marL="0" marR="0" lvl="0" indent="0" algn="l" rtl="0">
-              <a:spcBef>
-                <a:spcPts val="600"/>
-              </a:spcBef>
-              <a:spcAft>
-                <a:spcPts val="0"/>
-              </a:spcAft>
-              <a:buNone/>
-              <a:defRPr/>
-            </a:pPr>
-            <a:r>
-              <a:rPr lang="en-US" sz="2200" b="1" i="0" u="none" strike="noStrike" cap="none">
-                <a:solidFill>
-                  <a:srgbClr val="202020"/>
-                </a:solidFill>
-                <a:latin typeface="맑은 고딕"/>
-                <a:ea typeface="맑은 고딕"/>
-                <a:cs typeface="맑은 고딕"/>
-                <a:sym typeface="맑은 고딕"/>
-              </a:rPr>
-              <a:t>② 매칭 — 활동·수면 기록을 사람 기준으로 진단 결과와 연결 (174명 전원 확인)</a:t>
-            </a:r>
-            <a:endParaRPr lang="en-US" sz="2200" b="1" i="0" u="none" strike="noStrike" cap="none">
-              <a:solidFill>
-                <a:srgbClr val="202020"/>
-              </a:solidFill>
-              <a:latin typeface="맑은 고딕"/>
-              <a:ea typeface="맑은 고딕"/>
-              <a:cs typeface="맑은 고딕"/>
-              <a:sym typeface="맑은 고딕"/>
-            </a:endParaRPr>
-          </a:p>
-          <a:p>
-            <a:pPr marL="0" marR="0" lvl="0" indent="0" algn="l" rtl="0">
-              <a:spcBef>
-                <a:spcPts val="600"/>
-              </a:spcBef>
-              <a:spcAft>
-                <a:spcPts val="0"/>
-              </a:spcAft>
-              <a:buNone/>
-              <a:defRPr/>
-            </a:pPr>
-            <a:endParaRPr sz="2200" b="1" i="0" u="none" strike="noStrike" cap="none">
-              <a:solidFill>
-                <a:srgbClr val="202020"/>
-              </a:solidFill>
-              <a:latin typeface="맑은 고딕"/>
-              <a:ea typeface="맑은 고딕"/>
-              <a:cs typeface="맑은 고딕"/>
-              <a:sym typeface="맑은 고딕"/>
-            </a:endParaRPr>
-          </a:p>
-          <a:p>
-            <a:pPr marL="0" marR="0" lvl="0" indent="0" algn="l" rtl="0">
-              <a:spcBef>
-                <a:spcPts val="600"/>
-              </a:spcBef>
-              <a:spcAft>
-                <a:spcPts val="0"/>
-              </a:spcAft>
-              <a:buNone/>
-              <a:defRPr/>
-            </a:pPr>
-            <a:r>
-              <a:rPr lang="en-US" sz="2200" b="1" i="0" u="none" strike="noStrike" cap="none">
-                <a:solidFill>
-                  <a:srgbClr val="202020"/>
-                </a:solidFill>
-                <a:latin typeface="맑은 고딕"/>
-                <a:ea typeface="맑은 고딕"/>
-                <a:cs typeface="맑은 고딕"/>
-                <a:sym typeface="맑은 고딕"/>
-              </a:rPr>
-              <a:t>③ 요약 — 사람 1명당 28~118일 기록을 지표별 평균(수준) </a:t>
-            </a:r>
-            <a:endParaRPr lang="en-US" sz="2200" b="1" i="0" u="none" strike="noStrike" cap="none">
-              <a:solidFill>
-                <a:srgbClr val="202020"/>
-              </a:solidFill>
-              <a:latin typeface="맑은 고딕"/>
-              <a:ea typeface="맑은 고딕"/>
-              <a:cs typeface="맑은 고딕"/>
-              <a:sym typeface="맑은 고딕"/>
-            </a:endParaRPr>
-          </a:p>
-          <a:p>
-            <a:pPr marL="0" marR="0" lvl="0" indent="0" algn="l" rtl="0">
-              <a:spcBef>
-                <a:spcPts val="600"/>
-              </a:spcBef>
-              <a:spcAft>
-                <a:spcPts val="0"/>
-              </a:spcAft>
-              <a:buNone/>
-              <a:defRPr/>
-            </a:pPr>
-            <a:r>
-              <a:rPr lang="en-US" sz="2200" b="1" i="0" u="none" strike="noStrike" cap="none">
-                <a:solidFill>
-                  <a:srgbClr val="202020"/>
-                </a:solidFill>
-                <a:latin typeface="맑은 고딕"/>
-                <a:ea typeface="맑은 고딕"/>
-                <a:cs typeface="맑은 고딕"/>
-                <a:sym typeface="맑은 고딕"/>
-              </a:rPr>
-              <a:t>											</a:t>
-            </a:r>
-            <a:endParaRPr lang="en-US" sz="2200" b="1" i="0" u="none" strike="noStrike" cap="none">
-              <a:solidFill>
-                <a:srgbClr val="202020"/>
-              </a:solidFill>
-              <a:latin typeface="맑은 고딕"/>
-              <a:ea typeface="맑은 고딕"/>
-              <a:cs typeface="맑은 고딕"/>
-              <a:sym typeface="맑은 고딕"/>
-            </a:endParaRPr>
-          </a:p>
-          <a:p>
-            <a:pPr marL="0" marR="0" lvl="0" indent="0" algn="l" rtl="0">
-              <a:spcBef>
-                <a:spcPts val="600"/>
-              </a:spcBef>
-              <a:spcAft>
-                <a:spcPts val="0"/>
-              </a:spcAft>
-              <a:buNone/>
-              <a:defRPr/>
-            </a:pPr>
-            <a:r>
-              <a:rPr lang="en-US" sz="2200" b="1" i="0" u="none" strike="noStrike" cap="none">
-                <a:solidFill>
-                  <a:srgbClr val="202020"/>
-                </a:solidFill>
-                <a:latin typeface="맑은 고딕"/>
-                <a:ea typeface="맑은 고딕"/>
-                <a:cs typeface="맑은 고딕"/>
-                <a:sym typeface="맑은 고딕"/>
-              </a:rPr>
-              <a:t>+ 표준편차(들쭉날쭉함)로 압축</a:t>
-            </a:r>
-            <a:endParaRPr lang="en-US" sz="2200" b="1" i="0" u="none" strike="noStrike" cap="none">
-              <a:solidFill>
-                <a:srgbClr val="202020"/>
-              </a:solidFill>
-              <a:latin typeface="맑은 고딕"/>
-              <a:ea typeface="맑은 고딕"/>
-              <a:cs typeface="맑은 고딕"/>
-              <a:sym typeface="맑은 고딕"/>
-            </a:endParaRPr>
-          </a:p>
-          <a:p>
-            <a:pPr marL="0" marR="0" lvl="0" indent="0" algn="l" rtl="0">
-              <a:spcBef>
-                <a:spcPts val="600"/>
-              </a:spcBef>
-              <a:spcAft>
-                <a:spcPts val="0"/>
-              </a:spcAft>
-              <a:buNone/>
-              <a:defRPr/>
-            </a:pPr>
-            <a:endParaRPr sz="1800" b="1" i="0" u="none" strike="noStrike" cap="none">
-              <a:solidFill>
-                <a:srgbClr val="202020"/>
-              </a:solidFill>
-              <a:latin typeface="맑은 고딕"/>
-              <a:ea typeface="맑은 고딕"/>
-              <a:cs typeface="맑은 고딕"/>
-              <a:sym typeface="맑은 고딕"/>
-            </a:endParaRPr>
-          </a:p>
-          <a:p>
-            <a:pPr marL="0" marR="0" lvl="0" indent="0" algn="l" rtl="0">
-              <a:spcBef>
-                <a:spcPts val="600"/>
-              </a:spcBef>
-              <a:spcAft>
-                <a:spcPts val="0"/>
-              </a:spcAft>
-              <a:buNone/>
-              <a:defRPr/>
-            </a:pPr>
-            <a:r>
-              <a:rPr lang="en-US" sz="2200" b="1" i="0" u="none" strike="noStrike" cap="none">
-                <a:solidFill>
-                  <a:srgbClr val="202020"/>
-                </a:solidFill>
-                <a:latin typeface="맑은 고딕"/>
-                <a:ea typeface="맑은 고딕"/>
-                <a:cs typeface="맑은 고딕"/>
-                <a:sym typeface="맑은 고딕"/>
-              </a:rPr>
-              <a:t>④ 파생 — 취침·기상 시각의 들쭉날쭉함(수면 리듬), 걸음 수 변동계수 등 리듬 지표 생성</a:t>
-            </a:r>
-            <a:endParaRPr lang="en-US" sz="2200" b="1" i="0" u="none" strike="noStrike" cap="none">
-              <a:solidFill>
-                <a:srgbClr val="202020"/>
-              </a:solidFill>
-              <a:latin typeface="맑은 고딕"/>
-              <a:ea typeface="맑은 고딕"/>
-              <a:cs typeface="맑은 고딕"/>
-              <a:sym typeface="맑은 고딕"/>
-            </a:endParaRPr>
-          </a:p>
-          <a:p>
-            <a:pPr marL="0" marR="0" lvl="0" indent="0" algn="l" rtl="0">
-              <a:spcBef>
-                <a:spcPts val="600"/>
-              </a:spcBef>
-              <a:spcAft>
-                <a:spcPts val="0"/>
-              </a:spcAft>
-              <a:buNone/>
-              <a:defRPr/>
-            </a:pPr>
-            <a:r>
-              <a:rPr lang="en-US" sz="2200" b="1" i="0" u="none" strike="noStrike" cap="none">
-                <a:solidFill>
-                  <a:srgbClr val="104281"/>
-                </a:solidFill>
-                <a:latin typeface="맑은 고딕"/>
-                <a:ea typeface="맑은 고딕"/>
-                <a:cs typeface="맑은 고딕"/>
-                <a:sym typeface="맑은 고딕"/>
-              </a:rPr>
-              <a:t>	→ 174명 × 44개 지표 테이블 완성 </a:t>
-            </a:r>
-            <a:endParaRPr lang="en-US" sz="2200" b="1" i="0" u="none" strike="noStrike" cap="none">
-              <a:solidFill>
-                <a:srgbClr val="104281"/>
-              </a:solidFill>
-              <a:latin typeface="맑은 고딕"/>
-              <a:ea typeface="맑은 고딕"/>
-              <a:cs typeface="맑은 고딕"/>
-              <a:sym typeface="맑은 고딕"/>
-            </a:endParaRPr>
-          </a:p>
-          <a:p>
-            <a:pPr marL="0" marR="0" lvl="0" indent="0" algn="l" rtl="0">
-              <a:spcBef>
-                <a:spcPts val="600"/>
-              </a:spcBef>
-              <a:spcAft>
-                <a:spcPts val="0"/>
-              </a:spcAft>
-              <a:buNone/>
-              <a:defRPr/>
-            </a:pPr>
-            <a:r>
-              <a:rPr lang="en-US" sz="2200" b="1" i="0" u="none" strike="noStrike" cap="none">
-                <a:solidFill>
-                  <a:srgbClr val="104281"/>
-                </a:solidFill>
-                <a:latin typeface="맑은 고딕"/>
-                <a:ea typeface="맑은 고딕"/>
-                <a:cs typeface="맑은 고딕"/>
-                <a:sym typeface="맑은 고딕"/>
-              </a:rPr>
-              <a:t>						— 이후 모든 분석·모델·서비스의 출발점</a:t>
-            </a:r>
-            <a:endParaRPr lang="en-US" sz="2200" b="1" i="0" u="none" strike="noStrike" cap="none">
-              <a:solidFill>
-                <a:srgbClr val="104281"/>
-              </a:solidFill>
-              <a:latin typeface="맑은 고딕"/>
-              <a:ea typeface="맑은 고딕"/>
-              <a:cs typeface="맑은 고딕"/>
-              <a:sym typeface="맑은 고딕"/>
-            </a:endParaRPr>
-          </a:p>
-          <a:p>
-            <a:pPr marL="0" marR="0" lvl="0" indent="0" algn="l" rtl="0">
-              <a:spcBef>
-                <a:spcPts val="600"/>
-              </a:spcBef>
-              <a:spcAft>
-                <a:spcPts val="0"/>
-              </a:spcAft>
-              <a:buNone/>
-              <a:defRPr/>
-            </a:pPr>
-            <a:endParaRPr sz="2200" b="1" i="0" u="none" strike="noStrike" cap="none">
-              <a:solidFill>
-                <a:srgbClr val="104281"/>
-              </a:solidFill>
-              <a:latin typeface="맑은 고딕"/>
-              <a:ea typeface="맑은 고딕"/>
-              <a:cs typeface="맑은 고딕"/>
-              <a:sym typeface="맑은 고딕"/>
-            </a:endParaRPr>
-          </a:p>
-          <a:p>
-            <a:pPr marL="0" marR="0" lvl="0" indent="0" algn="l" rtl="0">
-              <a:spcBef>
-                <a:spcPts val="600"/>
-              </a:spcBef>
-              <a:spcAft>
-                <a:spcPts val="0"/>
-              </a:spcAft>
-              <a:buNone/>
-              <a:defRPr/>
-            </a:pPr>
-            <a:r>
-              <a:rPr lang="en-US" sz="2000" b="1" i="0" u="none" strike="noStrike" cap="none">
-                <a:solidFill>
-                  <a:srgbClr val="ff0000"/>
-                </a:solidFill>
-                <a:latin typeface="맑은 고딕"/>
-                <a:ea typeface="맑은 고딕"/>
-                <a:cs typeface="맑은 고딕"/>
-                <a:sym typeface="맑은 고딕"/>
-              </a:rPr>
-              <a:t>전처리 기준은 전부 코드로 고정 </a:t>
-            </a:r>
-            <a:endParaRPr lang="en-US" sz="2000" b="1" i="0" u="none" strike="noStrike" cap="none">
-              <a:solidFill>
-                <a:srgbClr val="ff0000"/>
-              </a:solidFill>
-              <a:latin typeface="맑은 고딕"/>
-              <a:ea typeface="맑은 고딕"/>
-              <a:cs typeface="맑은 고딕"/>
-              <a:sym typeface="맑은 고딕"/>
-            </a:endParaRPr>
-          </a:p>
-        </p:txBody>
-      </p:sp>
-      <p:sp>
-        <p:nvSpPr>
           <p:cNvPr id="182" name="Google Shape;182;p9"/>
           <p:cNvSpPr txBox="1"/>
           <p:nvPr/>
@@ -15798,6 +15335,125 @@
               <a:cs typeface="맑은 고딕"/>
               <a:sym typeface="맑은 고딕"/>
             </a:endParaRPr>
+          </a:p>
+        </p:txBody>
+      </p:sp>
+      <p:sp>
+        <p:nvSpPr>
+          <p:cNvPr id="183" name="TextBox 182"/>
+          <p:cNvSpPr txBox="1"/>
+          <p:nvPr/>
+        </p:nvSpPr>
+        <p:spPr>
+          <a:xfrm>
+            <a:off x="914400" y="1783080"/>
+            <a:ext cx="10607040" cy="4389120"/>
+          </a:xfrm>
+          <a:prstGeom prst="rect">
+            <a:avLst/>
+          </a:prstGeom>
+          <a:noFill/>
+        </p:spPr>
+        <p:txBody>
+          <a:bodyPr wrap="square">
+            <a:spAutoFit/>
+          </a:bodyPr>
+          <a:lstStyle/>
+          <a:p>
+            <a:pPr>
+              <a:spcAft>
+                <a:spcPts val="1000"/>
+              </a:spcAft>
+            </a:pPr>
+            <a:r>
+              <a:rPr sz="1800" b="1">
+                <a:solidFill>
+                  <a:srgbClr val="202020"/>
+                </a:solidFill>
+                <a:latin typeface="맑은 고딕"/>
+              </a:rPr>
+              <a:t>① 신뢰 필터 — 반지 미착용이 긴 날(180분 이상)은 그날 기록 전체를 제외</a:t>
+            </a:r>
+          </a:p>
+          <a:p>
+            <a:pPr>
+              <a:spcAft>
+                <a:spcPts val="1000"/>
+              </a:spcAft>
+            </a:pPr>
+            <a:r>
+              <a:rPr sz="1800" b="1">
+                <a:solidFill>
+                  <a:srgbClr val="202020"/>
+                </a:solidFill>
+                <a:latin typeface="맑은 고딕"/>
+              </a:rPr>
+              <a:t>② 매칭 — 활동·수면 기록을 사람 기준으로 진단 결과와 연결 (174명 전원 확인)</a:t>
+            </a:r>
+          </a:p>
+          <a:p>
+            <a:pPr>
+              <a:spcAft>
+                <a:spcPts val="1000"/>
+              </a:spcAft>
+            </a:pPr>
+            <a:r>
+              <a:rPr sz="1800" b="1">
+                <a:solidFill>
+                  <a:srgbClr val="202020"/>
+                </a:solidFill>
+                <a:latin typeface="맑은 고딕"/>
+              </a:rPr>
+              <a:t>③ 요약 — 사람 1명당 28~118일 기록을 지표별 평균 + 표준편차(들쭉날쭉함)로 압축</a:t>
+            </a:r>
+          </a:p>
+          <a:p>
+            <a:pPr>
+              <a:spcAft>
+                <a:spcPts val="1600"/>
+              </a:spcAft>
+            </a:pPr>
+            <a:r>
+              <a:rPr sz="1800" b="1">
+                <a:solidFill>
+                  <a:srgbClr val="202020"/>
+                </a:solidFill>
+                <a:latin typeface="맑은 고딕"/>
+              </a:rPr>
+              <a:t>④ 파생 — 취침·기상 시각의 들쭉날쭉함(수면 리듬), 걸음 수 변동계수 생성</a:t>
+            </a:r>
+          </a:p>
+          <a:p>
+            <a:pPr>
+              <a:spcAft>
+                <a:spcPts val="1600"/>
+              </a:spcAft>
+            </a:pPr>
+            <a:r>
+              <a:rPr sz="2000" b="1">
+                <a:solidFill>
+                  <a:srgbClr val="104281"/>
+                </a:solidFill>
+                <a:latin typeface="맑은 고딕"/>
+              </a:rPr>
+              <a:t>→ 174명 × 44개 지표 테이블 완성 — 이후 모든 분석·모델·서비스의 출발점</a:t>
+            </a:r>
+          </a:p>
+          <a:p>
+            <a:pPr>
+              <a:spcAft>
+                <a:spcPts val="0"/>
+              </a:spcAft>
+            </a:pPr>
+            <a:r>
+              <a:rPr sz="1400" b="1">
+                <a:solidFill>
+                  <a:srgbClr val="666666"/>
+                </a:solidFill>
+                <a:latin typeface="맑은 고딕"/>
+              </a:rPr>
+              <a:t>전처리 기준은 전부 코드로 고정 — 같은 원본을 넣으면 누가 실행해도 같은 표가 나온다</a:t>
+            </a:r>
           </a:p>
         </p:txBody>
       </p:sp>
@@ -24252,7 +23908,7 @@
               <a:buNone/>
             </a:pPr>
             <a:r>
-              <a:rPr b="1" i="0" lang="en-US" sz="1700" u="none" cap="none" strike="noStrike">
+              <a:rPr b="1" i="0" lang="en-US" sz="1450" u="none" cap="none" strike="noStrike">
                 <a:solidFill>
                   <a:srgbClr val="104281"/>
                 </a:solidFill>
@@ -24284,7 +23940,7 @@
               <a:buNone/>
             </a:pPr>
             <a:r>
-              <a:rPr b="1" i="0" lang="en-US" sz="1400" u="none" cap="none" strike="noStrike">
+              <a:rPr b="1" i="0" lang="en-US" sz="1150" u="none" cap="none" strike="noStrike">
                 <a:solidFill>
                   <a:srgbClr val="202020"/>
                 </a:solidFill>
@@ -24424,7 +24080,7 @@
               <a:buNone/>
             </a:pPr>
             <a:r>
-              <a:rPr b="1" i="0" lang="en-US" sz="1700" u="none" cap="none" strike="noStrike">
+              <a:rPr b="1" i="0" lang="en-US" sz="1450" u="none" cap="none" strike="noStrike">
                 <a:solidFill>
                   <a:srgbClr val="104281"/>
                 </a:solidFill>
@@ -24456,7 +24112,7 @@
               <a:buNone/>
             </a:pPr>
             <a:r>
-              <a:rPr b="1" i="0" lang="en-US" sz="1400" u="none" cap="none" strike="noStrike">
+              <a:rPr b="1" i="0" lang="en-US" sz="1150" u="none" cap="none" strike="noStrike">
                 <a:solidFill>
                   <a:srgbClr val="202020"/>
                 </a:solidFill>
@@ -24488,7 +24144,7 @@
               <a:buNone/>
             </a:pPr>
             <a:r>
-              <a:rPr b="1" i="0" lang="en-US" sz="1400" u="none" cap="none" strike="noStrike">
+              <a:rPr b="1" i="0" lang="en-US" sz="1150" u="none" cap="none" strike="noStrike">
                 <a:solidFill>
                   <a:srgbClr val="202020"/>
                 </a:solidFill>
@@ -24628,7 +24284,7 @@
               <a:buNone/>
             </a:pPr>
             <a:r>
-              <a:rPr b="1" i="0" lang="en-US" sz="1700" u="none" cap="none" strike="noStrike">
+              <a:rPr b="1" i="0" lang="en-US" sz="1450" u="none" cap="none" strike="noStrike">
                 <a:solidFill>
                   <a:srgbClr val="104281"/>
                 </a:solidFill>
@@ -24660,7 +24316,7 @@
               <a:buNone/>
             </a:pPr>
             <a:r>
-              <a:rPr b="1" i="0" lang="en-US" sz="1400" u="none" cap="none" strike="noStrike">
+              <a:rPr b="1" i="0" lang="en-US" sz="1150" u="none" cap="none" strike="noStrike">
                 <a:solidFill>
                   <a:srgbClr val="202020"/>
                 </a:solidFill>
@@ -24800,7 +24456,7 @@
               <a:buNone/>
             </a:pPr>
             <a:r>
-              <a:rPr b="1" i="0" lang="en-US" sz="1700" u="none" cap="none" strike="noStrike">
+              <a:rPr b="1" i="0" lang="en-US" sz="1450" u="none" cap="none" strike="noStrike">
                 <a:solidFill>
                   <a:srgbClr val="104281"/>
                 </a:solidFill>
@@ -24832,7 +24488,7 @@
               <a:buNone/>
             </a:pPr>
             <a:r>
-              <a:rPr b="1" i="0" lang="en-US" sz="1400" u="none" cap="none" strike="noStrike">
+              <a:rPr b="1" i="0" lang="en-US" sz="1150" u="none" cap="none" strike="noStrike">
                 <a:solidFill>
                   <a:srgbClr val="202020"/>
                 </a:solidFill>
@@ -24864,7 +24520,7 @@
               <a:buNone/>
             </a:pPr>
             <a:r>
-              <a:rPr b="1" i="0" lang="en-US" sz="1400" u="none" cap="none" strike="noStrike">
+              <a:rPr b="1" i="0" lang="en-US" sz="1150" u="none" cap="none" strike="noStrike">
                 <a:solidFill>
                   <a:srgbClr val="202020"/>
                 </a:solidFill>
@@ -25004,7 +24660,7 @@
               <a:buNone/>
             </a:pPr>
             <a:r>
-              <a:rPr b="1" i="0" lang="en-US" sz="1700" u="none" cap="none" strike="noStrike">
+              <a:rPr b="1" i="0" lang="en-US" sz="1450" u="none" cap="none" strike="noStrike">
                 <a:solidFill>
                   <a:srgbClr val="2E7D43"/>
                 </a:solidFill>
@@ -25036,7 +24692,7 @@
               <a:buNone/>
             </a:pPr>
             <a:r>
-              <a:rPr b="1" i="0" lang="en-US" sz="1400" u="none" cap="none" strike="noStrike">
+              <a:rPr b="1" i="0" lang="en-US" sz="1150" u="none" cap="none" strike="noStrike">
                 <a:solidFill>
                   <a:srgbClr val="202020"/>
                 </a:solidFill>
@@ -25068,7 +24724,7 @@
               <a:buNone/>
             </a:pPr>
             <a:r>
-              <a:rPr b="1" i="0" lang="en-US" sz="1400" u="none" cap="none" strike="noStrike">
+              <a:rPr b="1" i="0" lang="en-US" sz="1150" u="none" cap="none" strike="noStrike">
                 <a:solidFill>
                   <a:srgbClr val="202020"/>
                 </a:solidFill>

--- a/발표자료_최종본_v6.pptx
+++ b/발표자료_최종본_v6.pptx
@@ -2,7 +2,7 @@
 <file path=ppt/presentation.xml><?xml version="1.0" encoding="utf-8"?>
 <p:presentation xmlns:r="http://schemas.openxmlformats.org/officeDocument/2006/relationships" xmlns:c="http://schemas.openxmlformats.org/drawingml/2006/chart" xmlns:a="http://schemas.openxmlformats.org/drawingml/2006/main" xmlns:dgm="http://schemas.openxmlformats.org/drawingml/2006/diagram" xmlns:dsp="http://schemas.microsoft.com/office/drawing/2008/diagram" xmlns:p="http://schemas.openxmlformats.org/presentationml/2006/main" strictFirstAndLastChars="0" saveSubsetFonts="1" autoCompressPictures="0">
   <p:sldMasterIdLst>
-    <p:sldMasterId id="2147483663" r:id="rId1"/>
+    <p:sldMasterId id="2147483662" r:id="rId1"/>
   </p:sldMasterIdLst>
   <p:notesMasterIdLst>
     <p:notesMasterId r:id="rId2"/>
@@ -1719,9 +1719,7 @@
               <a:defRPr/>
             </a:pPr>
             <a:r>
-              <a:rPr lang="ko-KR" altLang="en-US">
-                <a:latin typeface="맑은 고딕"/>
-              </a:rPr>
+              <a:rPr lang="ko-KR" altLang="en-US"/>
               <a:t/>
             </a:r>
             <a:endParaRPr lang="ko-KR" altLang="en-US"/>
@@ -2164,9 +2162,7 @@
               <a:defRPr/>
             </a:pPr>
             <a:r>
-              <a:rPr lang="ko-KR" altLang="en-US">
-                <a:latin typeface="맑은 고딕"/>
-              </a:rPr>
+              <a:rPr lang="ko-KR" altLang="en-US"/>
               <a:t/>
             </a:r>
             <a:endParaRPr lang="ko-KR" altLang="en-US"/>
@@ -2441,9 +2437,7 @@
               <a:defRPr/>
             </a:pPr>
             <a:r>
-              <a:rPr lang="ko-KR" altLang="en-US">
-                <a:latin typeface="맑은 고딕"/>
-              </a:rPr>
+              <a:rPr lang="ko-KR" altLang="en-US"/>
               <a:t/>
             </a:r>
             <a:endParaRPr lang="ko-KR" altLang="en-US"/>
@@ -2550,9 +2544,7 @@
               <a:defRPr/>
             </a:pPr>
             <a:r>
-              <a:rPr lang="ko-KR" altLang="en-US">
-                <a:latin typeface="맑은 고딕"/>
-              </a:rPr>
+              <a:rPr lang="ko-KR" altLang="en-US"/>
               <a:t/>
             </a:r>
             <a:endParaRPr lang="ko-KR" altLang="en-US"/>
@@ -2659,9 +2651,7 @@
               <a:defRPr/>
             </a:pPr>
             <a:r>
-              <a:rPr lang="ko-KR" altLang="en-US">
-                <a:latin typeface="맑은 고딕"/>
-              </a:rPr>
+              <a:rPr lang="ko-KR" altLang="en-US"/>
               <a:t/>
             </a:r>
             <a:endParaRPr lang="ko-KR" altLang="en-US"/>
@@ -2768,9 +2758,7 @@
               <a:defRPr/>
             </a:pPr>
             <a:r>
-              <a:rPr lang="ko-KR" altLang="en-US">
-                <a:latin typeface="맑은 고딕"/>
-              </a:rPr>
+              <a:rPr lang="ko-KR" altLang="en-US"/>
               <a:t/>
             </a:r>
             <a:endParaRPr lang="ko-KR" altLang="en-US"/>
@@ -2877,9 +2865,7 @@
               <a:defRPr/>
             </a:pPr>
             <a:r>
-              <a:rPr lang="ko-KR" altLang="en-US">
-                <a:latin typeface="맑은 고딕"/>
-              </a:rPr>
+              <a:rPr lang="ko-KR" altLang="en-US"/>
               <a:t/>
             </a:r>
             <a:endParaRPr lang="ko-KR" altLang="en-US"/>
@@ -2986,9 +2972,7 @@
               <a:defRPr/>
             </a:pPr>
             <a:r>
-              <a:rPr lang="ko-KR" altLang="en-US">
-                <a:latin typeface="맑은 고딕"/>
-              </a:rPr>
+              <a:rPr lang="ko-KR" altLang="en-US"/>
               <a:t/>
             </a:r>
             <a:endParaRPr lang="ko-KR" altLang="en-US"/>
@@ -3151,7 +3135,9 @@
               </a:rPr>
               <a:t>상용화 관점 질문 대비: 업로드가 일회성으로 사라지지 않고 DB에 쌓이며, 검진 확진 결과가 연결된 데이터만 재학습에 씁니다. 라벨 없이 학습하면 모델이 자기 예측을 정답처럼 배우는 오염이 생기기 때문입니다. 전체 루프(적재→라벨→재학습→모델 교체)를 실제로 구현하고 테스트까지 마쳤습니다.</a:t>
             </a:r>
-            <a:endParaRPr lang="en-US"/>
+            <a:endParaRPr lang="en-US">
+              <a:latin typeface="맑은 고딕"/>
+            </a:endParaRPr>
           </a:p>
           <a:p>
             <a:pPr marL="0" lvl="0" indent="0" algn="l" rtl="0">
@@ -3183,7 +3169,9 @@
               </a:rPr>
               <a:t>[적재 상세 — 구체적으로 어떻게 저장되냐는 질문 대비]</a:t>
             </a:r>
-            <a:endParaRPr lang="en-US"/>
+            <a:endParaRPr lang="en-US">
+              <a:latin typeface="맑은 고딕"/>
+            </a:endParaRPr>
           </a:p>
           <a:p>
             <a:pPr marL="0" lvl="0" indent="0" algn="l" rtl="0">
@@ -3314,9 +3302,7 @@
               <a:defRPr/>
             </a:pPr>
             <a:r>
-              <a:rPr lang="ko-KR" altLang="en-US">
-                <a:latin typeface="맑은 고딕"/>
-              </a:rPr>
+              <a:rPr lang="ko-KR" altLang="en-US"/>
               <a:t/>
             </a:r>
             <a:endParaRPr lang="ko-KR" altLang="en-US"/>
@@ -3423,9 +3409,7 @@
               <a:defRPr/>
             </a:pPr>
             <a:r>
-              <a:rPr lang="ko-KR" altLang="en-US">
-                <a:latin typeface="맑은 고딕"/>
-              </a:rPr>
+              <a:rPr lang="ko-KR" altLang="en-US"/>
               <a:t/>
             </a:r>
             <a:endParaRPr lang="ko-KR" altLang="en-US"/>
@@ -3532,9 +3516,7 @@
               <a:defRPr/>
             </a:pPr>
             <a:r>
-              <a:rPr lang="ko-KR" altLang="en-US">
-                <a:latin typeface="맑은 고딕"/>
-              </a:rPr>
+              <a:rPr lang="ko-KR" altLang="en-US"/>
               <a:t/>
             </a:r>
             <a:endParaRPr lang="ko-KR" altLang="en-US"/>
@@ -3977,9 +3959,7 @@
               <a:defRPr/>
             </a:pPr>
             <a:r>
-              <a:rPr lang="ko-KR" altLang="en-US">
-                <a:latin typeface="맑은 고딕"/>
-              </a:rPr>
+              <a:rPr lang="ko-KR" altLang="en-US"/>
               <a:t/>
             </a:r>
             <a:endParaRPr lang="ko-KR" altLang="en-US"/>
@@ -4254,9 +4234,7 @@
               <a:defRPr/>
             </a:pPr>
             <a:r>
-              <a:rPr lang="ko-KR" altLang="en-US">
-                <a:latin typeface="맑은 고딕"/>
-              </a:rPr>
+              <a:rPr lang="ko-KR" altLang="en-US"/>
               <a:t/>
             </a:r>
             <a:endParaRPr lang="ko-KR" altLang="en-US"/>
@@ -4531,9 +4509,7 @@
               <a:defRPr/>
             </a:pPr>
             <a:r>
-              <a:rPr lang="ko-KR" altLang="en-US">
-                <a:latin typeface="맑은 고딕"/>
-              </a:rPr>
+              <a:rPr lang="ko-KR" altLang="en-US"/>
               <a:t/>
             </a:r>
             <a:endParaRPr lang="ko-KR" altLang="en-US"/>
@@ -15346,8 +15322,8 @@
         </p:nvSpPr>
         <p:spPr>
           <a:xfrm>
-            <a:off x="914400" y="1783080"/>
-            <a:ext cx="10607040" cy="4389120"/>
+            <a:off x="822960" y="1600200"/>
+            <a:ext cx="10789920" cy="4754880"/>
           </a:xfrm>
           <a:prstGeom prst="rect">
             <a:avLst/>
@@ -15362,17 +15338,52 @@
           <a:p>
             <a:pPr>
               <a:spcAft>
+                <a:spcPts val="200"/>
+              </a:spcAft>
+            </a:pPr>
+            <a:r>
+              <a:rPr sz="1700" b="1">
+                <a:solidFill>
+                  <a:srgbClr val="202020"/>
+                </a:solidFill>
+                <a:latin typeface="맑은 고딕"/>
+                <a:ea typeface="맑은 고딕"/>
+              </a:rPr>
+              <a:t>① 미착용 필터 — 반지를 3시간 이상 벗어둔 날은 그날 기록 전체를 제외</a:t>
+            </a:r>
+          </a:p>
+          <a:p>
+            <a:pPr>
+              <a:spcAft>
                 <a:spcPts val="1000"/>
               </a:spcAft>
             </a:pPr>
             <a:r>
-              <a:rPr sz="1800" b="1">
+              <a:rPr sz="1400" b="1">
+                <a:solidFill>
+                  <a:srgbClr val="666666"/>
+                </a:solidFill>
+                <a:latin typeface="맑은 고딕"/>
+                <a:ea typeface="맑은 고딕"/>
+              </a:rPr>
+              <a:t>     '걸음 0'이 실제가 아니라 가짜 값이기 때문 — 남기면 모델이 엉뚱한 패턴을 학습</a:t>
+            </a:r>
+          </a:p>
+          <a:p>
+            <a:pPr>
+              <a:spcAft>
+                <a:spcPts val="200"/>
+              </a:spcAft>
+            </a:pPr>
+            <a:r>
+              <a:rPr sz="1700" b="1">
                 <a:solidFill>
                   <a:srgbClr val="202020"/>
                 </a:solidFill>
                 <a:latin typeface="맑은 고딕"/>
+                <a:ea typeface="맑은 고딕"/>
               </a:rPr>
-              <a:t>① 신뢰 필터 — 반지 미착용이 긴 날(180분 이상)은 그날 기록 전체를 제외</a:t>
+              <a:t>② 매칭 — 흩어진 활동·수면·진단 파일을 사람(식별자) 기준으로 연결, 174명 전원 확인</a:t>
             </a:r>
           </a:p>
           <a:p>
@@ -15382,13 +15393,31 @@
               </a:spcAft>
             </a:pPr>
             <a:r>
-              <a:rPr sz="1800" b="1">
+              <a:rPr sz="1400" b="1">
+                <a:solidFill>
+                  <a:srgbClr val="666666"/>
+                </a:solidFill>
+                <a:latin typeface="맑은 고딕"/>
+                <a:ea typeface="맑은 고딕"/>
+              </a:rPr>
+              <a:t>     세 파일이 따로 제공되어, 연결이 맞아야 라벨과 기록이 짝지어짐</a:t>
+            </a:r>
+          </a:p>
+          <a:p>
+            <a:pPr>
+              <a:spcAft>
+                <a:spcPts val="200"/>
+              </a:spcAft>
+            </a:pPr>
+            <a:r>
+              <a:rPr sz="1700" b="1">
                 <a:solidFill>
                   <a:srgbClr val="202020"/>
                 </a:solidFill>
                 <a:latin typeface="맑은 고딕"/>
+                <a:ea typeface="맑은 고딕"/>
               </a:rPr>
-              <a:t>② 매칭 — 활동·수면 기록을 사람 기준으로 진단 결과와 연결 (174명 전원 확인)</a:t>
+              <a:t>③ 사람 단위 요약 — 사람마다 28~118일로 기록 길이가 달라, 지표별 평균 + 표준편차로 압축</a:t>
             </a:r>
           </a:p>
           <a:p>
@@ -15398,43 +15427,63 @@
               </a:spcAft>
             </a:pPr>
             <a:r>
-              <a:rPr sz="1800" b="1">
+              <a:rPr sz="1400" b="1">
+                <a:solidFill>
+                  <a:srgbClr val="666666"/>
+                </a:solidFill>
+                <a:latin typeface="맑은 고딕"/>
+                <a:ea typeface="맑은 고딕"/>
+              </a:rPr>
+              <a:t>     평균 = 평소 수준, 표준편차 = 날마다의 들쭉날쭉함(변동성)</a:t>
+            </a:r>
+          </a:p>
+          <a:p>
+            <a:pPr>
+              <a:spcAft>
+                <a:spcPts val="200"/>
+              </a:spcAft>
+            </a:pPr>
+            <a:r>
+              <a:rPr sz="1700" b="1">
                 <a:solidFill>
                   <a:srgbClr val="202020"/>
                 </a:solidFill>
                 <a:latin typeface="맑은 고딕"/>
+                <a:ea typeface="맑은 고딕"/>
               </a:rPr>
-              <a:t>③ 요약 — 사람 1명당 28~118일 기록을 지표별 평균 + 표준편차(들쭉날쭉함)로 압축</a:t>
+              <a:t>④ 파생 지표 — 취침·기상 시각의 들쭉날쭉함(수면 리듬), 걸음 수 변동계수 생성</a:t>
             </a:r>
           </a:p>
           <a:p>
             <a:pPr>
               <a:spcAft>
-                <a:spcPts val="1600"/>
-              </a:spcAft>
-            </a:pPr>
-            <a:r>
-              <a:rPr sz="1800" b="1">
-                <a:solidFill>
-                  <a:srgbClr val="202020"/>
+                <a:spcPts val="1400"/>
+              </a:spcAft>
+            </a:pPr>
+            <a:r>
+              <a:rPr sz="1400" b="1">
+                <a:solidFill>
+                  <a:srgbClr val="666666"/>
                 </a:solidFill>
                 <a:latin typeface="맑은 고딕"/>
+                <a:ea typeface="맑은 고딕"/>
               </a:rPr>
-              <a:t>④ 파생 — 취침·기상 시각의 들쭉날쭉함(수면 리듬), 걸음 수 변동계수 생성</a:t>
+              <a:t>     평균만으로는 '리듬이 무너지는 신호'를 못 봄 — 뒤의 분석에서 핵심 지표가 됨</a:t>
             </a:r>
           </a:p>
           <a:p>
             <a:pPr>
               <a:spcAft>
-                <a:spcPts val="1600"/>
-              </a:spcAft>
-            </a:pPr>
-            <a:r>
-              <a:rPr sz="2000" b="1">
+                <a:spcPts val="600"/>
+              </a:spcAft>
+            </a:pPr>
+            <a:r>
+              <a:rPr sz="1900" b="1">
                 <a:solidFill>
                   <a:srgbClr val="104281"/>
                 </a:solidFill>
                 <a:latin typeface="맑은 고딕"/>
+                <a:ea typeface="맑은 고딕"/>
               </a:rPr>
               <a:t>→ 174명 × 44개 지표 테이블 완성 — 이후 모든 분석·모델·서비스의 출발점</a:t>
             </a:r>
@@ -15446,11 +15495,12 @@
               </a:spcAft>
             </a:pPr>
             <a:r>
-              <a:rPr sz="1400" b="1">
+              <a:rPr sz="1300" b="1">
                 <a:solidFill>
                   <a:srgbClr val="666666"/>
                 </a:solidFill>
                 <a:latin typeface="맑은 고딕"/>
+                <a:ea typeface="맑은 고딕"/>
               </a:rPr>
               <a:t>전처리 기준은 전부 코드로 고정 — 같은 원본을 넣으면 누가 실행해도 같은 표가 나온다</a:t>
             </a:r>
@@ -16984,68 +17034,6 @@
       </p:grpSpPr>
       <p:sp>
         <p:nvSpPr>
-          <p:cNvPr id="228" name="Google Shape;228;p13"/>
-          <p:cNvSpPr/>
-          <p:nvPr/>
-        </p:nvSpPr>
-        <p:spPr>
-          <a:xfrm>
-            <a:off x="0" y="0"/>
-            <a:ext cx="12191695" cy="146304"/>
-          </a:xfrm>
-          <a:prstGeom prst="rect">
-            <a:avLst/>
-          </a:prstGeom>
-          <a:solidFill>
-            <a:srgbClr val="104281"/>
-          </a:solidFill>
-          <a:ln>
-            <a:noFill/>
-          </a:ln>
-          <a:effectLst>
-            <a:outerShdw blurRad="40000" rotWithShape="0" dir="5400000" dist="23000">
-              <a:srgbClr val="000000">
-                <a:alpha val="34902"/>
-              </a:srgbClr>
-            </a:outerShdw>
-          </a:effectLst>
-        </p:spPr>
-        <p:txBody>
-          <a:bodyPr anchorCtr="0" anchor="ctr" bIns="45700" lIns="91425" spcFirstLastPara="1" rIns="91425" wrap="square" tIns="45700">
-            <a:noAutofit/>
-          </a:bodyPr>
-          <a:lstStyle/>
-          <a:p>
-            <a:pPr indent="0" lvl="0" marL="0" marR="0" rtl="0" algn="ctr">
-              <a:spcBef>
-                <a:spcPts val="0"/>
-              </a:spcBef>
-              <a:spcAft>
-                <a:spcPts val="0"/>
-              </a:spcAft>
-              <a:buNone/>
-            </a:pPr>
-            <a:r>
-              <a:rPr>
-                <a:latin typeface="맑은 고딕"/>
-                <a:ea typeface="맑은 고딕"/>
-              </a:rPr>
-              <a:t/>
-            </a:r>
-            <a:endParaRPr b="0" i="0" sz="1800" u="none" cap="none" strike="noStrike">
-              <a:solidFill>
-                <a:schemeClr val="lt1"/>
-              </a:solidFill>
-              <a:latin typeface="Calibri"/>
-              <a:ea typeface="Calibri"/>
-              <a:cs typeface="Calibri"/>
-              <a:sym typeface="Calibri"/>
-            </a:endParaRPr>
-          </a:p>
-        </p:txBody>
-      </p:sp>
-      <p:sp>
-        <p:nvSpPr>
           <p:cNvPr id="229" name="Google Shape;229;p13"/>
           <p:cNvSpPr txBox="1"/>
           <p:nvPr/>
@@ -17194,504 +17182,189 @@
           </a:p>
         </p:txBody>
       </p:sp>
-      <p:graphicFrame>
-        <p:nvGraphicFramePr>
-          <p:cNvPr id="232" name="Google Shape;232;p13"/>
-          <p:cNvGraphicFramePr/>
-          <p:nvPr/>
-        </p:nvGraphicFramePr>
-        <p:xfrm>
-          <a:off x="731520" y="1645920"/>
-          <a:ext cx="3000000" cy="3000000"/>
-        </p:xfrm>
-        <a:graphic>
-          <a:graphicData uri="http://schemas.openxmlformats.org/drawingml/2006/table">
-            <a:tbl>
-              <a:tblPr bandRow="1" firstRow="1">
-                <a:noFill/>
-                <a:tableStyleId>{3DE3693A-EF05-4C50-91A9-67FE5D2D02F8}</a:tableStyleId>
-              </a:tblPr>
-              <a:tblGrid>
-                <a:gridCol w="3941650"/>
-                <a:gridCol w="2217175"/>
-                <a:gridCol w="2217175"/>
-                <a:gridCol w="2217175"/>
-              </a:tblGrid>
-              <a:tr h="548650">
-                <a:tc>
-                  <a:txBody>
-                    <a:bodyPr/>
-                    <a:lstStyle/>
-                    <a:p>
-                      <a:pPr indent="0" lvl="0" marL="0" marR="0" rtl="0" algn="l">
-                        <a:spcBef>
-                          <a:spcPts val="0"/>
-                        </a:spcBef>
-                        <a:spcAft>
-                          <a:spcPts val="0"/>
-                        </a:spcAft>
-                        <a:buNone/>
-                      </a:pPr>
-                      <a:r>
-                        <a:rPr>
-                          <a:latin typeface="맑은 고딕"/>
-                          <a:ea typeface="맑은 고딕"/>
-                        </a:rPr>
-                        <a:t/>
-                      </a:r>
-                      <a:endParaRPr sz="1800" u="none" cap="none" strike="noStrike"/>
-                    </a:p>
-                  </a:txBody>
-                  <a:tcPr marT="45725" marB="45725" marR="91450" marL="91450" anchor="ctr">
-                    <a:solidFill>
-                      <a:srgbClr val="104281"/>
-                    </a:solidFill>
-                  </a:tcPr>
-                </a:tc>
-                <a:tc>
-                  <a:txBody>
-                    <a:bodyPr/>
-                    <a:lstStyle/>
-                    <a:p>
-                      <a:pPr indent="0" lvl="0" marL="0" marR="0" rtl="0" algn="l">
-                        <a:spcBef>
-                          <a:spcPts val="0"/>
-                        </a:spcBef>
-                        <a:spcAft>
-                          <a:spcPts val="0"/>
-                        </a:spcAft>
-                        <a:buNone/>
-                      </a:pPr>
-                      <a:r>
-                        <a:rPr b="1" lang="en-US" sz="1700" u="none" cap="none" strike="noStrike">
-                          <a:solidFill>
-                            <a:srgbClr val="FFFFFF"/>
-                          </a:solidFill>
-                          <a:latin typeface="맑은 고딕"/>
-                          <a:ea typeface="맑은 고딕"/>
-                          <a:cs typeface="Malgun Gothic"/>
-                          <a:sym typeface="Malgun Gothic"/>
-                        </a:rPr>
-                        <a:t>정확도</a:t>
-                      </a:r>
-                      <a:endParaRPr/>
-                    </a:p>
-                  </a:txBody>
-                  <a:tcPr marT="45725" marB="45725" marR="91450" marL="91450" anchor="ctr">
-                    <a:solidFill>
-                      <a:srgbClr val="104281"/>
-                    </a:solidFill>
-                  </a:tcPr>
-                </a:tc>
-                <a:tc>
-                  <a:txBody>
-                    <a:bodyPr/>
-                    <a:lstStyle/>
-                    <a:p>
-                      <a:pPr indent="0" lvl="0" marL="0" marR="0" rtl="0" algn="l">
-                        <a:spcBef>
-                          <a:spcPts val="0"/>
-                        </a:spcBef>
-                        <a:spcAft>
-                          <a:spcPts val="0"/>
-                        </a:spcAft>
-                        <a:buNone/>
-                      </a:pPr>
-                      <a:r>
-                        <a:rPr b="1" lang="en-US" sz="1700" u="none" cap="none" strike="noStrike">
-                          <a:solidFill>
-                            <a:srgbClr val="FFFFFF"/>
-                          </a:solidFill>
-                          <a:latin typeface="맑은 고딕"/>
-                          <a:ea typeface="맑은 고딕"/>
-                          <a:cs typeface="Malgun Gothic"/>
-                          <a:sym typeface="Malgun Gothic"/>
-                        </a:rPr>
-                        <a:t>위험군 재현율</a:t>
-                      </a:r>
-                      <a:endParaRPr/>
-                    </a:p>
-                  </a:txBody>
-                  <a:tcPr marT="45725" marB="45725" marR="91450" marL="91450" anchor="ctr">
-                    <a:solidFill>
-                      <a:srgbClr val="104281"/>
-                    </a:solidFill>
-                  </a:tcPr>
-                </a:tc>
-                <a:tc>
-                  <a:txBody>
-                    <a:bodyPr/>
-                    <a:lstStyle/>
-                    <a:p>
-                      <a:pPr indent="0" lvl="0" marL="0" marR="0" rtl="0" algn="l">
-                        <a:spcBef>
-                          <a:spcPts val="0"/>
-                        </a:spcBef>
-                        <a:spcAft>
-                          <a:spcPts val="0"/>
-                        </a:spcAft>
-                        <a:buNone/>
-                      </a:pPr>
-                      <a:r>
-                        <a:rPr b="1" lang="en-US" sz="1700" u="none" cap="none" strike="noStrike">
-                          <a:solidFill>
-                            <a:srgbClr val="FFFFFF"/>
-                          </a:solidFill>
-                          <a:latin typeface="맑은 고딕"/>
-                          <a:ea typeface="맑은 고딕"/>
-                          <a:cs typeface="Malgun Gothic"/>
-                          <a:sym typeface="Malgun Gothic"/>
-                        </a:rPr>
-                        <a:t>AUC</a:t>
-                      </a:r>
-                      <a:endParaRPr/>
-                    </a:p>
-                  </a:txBody>
-                  <a:tcPr marT="45725" marB="45725" marR="91450" marL="91450" anchor="ctr">
-                    <a:solidFill>
-                      <a:srgbClr val="104281"/>
-                    </a:solidFill>
-                  </a:tcPr>
-                </a:tc>
-              </a:tr>
-              <a:tr h="548650">
-                <a:tc>
-                  <a:txBody>
-                    <a:bodyPr/>
-                    <a:lstStyle/>
-                    <a:p>
-                      <a:pPr indent="0" lvl="0" marL="0" marR="0" rtl="0" algn="l">
-                        <a:spcBef>
-                          <a:spcPts val="0"/>
-                        </a:spcBef>
-                        <a:spcAft>
-                          <a:spcPts val="0"/>
-                        </a:spcAft>
-                        <a:buNone/>
-                      </a:pPr>
-                      <a:r>
-                        <a:rPr b="1" lang="en-US" sz="1600" u="none" cap="none" strike="noStrike">
-                          <a:solidFill>
-                            <a:srgbClr val="202020"/>
-                          </a:solidFill>
-                          <a:latin typeface="맑은 고딕"/>
-                          <a:ea typeface="맑은 고딕"/>
-                          <a:cs typeface="Malgun Gothic"/>
-                          <a:sym typeface="Malgun Gothic"/>
-                        </a:rPr>
-                        <a:t>RandomForest</a:t>
-                      </a:r>
-                      <a:endParaRPr/>
-                    </a:p>
-                  </a:txBody>
-                  <a:tcPr marT="45725" marB="45725" marR="91450" marL="91450" anchor="ctr">
-                    <a:solidFill>
-                      <a:srgbClr val="FFFFFF"/>
-                    </a:solidFill>
-                  </a:tcPr>
-                </a:tc>
-                <a:tc>
-                  <a:txBody>
-                    <a:bodyPr/>
-                    <a:lstStyle/>
-                    <a:p>
-                      <a:pPr indent="0" lvl="0" marL="0" marR="0" rtl="0" algn="l">
-                        <a:spcBef>
-                          <a:spcPts val="0"/>
-                        </a:spcBef>
-                        <a:spcAft>
-                          <a:spcPts val="0"/>
-                        </a:spcAft>
-                        <a:buNone/>
-                      </a:pPr>
-                      <a:r>
-                        <a:rPr b="1" lang="en-US" sz="1600" u="none" cap="none" strike="noStrike">
-                          <a:solidFill>
-                            <a:srgbClr val="202020"/>
-                          </a:solidFill>
-                          <a:latin typeface="맑은 고딕"/>
-                          <a:ea typeface="맑은 고딕"/>
-                          <a:cs typeface="Malgun Gothic"/>
-                          <a:sym typeface="Malgun Gothic"/>
-                        </a:rPr>
-                        <a:t>58.0%</a:t>
-                      </a:r>
-                      <a:endParaRPr/>
-                    </a:p>
-                  </a:txBody>
-                  <a:tcPr marT="45725" marB="45725" marR="91450" marL="91450" anchor="ctr">
-                    <a:solidFill>
-                      <a:srgbClr val="FFFFFF"/>
-                    </a:solidFill>
-                  </a:tcPr>
-                </a:tc>
-                <a:tc>
-                  <a:txBody>
-                    <a:bodyPr/>
-                    <a:lstStyle/>
-                    <a:p>
-                      <a:pPr indent="0" lvl="0" marL="0" marR="0" rtl="0" algn="l">
-                        <a:spcBef>
-                          <a:spcPts val="0"/>
-                        </a:spcBef>
-                        <a:spcAft>
-                          <a:spcPts val="0"/>
-                        </a:spcAft>
-                        <a:buNone/>
-                      </a:pPr>
-                      <a:r>
-                        <a:rPr b="1" lang="en-US" sz="1600" u="none" cap="none" strike="noStrike">
-                          <a:solidFill>
-                            <a:srgbClr val="202020"/>
-                          </a:solidFill>
-                          <a:latin typeface="맑은 고딕"/>
-                          <a:ea typeface="맑은 고딕"/>
-                          <a:cs typeface="Malgun Gothic"/>
-                          <a:sym typeface="Malgun Gothic"/>
-                        </a:rPr>
-                        <a:t>38.7%</a:t>
-                      </a:r>
-                      <a:endParaRPr/>
-                    </a:p>
-                  </a:txBody>
-                  <a:tcPr marT="45725" marB="45725" marR="91450" marL="91450" anchor="ctr">
-                    <a:solidFill>
-                      <a:srgbClr val="FFFFFF"/>
-                    </a:solidFill>
-                  </a:tcPr>
-                </a:tc>
-                <a:tc>
-                  <a:txBody>
-                    <a:bodyPr/>
-                    <a:lstStyle/>
-                    <a:p>
-                      <a:pPr indent="0" lvl="0" marL="0" marR="0" rtl="0" algn="l">
-                        <a:spcBef>
-                          <a:spcPts val="0"/>
-                        </a:spcBef>
-                        <a:spcAft>
-                          <a:spcPts val="0"/>
-                        </a:spcAft>
-                        <a:buNone/>
-                      </a:pPr>
-                      <a:r>
-                        <a:rPr b="1" lang="en-US" sz="1600" u="none" cap="none" strike="noStrike">
-                          <a:solidFill>
-                            <a:srgbClr val="202020"/>
-                          </a:solidFill>
-                          <a:latin typeface="맑은 고딕"/>
-                          <a:ea typeface="맑은 고딕"/>
-                          <a:cs typeface="Malgun Gothic"/>
-                          <a:sym typeface="Malgun Gothic"/>
-                        </a:rPr>
-                        <a:t>0.549</a:t>
-                      </a:r>
-                      <a:endParaRPr/>
-                    </a:p>
-                  </a:txBody>
-                  <a:tcPr marT="45725" marB="45725" marR="91450" marL="91450" anchor="ctr">
-                    <a:solidFill>
-                      <a:srgbClr val="FFFFFF"/>
-                    </a:solidFill>
-                  </a:tcPr>
-                </a:tc>
-              </a:tr>
-              <a:tr h="548650">
-                <a:tc>
-                  <a:txBody>
-                    <a:bodyPr/>
-                    <a:lstStyle/>
-                    <a:p>
-                      <a:pPr indent="0" lvl="0" marL="0" marR="0" rtl="0" algn="l">
-                        <a:spcBef>
-                          <a:spcPts val="0"/>
-                        </a:spcBef>
-                        <a:spcAft>
-                          <a:spcPts val="0"/>
-                        </a:spcAft>
-                        <a:buNone/>
-                      </a:pPr>
-                      <a:r>
-                        <a:rPr b="1" lang="en-US" sz="1600" u="none" cap="none" strike="noStrike">
-                          <a:solidFill>
-                            <a:srgbClr val="C44E52"/>
-                          </a:solidFill>
-                          <a:latin typeface="맑은 고딕"/>
-                          <a:ea typeface="맑은 고딕"/>
-                          <a:cs typeface="Malgun Gothic"/>
-                          <a:sym typeface="Malgun Gothic"/>
-                        </a:rPr>
-                        <a:t>로지스틱 회귀 (최종 채택)</a:t>
-                      </a:r>
-                      <a:endParaRPr/>
-                    </a:p>
-                  </a:txBody>
-                  <a:tcPr marT="45725" marB="45725" marR="91450" marL="91450" anchor="ctr">
-                    <a:solidFill>
-                      <a:srgbClr val="EEF3FB"/>
-                    </a:solidFill>
-                  </a:tcPr>
-                </a:tc>
-                <a:tc>
-                  <a:txBody>
-                    <a:bodyPr/>
-                    <a:lstStyle/>
-                    <a:p>
-                      <a:pPr indent="0" lvl="0" marL="0" marR="0" rtl="0" algn="l">
-                        <a:spcBef>
-                          <a:spcPts val="0"/>
-                        </a:spcBef>
-                        <a:spcAft>
-                          <a:spcPts val="0"/>
-                        </a:spcAft>
-                        <a:buNone/>
-                      </a:pPr>
-                      <a:r>
-                        <a:rPr b="1" lang="en-US" sz="1600" u="none" cap="none" strike="noStrike">
-                          <a:solidFill>
-                            <a:srgbClr val="C44E52"/>
-                          </a:solidFill>
-                          <a:latin typeface="맑은 고딕"/>
-                          <a:ea typeface="맑은 고딕"/>
-                          <a:cs typeface="Malgun Gothic"/>
-                          <a:sym typeface="Malgun Gothic"/>
-                        </a:rPr>
-                        <a:t>60.2%</a:t>
-                      </a:r>
-                      <a:endParaRPr/>
-                    </a:p>
-                  </a:txBody>
-                  <a:tcPr marT="45725" marB="45725" marR="91450" marL="91450" anchor="ctr">
-                    <a:solidFill>
-                      <a:srgbClr val="EEF3FB"/>
-                    </a:solidFill>
-                  </a:tcPr>
-                </a:tc>
-                <a:tc>
-                  <a:txBody>
-                    <a:bodyPr/>
-                    <a:lstStyle/>
-                    <a:p>
-                      <a:pPr indent="0" lvl="0" marL="0" marR="0" rtl="0" algn="l">
-                        <a:spcBef>
-                          <a:spcPts val="0"/>
-                        </a:spcBef>
-                        <a:spcAft>
-                          <a:spcPts val="0"/>
-                        </a:spcAft>
-                        <a:buNone/>
-                      </a:pPr>
-                      <a:r>
-                        <a:rPr b="1" lang="en-US" sz="1600" u="none" cap="none" strike="noStrike">
-                          <a:solidFill>
-                            <a:srgbClr val="C44E52"/>
-                          </a:solidFill>
-                          <a:latin typeface="맑은 고딕"/>
-                          <a:ea typeface="맑은 고딕"/>
-                          <a:cs typeface="Malgun Gothic"/>
-                          <a:sym typeface="Malgun Gothic"/>
-                        </a:rPr>
-                        <a:t>52.7%</a:t>
-                      </a:r>
-                      <a:endParaRPr/>
-                    </a:p>
-                  </a:txBody>
-                  <a:tcPr marT="45725" marB="45725" marR="91450" marL="91450" anchor="ctr">
-                    <a:solidFill>
-                      <a:srgbClr val="EEF3FB"/>
-                    </a:solidFill>
-                  </a:tcPr>
-                </a:tc>
-                <a:tc>
-                  <a:txBody>
-                    <a:bodyPr/>
-                    <a:lstStyle/>
-                    <a:p>
-                      <a:pPr indent="0" lvl="0" marL="0" marR="0" rtl="0" algn="l">
-                        <a:spcBef>
-                          <a:spcPts val="0"/>
-                        </a:spcBef>
-                        <a:spcAft>
-                          <a:spcPts val="0"/>
-                        </a:spcAft>
-                        <a:buNone/>
-                      </a:pPr>
-                      <a:r>
-                        <a:rPr b="1" lang="en-US" sz="1600" u="none" cap="none" strike="noStrike">
-                          <a:solidFill>
-                            <a:srgbClr val="C44E52"/>
-                          </a:solidFill>
-                          <a:latin typeface="맑은 고딕"/>
-                          <a:ea typeface="맑은 고딕"/>
-                          <a:cs typeface="Malgun Gothic"/>
-                          <a:sym typeface="Malgun Gothic"/>
-                        </a:rPr>
-                        <a:t>0.601</a:t>
-                      </a:r>
-                      <a:endParaRPr/>
-                    </a:p>
-                  </a:txBody>
-                  <a:tcPr marT="45725" marB="45725" marR="91450" marL="91450" anchor="ctr">
-                    <a:solidFill>
-                      <a:srgbClr val="EEF3FB"/>
-                    </a:solidFill>
-                  </a:tcPr>
-                </a:tc>
-              </a:tr>
-            </a:tbl>
-          </a:graphicData>
-        </a:graphic>
-      </p:graphicFrame>
       <p:sp>
         <p:nvSpPr>
-          <p:cNvPr id="233" name="Google Shape;233;p13"/>
+          <p:cNvPr id="234" name="TextBox 233"/>
           <p:cNvSpPr txBox="1"/>
           <p:nvPr/>
         </p:nvSpPr>
         <p:spPr>
           <a:xfrm>
-            <a:off x="777240" y="4519405"/>
-            <a:ext cx="10698480" cy="1470743"/>
+            <a:off x="6355080" y="1645920"/>
+            <a:ext cx="5486400" cy="4937760"/>
           </a:xfrm>
           <a:prstGeom prst="rect">
             <a:avLst/>
           </a:prstGeom>
           <a:noFill/>
-          <a:ln>
-            <a:noFill/>
-          </a:ln>
         </p:spPr>
         <p:txBody>
-          <a:bodyPr anchorCtr="0" anchor="t" bIns="45700" lIns="91425" spcFirstLastPara="1" rIns="91425" wrap="square" tIns="45700">
+          <a:bodyPr wrap="square">
             <a:spAutoFit/>
           </a:bodyPr>
           <a:lstStyle/>
           <a:p>
-            <a:pPr indent="0" lvl="0" marL="0" marR="0" rtl="0" algn="l">
-              <a:spcBef>
-                <a:spcPts val="0"/>
-              </a:spcBef>
-              <a:spcAft>
-                <a:spcPts val="0"/>
-              </a:spcAft>
-              <a:buNone/>
-            </a:pPr>
-            <a:r>
-              <a:rPr b="1" i="0" lang="en-US" sz="1700" u="none" cap="none" strike="noStrike">
-                <a:solidFill>
-                  <a:srgbClr val="104281"/>
+            <a:pPr>
+              <a:spcAft>
+                <a:spcPts val="200"/>
+              </a:spcAft>
+            </a:pPr>
+            <a:r>
+              <a:rPr sz="1600" b="1">
+                <a:solidFill>
+                  <a:srgbClr val="2A78D6"/>
                 </a:solidFill>
                 <a:latin typeface="맑은 고딕"/>
                 <a:ea typeface="맑은 고딕"/>
-                <a:cs typeface="Malgun Gothic"/>
-                <a:sym typeface="Malgun Gothic"/>
               </a:rPr>
-              <a:t>174명 소표본에서는 단순한 모델이 잡음에 덜 흔들린다 — 50회 반복 비교에서 로지스틱 회귀가 모든 지표 우위</a:t>
-            </a:r>
-            <a:endParaRPr/>
+              <a:t>어떻게 측정했나</a:t>
+            </a:r>
+          </a:p>
+          <a:p>
+            <a:pPr>
+              <a:spcAft>
+                <a:spcPts val="1000"/>
+              </a:spcAft>
+            </a:pPr>
+            <a:r>
+              <a:rPr sz="1450" b="1">
+                <a:solidFill>
+                  <a:srgbClr val="202020"/>
+                </a:solidFill>
+                <a:latin typeface="맑은 고딕"/>
+                <a:ea typeface="맑은 고딕"/>
+              </a:rPr>
+              <a:t>데이터를 50번 다르게 나눠(5조각×10회) 반복 평가한 평균 — 한 번의 운에 좌우되지 않게</a:t>
+            </a:r>
+          </a:p>
+          <a:p>
+            <a:pPr>
+              <a:spcAft>
+                <a:spcPts val="200"/>
+              </a:spcAft>
+            </a:pPr>
+            <a:r>
+              <a:rPr sz="1600" b="1">
+                <a:solidFill>
+                  <a:srgbClr val="2A78D6"/>
+                </a:solidFill>
+                <a:latin typeface="맑은 고딕"/>
+                <a:ea typeface="맑은 고딕"/>
+              </a:rPr>
+              <a:t>왜 두 모델을 비교했나</a:t>
+            </a:r>
+          </a:p>
+          <a:p>
+            <a:pPr>
+              <a:spcAft>
+                <a:spcPts val="1000"/>
+              </a:spcAft>
+            </a:pPr>
+            <a:r>
+              <a:rPr sz="1450" b="1">
+                <a:solidFill>
+                  <a:srgbClr val="202020"/>
+                </a:solidFill>
+                <a:latin typeface="맑은 고딕"/>
+                <a:ea typeface="맑은 고딕"/>
+              </a:rPr>
+              <a:t>174명 소표본에서 복잡한 모델은 우연한 잡음까지 외울 위험 → 단순한 로지스틱 회귀와 같은 조건에서 비교</a:t>
+            </a:r>
+          </a:p>
+          <a:p>
+            <a:pPr>
+              <a:spcAft>
+                <a:spcPts val="200"/>
+              </a:spcAft>
+            </a:pPr>
+            <a:r>
+              <a:rPr sz="1600" b="1">
+                <a:solidFill>
+                  <a:srgbClr val="2A78D6"/>
+                </a:solidFill>
+                <a:latin typeface="맑은 고딕"/>
+                <a:ea typeface="맑은 고딕"/>
+              </a:rPr>
+              <a:t>주요 결과</a:t>
+            </a:r>
+          </a:p>
+          <a:p>
+            <a:pPr>
+              <a:spcAft>
+                <a:spcPts val="1000"/>
+              </a:spcAft>
+            </a:pPr>
+            <a:r>
+              <a:rPr sz="1450" b="1">
+                <a:solidFill>
+                  <a:srgbClr val="202020"/>
+                </a:solidFill>
+                <a:latin typeface="맑은 고딕"/>
+                <a:ea typeface="맑은 고딕"/>
+              </a:rPr>
+              <a:t>로지스틱 회귀가 모든 지표 우위 — 특히 재현율 38.7 → 52.7%(+14%p)</a:t>
+            </a:r>
+          </a:p>
+          <a:p>
+            <a:pPr>
+              <a:spcAft>
+                <a:spcPts val="200"/>
+              </a:spcAft>
+            </a:pPr>
+            <a:r>
+              <a:rPr sz="1600" b="1">
+                <a:solidFill>
+                  <a:srgbClr val="C00000"/>
+                </a:solidFill>
+                <a:latin typeface="맑은 고딕"/>
+                <a:ea typeface="맑은 고딕"/>
+              </a:rPr>
+              <a:t>해석 — 위험군 2명 중 1명 이상 탐지</a:t>
+            </a:r>
+          </a:p>
+          <a:p>
+            <a:pPr>
+              <a:spcAft>
+                <a:spcPts val="0"/>
+              </a:spcAft>
+            </a:pPr>
+            <a:r>
+              <a:rPr sz="1450" b="1">
+                <a:solidFill>
+                  <a:srgbClr val="202020"/>
+                </a:solidFill>
+                <a:latin typeface="맑은 고딕"/>
+                <a:ea typeface="맑은 고딕"/>
+              </a:rPr>
+              <a:t>스크리닝에서는 정확도보다 '위험군을 놓치지 않는 능력'(재현율·AUC)이 핵심 — 놓치면 병원 갈 기회 자체를 잃기 때문</a:t>
+            </a:r>
           </a:p>
         </p:txBody>
       </p:sp>
+      <p:pic>
+        <p:nvPicPr>
+          <p:cNvPr id="235" name="Picture 234" descr="ppt_model_compare.png"/>
+          <p:cNvPicPr>
+            <a:picLocks noChangeAspect="1"/>
+          </p:cNvPicPr>
+          <p:nvPr/>
+        </p:nvPicPr>
+        <p:blipFill>
+          <a:blip r:embed="rId5"/>
+          <a:stretch>
+            <a:fillRect/>
+          </a:stretch>
+        </p:blipFill>
+        <p:spPr>
+          <a:xfrm>
+            <a:off x="411480" y="1612669"/>
+            <a:ext cx="5669280" cy="4638501"/>
+          </a:xfrm>
+          <a:prstGeom prst="rect">
+            <a:avLst/>
+          </a:prstGeom>
+        </p:spPr>
+      </p:pic>
     </p:spTree>
   </p:cSld>
   <p:clrMapOvr>
@@ -18238,11 +17911,11 @@
 </file>
 
 <file path=ppt/slides/slide16.xml><?xml version="1.0" encoding="utf-8"?>
-<p:sld xmlns:a="http://schemas.openxmlformats.org/drawingml/2006/main" xmlns:r="http://schemas.openxmlformats.org/officeDocument/2006/relationships" xmlns:mc="http://schemas.openxmlformats.org/markup-compatibility/2006" xmlns:mv="urn:schemas-microsoft-com:mac:vml" xmlns:p="http://schemas.openxmlformats.org/presentationml/2006/main" xmlns:c="http://schemas.openxmlformats.org/drawingml/2006/chart" xmlns:dgm="http://schemas.openxmlformats.org/drawingml/2006/diagram" xmlns:o="urn:schemas-microsoft-com:office:office" xmlns:v="urn:schemas-microsoft-com:vml" xmlns:pvml="urn:schemas-microsoft-com:office:powerpoint" xmlns:com="http://schemas.openxmlformats.org/drawingml/2006/compatibility" xmlns:p14="http://schemas.microsoft.com/office/powerpoint/2010/main" xmlns:p15="http://schemas.microsoft.com/office/powerpoint/2012/main" xmlns:ahyp="http://schemas.microsoft.com/office/drawing/2018/hyperlinkcolor">
+<p:sld xmlns:r="http://schemas.openxmlformats.org/officeDocument/2006/relationships" xmlns:c="http://schemas.openxmlformats.org/drawingml/2006/chart" xmlns:a="http://schemas.openxmlformats.org/drawingml/2006/main" xmlns:dgm="http://schemas.openxmlformats.org/drawingml/2006/diagram" xmlns:dsp="http://schemas.microsoft.com/office/drawing/2008/diagram" xmlns:p="http://schemas.openxmlformats.org/presentationml/2006/main">
   <p:cSld>
     <p:spTree>
       <p:nvGrpSpPr>
-        <p:cNvPr id="238" name="Shape 238"/>
+        <p:cNvPr id="1" name=""/>
         <p:cNvGrpSpPr/>
         <p:nvPr/>
       </p:nvGrpSpPr>
@@ -18254,68 +17927,6 @@
           <a:chExt cx="0" cy="0"/>
         </a:xfrm>
       </p:grpSpPr>
-      <p:sp>
-        <p:nvSpPr>
-          <p:cNvPr id="239" name="Google Shape;239;p14"/>
-          <p:cNvSpPr/>
-          <p:nvPr/>
-        </p:nvSpPr>
-        <p:spPr>
-          <a:xfrm>
-            <a:off x="0" y="0"/>
-            <a:ext cx="12191695" cy="146304"/>
-          </a:xfrm>
-          <a:prstGeom prst="rect">
-            <a:avLst/>
-          </a:prstGeom>
-          <a:solidFill>
-            <a:srgbClr val="104281"/>
-          </a:solidFill>
-          <a:ln>
-            <a:noFill/>
-          </a:ln>
-          <a:effectLst>
-            <a:outerShdw blurRad="40000" rotWithShape="0" dir="5400000" dist="23000">
-              <a:srgbClr val="000000">
-                <a:alpha val="34902"/>
-              </a:srgbClr>
-            </a:outerShdw>
-          </a:effectLst>
-        </p:spPr>
-        <p:txBody>
-          <a:bodyPr anchorCtr="0" anchor="ctr" bIns="45700" lIns="91425" spcFirstLastPara="1" rIns="91425" wrap="square" tIns="45700">
-            <a:noAutofit/>
-          </a:bodyPr>
-          <a:lstStyle/>
-          <a:p>
-            <a:pPr indent="0" lvl="0" marL="0" marR="0" rtl="0" algn="ctr">
-              <a:spcBef>
-                <a:spcPts val="0"/>
-              </a:spcBef>
-              <a:spcAft>
-                <a:spcPts val="0"/>
-              </a:spcAft>
-              <a:buNone/>
-            </a:pPr>
-            <a:r>
-              <a:rPr>
-                <a:latin typeface="맑은 고딕"/>
-                <a:ea typeface="맑은 고딕"/>
-              </a:rPr>
-              <a:t/>
-            </a:r>
-            <a:endParaRPr b="0" i="0" sz="1800" u="none" cap="none" strike="noStrike">
-              <a:solidFill>
-                <a:schemeClr val="lt1"/>
-              </a:solidFill>
-              <a:latin typeface="Calibri"/>
-              <a:ea typeface="Calibri"/>
-              <a:cs typeface="Calibri"/>
-              <a:sym typeface="Calibri"/>
-            </a:endParaRPr>
-          </a:p>
-        </p:txBody>
-      </p:sp>
       <p:sp>
         <p:nvSpPr>
           <p:cNvPr id="240" name="Google Shape;240;p14"/>
@@ -18336,40 +17947,41 @@
           </a:ln>
         </p:spPr>
         <p:txBody>
-          <a:bodyPr anchorCtr="0" anchor="t" bIns="45700" lIns="91425" spcFirstLastPara="1" rIns="91425" wrap="square" tIns="45700">
+          <a:bodyPr wrap="square" lIns="91424" tIns="45700" rIns="91424" bIns="45700" anchor="t" anchorCtr="0">
             <a:spAutoFit/>
           </a:bodyPr>
           <a:lstStyle/>
           <a:p>
-            <a:pPr indent="0" lvl="0" marL="0" marR="0" rtl="0" algn="l">
-              <a:spcBef>
-                <a:spcPts val="0"/>
-              </a:spcBef>
-              <a:spcAft>
-                <a:spcPts val="0"/>
-              </a:spcAft>
-              <a:buNone/>
-            </a:pPr>
-            <a:r>
-              <a:rPr b="1" i="0" lang="en-US" sz="1600" u="none" cap="none" strike="noStrike">
-                <a:solidFill>
-                  <a:srgbClr val="2A78D6"/>
+            <a:pPr marL="0" marR="0" lvl="0" indent="0" algn="l" rtl="0">
+              <a:spcBef>
+                <a:spcPts val="0"/>
+              </a:spcBef>
+              <a:spcAft>
+                <a:spcPts val="0"/>
+              </a:spcAft>
+              <a:buNone/>
+              <a:defRPr/>
+            </a:pPr>
+            <a:r>
+              <a:rPr lang="en-US" sz="1600" b="1" i="0" u="none" strike="noStrike" cap="none">
+                <a:solidFill>
+                  <a:srgbClr val="2a78d6"/>
                 </a:solidFill>
                 <a:latin typeface="맑은 고딕"/>
                 <a:ea typeface="맑은 고딕"/>
-                <a:cs typeface="Malgun Gothic"/>
-                <a:sym typeface="Malgun Gothic"/>
+                <a:cs typeface="맑은 고딕"/>
+                <a:sym typeface="맑은 고딕"/>
               </a:rPr>
               <a:t>04. 검증</a:t>
             </a:r>
-            <a:endParaRPr b="1" i="0" sz="1600" u="none" cap="none" strike="noStrike">
+            <a:endParaRPr sz="1600" b="1" i="0" u="none" strike="noStrike" cap="none">
               <a:solidFill>
-                <a:srgbClr val="2A78D6"/>
+                <a:srgbClr val="2a78d6"/>
               </a:solidFill>
-              <a:latin typeface="Malgun Gothic"/>
-              <a:ea typeface="Malgun Gothic"/>
-              <a:cs typeface="Malgun Gothic"/>
-              <a:sym typeface="Malgun Gothic"/>
+              <a:latin typeface="맑은 고딕"/>
+              <a:ea typeface="맑은 고딕"/>
+              <a:cs typeface="맑은 고딕"/>
+              <a:sym typeface="맑은 고딕"/>
             </a:endParaRPr>
           </a:p>
         </p:txBody>
@@ -18394,371 +18006,41 @@
           </a:ln>
         </p:spPr>
         <p:txBody>
-          <a:bodyPr anchorCtr="0" anchor="t" bIns="45700" lIns="91425" spcFirstLastPara="1" rIns="91425" wrap="square" tIns="45700">
+          <a:bodyPr wrap="square" lIns="91424" tIns="45700" rIns="91424" bIns="45700" anchor="t" anchorCtr="0">
             <a:spAutoFit/>
           </a:bodyPr>
           <a:lstStyle/>
           <a:p>
-            <a:pPr indent="0" lvl="0" marL="0" marR="0" rtl="0" algn="l">
-              <a:spcBef>
-                <a:spcPts val="0"/>
-              </a:spcBef>
-              <a:spcAft>
-                <a:spcPts val="0"/>
-              </a:spcAft>
-              <a:buNone/>
-            </a:pPr>
-            <a:r>
-              <a:rPr b="1" i="0" lang="en-US" sz="3000" u="none" cap="none" strike="noStrike">
+            <a:pPr marL="0" marR="0" lvl="0" indent="0" algn="l" rtl="0">
+              <a:spcBef>
+                <a:spcPts val="0"/>
+              </a:spcBef>
+              <a:spcAft>
+                <a:spcPts val="0"/>
+              </a:spcAft>
+              <a:buNone/>
+              <a:defRPr/>
+            </a:pPr>
+            <a:r>
+              <a:rPr lang="en-US" sz="3000" b="1" i="0" u="none" strike="noStrike" cap="none">
                 <a:solidFill>
                   <a:srgbClr val="104281"/>
                 </a:solidFill>
                 <a:latin typeface="맑은 고딕"/>
                 <a:ea typeface="맑은 고딕"/>
-                <a:cs typeface="Malgun Gothic"/>
-                <a:sym typeface="Malgun Gothic"/>
+                <a:cs typeface="맑은 고딕"/>
+                <a:sym typeface="맑은 고딕"/>
               </a:rPr>
               <a:t>Q4 — 치매 12명을 빼도 신호가 남는가?  →  아니오</a:t>
             </a:r>
-            <a:endParaRPr b="1" i="0" sz="3000" u="none" cap="none" strike="noStrike">
+            <a:endParaRPr sz="3000" b="1" i="0" u="none" strike="noStrike" cap="none">
               <a:solidFill>
                 <a:srgbClr val="104281"/>
               </a:solidFill>
-              <a:latin typeface="Malgun Gothic"/>
-              <a:ea typeface="Malgun Gothic"/>
-              <a:cs typeface="Malgun Gothic"/>
-              <a:sym typeface="Malgun Gothic"/>
-            </a:endParaRPr>
-          </a:p>
-        </p:txBody>
-      </p:sp>
-      <p:sp>
-        <p:nvSpPr>
-          <p:cNvPr id="242" name="Google Shape;242;p14"/>
-          <p:cNvSpPr txBox="1"/>
-          <p:nvPr/>
-        </p:nvSpPr>
-        <p:spPr>
-          <a:xfrm>
-            <a:off x="914400" y="1875347"/>
-            <a:ext cx="10845478" cy="3809173"/>
-          </a:xfrm>
-          <a:prstGeom prst="rect">
-            <a:avLst/>
-          </a:prstGeom>
-          <a:noFill/>
-          <a:ln>
-            <a:noFill/>
-          </a:ln>
-        </p:spPr>
-        <p:txBody>
-          <a:bodyPr anchorCtr="0" anchor="t" bIns="45700" lIns="91425" spcFirstLastPara="1" rIns="91425" wrap="square" tIns="45700">
-            <a:spAutoFit/>
-          </a:bodyPr>
-          <a:lstStyle/>
-          <a:p>
-            <a:pPr indent="0" lvl="0" marL="0" marR="0" rtl="0" algn="l">
-              <a:spcBef>
-                <a:spcPts val="0"/>
-              </a:spcBef>
-              <a:spcAft>
-                <a:spcPts val="0"/>
-              </a:spcAft>
-              <a:buNone/>
-            </a:pPr>
-            <a:r>
-              <a:rPr b="1" i="0" lang="en-US" sz="2100" u="none" cap="none" strike="noStrike">
-                <a:solidFill>
-                  <a:srgbClr val="202020"/>
-                </a:solidFill>
-                <a:latin typeface="맑은 고딕"/>
-                <a:ea typeface="맑은 고딕"/>
-                <a:cs typeface="Malgun Gothic"/>
-                <a:sym typeface="Malgun Gothic"/>
-              </a:rPr>
-              <a:t>치매를 완전히 제외하고 정상 111명 vs 경도인지장애 51명만으로 재검증</a:t>
-            </a:r>
-            <a:endParaRPr b="1" i="0" sz="2100" u="none" cap="none" strike="noStrike">
-              <a:solidFill>
-                <a:srgbClr val="202020"/>
-              </a:solidFill>
-              <a:latin typeface="Malgun Gothic"/>
-              <a:ea typeface="Malgun Gothic"/>
-              <a:cs typeface="Malgun Gothic"/>
-              <a:sym typeface="Malgun Gothic"/>
-            </a:endParaRPr>
-          </a:p>
-          <a:p>
-            <a:pPr indent="0" lvl="0" marL="0" marR="0" rtl="0" algn="l">
-              <a:spcBef>
-                <a:spcPts val="600"/>
-              </a:spcBef>
-              <a:spcAft>
-                <a:spcPts val="0"/>
-              </a:spcAft>
-              <a:buNone/>
-            </a:pPr>
-            <a:r>
-              <a:rPr>
-                <a:latin typeface="맑은 고딕"/>
-                <a:ea typeface="맑은 고딕"/>
-              </a:rPr>
-              <a:t/>
-            </a:r>
-            <a:endParaRPr b="1" i="0" sz="1800" u="none" cap="none" strike="noStrike">
-              <a:solidFill>
-                <a:srgbClr val="202020"/>
-              </a:solidFill>
-              <a:latin typeface="Malgun Gothic"/>
-              <a:ea typeface="Malgun Gothic"/>
-              <a:cs typeface="Malgun Gothic"/>
-              <a:sym typeface="Malgun Gothic"/>
-            </a:endParaRPr>
-          </a:p>
-          <a:p>
-            <a:pPr indent="0" lvl="0" marL="0" marR="0" rtl="0" algn="l">
-              <a:spcBef>
-                <a:spcPts val="600"/>
-              </a:spcBef>
-              <a:spcAft>
-                <a:spcPts val="0"/>
-              </a:spcAft>
-              <a:buNone/>
-            </a:pPr>
-            <a:r>
-              <a:rPr b="1" i="0" lang="en-US" sz="2000" u="none" cap="none" strike="noStrike">
-                <a:solidFill>
-                  <a:srgbClr val="202020"/>
-                </a:solidFill>
-                <a:latin typeface="맑은 고딕"/>
-                <a:ea typeface="맑은 고딕"/>
-                <a:cs typeface="Malgun Gothic"/>
-                <a:sym typeface="Malgun Gothic"/>
-              </a:rPr>
-              <a:t>· 기존 44개 지표 → 정확도 55.3% (전부 "정상"이라 답하는 기준선 68.5%에도 미달)</a:t>
-            </a:r>
-            <a:endParaRPr b="1" i="0" sz="2000" u="none" cap="none" strike="noStrike">
-              <a:solidFill>
-                <a:srgbClr val="202020"/>
-              </a:solidFill>
-              <a:latin typeface="Malgun Gothic"/>
-              <a:ea typeface="Malgun Gothic"/>
-              <a:cs typeface="Malgun Gothic"/>
-              <a:sym typeface="Malgun Gothic"/>
-            </a:endParaRPr>
-          </a:p>
-          <a:p>
-            <a:pPr indent="0" lvl="0" marL="0" marR="0" rtl="0" algn="l">
-              <a:spcBef>
-                <a:spcPts val="600"/>
-              </a:spcBef>
-              <a:spcAft>
-                <a:spcPts val="0"/>
-              </a:spcAft>
-              <a:buNone/>
-            </a:pPr>
-            <a:r>
-              <a:rPr b="1" i="0" lang="en-US" sz="2000" u="none" cap="none" strike="noStrike">
-                <a:solidFill>
-                  <a:srgbClr val="202020"/>
-                </a:solidFill>
-                <a:latin typeface="맑은 고딕"/>
-                <a:ea typeface="맑은 고딕"/>
-                <a:cs typeface="Malgun Gothic"/>
-                <a:sym typeface="Malgun Gothic"/>
-              </a:rPr>
-              <a:t>· 시계열 지표 추가 → 여전히 미달   · 모델을 바꿔도 → 동일</a:t>
-            </a:r>
-            <a:endParaRPr b="1" i="0" sz="2000" u="none" cap="none" strike="noStrike">
-              <a:solidFill>
-                <a:srgbClr val="202020"/>
-              </a:solidFill>
-              <a:latin typeface="Malgun Gothic"/>
-              <a:ea typeface="Malgun Gothic"/>
-              <a:cs typeface="Malgun Gothic"/>
-              <a:sym typeface="Malgun Gothic"/>
-            </a:endParaRPr>
-          </a:p>
-          <a:p>
-            <a:pPr indent="0" lvl="0" marL="0" marR="0" rtl="0" algn="l">
-              <a:spcBef>
-                <a:spcPts val="600"/>
-              </a:spcBef>
-              <a:spcAft>
-                <a:spcPts val="0"/>
-              </a:spcAft>
-              <a:buNone/>
-            </a:pPr>
-            <a:r>
-              <a:rPr>
-                <a:latin typeface="맑은 고딕"/>
-                <a:ea typeface="맑은 고딕"/>
-              </a:rPr>
-              <a:t/>
-            </a:r>
-            <a:endParaRPr b="1" i="0" sz="1800" u="none" cap="none" strike="noStrike">
-              <a:solidFill>
-                <a:srgbClr val="202020"/>
-              </a:solidFill>
-              <a:latin typeface="Malgun Gothic"/>
-              <a:ea typeface="Malgun Gothic"/>
-              <a:cs typeface="Malgun Gothic"/>
-              <a:sym typeface="Malgun Gothic"/>
-            </a:endParaRPr>
-          </a:p>
-          <a:p>
-            <a:pPr indent="0" lvl="0" marL="0" marR="0" rtl="0" algn="l">
-              <a:spcBef>
-                <a:spcPts val="600"/>
-              </a:spcBef>
-              <a:spcAft>
-                <a:spcPts val="0"/>
-              </a:spcAft>
-              <a:buNone/>
-            </a:pPr>
-            <a:r>
-              <a:rPr b="1" i="0" lang="en-US" sz="2200" u="none" cap="none" strike="noStrike">
-                <a:solidFill>
-                  <a:srgbClr val="C44E52"/>
-                </a:solidFill>
-                <a:latin typeface="맑은 고딕"/>
-                <a:ea typeface="맑은 고딕"/>
-                <a:cs typeface="Malgun Gothic"/>
-                <a:sym typeface="Malgun Gothic"/>
-              </a:rPr>
-              <a:t>세 번 시도, 같은 결론: 경도인지장애 '단독' 조기 신호는 현재 데이터로는 못 찾았다</a:t>
-            </a:r>
-            <a:endParaRPr b="1" i="0" sz="2200" u="none" cap="none" strike="noStrike">
-              <a:solidFill>
-                <a:srgbClr val="C44E52"/>
-              </a:solidFill>
-              <a:latin typeface="Malgun Gothic"/>
-              <a:ea typeface="Malgun Gothic"/>
-              <a:cs typeface="Malgun Gothic"/>
-              <a:sym typeface="Malgun Gothic"/>
-            </a:endParaRPr>
-          </a:p>
-          <a:p>
-            <a:pPr indent="0" lvl="0" marL="0" marR="0" rtl="0" algn="l">
-              <a:spcBef>
-                <a:spcPts val="600"/>
-              </a:spcBef>
-              <a:spcAft>
-                <a:spcPts val="0"/>
-              </a:spcAft>
-              <a:buNone/>
-            </a:pPr>
-            <a:r>
-              <a:rPr>
-                <a:latin typeface="맑은 고딕"/>
-                <a:ea typeface="맑은 고딕"/>
-              </a:rPr>
-              <a:t/>
-            </a:r>
-            <a:endParaRPr b="1" i="0" sz="1800" u="none" cap="none" strike="noStrike">
-              <a:solidFill>
-                <a:srgbClr val="202020"/>
-              </a:solidFill>
-              <a:latin typeface="Malgun Gothic"/>
-              <a:ea typeface="Malgun Gothic"/>
-              <a:cs typeface="Malgun Gothic"/>
-              <a:sym typeface="Malgun Gothic"/>
-            </a:endParaRPr>
-          </a:p>
-          <a:p>
-            <a:pPr indent="0" lvl="0" marL="0" marR="0" rtl="0" algn="l">
-              <a:spcBef>
-                <a:spcPts val="600"/>
-              </a:spcBef>
-              <a:spcAft>
-                <a:spcPts val="0"/>
-              </a:spcAft>
-              <a:buNone/>
-            </a:pPr>
-            <a:r>
-              <a:rPr b="1" i="0" lang="en-US" sz="2200" u="none" cap="none" strike="noStrike">
-                <a:solidFill>
-                  <a:srgbClr val="104281"/>
-                </a:solidFill>
-                <a:latin typeface="맑은 고딕"/>
-                <a:ea typeface="맑은 고딕"/>
-                <a:cs typeface="Malgun Gothic"/>
-                <a:sym typeface="Malgun Gothic"/>
-              </a:rPr>
-              <a:t>검증이 실제로 한 일 — 서비스 주장 범위를 바꿨다</a:t>
-            </a:r>
-            <a:endParaRPr b="1" i="0" sz="2200" u="none" cap="none" strike="noStrike">
-              <a:solidFill>
-                <a:srgbClr val="104281"/>
-              </a:solidFill>
-              <a:latin typeface="Malgun Gothic"/>
-              <a:ea typeface="Malgun Gothic"/>
-              <a:cs typeface="Malgun Gothic"/>
-              <a:sym typeface="Malgun Gothic"/>
-            </a:endParaRPr>
-          </a:p>
-          <a:p>
-            <a:pPr indent="0" lvl="0" marL="0" marR="0" rtl="0" algn="l">
-              <a:spcBef>
-                <a:spcPts val="600"/>
-              </a:spcBef>
-              <a:spcAft>
-                <a:spcPts val="0"/>
-              </a:spcAft>
-              <a:buNone/>
-            </a:pPr>
-            <a:r>
-              <a:rPr b="1" i="0" lang="en-US" sz="2000" u="none" cap="none" strike="noStrike">
-                <a:solidFill>
-                  <a:srgbClr val="202020"/>
-                </a:solidFill>
-                <a:latin typeface="맑은 고딕"/>
-                <a:ea typeface="맑은 고딕"/>
-                <a:cs typeface="Malgun Gothic"/>
-                <a:sym typeface="Malgun Gothic"/>
-              </a:rPr>
-              <a:t>· "경도인지장애를 조기 진단한다"  →  사용 금지</a:t>
-            </a:r>
-            <a:endParaRPr b="1" i="0" sz="2000" u="none" cap="none" strike="noStrike">
-              <a:solidFill>
-                <a:srgbClr val="202020"/>
-              </a:solidFill>
-              <a:latin typeface="Malgun Gothic"/>
-              <a:ea typeface="Malgun Gothic"/>
-              <a:cs typeface="Malgun Gothic"/>
-              <a:sym typeface="Malgun Gothic"/>
-            </a:endParaRPr>
-          </a:p>
-          <a:p>
-            <a:pPr indent="0" lvl="0" marL="0" marR="0" rtl="0" algn="l">
-              <a:spcBef>
-                <a:spcPts val="600"/>
-              </a:spcBef>
-              <a:spcAft>
-                <a:spcPts val="0"/>
-              </a:spcAft>
-              <a:buNone/>
-            </a:pPr>
-            <a:r>
-              <a:rPr b="1" i="0" lang="en-US" sz="2000" u="none" cap="none" strike="noStrike">
-                <a:solidFill>
-                  <a:srgbClr val="202020"/>
-                </a:solidFill>
-                <a:latin typeface="맑은 고딕"/>
-                <a:ea typeface="맑은 고딕"/>
-                <a:cs typeface="Malgun Gothic"/>
-                <a:sym typeface="Malgun Gothic"/>
-              </a:rPr>
-              <a:t>· "위험군(경도인지장애+치매)을 걸러 검진으로 안내한다"  →  이 범위만 주장</a:t>
-            </a:r>
-            <a:endParaRPr b="1" i="0" sz="2000" u="none" cap="none" strike="noStrike">
-              <a:solidFill>
-                <a:srgbClr val="202020"/>
-              </a:solidFill>
-              <a:latin typeface="Malgun Gothic"/>
-              <a:ea typeface="Malgun Gothic"/>
-              <a:cs typeface="Malgun Gothic"/>
-              <a:sym typeface="Malgun Gothic"/>
+              <a:latin typeface="맑은 고딕"/>
+              <a:ea typeface="맑은 고딕"/>
+              <a:cs typeface="맑은 고딕"/>
+              <a:sym typeface="맑은 고딕"/>
             </a:endParaRPr>
           </a:p>
         </p:txBody>
@@ -18783,41 +18065,235 @@
           </a:ln>
         </p:spPr>
         <p:txBody>
-          <a:bodyPr anchorCtr="0" anchor="t" bIns="45700" lIns="91425" spcFirstLastPara="1" rIns="91425" wrap="square" tIns="45700">
+          <a:bodyPr wrap="square" lIns="91424" tIns="45700" rIns="91424" bIns="45700" anchor="t" anchorCtr="0">
             <a:spAutoFit/>
           </a:bodyPr>
           <a:lstStyle/>
           <a:p>
-            <a:pPr indent="0" lvl="0" marL="0" marR="0" rtl="0" algn="r">
-              <a:spcBef>
-                <a:spcPts val="0"/>
-              </a:spcBef>
-              <a:spcAft>
-                <a:spcPts val="0"/>
-              </a:spcAft>
-              <a:buNone/>
-            </a:pPr>
-            <a:r>
-              <a:rPr b="0" i="0" lang="en-US" sz="1200" u="none" cap="none" strike="noStrike">
+            <a:pPr marL="0" marR="0" lvl="0" indent="0" algn="r" rtl="0">
+              <a:spcBef>
+                <a:spcPts val="0"/>
+              </a:spcBef>
+              <a:spcAft>
+                <a:spcPts val="0"/>
+              </a:spcAft>
+              <a:buNone/>
+              <a:defRPr/>
+            </a:pPr>
+            <a:r>
+              <a:rPr lang="en-US" sz="1200" b="0" i="0" u="none" strike="noStrike" cap="none">
                 <a:solidFill>
                   <a:srgbClr val="666666"/>
                 </a:solidFill>
                 <a:latin typeface="맑은 고딕"/>
                 <a:ea typeface="맑은 고딕"/>
-                <a:cs typeface="Malgun Gothic"/>
-                <a:sym typeface="Malgun Gothic"/>
+                <a:cs typeface="맑은 고딕"/>
+                <a:sym typeface="맑은 고딕"/>
               </a:rPr>
               <a:t>16</a:t>
             </a:r>
-            <a:endParaRPr b="0" i="0" sz="1200" u="none" cap="none" strike="noStrike">
+            <a:endParaRPr sz="1200" b="0" i="0" u="none" strike="noStrike" cap="none">
               <a:solidFill>
                 <a:srgbClr val="666666"/>
               </a:solidFill>
-              <a:latin typeface="Malgun Gothic"/>
-              <a:ea typeface="Malgun Gothic"/>
-              <a:cs typeface="Malgun Gothic"/>
-              <a:sym typeface="Malgun Gothic"/>
+              <a:latin typeface="맑은 고딕"/>
+              <a:ea typeface="맑은 고딕"/>
+              <a:cs typeface="맑은 고딕"/>
+              <a:sym typeface="맑은 고딕"/>
             </a:endParaRPr>
+          </a:p>
+        </p:txBody>
+      </p:sp>
+      <p:sp>
+        <p:nvSpPr>
+          <p:cNvPr id="244" name="TextBox 243"/>
+          <p:cNvSpPr txBox="1"/>
+          <p:nvPr/>
+        </p:nvSpPr>
+        <p:spPr>
+          <a:xfrm>
+            <a:off x="822960" y="1554480"/>
+            <a:ext cx="10789920" cy="4937760"/>
+          </a:xfrm>
+          <a:prstGeom prst="rect">
+            <a:avLst/>
+          </a:prstGeom>
+          <a:noFill/>
+        </p:spPr>
+        <p:txBody>
+          <a:bodyPr wrap="square">
+            <a:spAutoFit/>
+          </a:bodyPr>
+          <a:lstStyle/>
+          <a:p>
+            <a:pPr>
+              <a:spcAft>
+                <a:spcPts val="200"/>
+              </a:spcAft>
+            </a:pPr>
+            <a:r>
+              <a:rPr sz="1600" b="1">
+                <a:solidFill>
+                  <a:srgbClr val="2A78D6"/>
+                </a:solidFill>
+                <a:latin typeface="맑은 고딕"/>
+                <a:ea typeface="맑은 고딕"/>
+              </a:rPr>
+              <a:t>출발점이 된 의심</a:t>
+            </a:r>
+          </a:p>
+          <a:p>
+            <a:pPr>
+              <a:spcAft>
+                <a:spcPts val="1200"/>
+              </a:spcAft>
+            </a:pPr>
+            <a:r>
+              <a:rPr sz="1800" b="1">
+                <a:solidFill>
+                  <a:srgbClr val="202020"/>
+                </a:solidFill>
+                <a:latin typeface="맑은 고딕"/>
+                <a:ea typeface="맑은 고딕"/>
+              </a:rPr>
+              <a:t>"Q2의 성능, 사실은 이미 증상이 뚜렷한 치매 12명 덕분 아닐까?"</a:t>
+            </a:r>
+          </a:p>
+          <a:p>
+            <a:pPr>
+              <a:spcAft>
+                <a:spcPts val="200"/>
+              </a:spcAft>
+            </a:pPr>
+            <a:r>
+              <a:rPr sz="1600" b="1">
+                <a:solidFill>
+                  <a:srgbClr val="2A78D6"/>
+                </a:solidFill>
+                <a:latin typeface="맑은 고딕"/>
+                <a:ea typeface="맑은 고딕"/>
+              </a:rPr>
+              <a:t>검증 방법</a:t>
+            </a:r>
+          </a:p>
+          <a:p>
+            <a:pPr>
+              <a:spcAft>
+                <a:spcPts val="1200"/>
+              </a:spcAft>
+            </a:pPr>
+            <a:r>
+              <a:rPr sz="1600" b="1">
+                <a:solidFill>
+                  <a:srgbClr val="202020"/>
+                </a:solidFill>
+                <a:latin typeface="맑은 고딕"/>
+                <a:ea typeface="맑은 고딕"/>
+              </a:rPr>
+              <a:t>치매 12명을 완전히 제외하고, 정상 111명 vs 경도인지장애 51명만으로 같은 방식 재검증</a:t>
+            </a:r>
+          </a:p>
+          <a:p>
+            <a:pPr>
+              <a:spcAft>
+                <a:spcPts val="200"/>
+              </a:spcAft>
+            </a:pPr>
+            <a:r>
+              <a:rPr sz="1600" b="1">
+                <a:solidFill>
+                  <a:srgbClr val="2A78D6"/>
+                </a:solidFill>
+                <a:latin typeface="맑은 고딕"/>
+                <a:ea typeface="맑은 고딕"/>
+              </a:rPr>
+              <a:t>결과 — 세 번 시도, 모두 같은 결론</a:t>
+            </a:r>
+          </a:p>
+          <a:p>
+            <a:pPr>
+              <a:spcAft>
+                <a:spcPts val="400"/>
+              </a:spcAft>
+            </a:pPr>
+            <a:r>
+              <a:rPr sz="1600" b="1">
+                <a:solidFill>
+                  <a:srgbClr val="202020"/>
+                </a:solidFill>
+                <a:latin typeface="맑은 고딕"/>
+                <a:ea typeface="맑은 고딕"/>
+              </a:rPr>
+              <a:t>정확도 55.3% — '전부 정상'이라 답하는 기준선 68.5%에도 미달 (지표 추가·모델 교체에도 동일)</a:t>
+            </a:r>
+          </a:p>
+          <a:p>
+            <a:pPr>
+              <a:spcAft>
+                <a:spcPts val="1200"/>
+              </a:spcAft>
+            </a:pPr>
+            <a:r>
+              <a:rPr sz="1800" b="1">
+                <a:solidFill>
+                  <a:srgbClr val="C00000"/>
+                </a:solidFill>
+                <a:latin typeface="맑은 고딕"/>
+                <a:ea typeface="맑은 고딕"/>
+              </a:rPr>
+              <a:t>경도인지장애 '단독' 조기 신호는 현재 데이터로는 찾지 못했다</a:t>
+            </a:r>
+          </a:p>
+          <a:p>
+            <a:pPr>
+              <a:spcAft>
+                <a:spcPts val="200"/>
+              </a:spcAft>
+            </a:pPr>
+            <a:r>
+              <a:rPr sz="1600" b="1">
+                <a:solidFill>
+                  <a:srgbClr val="2A78D6"/>
+                </a:solidFill>
+                <a:latin typeface="맑은 고딕"/>
+                <a:ea typeface="맑은 고딕"/>
+              </a:rPr>
+              <a:t>검증이 실제로 한 일 — 서비스 주장 범위를 바꿨다</a:t>
+            </a:r>
+          </a:p>
+          <a:p>
+            <a:pPr>
+              <a:spcAft>
+                <a:spcPts val="200"/>
+              </a:spcAft>
+            </a:pPr>
+            <a:r>
+              <a:rPr sz="1500" b="1">
+                <a:solidFill>
+                  <a:srgbClr val="202020"/>
+                </a:solidFill>
+                <a:latin typeface="맑은 고딕"/>
+                <a:ea typeface="맑은 고딕"/>
+              </a:rPr>
+              <a:t>· "경도인지장애를 조기 진단한다"  →  사용 금지</a:t>
+            </a:r>
+          </a:p>
+          <a:p>
+            <a:pPr>
+              <a:spcAft>
+                <a:spcPts val="0"/>
+              </a:spcAft>
+            </a:pPr>
+            <a:r>
+              <a:rPr sz="1500" b="1">
+                <a:solidFill>
+                  <a:srgbClr val="202020"/>
+                </a:solidFill>
+                <a:latin typeface="맑은 고딕"/>
+                <a:ea typeface="맑은 고딕"/>
+              </a:rPr>
+              <a:t>· "위험군(경도인지장애+치매)을 걸러 검진으로 안내한다"  →  이 범위만 주장</a:t>
+            </a:r>
           </a:p>
         </p:txBody>
       </p:sp>
@@ -18826,6 +18302,14 @@
   <p:clrMapOvr>
     <a:masterClrMapping/>
   </p:clrMapOvr>
+  <mc:AlternateContent xmlns:mc="http://schemas.openxmlformats.org/markup-compatibility/2006">
+    <mc:Choice xmlns:p14="http://schemas.microsoft.com/office/powerpoint/2010/main" Requires="p14">
+      <p:transition xmlns:mc="http://schemas.openxmlformats.org/markup-compatibility/2006" xmlns:p14="http://schemas.microsoft.com/office/powerpoint/2010/main" mc:Ignorable="p14" p14:dur="500"/>
+    </mc:Choice>
+    <mc:Fallback>
+      <p:transition/>
+    </mc:Fallback>
+  </mc:AlternateContent>
 </p:sld>
 </file>
 
@@ -18970,7 +18454,7 @@
         <p:spPr>
           <a:xfrm>
             <a:off x="502920" y="621792"/>
-            <a:ext cx="11689080" cy="553998"/>
+            <a:ext cx="11689080" cy="1005058"/>
           </a:xfrm>
           <a:prstGeom prst="rect">
             <a:avLst/>
@@ -19006,9 +18490,66 @@
                 <a:cs typeface="맑은 고딕"/>
                 <a:sym typeface="맑은 고딕"/>
               </a:rPr>
-              <a:t>Q5 — 우연은 아닌가?  →  구분 능력은 진짜다 (우연일 확률 0.6%)</a:t>
-            </a:r>
-            <a:endParaRPr sz="3000" b="1" i="0" u="none" strike="noStrike" cap="none">
+              <a:t>Q5 — 우연은 아닌가?  →  구분 능력은 </a:t>
+            </a:r>
+            <a:r>
+              <a:rPr lang="ko-KR" altLang="en-US" sz="3000" b="1" i="0" u="none" strike="noStrike" cap="none">
+                <a:solidFill>
+                  <a:srgbClr val="104281"/>
+                </a:solidFill>
+                <a:latin typeface="맑은 고딕"/>
+                <a:ea typeface="맑은 고딕"/>
+                <a:cs typeface="맑은 고딕"/>
+                <a:sym typeface="맑은 고딕"/>
+              </a:rPr>
+              <a:t>검증 완료</a:t>
+            </a:r>
+            <a:r>
+              <a:rPr lang="en-US" sz="3000" b="1" i="0" u="none" strike="noStrike" cap="none">
+                <a:solidFill>
+                  <a:srgbClr val="104281"/>
+                </a:solidFill>
+                <a:latin typeface="맑은 고딕"/>
+                <a:ea typeface="맑은 고딕"/>
+                <a:cs typeface="맑은 고딕"/>
+                <a:sym typeface="맑은 고딕"/>
+              </a:rPr>
+              <a:t> </a:t>
+            </a:r>
+            <a:endParaRPr lang="en-US" sz="3000" b="1" i="0" u="none" strike="noStrike" cap="none">
+              <a:solidFill>
+                <a:srgbClr val="104281"/>
+              </a:solidFill>
+              <a:latin typeface="맑은 고딕"/>
+              <a:ea typeface="맑은 고딕"/>
+              <a:cs typeface="맑은 고딕"/>
+              <a:sym typeface="맑은 고딕"/>
+            </a:endParaRPr>
+          </a:p>
+          <a:p>
+            <a:pPr marL="0" marR="0" lvl="0" indent="0" algn="l" rtl="0">
+              <a:spcBef>
+                <a:spcPts val="0"/>
+              </a:spcBef>
+              <a:spcAft>
+                <a:spcPts val="0"/>
+              </a:spcAft>
+              <a:buNone/>
+              <a:defRPr/>
+            </a:pPr>
+            <a:r>
+              <a:rPr lang="en-US" sz="3000" b="1" i="0" u="none" strike="noStrike" cap="none">
+                <a:solidFill>
+                  <a:srgbClr val="104281"/>
+                </a:solidFill>
+                <a:latin typeface="맑은 고딕"/>
+                <a:ea typeface="맑은 고딕"/>
+                <a:cs typeface="맑은 고딕"/>
+                <a:sym typeface="맑은 고딕"/>
+              </a:rPr>
+              <a:t>(우연일 확률 0.6%)</a:t>
+            </a:r>
+            <a:endParaRPr lang="en-US" sz="3000" b="1" i="0" u="none" strike="noStrike" cap="none">
               <a:solidFill>
                 <a:srgbClr val="104281"/>
               </a:solidFill>
@@ -19495,7 +19036,7 @@
 </file>
 
 <file path=ppt/slides/slide18.xml><?xml version="1.0" encoding="utf-8"?>
-<p:sld xmlns:a="http://schemas.openxmlformats.org/drawingml/2006/main" xmlns:p="http://schemas.openxmlformats.org/presentationml/2006/main" xmlns:r="http://schemas.openxmlformats.org/officeDocument/2006/relationships">
+<p:sld xmlns:r="http://schemas.openxmlformats.org/officeDocument/2006/relationships" xmlns:c="http://schemas.openxmlformats.org/drawingml/2006/chart" xmlns:a="http://schemas.openxmlformats.org/drawingml/2006/main" xmlns:dgm="http://schemas.openxmlformats.org/drawingml/2006/diagram" xmlns:dsp="http://schemas.microsoft.com/office/drawing/2008/diagram" xmlns:p="http://schemas.openxmlformats.org/presentationml/2006/main">
   <p:cSld>
     <p:spTree>
       <p:nvGrpSpPr>
@@ -19503,24 +19044,14 @@
         <p:cNvGrpSpPr/>
         <p:nvPr/>
       </p:nvGrpSpPr>
-      <p:grpSpPr/>
-      <p:sp>
-        <p:nvSpPr>
-          <p:cNvPr id="2" name="Title 1"/>
-          <p:cNvSpPr>
-            <a:spLocks noGrp="1"/>
-          </p:cNvSpPr>
-          <p:nvPr>
-            <p:ph type="title"/>
-          </p:nvPr>
-        </p:nvSpPr>
-        <p:spPr/>
-        <p:txBody>
-          <a:bodyPr/>
-          <a:lstStyle/>
-          <a:p/>
-        </p:txBody>
-      </p:sp>
+      <p:grpSpPr>
+        <a:xfrm>
+          <a:off x="0" y="0"/>
+          <a:ext cx="0" cy="0"/>
+          <a:chOff x="0" y="0"/>
+          <a:chExt cx="0" cy="0"/>
+        </a:xfrm>
+      </p:grpSpPr>
       <p:sp>
         <p:nvSpPr>
           <p:cNvPr id="3" name="Rectangle 2"/>
@@ -19557,10 +19088,13 @@
           </a:fontRef>
         </p:style>
         <p:txBody>
-          <a:bodyPr rtlCol="0" anchor="ctr"/>
+          <a:bodyPr anchor="ctr"/>
           <a:lstStyle/>
           <a:p>
-            <a:pPr algn="ctr"/>
+            <a:pPr algn="ctr">
+              <a:defRPr/>
+            </a:pPr>
+            <a:endParaRPr lang="ko-KR" altLang="en-US"/>
           </a:p>
         </p:txBody>
       </p:sp>
@@ -19573,7 +19107,7 @@
         <p:spPr>
           <a:xfrm>
             <a:off x="502920" y="292608"/>
-            <a:ext cx="10515600" cy="365760"/>
+            <a:ext cx="10515600" cy="296037"/>
           </a:xfrm>
           <a:prstGeom prst="rect">
             <a:avLst/>
@@ -19590,17 +19124,25 @@
               <a:spcAft>
                 <a:spcPts val="600"/>
               </a:spcAft>
+              <a:defRPr/>
             </a:pPr>
             <a:r>
               <a:rPr sz="1400" b="1">
                 <a:solidFill>
-                  <a:srgbClr val="2A78D6"/>
+                  <a:srgbClr val="2a78d6"/>
                 </a:solidFill>
                 <a:latin typeface="맑은 고딕"/>
                 <a:ea typeface="맑은 고딕"/>
               </a:rPr>
               <a:t>05. 서비스</a:t>
             </a:r>
+            <a:endParaRPr sz="1400" b="1">
+              <a:solidFill>
+                <a:srgbClr val="2a78d6"/>
+              </a:solidFill>
+              <a:latin typeface="맑은 고딕"/>
+              <a:ea typeface="맑은 고딕"/>
+            </a:endParaRPr>
           </a:p>
         </p:txBody>
       </p:sp>
@@ -19613,7 +19155,7 @@
         <p:spPr>
           <a:xfrm>
             <a:off x="502920" y="621792"/>
-            <a:ext cx="11155680" cy="731520"/>
+            <a:ext cx="11155680" cy="547878"/>
           </a:xfrm>
           <a:prstGeom prst="rect">
             <a:avLst/>
@@ -19630,6 +19172,7 @@
               <a:spcAft>
                 <a:spcPts val="600"/>
               </a:spcAft>
+              <a:defRPr/>
             </a:pPr>
             <a:r>
               <a:rPr sz="3000" b="1">
@@ -19639,8 +19182,25 @@
                 <a:latin typeface="맑은 고딕"/>
                 <a:ea typeface="맑은 고딕"/>
               </a:rPr>
-              <a:t>분석이 말해준 것 — 그래서 이 서비스다</a:t>
-            </a:r>
+              <a:t>분석</a:t>
+            </a:r>
+            <a:r>
+              <a:rPr lang="ko-KR" altLang="en-US" sz="3000" b="1">
+                <a:solidFill>
+                  <a:srgbClr val="104281"/>
+                </a:solidFill>
+                <a:latin typeface="맑은 고딕"/>
+                <a:ea typeface="맑은 고딕"/>
+              </a:rPr>
+              <a:t> 결과 및 결론</a:t>
+            </a:r>
+            <a:endParaRPr lang="ko-KR" altLang="en-US" sz="3000" b="1">
+              <a:solidFill>
+                <a:srgbClr val="104281"/>
+              </a:solidFill>
+              <a:latin typeface="맑은 고딕"/>
+              <a:ea typeface="맑은 고딕"/>
+            </a:endParaRPr>
           </a:p>
         </p:txBody>
       </p:sp>
@@ -19670,22 +19230,31 @@
               <a:tr h="658368">
                 <a:tc>
                   <a:txBody>
-                    <a:bodyPr/>
-                    <a:lstStyle/>
+                    <a:bodyPr vert="horz" lIns="109728" tIns="91440" rIns="91440" bIns="45720" anchor="t" anchorCtr="0"/>
                     <a:p>
+                      <a:pPr lvl="0">
+                        <a:defRPr/>
+                      </a:pPr>
                       <a:r>
                         <a:rPr sz="1400" b="1">
                           <a:solidFill>
-                            <a:srgbClr val="FFFFFF"/>
+                            <a:srgbClr val="ffffff"/>
                           </a:solidFill>
                           <a:latin typeface="맑은 고딕"/>
                           <a:ea typeface="맑은 고딕"/>
                         </a:rPr>
                         <a:t>분석·검증 결과</a:t>
                       </a:r>
+                      <a:endParaRPr sz="1400" b="1">
+                        <a:solidFill>
+                          <a:srgbClr val="ffffff"/>
+                        </a:solidFill>
+                        <a:latin typeface="맑은 고딕"/>
+                        <a:ea typeface="맑은 고딕"/>
+                      </a:endParaRPr>
                     </a:p>
                   </a:txBody>
-                  <a:tcPr marL="109728" marT="91440">
+                  <a:tcPr marL="109728" marR="91440" marT="91440">
                     <a:solidFill>
                       <a:srgbClr val="104281"/>
                     </a:solidFill>
@@ -19693,22 +19262,31 @@
                 </a:tc>
                 <a:tc>
                   <a:txBody>
-                    <a:bodyPr/>
-                    <a:lstStyle/>
+                    <a:bodyPr vert="horz" lIns="109728" tIns="91440" rIns="91440" bIns="45720" anchor="t" anchorCtr="0"/>
                     <a:p>
+                      <a:pPr lvl="0">
+                        <a:defRPr/>
+                      </a:pPr>
                       <a:r>
                         <a:rPr sz="1400" b="1">
                           <a:solidFill>
-                            <a:srgbClr val="FFFFFF"/>
+                            <a:srgbClr val="ffffff"/>
                           </a:solidFill>
                           <a:latin typeface="맑은 고딕"/>
                           <a:ea typeface="맑은 고딕"/>
                         </a:rPr>
                         <a:t>도출된 필요성</a:t>
                       </a:r>
+                      <a:endParaRPr sz="1400" b="1">
+                        <a:solidFill>
+                          <a:srgbClr val="ffffff"/>
+                        </a:solidFill>
+                        <a:latin typeface="맑은 고딕"/>
+                        <a:ea typeface="맑은 고딕"/>
+                      </a:endParaRPr>
                     </a:p>
                   </a:txBody>
-                  <a:tcPr marL="109728" marT="91440">
+                  <a:tcPr marL="109728" marR="91440" marT="91440">
                     <a:solidFill>
                       <a:srgbClr val="104281"/>
                     </a:solidFill>
@@ -19716,22 +19294,31 @@
                 </a:tc>
                 <a:tc>
                   <a:txBody>
-                    <a:bodyPr/>
-                    <a:lstStyle/>
+                    <a:bodyPr vert="horz" lIns="109728" tIns="91440" rIns="91440" bIns="45720" anchor="t" anchorCtr="0"/>
                     <a:p>
+                      <a:pPr lvl="0">
+                        <a:defRPr/>
+                      </a:pPr>
                       <a:r>
                         <a:rPr sz="1400" b="1">
                           <a:solidFill>
-                            <a:srgbClr val="FFFFFF"/>
+                            <a:srgbClr val="ffffff"/>
                           </a:solidFill>
                           <a:latin typeface="맑은 고딕"/>
                           <a:ea typeface="맑은 고딕"/>
                         </a:rPr>
                         <a:t>서비스 기능</a:t>
                       </a:r>
+                      <a:endParaRPr sz="1400" b="1">
+                        <a:solidFill>
+                          <a:srgbClr val="ffffff"/>
+                        </a:solidFill>
+                        <a:latin typeface="맑은 고딕"/>
+                        <a:ea typeface="맑은 고딕"/>
+                      </a:endParaRPr>
                     </a:p>
                   </a:txBody>
-                  <a:tcPr marL="109728" marT="91440">
+                  <a:tcPr marL="109728" marR="91440" marT="91440">
                     <a:solidFill>
                       <a:srgbClr val="104281"/>
                     </a:solidFill>
@@ -19741,9 +19328,11 @@
               <a:tr h="658368">
                 <a:tc>
                   <a:txBody>
-                    <a:bodyPr/>
-                    <a:lstStyle/>
+                    <a:bodyPr vert="horz" lIns="109728" tIns="91440" rIns="91440" bIns="45720" anchor="t" anchorCtr="0"/>
                     <a:p>
+                      <a:pPr lvl="0">
+                        <a:defRPr/>
+                      </a:pPr>
                       <a:r>
                         <a:rPr sz="1400" b="1">
                           <a:solidFill>
@@ -19754,8 +19343,18 @@
                         </a:rPr>
                         <a:t>생활 패턴의 불규칙함이</a:t>
                       </a:r>
+                      <a:endParaRPr sz="1400" b="1">
+                        <a:solidFill>
+                          <a:srgbClr val="104281"/>
+                        </a:solidFill>
+                        <a:latin typeface="맑은 고딕"/>
+                        <a:ea typeface="맑은 고딕"/>
+                      </a:endParaRPr>
                     </a:p>
                     <a:p>
+                      <a:pPr lvl="0">
+                        <a:defRPr/>
+                      </a:pPr>
                       <a:r>
                         <a:rPr>
                           <a:latin typeface="맑은 고딕"/>
@@ -19763,19 +19362,25 @@
                         </a:rPr>
                         <a:t>위험군을 가른다 (Q3)</a:t>
                       </a:r>
+                      <a:endParaRPr>
+                        <a:latin typeface="맑은 고딕"/>
+                        <a:ea typeface="맑은 고딕"/>
+                      </a:endParaRPr>
                     </a:p>
                   </a:txBody>
-                  <a:tcPr marL="109728" marT="91440">
+                  <a:tcPr marL="109728" marR="91440" marT="91440">
                     <a:solidFill>
-                      <a:srgbClr val="EEF3FB"/>
+                      <a:srgbClr val="eef3fb"/>
                     </a:solidFill>
                   </a:tcPr>
                 </a:tc>
                 <a:tc>
                   <a:txBody>
-                    <a:bodyPr/>
-                    <a:lstStyle/>
+                    <a:bodyPr vert="horz" lIns="109728" tIns="91440" rIns="91440" bIns="45720" anchor="t" anchorCtr="0"/>
                     <a:p>
+                      <a:pPr lvl="0">
+                        <a:defRPr/>
+                      </a:pPr>
                       <a:r>
                         <a:rPr sz="1400" b="1">
                           <a:solidFill>
@@ -19786,8 +19391,18 @@
                         </a:rPr>
                         <a:t>병원 밖 일상 기록으로</a:t>
                       </a:r>
+                      <a:endParaRPr sz="1400" b="1">
+                        <a:solidFill>
+                          <a:srgbClr val="202020"/>
+                        </a:solidFill>
+                        <a:latin typeface="맑은 고딕"/>
+                        <a:ea typeface="맑은 고딕"/>
+                      </a:endParaRPr>
                     </a:p>
                     <a:p>
+                      <a:pPr lvl="0">
+                        <a:defRPr/>
+                      </a:pPr>
                       <a:r>
                         <a:rPr>
                           <a:latin typeface="맑은 고딕"/>
@@ -19795,19 +19410,25 @@
                         </a:rPr>
                         <a:t>위험 신호 감지 가능</a:t>
                       </a:r>
+                      <a:endParaRPr>
+                        <a:latin typeface="맑은 고딕"/>
+                        <a:ea typeface="맑은 고딕"/>
+                      </a:endParaRPr>
                     </a:p>
                   </a:txBody>
-                  <a:tcPr marL="109728" marT="91440">
+                  <a:tcPr marL="109728" marR="91440" marT="91440">
                     <a:solidFill>
-                      <a:srgbClr val="FFFFFF"/>
+                      <a:srgbClr val="ffffff"/>
                     </a:solidFill>
                   </a:tcPr>
                 </a:tc>
                 <a:tc>
                   <a:txBody>
-                    <a:bodyPr/>
-                    <a:lstStyle/>
+                    <a:bodyPr vert="horz" lIns="109728" tIns="91440" rIns="91440" bIns="45720" anchor="t" anchorCtr="0"/>
                     <a:p>
+                      <a:pPr lvl="0">
+                        <a:defRPr/>
+                      </a:pPr>
                       <a:r>
                         <a:rPr sz="1400" b="1">
                           <a:solidFill>
@@ -19818,8 +19439,18 @@
                         </a:rPr>
                         <a:t>웨어러블 기록 업로드</a:t>
                       </a:r>
+                      <a:endParaRPr sz="1400" b="1">
+                        <a:solidFill>
+                          <a:srgbClr val="202020"/>
+                        </a:solidFill>
+                        <a:latin typeface="맑은 고딕"/>
+                        <a:ea typeface="맑은 고딕"/>
+                      </a:endParaRPr>
                     </a:p>
                     <a:p>
+                      <a:pPr lvl="0">
+                        <a:defRPr/>
+                      </a:pPr>
                       <a:r>
                         <a:rPr>
                           <a:latin typeface="맑은 고딕"/>
@@ -19827,11 +19458,15 @@
                         </a:rPr>
                         <a:t>→ 위험 점수·근거 제시</a:t>
                       </a:r>
+                      <a:endParaRPr>
+                        <a:latin typeface="맑은 고딕"/>
+                        <a:ea typeface="맑은 고딕"/>
+                      </a:endParaRPr>
                     </a:p>
                   </a:txBody>
-                  <a:tcPr marL="109728" marT="91440">
+                  <a:tcPr marL="109728" marR="91440" marT="91440">
                     <a:solidFill>
-                      <a:srgbClr val="FFFFFF"/>
+                      <a:srgbClr val="ffffff"/>
                     </a:solidFill>
                   </a:tcPr>
                 </a:tc>
@@ -19839,9 +19474,11 @@
               <a:tr h="658368">
                 <a:tc>
                   <a:txBody>
-                    <a:bodyPr/>
-                    <a:lstStyle/>
+                    <a:bodyPr vert="horz" lIns="109728" tIns="91440" rIns="91440" bIns="45720" anchor="t" anchorCtr="0"/>
                     <a:p>
+                      <a:pPr lvl="0">
+                        <a:defRPr/>
+                      </a:pPr>
                       <a:r>
                         <a:rPr sz="1400" b="1">
                           <a:solidFill>
@@ -19852,8 +19489,18 @@
                         </a:rPr>
                         <a:t>경도인지장애 단독 신호는</a:t>
                       </a:r>
+                      <a:endParaRPr sz="1400" b="1">
+                        <a:solidFill>
+                          <a:srgbClr val="104281"/>
+                        </a:solidFill>
+                        <a:latin typeface="맑은 고딕"/>
+                        <a:ea typeface="맑은 고딕"/>
+                      </a:endParaRPr>
                     </a:p>
                     <a:p>
+                      <a:pPr lvl="0">
+                        <a:defRPr/>
+                      </a:pPr>
                       <a:r>
                         <a:rPr>
                           <a:latin typeface="맑은 고딕"/>
@@ -19861,19 +19508,25 @@
                         </a:rPr>
                         <a:t>미확인 (Q4)</a:t>
                       </a:r>
+                      <a:endParaRPr>
+                        <a:latin typeface="맑은 고딕"/>
+                        <a:ea typeface="맑은 고딕"/>
+                      </a:endParaRPr>
                     </a:p>
                   </a:txBody>
-                  <a:tcPr marL="109728" marT="91440">
+                  <a:tcPr marL="109728" marR="91440" marT="91440">
                     <a:solidFill>
-                      <a:srgbClr val="EEF3FB"/>
+                      <a:srgbClr val="eef3fb"/>
                     </a:solidFill>
                   </a:tcPr>
                 </a:tc>
                 <a:tc>
                   <a:txBody>
-                    <a:bodyPr/>
-                    <a:lstStyle/>
+                    <a:bodyPr vert="horz" lIns="109728" tIns="91440" rIns="91440" bIns="45720" anchor="t" anchorCtr="0"/>
                     <a:p>
+                      <a:pPr lvl="0">
+                        <a:defRPr/>
+                      </a:pPr>
                       <a:r>
                         <a:rPr sz="1400" b="1">
                           <a:solidFill>
@@ -19884,8 +19537,18 @@
                         </a:rPr>
                         <a:t>진단이 아닌 '위험군</a:t>
                       </a:r>
+                      <a:endParaRPr sz="1400" b="1">
+                        <a:solidFill>
+                          <a:srgbClr val="202020"/>
+                        </a:solidFill>
+                        <a:latin typeface="맑은 고딕"/>
+                        <a:ea typeface="맑은 고딕"/>
+                      </a:endParaRPr>
                     </a:p>
                     <a:p>
+                      <a:pPr lvl="0">
+                        <a:defRPr/>
+                      </a:pPr>
                       <a:r>
                         <a:rPr>
                           <a:latin typeface="맑은 고딕"/>
@@ -19893,19 +19556,25 @@
                         </a:rPr>
                         <a:t>스크리닝'으로 범위 한정</a:t>
                       </a:r>
+                      <a:endParaRPr>
+                        <a:latin typeface="맑은 고딕"/>
+                        <a:ea typeface="맑은 고딕"/>
+                      </a:endParaRPr>
                     </a:p>
                   </a:txBody>
-                  <a:tcPr marL="109728" marT="91440">
+                  <a:tcPr marL="109728" marR="91440" marT="91440">
                     <a:solidFill>
-                      <a:srgbClr val="FFFFFF"/>
+                      <a:srgbClr val="ffffff"/>
                     </a:solidFill>
                   </a:tcPr>
                 </a:tc>
                 <a:tc>
                   <a:txBody>
-                    <a:bodyPr/>
-                    <a:lstStyle/>
+                    <a:bodyPr vert="horz" lIns="109728" tIns="91440" rIns="91440" bIns="45720" anchor="t" anchorCtr="0"/>
                     <a:p>
+                      <a:pPr lvl="0">
+                        <a:defRPr/>
+                      </a:pPr>
                       <a:r>
                         <a:rPr sz="1400" b="1">
                           <a:solidFill>
@@ -19916,8 +19585,18 @@
                         </a:rPr>
                         <a:t>참고용 판정 + 한계 고지를</a:t>
                       </a:r>
+                      <a:endParaRPr sz="1400" b="1">
+                        <a:solidFill>
+                          <a:srgbClr val="202020"/>
+                        </a:solidFill>
+                        <a:latin typeface="맑은 고딕"/>
+                        <a:ea typeface="맑은 고딕"/>
+                      </a:endParaRPr>
                     </a:p>
                     <a:p>
+                      <a:pPr lvl="0">
+                        <a:defRPr/>
+                      </a:pPr>
                       <a:r>
                         <a:rPr>
                           <a:latin typeface="맑은 고딕"/>
@@ -19925,11 +19604,15 @@
                         </a:rPr>
                         <a:t>모든 화면에 명시</a:t>
                       </a:r>
+                      <a:endParaRPr>
+                        <a:latin typeface="맑은 고딕"/>
+                        <a:ea typeface="맑은 고딕"/>
+                      </a:endParaRPr>
                     </a:p>
                   </a:txBody>
-                  <a:tcPr marL="109728" marT="91440">
+                  <a:tcPr marL="109728" marR="91440" marT="91440">
                     <a:solidFill>
-                      <a:srgbClr val="FFFFFF"/>
+                      <a:srgbClr val="ffffff"/>
                     </a:solidFill>
                   </a:tcPr>
                 </a:tc>
@@ -19937,9 +19620,11 @@
               <a:tr h="658368">
                 <a:tc>
                   <a:txBody>
-                    <a:bodyPr/>
-                    <a:lstStyle/>
+                    <a:bodyPr vert="horz" lIns="109728" tIns="91440" rIns="91440" bIns="45720" anchor="t" anchorCtr="0"/>
                     <a:p>
+                      <a:pPr lvl="0">
+                        <a:defRPr/>
+                      </a:pPr>
                       <a:r>
                         <a:rPr sz="1400" b="1">
                           <a:solidFill>
@@ -19950,8 +19635,18 @@
                         </a:rPr>
                         <a:t>위험군 구분 능력은</a:t>
                       </a:r>
+                      <a:endParaRPr sz="1400" b="1">
+                        <a:solidFill>
+                          <a:srgbClr val="104281"/>
+                        </a:solidFill>
+                        <a:latin typeface="맑은 고딕"/>
+                        <a:ea typeface="맑은 고딕"/>
+                      </a:endParaRPr>
                     </a:p>
                     <a:p>
+                      <a:pPr lvl="0">
+                        <a:defRPr/>
+                      </a:pPr>
                       <a:r>
                         <a:rPr>
                           <a:latin typeface="맑은 고딕"/>
@@ -19959,19 +19654,25 @@
                         </a:rPr>
                         <a:t>통계적으로 유효 (Q5)</a:t>
                       </a:r>
+                      <a:endParaRPr>
+                        <a:latin typeface="맑은 고딕"/>
+                        <a:ea typeface="맑은 고딕"/>
+                      </a:endParaRPr>
                     </a:p>
                   </a:txBody>
-                  <a:tcPr marL="109728" marT="91440">
+                  <a:tcPr marL="109728" marR="91440" marT="91440">
                     <a:solidFill>
-                      <a:srgbClr val="EEF3FB"/>
+                      <a:srgbClr val="eef3fb"/>
                     </a:solidFill>
                   </a:tcPr>
                 </a:tc>
                 <a:tc>
                   <a:txBody>
-                    <a:bodyPr/>
-                    <a:lstStyle/>
+                    <a:bodyPr vert="horz" lIns="109728" tIns="91440" rIns="91440" bIns="45720" anchor="t" anchorCtr="0"/>
                     <a:p>
+                      <a:pPr lvl="0">
+                        <a:defRPr/>
+                      </a:pPr>
                       <a:r>
                         <a:rPr sz="1400" b="1">
                           <a:solidFill>
@@ -19982,8 +19683,18 @@
                         </a:rPr>
                         <a:t>걸러낸 위험군을 검진으로</a:t>
                       </a:r>
+                      <a:endParaRPr sz="1400" b="1">
+                        <a:solidFill>
+                          <a:srgbClr val="202020"/>
+                        </a:solidFill>
+                        <a:latin typeface="맑은 고딕"/>
+                        <a:ea typeface="맑은 고딕"/>
+                      </a:endParaRPr>
                     </a:p>
                     <a:p>
+                      <a:pPr lvl="0">
+                        <a:defRPr/>
+                      </a:pPr>
                       <a:r>
                         <a:rPr>
                           <a:latin typeface="맑은 고딕"/>
@@ -19991,19 +19702,25 @@
                         </a:rPr>
                         <a:t>연결할 통로 필요</a:t>
                       </a:r>
+                      <a:endParaRPr>
+                        <a:latin typeface="맑은 고딕"/>
+                        <a:ea typeface="맑은 고딕"/>
+                      </a:endParaRPr>
                     </a:p>
                   </a:txBody>
-                  <a:tcPr marL="109728" marT="91440">
+                  <a:tcPr marL="109728" marR="91440" marT="91440">
                     <a:solidFill>
-                      <a:srgbClr val="FFFFFF"/>
+                      <a:srgbClr val="ffffff"/>
                     </a:solidFill>
                   </a:tcPr>
                 </a:tc>
                 <a:tc>
                   <a:txBody>
-                    <a:bodyPr/>
-                    <a:lstStyle/>
+                    <a:bodyPr vert="horz" lIns="109728" tIns="91440" rIns="91440" bIns="45720" anchor="t" anchorCtr="0"/>
                     <a:p>
+                      <a:pPr lvl="0">
+                        <a:defRPr/>
+                      </a:pPr>
                       <a:r>
                         <a:rPr sz="1400" b="1">
                           <a:solidFill>
@@ -20014,8 +19731,18 @@
                         </a:rPr>
                         <a:t>치매안심센터 지도 안내</a:t>
                       </a:r>
+                      <a:endParaRPr sz="1400" b="1">
+                        <a:solidFill>
+                          <a:srgbClr val="202020"/>
+                        </a:solidFill>
+                        <a:latin typeface="맑은 고딕"/>
+                        <a:ea typeface="맑은 고딕"/>
+                      </a:endParaRPr>
                     </a:p>
                     <a:p>
+                      <a:pPr lvl="0">
+                        <a:defRPr/>
+                      </a:pPr>
                       <a:r>
                         <a:rPr>
                           <a:latin typeface="맑은 고딕"/>
@@ -20023,11 +19750,15 @@
                         </a:rPr>
                         <a:t>(전국 317곳 공공데이터)</a:t>
                       </a:r>
+                      <a:endParaRPr>
+                        <a:latin typeface="맑은 고딕"/>
+                        <a:ea typeface="맑은 고딕"/>
+                      </a:endParaRPr>
                     </a:p>
                   </a:txBody>
-                  <a:tcPr marL="109728" marT="91440">
+                  <a:tcPr marL="109728" marR="91440" marT="91440">
                     <a:solidFill>
-                      <a:srgbClr val="FFFFFF"/>
+                      <a:srgbClr val="ffffff"/>
                     </a:solidFill>
                   </a:tcPr>
                 </a:tc>
@@ -20045,7 +19776,7 @@
         <p:spPr>
           <a:xfrm>
             <a:off x="640080" y="5349240"/>
-            <a:ext cx="10972800" cy="1097280"/>
+            <a:ext cx="10972800" cy="678180"/>
           </a:xfrm>
           <a:prstGeom prst="rect">
             <a:avLst/>
@@ -20062,6 +19793,7 @@
               <a:spcAft>
                 <a:spcPts val="600"/>
               </a:spcAft>
+              <a:defRPr/>
             </a:pPr>
             <a:r>
               <a:rPr sz="1700" b="1">
@@ -20073,12 +19805,20 @@
               </a:rPr>
               <a:t>"생활 패턴의 불규칙함이 위험 신호임을 확인했고, 이를 활용해 위험군을 조기에 걸러</a:t>
             </a:r>
+            <a:endParaRPr sz="1700" b="1">
+              <a:solidFill>
+                <a:srgbClr val="104281"/>
+              </a:solidFill>
+              <a:latin typeface="맑은 고딕"/>
+              <a:ea typeface="맑은 고딕"/>
+            </a:endParaRPr>
           </a:p>
           <a:p>
             <a:pPr algn="l">
               <a:spcAft>
                 <a:spcPts val="600"/>
               </a:spcAft>
+              <a:defRPr/>
             </a:pPr>
             <a:r>
               <a:rPr sz="1700" b="1">
@@ -20090,6 +19830,13 @@
               </a:rPr>
               <a:t>  병원 검진으로 연결하는 스크리닝 서비스를 기획하였다"</a:t>
             </a:r>
+            <a:endParaRPr sz="1700" b="1">
+              <a:solidFill>
+                <a:srgbClr val="104281"/>
+              </a:solidFill>
+              <a:latin typeface="맑은 고딕"/>
+              <a:ea typeface="맑은 고딕"/>
+            </a:endParaRPr>
           </a:p>
         </p:txBody>
       </p:sp>
@@ -20102,7 +19849,7 @@
         <p:spPr>
           <a:xfrm>
             <a:off x="11475720" y="6446520"/>
-            <a:ext cx="640080" cy="320040"/>
+            <a:ext cx="640080" cy="266700"/>
           </a:xfrm>
           <a:prstGeom prst="rect">
             <a:avLst/>
@@ -20119,6 +19866,7 @@
               <a:spcAft>
                 <a:spcPts val="600"/>
               </a:spcAft>
+              <a:defRPr/>
             </a:pPr>
             <a:r>
               <a:rPr sz="1200" b="0">
@@ -20130,6 +19878,13 @@
               </a:rPr>
               <a:t>18</a:t>
             </a:r>
+            <a:endParaRPr sz="1200" b="0">
+              <a:solidFill>
+                <a:srgbClr val="666666"/>
+              </a:solidFill>
+              <a:latin typeface="맑은 고딕"/>
+              <a:ea typeface="맑은 고딕"/>
+            </a:endParaRPr>
           </a:p>
         </p:txBody>
       </p:sp>
@@ -20138,6 +19893,14 @@
   <p:clrMapOvr>
     <a:masterClrMapping/>
   </p:clrMapOvr>
+  <mc:AlternateContent xmlns:mc="http://schemas.openxmlformats.org/markup-compatibility/2006">
+    <mc:Choice xmlns:p14="http://schemas.microsoft.com/office/powerpoint/2010/main" Requires="p14">
+      <p:transition xmlns:mc="http://schemas.openxmlformats.org/markup-compatibility/2006" xmlns:p14="http://schemas.microsoft.com/office/powerpoint/2010/main" mc:Ignorable="p14" p14:dur="500"/>
+    </mc:Choice>
+    <mc:Fallback>
+      <p:transition/>
+    </mc:Fallback>
+  </mc:AlternateContent>
 </p:sld>
 </file>
 
@@ -20955,7 +20718,7 @@
         <p:spPr>
           <a:xfrm>
             <a:off x="5120640" y="5004000"/>
-            <a:ext cx="6675120" cy="784830"/>
+            <a:ext cx="6675120" cy="1156750"/>
           </a:xfrm>
           <a:prstGeom prst="rect">
             <a:avLst/>
@@ -21026,7 +20789,64 @@
               </a:rPr>
               <a:t>		— 모든 결과 화면에 명시</a:t>
             </a:r>
-            <a:endParaRPr sz="2000" b="1" i="0" u="none" strike="noStrike" cap="none">
+            <a:endParaRPr lang="en-US" sz="2000" b="1" i="0" u="none" strike="noStrike" cap="none">
+              <a:solidFill>
+                <a:srgbClr val="202020"/>
+              </a:solidFill>
+              <a:latin typeface="맑은 고딕"/>
+              <a:ea typeface="맑은 고딕"/>
+              <a:cs typeface="맑은 고딕"/>
+              <a:sym typeface="맑은 고딕"/>
+            </a:endParaRPr>
+          </a:p>
+          <a:p>
+            <a:pPr marL="0" marR="0" lvl="0" indent="0" algn="l" rtl="0">
+              <a:spcBef>
+                <a:spcPts val="600"/>
+              </a:spcBef>
+              <a:spcAft>
+                <a:spcPts val="0"/>
+              </a:spcAft>
+              <a:buNone/>
+              <a:defRPr/>
+            </a:pPr>
+            <a:r>
+              <a:rPr lang="en-US" altLang="ko-KR" sz="2000" b="1" i="0" u="none" strike="noStrike" cap="none">
+                <a:solidFill>
+                  <a:srgbClr val="202020"/>
+                </a:solidFill>
+                <a:latin typeface="맑은 고딕"/>
+                <a:ea typeface="맑은 고딕"/>
+                <a:cs typeface="맑은 고딕"/>
+                <a:sym typeface="맑은 고딕"/>
+              </a:rPr>
+              <a:t>(</a:t>
+            </a:r>
+            <a:r>
+              <a:rPr lang="ko-KR" altLang="en-US" sz="2000" b="1" i="0" u="none" strike="noStrike" cap="none">
+                <a:solidFill>
+                  <a:srgbClr val="202020"/>
+                </a:solidFill>
+                <a:latin typeface="맑은 고딕"/>
+                <a:ea typeface="맑은 고딕"/>
+                <a:cs typeface="맑은 고딕"/>
+                <a:sym typeface="맑은 고딕"/>
+              </a:rPr>
+              <a:t>추후 데이터 적재를 통한 모델 성능 향상 가능</a:t>
+            </a:r>
+            <a:r>
+              <a:rPr lang="en-US" altLang="ko-KR" sz="2000" b="1" i="0" u="none" strike="noStrike" cap="none">
+                <a:solidFill>
+                  <a:srgbClr val="202020"/>
+                </a:solidFill>
+                <a:latin typeface="맑은 고딕"/>
+                <a:ea typeface="맑은 고딕"/>
+                <a:cs typeface="맑은 고딕"/>
+                <a:sym typeface="맑은 고딕"/>
+              </a:rPr>
+              <a:t>)</a:t>
+            </a:r>
+            <a:endParaRPr lang="en-US" altLang="ko-KR" sz="2000" b="1" i="0" u="none" strike="noStrike" cap="none">
               <a:solidFill>
                 <a:srgbClr val="202020"/>
               </a:solidFill>
@@ -22897,7 +22717,7 @@
 </file>
 
 <file path=ppt/slides/slide23.xml><?xml version="1.0" encoding="utf-8"?>
-<p:sld xmlns:a="http://schemas.openxmlformats.org/drawingml/2006/main" xmlns:p="http://schemas.openxmlformats.org/presentationml/2006/main" xmlns:r="http://schemas.openxmlformats.org/officeDocument/2006/relationships">
+<p:sld xmlns:r="http://schemas.openxmlformats.org/officeDocument/2006/relationships" xmlns:c="http://schemas.openxmlformats.org/drawingml/2006/chart" xmlns:a="http://schemas.openxmlformats.org/drawingml/2006/main" xmlns:dgm="http://schemas.openxmlformats.org/drawingml/2006/diagram" xmlns:dsp="http://schemas.microsoft.com/office/drawing/2008/diagram" xmlns:p="http://schemas.openxmlformats.org/presentationml/2006/main">
   <p:cSld>
     <p:spTree>
       <p:nvGrpSpPr>
@@ -22905,24 +22725,14 @@
         <p:cNvGrpSpPr/>
         <p:nvPr/>
       </p:nvGrpSpPr>
-      <p:grpSpPr/>
-      <p:sp>
-        <p:nvSpPr>
-          <p:cNvPr id="2" name="Title 1"/>
-          <p:cNvSpPr>
-            <a:spLocks noGrp="1"/>
-          </p:cNvSpPr>
-          <p:nvPr>
-            <p:ph type="title"/>
-          </p:nvPr>
-        </p:nvSpPr>
-        <p:spPr/>
-        <p:txBody>
-          <a:bodyPr/>
-          <a:lstStyle/>
-          <a:p/>
-        </p:txBody>
-      </p:sp>
+      <p:grpSpPr>
+        <a:xfrm>
+          <a:off x="0" y="0"/>
+          <a:ext cx="0" cy="0"/>
+          <a:chOff x="0" y="0"/>
+          <a:chExt cx="0" cy="0"/>
+        </a:xfrm>
+      </p:grpSpPr>
       <p:sp>
         <p:nvSpPr>
           <p:cNvPr id="3" name="Rectangle 2"/>
@@ -22959,10 +22769,13 @@
           </a:fontRef>
         </p:style>
         <p:txBody>
-          <a:bodyPr rtlCol="0" anchor="ctr"/>
+          <a:bodyPr anchor="ctr"/>
           <a:lstStyle/>
           <a:p>
-            <a:pPr algn="ctr"/>
+            <a:pPr algn="ctr">
+              <a:defRPr/>
+            </a:pPr>
+            <a:endParaRPr lang="ko-KR" altLang="en-US"/>
           </a:p>
         </p:txBody>
       </p:sp>
@@ -22975,7 +22788,7 @@
         <p:spPr>
           <a:xfrm>
             <a:off x="502920" y="292608"/>
-            <a:ext cx="10515600" cy="365760"/>
+            <a:ext cx="10515600" cy="296037"/>
           </a:xfrm>
           <a:prstGeom prst="rect">
             <a:avLst/>
@@ -22992,17 +22805,25 @@
               <a:spcAft>
                 <a:spcPts val="600"/>
               </a:spcAft>
+              <a:defRPr/>
             </a:pPr>
             <a:r>
               <a:rPr sz="1400" b="1">
                 <a:solidFill>
-                  <a:srgbClr val="2A78D6"/>
+                  <a:srgbClr val="2a78d6"/>
                 </a:solidFill>
                 <a:latin typeface="맑은 고딕"/>
                 <a:ea typeface="맑은 고딕"/>
               </a:rPr>
               <a:t>05. 서비스</a:t>
             </a:r>
+            <a:endParaRPr sz="1400" b="1">
+              <a:solidFill>
+                <a:srgbClr val="2a78d6"/>
+              </a:solidFill>
+              <a:latin typeface="맑은 고딕"/>
+              <a:ea typeface="맑은 고딕"/>
+            </a:endParaRPr>
           </a:p>
         </p:txBody>
       </p:sp>
@@ -23015,7 +22836,7 @@
         <p:spPr>
           <a:xfrm>
             <a:off x="502920" y="621792"/>
-            <a:ext cx="11155680" cy="731520"/>
+            <a:ext cx="11155680" cy="547878"/>
           </a:xfrm>
           <a:prstGeom prst="rect">
             <a:avLst/>
@@ -23032,6 +22853,7 @@
               <a:spcAft>
                 <a:spcPts val="600"/>
               </a:spcAft>
+              <a:defRPr/>
             </a:pPr>
             <a:r>
               <a:rPr sz="3000" b="1">
@@ -23043,6 +22865,13 @@
               </a:rPr>
               <a:t>데이터베이스 구축 — Oracle XE + SQLite</a:t>
             </a:r>
+            <a:endParaRPr sz="3000" b="1">
+              <a:solidFill>
+                <a:srgbClr val="104281"/>
+              </a:solidFill>
+              <a:latin typeface="맑은 고딕"/>
+              <a:ea typeface="맑은 고딕"/>
+            </a:endParaRPr>
           </a:p>
         </p:txBody>
       </p:sp>
@@ -23072,22 +22901,31 @@
               <a:tr h="658368">
                 <a:tc>
                   <a:txBody>
-                    <a:bodyPr/>
-                    <a:lstStyle/>
+                    <a:bodyPr vert="horz" lIns="109728" tIns="91440" rIns="91440" bIns="45720" anchor="t" anchorCtr="0"/>
                     <a:p>
+                      <a:pPr lvl="0">
+                        <a:defRPr/>
+                      </a:pPr>
                       <a:r>
                         <a:rPr sz="1400" b="1">
                           <a:solidFill>
-                            <a:srgbClr val="FFFFFF"/>
+                            <a:srgbClr val="ffffff"/>
                           </a:solidFill>
                           <a:latin typeface="맑은 고딕"/>
                           <a:ea typeface="맑은 고딕"/>
                         </a:rPr>
                         <a:t>테이블</a:t>
                       </a:r>
+                      <a:endParaRPr sz="1400" b="1">
+                        <a:solidFill>
+                          <a:srgbClr val="ffffff"/>
+                        </a:solidFill>
+                        <a:latin typeface="맑은 고딕"/>
+                        <a:ea typeface="맑은 고딕"/>
+                      </a:endParaRPr>
                     </a:p>
                   </a:txBody>
-                  <a:tcPr marL="109728" marT="91440">
+                  <a:tcPr marL="109728" marR="91440" marT="91440">
                     <a:solidFill>
                       <a:srgbClr val="104281"/>
                     </a:solidFill>
@@ -23095,22 +22933,31 @@
                 </a:tc>
                 <a:tc>
                   <a:txBody>
-                    <a:bodyPr/>
-                    <a:lstStyle/>
+                    <a:bodyPr vert="horz" lIns="109728" tIns="91440" rIns="91440" bIns="45720" anchor="t" anchorCtr="0"/>
                     <a:p>
+                      <a:pPr lvl="0">
+                        <a:defRPr/>
+                      </a:pPr>
                       <a:r>
                         <a:rPr sz="1400" b="1">
                           <a:solidFill>
-                            <a:srgbClr val="FFFFFF"/>
+                            <a:srgbClr val="ffffff"/>
                           </a:solidFill>
                           <a:latin typeface="맑은 고딕"/>
                           <a:ea typeface="맑은 고딕"/>
                         </a:rPr>
                         <a:t>내용</a:t>
                       </a:r>
+                      <a:endParaRPr sz="1400" b="1">
+                        <a:solidFill>
+                          <a:srgbClr val="ffffff"/>
+                        </a:solidFill>
+                        <a:latin typeface="맑은 고딕"/>
+                        <a:ea typeface="맑은 고딕"/>
+                      </a:endParaRPr>
                     </a:p>
                   </a:txBody>
-                  <a:tcPr marL="109728" marT="91440">
+                  <a:tcPr marL="109728" marR="91440" marT="91440">
                     <a:solidFill>
                       <a:srgbClr val="104281"/>
                     </a:solidFill>
@@ -23118,22 +22965,31 @@
                 </a:tc>
                 <a:tc>
                   <a:txBody>
-                    <a:bodyPr/>
-                    <a:lstStyle/>
+                    <a:bodyPr vert="horz" lIns="109728" tIns="91440" rIns="91440" bIns="45720" anchor="t" anchorCtr="0"/>
                     <a:p>
+                      <a:pPr lvl="0">
+                        <a:defRPr/>
+                      </a:pPr>
                       <a:r>
                         <a:rPr sz="1400" b="1">
                           <a:solidFill>
-                            <a:srgbClr val="FFFFFF"/>
+                            <a:srgbClr val="ffffff"/>
                           </a:solidFill>
                           <a:latin typeface="맑은 고딕"/>
                           <a:ea typeface="맑은 고딕"/>
                         </a:rPr>
                         <a:t>규모</a:t>
                       </a:r>
+                      <a:endParaRPr sz="1400" b="1">
+                        <a:solidFill>
+                          <a:srgbClr val="ffffff"/>
+                        </a:solidFill>
+                        <a:latin typeface="맑은 고딕"/>
+                        <a:ea typeface="맑은 고딕"/>
+                      </a:endParaRPr>
                     </a:p>
                   </a:txBody>
-                  <a:tcPr marL="109728" marT="91440">
+                  <a:tcPr marL="109728" marR="91440" marT="91440">
                     <a:solidFill>
                       <a:srgbClr val="104281"/>
                     </a:solidFill>
@@ -23143,9 +22999,11 @@
               <a:tr h="658368">
                 <a:tc>
                   <a:txBody>
-                    <a:bodyPr/>
-                    <a:lstStyle/>
+                    <a:bodyPr vert="horz" lIns="109728" tIns="91440" rIns="91440" bIns="45720" anchor="t" anchorCtr="0"/>
                     <a:p>
+                      <a:pPr lvl="0">
+                        <a:defRPr/>
+                      </a:pPr>
                       <a:r>
                         <a:rPr sz="1400" b="1">
                           <a:solidFill>
@@ -23156,19 +23014,28 @@
                         </a:rPr>
                         <a:t>TBL_RAW_ACTIVITY / SLEEP</a:t>
                       </a:r>
+                      <a:endParaRPr sz="1400" b="1">
+                        <a:solidFill>
+                          <a:srgbClr val="104281"/>
+                        </a:solidFill>
+                        <a:latin typeface="맑은 고딕"/>
+                        <a:ea typeface="맑은 고딕"/>
+                      </a:endParaRPr>
                     </a:p>
                   </a:txBody>
-                  <a:tcPr marL="109728" marT="91440">
+                  <a:tcPr marL="109728" marR="91440" marT="91440">
                     <a:solidFill>
-                      <a:srgbClr val="EEF3FB"/>
+                      <a:srgbClr val="eef3fb"/>
                     </a:solidFill>
                   </a:tcPr>
                 </a:tc>
                 <a:tc>
                   <a:txBody>
-                    <a:bodyPr/>
-                    <a:lstStyle/>
+                    <a:bodyPr vert="horz" lIns="109728" tIns="91440" rIns="91440" bIns="45720" anchor="t" anchorCtr="0"/>
                     <a:p>
+                      <a:pPr lvl="0">
+                        <a:defRPr/>
+                      </a:pPr>
                       <a:r>
                         <a:rPr sz="1400" b="1">
                           <a:solidFill>
@@ -23179,19 +23046,28 @@
                         </a:rPr>
                         <a:t>원천 라이프로그 보관 (Oracle 스테이징)</a:t>
                       </a:r>
+                      <a:endParaRPr sz="1400" b="1">
+                        <a:solidFill>
+                          <a:srgbClr val="202020"/>
+                        </a:solidFill>
+                        <a:latin typeface="맑은 고딕"/>
+                        <a:ea typeface="맑은 고딕"/>
+                      </a:endParaRPr>
                     </a:p>
                   </a:txBody>
-                  <a:tcPr marL="109728" marT="91440">
+                  <a:tcPr marL="109728" marR="91440" marT="91440">
                     <a:solidFill>
-                      <a:srgbClr val="FFFFFF"/>
+                      <a:srgbClr val="ffffff"/>
                     </a:solidFill>
                   </a:tcPr>
                 </a:tc>
                 <a:tc>
                   <a:txBody>
-                    <a:bodyPr/>
-                    <a:lstStyle/>
+                    <a:bodyPr vert="horz" lIns="109728" tIns="91440" rIns="91440" bIns="45720" anchor="t" anchorCtr="0"/>
                     <a:p>
+                      <a:pPr lvl="0">
+                        <a:defRPr/>
+                      </a:pPr>
                       <a:r>
                         <a:rPr sz="1400" b="1">
                           <a:solidFill>
@@ -23202,11 +23078,18 @@
                         </a:rPr>
                         <a:t>각 12,183행</a:t>
                       </a:r>
+                      <a:endParaRPr sz="1400" b="1">
+                        <a:solidFill>
+                          <a:srgbClr val="202020"/>
+                        </a:solidFill>
+                        <a:latin typeface="맑은 고딕"/>
+                        <a:ea typeface="맑은 고딕"/>
+                      </a:endParaRPr>
                     </a:p>
                   </a:txBody>
-                  <a:tcPr marL="109728" marT="91440">
+                  <a:tcPr marL="109728" marR="91440" marT="91440">
                     <a:solidFill>
-                      <a:srgbClr val="FFFFFF"/>
+                      <a:srgbClr val="ffffff"/>
                     </a:solidFill>
                   </a:tcPr>
                 </a:tc>
@@ -23214,9 +23097,11 @@
               <a:tr h="658368">
                 <a:tc>
                   <a:txBody>
-                    <a:bodyPr/>
-                    <a:lstStyle/>
+                    <a:bodyPr vert="horz" lIns="109728" tIns="91440" rIns="91440" bIns="45720" anchor="t" anchorCtr="0"/>
                     <a:p>
+                      <a:pPr lvl="0">
+                        <a:defRPr/>
+                      </a:pPr>
                       <a:r>
                         <a:rPr sz="1400" b="1">
                           <a:solidFill>
@@ -23227,19 +23112,28 @@
                         </a:rPr>
                         <a:t>TBL_RAW_MMSE / LABEL</a:t>
                       </a:r>
+                      <a:endParaRPr sz="1400" b="1">
+                        <a:solidFill>
+                          <a:srgbClr val="104281"/>
+                        </a:solidFill>
+                        <a:latin typeface="맑은 고딕"/>
+                        <a:ea typeface="맑은 고딕"/>
+                      </a:endParaRPr>
                     </a:p>
                   </a:txBody>
-                  <a:tcPr marL="109728" marT="91440">
+                  <a:tcPr marL="109728" marR="91440" marT="91440">
                     <a:solidFill>
-                      <a:srgbClr val="EEF3FB"/>
+                      <a:srgbClr val="eef3fb"/>
                     </a:solidFill>
                   </a:tcPr>
                 </a:tc>
                 <a:tc>
                   <a:txBody>
-                    <a:bodyPr/>
-                    <a:lstStyle/>
+                    <a:bodyPr vert="horz" lIns="109728" tIns="91440" rIns="91440" bIns="45720" anchor="t" anchorCtr="0"/>
                     <a:p>
+                      <a:pPr lvl="0">
+                        <a:defRPr/>
+                      </a:pPr>
                       <a:r>
                         <a:rPr sz="1400" b="1">
                           <a:solidFill>
@@ -23250,19 +23144,28 @@
                         </a:rPr>
                         <a:t>검사·진단 원천 보관 — MMSE는 학습 입력에서 제외</a:t>
                       </a:r>
+                      <a:endParaRPr sz="1400" b="1">
+                        <a:solidFill>
+                          <a:srgbClr val="202020"/>
+                        </a:solidFill>
+                        <a:latin typeface="맑은 고딕"/>
+                        <a:ea typeface="맑은 고딕"/>
+                      </a:endParaRPr>
                     </a:p>
                   </a:txBody>
-                  <a:tcPr marL="109728" marT="91440">
+                  <a:tcPr marL="109728" marR="91440" marT="91440">
                     <a:solidFill>
-                      <a:srgbClr val="FFFFFF"/>
+                      <a:srgbClr val="ffffff"/>
                     </a:solidFill>
                   </a:tcPr>
                 </a:tc>
                 <a:tc>
                   <a:txBody>
-                    <a:bodyPr/>
-                    <a:lstStyle/>
+                    <a:bodyPr vert="horz" lIns="109728" tIns="91440" rIns="91440" bIns="45720" anchor="t" anchorCtr="0"/>
                     <a:p>
+                      <a:pPr lvl="0">
+                        <a:defRPr/>
+                      </a:pPr>
                       <a:r>
                         <a:rPr sz="1400" b="1">
                           <a:solidFill>
@@ -23273,11 +23176,18 @@
                         </a:rPr>
                         <a:t>각 174행</a:t>
                       </a:r>
+                      <a:endParaRPr sz="1400" b="1">
+                        <a:solidFill>
+                          <a:srgbClr val="202020"/>
+                        </a:solidFill>
+                        <a:latin typeface="맑은 고딕"/>
+                        <a:ea typeface="맑은 고딕"/>
+                      </a:endParaRPr>
                     </a:p>
                   </a:txBody>
-                  <a:tcPr marL="109728" marT="91440">
+                  <a:tcPr marL="109728" marR="91440" marT="91440">
                     <a:solidFill>
-                      <a:srgbClr val="FFFFFF"/>
+                      <a:srgbClr val="ffffff"/>
                     </a:solidFill>
                   </a:tcPr>
                 </a:tc>
@@ -23285,9 +23195,11 @@
               <a:tr h="658368">
                 <a:tc>
                   <a:txBody>
-                    <a:bodyPr/>
-                    <a:lstStyle/>
+                    <a:bodyPr vert="horz" lIns="109728" tIns="91440" rIns="91440" bIns="45720" anchor="t" anchorCtr="0"/>
                     <a:p>
+                      <a:pPr lvl="0">
+                        <a:defRPr/>
+                      </a:pPr>
                       <a:r>
                         <a:rPr sz="1400" b="1">
                           <a:solidFill>
@@ -23298,19 +23210,28 @@
                         </a:rPr>
                         <a:t>TBL_DEMENTIA_CENTER</a:t>
                       </a:r>
+                      <a:endParaRPr sz="1400" b="1">
+                        <a:solidFill>
+                          <a:srgbClr val="104281"/>
+                        </a:solidFill>
+                        <a:latin typeface="맑은 고딕"/>
+                        <a:ea typeface="맑은 고딕"/>
+                      </a:endParaRPr>
                     </a:p>
                   </a:txBody>
-                  <a:tcPr marL="109728" marT="91440">
+                  <a:tcPr marL="109728" marR="91440" marT="91440">
                     <a:solidFill>
-                      <a:srgbClr val="EEF3FB"/>
+                      <a:srgbClr val="eef3fb"/>
                     </a:solidFill>
                   </a:tcPr>
                 </a:tc>
                 <a:tc>
                   <a:txBody>
-                    <a:bodyPr/>
-                    <a:lstStyle/>
+                    <a:bodyPr vert="horz" lIns="109728" tIns="91440" rIns="91440" bIns="45720" anchor="t" anchorCtr="0"/>
                     <a:p>
+                      <a:pPr lvl="0">
+                        <a:defRPr/>
+                      </a:pPr>
                       <a:r>
                         <a:rPr sz="1400" b="1">
                           <a:solidFill>
@@ -23321,19 +23242,28 @@
                         </a:rPr>
                         <a:t>치매안심센터 공공데이터 — 서비스 지도 안내에 사용</a:t>
                       </a:r>
+                      <a:endParaRPr sz="1400" b="1">
+                        <a:solidFill>
+                          <a:srgbClr val="202020"/>
+                        </a:solidFill>
+                        <a:latin typeface="맑은 고딕"/>
+                        <a:ea typeface="맑은 고딕"/>
+                      </a:endParaRPr>
                     </a:p>
                   </a:txBody>
-                  <a:tcPr marL="109728" marT="91440">
+                  <a:tcPr marL="109728" marR="91440" marT="91440">
                     <a:solidFill>
-                      <a:srgbClr val="FFFFFF"/>
+                      <a:srgbClr val="ffffff"/>
                     </a:solidFill>
                   </a:tcPr>
                 </a:tc>
                 <a:tc>
                   <a:txBody>
-                    <a:bodyPr/>
-                    <a:lstStyle/>
+                    <a:bodyPr vert="horz" lIns="109728" tIns="91440" rIns="91440" bIns="45720" anchor="t" anchorCtr="0"/>
                     <a:p>
+                      <a:pPr lvl="0">
+                        <a:defRPr/>
+                      </a:pPr>
                       <a:r>
                         <a:rPr sz="1400" b="1">
                           <a:solidFill>
@@ -23344,11 +23274,18 @@
                         </a:rPr>
                         <a:t>317행</a:t>
                       </a:r>
+                      <a:endParaRPr sz="1400" b="1">
+                        <a:solidFill>
+                          <a:srgbClr val="202020"/>
+                        </a:solidFill>
+                        <a:latin typeface="맑은 고딕"/>
+                        <a:ea typeface="맑은 고딕"/>
+                      </a:endParaRPr>
                     </a:p>
                   </a:txBody>
-                  <a:tcPr marL="109728" marT="91440">
+                  <a:tcPr marL="109728" marR="91440" marT="91440">
                     <a:solidFill>
-                      <a:srgbClr val="FFFFFF"/>
+                      <a:srgbClr val="ffffff"/>
                     </a:solidFill>
                   </a:tcPr>
                 </a:tc>
@@ -23356,9 +23293,11 @@
               <a:tr h="658368">
                 <a:tc>
                   <a:txBody>
-                    <a:bodyPr/>
-                    <a:lstStyle/>
+                    <a:bodyPr vert="horz" lIns="109728" tIns="91440" rIns="91440" bIns="45720" anchor="t" anchorCtr="0"/>
                     <a:p>
+                      <a:pPr lvl="0">
+                        <a:defRPr/>
+                      </a:pPr>
                       <a:r>
                         <a:rPr sz="1400" b="1">
                           <a:solidFill>
@@ -23369,19 +23308,28 @@
                         </a:rPr>
                         <a:t>uploads / upload_daily</a:t>
                       </a:r>
+                      <a:endParaRPr sz="1400" b="1">
+                        <a:solidFill>
+                          <a:srgbClr val="104281"/>
+                        </a:solidFill>
+                        <a:latin typeface="맑은 고딕"/>
+                        <a:ea typeface="맑은 고딕"/>
+                      </a:endParaRPr>
                     </a:p>
                   </a:txBody>
-                  <a:tcPr marL="109728" marT="91440">
+                  <a:tcPr marL="109728" marR="91440" marT="91440">
                     <a:solidFill>
-                      <a:srgbClr val="EEF3FB"/>
+                      <a:srgbClr val="eef3fb"/>
                     </a:solidFill>
                   </a:tcPr>
                 </a:tc>
                 <a:tc>
                   <a:txBody>
-                    <a:bodyPr/>
-                    <a:lstStyle/>
+                    <a:bodyPr vert="horz" lIns="109728" tIns="91440" rIns="91440" bIns="45720" anchor="t" anchorCtr="0"/>
                     <a:p>
+                      <a:pPr lvl="0">
+                        <a:defRPr/>
+                      </a:pPr>
                       <a:r>
                         <a:rPr sz="1400" b="1">
                           <a:solidFill>
@@ -23392,19 +23340,28 @@
                         </a:rPr>
                         <a:t>서비스 업로드 자동 적재 (SQLite) — 재학습 재료</a:t>
                       </a:r>
+                      <a:endParaRPr sz="1400" b="1">
+                        <a:solidFill>
+                          <a:srgbClr val="202020"/>
+                        </a:solidFill>
+                        <a:latin typeface="맑은 고딕"/>
+                        <a:ea typeface="맑은 고딕"/>
+                      </a:endParaRPr>
                     </a:p>
                   </a:txBody>
-                  <a:tcPr marL="109728" marT="91440">
+                  <a:tcPr marL="109728" marR="91440" marT="91440">
                     <a:solidFill>
-                      <a:srgbClr val="FFFFFF"/>
+                      <a:srgbClr val="ffffff"/>
                     </a:solidFill>
                   </a:tcPr>
                 </a:tc>
                 <a:tc>
                   <a:txBody>
-                    <a:bodyPr/>
-                    <a:lstStyle/>
+                    <a:bodyPr vert="horz" lIns="109728" tIns="91440" rIns="91440" bIns="45720" anchor="t" anchorCtr="0"/>
                     <a:p>
+                      <a:pPr lvl="0">
+                        <a:defRPr/>
+                      </a:pPr>
                       <a:r>
                         <a:rPr sz="1400" b="1">
                           <a:solidFill>
@@ -23415,11 +23372,18 @@
                         </a:rPr>
                         <a:t>실시간 누적</a:t>
                       </a:r>
+                      <a:endParaRPr sz="1400" b="1">
+                        <a:solidFill>
+                          <a:srgbClr val="202020"/>
+                        </a:solidFill>
+                        <a:latin typeface="맑은 고딕"/>
+                        <a:ea typeface="맑은 고딕"/>
+                      </a:endParaRPr>
                     </a:p>
                   </a:txBody>
-                  <a:tcPr marL="109728" marT="91440">
+                  <a:tcPr marL="109728" marR="91440" marT="91440">
                     <a:solidFill>
-                      <a:srgbClr val="FFFFFF"/>
+                      <a:srgbClr val="ffffff"/>
                     </a:solidFill>
                   </a:tcPr>
                 </a:tc>
@@ -23437,7 +23401,7 @@
         <p:spPr>
           <a:xfrm>
             <a:off x="640080" y="5394960"/>
-            <a:ext cx="10972800" cy="822960"/>
+            <a:ext cx="10972800" cy="337185"/>
           </a:xfrm>
           <a:prstGeom prst="rect">
             <a:avLst/>
@@ -23454,6 +23418,7 @@
               <a:spcAft>
                 <a:spcPts val="600"/>
               </a:spcAft>
+              <a:defRPr/>
             </a:pPr>
             <a:r>
               <a:rPr sz="1600" b="1">
@@ -23465,6 +23430,13 @@
               </a:rPr>
               <a:t>원천 보관(Oracle) · 서비스 조회(센터 데이터) · 신규 수집(업로드 적재) — 세 층으로 분리 구축</a:t>
             </a:r>
+            <a:endParaRPr sz="1600" b="1">
+              <a:solidFill>
+                <a:srgbClr val="104281"/>
+              </a:solidFill>
+              <a:latin typeface="맑은 고딕"/>
+              <a:ea typeface="맑은 고딕"/>
+            </a:endParaRPr>
           </a:p>
         </p:txBody>
       </p:sp>
@@ -23477,7 +23449,7 @@
         <p:spPr>
           <a:xfrm>
             <a:off x="11475720" y="6446520"/>
-            <a:ext cx="640080" cy="320040"/>
+            <a:ext cx="640080" cy="266700"/>
           </a:xfrm>
           <a:prstGeom prst="rect">
             <a:avLst/>
@@ -23494,6 +23466,7 @@
               <a:spcAft>
                 <a:spcPts val="600"/>
               </a:spcAft>
+              <a:defRPr/>
             </a:pPr>
             <a:r>
               <a:rPr sz="1200" b="0">
@@ -23505,6 +23478,13 @@
               </a:rPr>
               <a:t>23</a:t>
             </a:r>
+            <a:endParaRPr sz="1200" b="0">
+              <a:solidFill>
+                <a:srgbClr val="666666"/>
+              </a:solidFill>
+              <a:latin typeface="맑은 고딕"/>
+              <a:ea typeface="맑은 고딕"/>
+            </a:endParaRPr>
           </a:p>
         </p:txBody>
       </p:sp>
@@ -23513,6 +23493,14 @@
   <p:clrMapOvr>
     <a:masterClrMapping/>
   </p:clrMapOvr>
+  <mc:AlternateContent xmlns:mc="http://schemas.openxmlformats.org/markup-compatibility/2006">
+    <mc:Choice xmlns:p14="http://schemas.microsoft.com/office/powerpoint/2010/main" Requires="p14">
+      <p:transition xmlns:mc="http://schemas.openxmlformats.org/markup-compatibility/2006" xmlns:p14="http://schemas.microsoft.com/office/powerpoint/2010/main" mc:Ignorable="p14" p14:dur="500"/>
+    </mc:Choice>
+    <mc:Fallback>
+      <p:transition/>
+    </mc:Fallback>
+  </mc:AlternateContent>
 </p:sld>
 </file>
 
@@ -24894,11 +24882,11 @@
 </file>
 
 <file path=ppt/slides/slide25.xml><?xml version="1.0" encoding="utf-8"?>
-<p:sld xmlns:a="http://schemas.openxmlformats.org/drawingml/2006/main" xmlns:r="http://schemas.openxmlformats.org/officeDocument/2006/relationships" xmlns:mc="http://schemas.openxmlformats.org/markup-compatibility/2006" xmlns:mv="urn:schemas-microsoft-com:mac:vml" xmlns:p="http://schemas.openxmlformats.org/presentationml/2006/main" xmlns:c="http://schemas.openxmlformats.org/drawingml/2006/chart" xmlns:dgm="http://schemas.openxmlformats.org/drawingml/2006/diagram" xmlns:o="urn:schemas-microsoft-com:office:office" xmlns:v="urn:schemas-microsoft-com:vml" xmlns:pvml="urn:schemas-microsoft-com:office:powerpoint" xmlns:com="http://schemas.openxmlformats.org/drawingml/2006/compatibility" xmlns:p14="http://schemas.microsoft.com/office/powerpoint/2010/main" xmlns:p15="http://schemas.microsoft.com/office/powerpoint/2012/main" xmlns:ahyp="http://schemas.microsoft.com/office/drawing/2018/hyperlinkcolor">
+<p:sld xmlns:r="http://schemas.openxmlformats.org/officeDocument/2006/relationships" xmlns:c="http://schemas.openxmlformats.org/drawingml/2006/chart" xmlns:a="http://schemas.openxmlformats.org/drawingml/2006/main" xmlns:dgm="http://schemas.openxmlformats.org/drawingml/2006/diagram" xmlns:dsp="http://schemas.microsoft.com/office/drawing/2008/diagram" xmlns:p="http://schemas.openxmlformats.org/presentationml/2006/main">
   <p:cSld>
     <p:spTree>
       <p:nvGrpSpPr>
-        <p:cNvPr id="326" name="Shape 326"/>
+        <p:cNvPr id="1" name=""/>
         <p:cNvGrpSpPr/>
         <p:nvPr/>
       </p:nvGrpSpPr>
@@ -24931,36 +24919,30 @@
             <a:noFill/>
           </a:ln>
           <a:effectLst>
-            <a:outerShdw blurRad="40000" rotWithShape="0" dir="5400000" dist="23000">
+            <a:outerShdw blurRad="40000" dist="23000" dir="5400000" rotWithShape="0">
               <a:srgbClr val="000000">
-                <a:alpha val="34902"/>
+                <a:alpha val="34900"/>
               </a:srgbClr>
             </a:outerShdw>
           </a:effectLst>
         </p:spPr>
         <p:txBody>
-          <a:bodyPr anchorCtr="0" anchor="ctr" bIns="45700" lIns="91425" spcFirstLastPara="1" rIns="91425" wrap="square" tIns="45700">
+          <a:bodyPr wrap="square" lIns="91424" tIns="45700" rIns="91424" bIns="45700" anchor="ctr" anchorCtr="0">
             <a:noAutofit/>
           </a:bodyPr>
           <a:lstStyle/>
           <a:p>
-            <a:pPr indent="0" lvl="0" marL="0" marR="0" rtl="0" algn="ctr">
-              <a:spcBef>
-                <a:spcPts val="0"/>
-              </a:spcBef>
-              <a:spcAft>
-                <a:spcPts val="0"/>
-              </a:spcAft>
-              <a:buNone/>
-            </a:pPr>
-            <a:r>
-              <a:rPr>
-                <a:latin typeface="맑은 고딕"/>
-                <a:ea typeface="맑은 고딕"/>
-              </a:rPr>
-              <a:t/>
-            </a:r>
-            <a:endParaRPr b="0" i="0" sz="1800" u="none" cap="none" strike="noStrike">
+            <a:pPr marL="0" marR="0" lvl="0" indent="0" algn="ctr" rtl="0">
+              <a:spcBef>
+                <a:spcPts val="0"/>
+              </a:spcBef>
+              <a:spcAft>
+                <a:spcPts val="0"/>
+              </a:spcAft>
+              <a:buNone/>
+              <a:defRPr/>
+            </a:pPr>
+            <a:endParaRPr sz="1800" b="0" i="0" u="none" strike="noStrike" cap="none">
               <a:solidFill>
                 <a:schemeClr val="lt1"/>
               </a:solidFill>
@@ -24992,40 +24974,41 @@
           </a:ln>
         </p:spPr>
         <p:txBody>
-          <a:bodyPr anchorCtr="0" anchor="t" bIns="45700" lIns="91425" spcFirstLastPara="1" rIns="91425" wrap="square" tIns="45700">
+          <a:bodyPr wrap="square" lIns="91424" tIns="45700" rIns="91424" bIns="45700" anchor="t" anchorCtr="0">
             <a:spAutoFit/>
           </a:bodyPr>
           <a:lstStyle/>
           <a:p>
-            <a:pPr indent="0" lvl="0" marL="0" marR="0" rtl="0" algn="l">
-              <a:spcBef>
-                <a:spcPts val="0"/>
-              </a:spcBef>
-              <a:spcAft>
-                <a:spcPts val="0"/>
-              </a:spcAft>
-              <a:buNone/>
-            </a:pPr>
-            <a:r>
-              <a:rPr b="1" i="0" lang="en-US" sz="1600" u="none" cap="none" strike="noStrike">
-                <a:solidFill>
-                  <a:srgbClr val="2A78D6"/>
+            <a:pPr marL="0" marR="0" lvl="0" indent="0" algn="l" rtl="0">
+              <a:spcBef>
+                <a:spcPts val="0"/>
+              </a:spcBef>
+              <a:spcAft>
+                <a:spcPts val="0"/>
+              </a:spcAft>
+              <a:buNone/>
+              <a:defRPr/>
+            </a:pPr>
+            <a:r>
+              <a:rPr lang="en-US" sz="1600" b="1" i="0" u="none" strike="noStrike" cap="none">
+                <a:solidFill>
+                  <a:srgbClr val="2a78d6"/>
                 </a:solidFill>
                 <a:latin typeface="맑은 고딕"/>
                 <a:ea typeface="맑은 고딕"/>
-                <a:cs typeface="Malgun Gothic"/>
-                <a:sym typeface="Malgun Gothic"/>
+                <a:cs typeface="맑은 고딕"/>
+                <a:sym typeface="맑은 고딕"/>
               </a:rPr>
               <a:t>06. 결론 및 확장</a:t>
             </a:r>
-            <a:endParaRPr b="1" i="0" sz="1600" u="none" cap="none" strike="noStrike">
+            <a:endParaRPr sz="1600" b="1" i="0" u="none" strike="noStrike" cap="none">
               <a:solidFill>
-                <a:srgbClr val="2A78D6"/>
+                <a:srgbClr val="2a78d6"/>
               </a:solidFill>
-              <a:latin typeface="Malgun Gothic"/>
-              <a:ea typeface="Malgun Gothic"/>
-              <a:cs typeface="Malgun Gothic"/>
-              <a:sym typeface="Malgun Gothic"/>
+              <a:latin typeface="맑은 고딕"/>
+              <a:ea typeface="맑은 고딕"/>
+              <a:cs typeface="맑은 고딕"/>
+              <a:sym typeface="맑은 고딕"/>
             </a:endParaRPr>
           </a:p>
         </p:txBody>
@@ -25050,40 +25033,101 @@
           </a:ln>
         </p:spPr>
         <p:txBody>
-          <a:bodyPr anchorCtr="0" anchor="t" bIns="45700" lIns="91425" spcFirstLastPara="1" rIns="91425" wrap="square" tIns="45700">
+          <a:bodyPr wrap="square" lIns="91424" tIns="45700" rIns="91424" bIns="45700" anchor="t" anchorCtr="0">
             <a:spAutoFit/>
           </a:bodyPr>
           <a:lstStyle/>
           <a:p>
-            <a:pPr indent="0" lvl="0" marL="0" marR="0" rtl="0" algn="l">
-              <a:spcBef>
-                <a:spcPts val="0"/>
-              </a:spcBef>
-              <a:spcAft>
-                <a:spcPts val="0"/>
-              </a:spcAft>
-              <a:buNone/>
-            </a:pPr>
-            <a:r>
-              <a:rPr b="1" i="0" lang="en-US" sz="3000" u="none" cap="none" strike="noStrike">
+            <a:pPr marL="0" marR="0" lvl="0" indent="0" algn="l" rtl="0">
+              <a:spcBef>
+                <a:spcPts val="0"/>
+              </a:spcBef>
+              <a:spcAft>
+                <a:spcPts val="0"/>
+              </a:spcAft>
+              <a:buNone/>
+              <a:defRPr/>
+            </a:pPr>
+            <a:r>
+              <a:rPr lang="en-US" sz="3000" b="1" i="0" u="none" strike="noStrike" cap="none">
                 <a:solidFill>
                   <a:srgbClr val="104281"/>
                 </a:solidFill>
                 <a:latin typeface="맑은 고딕"/>
                 <a:ea typeface="맑은 고딕"/>
-                <a:cs typeface="Malgun Gothic"/>
-                <a:sym typeface="Malgun Gothic"/>
+                <a:cs typeface="맑은 고딕"/>
+                <a:sym typeface="맑은 고딕"/>
               </a:rPr>
-              <a:t>5일 동안 만든 것은 숫자가 아니라, 믿을 수 있는 절차입니다</a:t>
-            </a:r>
-            <a:endParaRPr b="1" i="0" sz="3000" u="none" cap="none" strike="noStrike">
+              <a:t>숫자가 아</a:t>
+            </a:r>
+            <a:r>
+              <a:rPr lang="ko-KR" altLang="en-US" sz="3000" b="1" i="0" u="none" strike="noStrike" cap="none">
+                <a:solidFill>
+                  <a:srgbClr val="104281"/>
+                </a:solidFill>
+                <a:latin typeface="맑은 고딕"/>
+                <a:ea typeface="맑은 고딕"/>
+                <a:cs typeface="맑은 고딕"/>
+                <a:sym typeface="맑은 고딕"/>
+              </a:rPr>
+              <a:t>닌</a:t>
+            </a:r>
+            <a:r>
+              <a:rPr lang="en-US" sz="3000" b="1" i="0" u="none" strike="noStrike" cap="none">
+                <a:solidFill>
+                  <a:srgbClr val="104281"/>
+                </a:solidFill>
+                <a:latin typeface="맑은 고딕"/>
+                <a:ea typeface="맑은 고딕"/>
+                <a:cs typeface="맑은 고딕"/>
+                <a:sym typeface="맑은 고딕"/>
+              </a:rPr>
+              <a:t>, </a:t>
+            </a:r>
+            <a:r>
+              <a:rPr lang="ko-KR" altLang="en-US" sz="3000" b="1" i="0" u="none" strike="noStrike" cap="none">
+                <a:solidFill>
+                  <a:srgbClr val="104281"/>
+                </a:solidFill>
+                <a:latin typeface="맑은 고딕"/>
+                <a:ea typeface="맑은 고딕"/>
+                <a:cs typeface="맑은 고딕"/>
+                <a:sym typeface="맑은 고딕"/>
+              </a:rPr>
+              <a:t>신뢰 가능한</a:t>
+            </a:r>
+            <a:r>
+              <a:rPr lang="en-US" sz="3000" b="1" i="0" u="none" strike="noStrike" cap="none">
+                <a:solidFill>
+                  <a:srgbClr val="104281"/>
+                </a:solidFill>
+                <a:latin typeface="맑은 고딕"/>
+                <a:ea typeface="맑은 고딕"/>
+                <a:cs typeface="맑은 고딕"/>
+                <a:sym typeface="맑은 고딕"/>
+              </a:rPr>
+              <a:t> 절차</a:t>
+            </a:r>
+            <a:r>
+              <a:rPr lang="ko-KR" altLang="en-US" sz="3000" b="1" i="0" u="none" strike="noStrike" cap="none">
+                <a:solidFill>
+                  <a:srgbClr val="104281"/>
+                </a:solidFill>
+                <a:latin typeface="맑은 고딕"/>
+                <a:ea typeface="맑은 고딕"/>
+                <a:cs typeface="맑은 고딕"/>
+                <a:sym typeface="맑은 고딕"/>
+              </a:rPr>
+              <a:t>를 만들었습니다</a:t>
+            </a:r>
+            <a:endParaRPr lang="ko-KR" altLang="en-US" sz="3000" b="1" i="0" u="none" strike="noStrike" cap="none">
               <a:solidFill>
                 <a:srgbClr val="104281"/>
               </a:solidFill>
-              <a:latin typeface="Malgun Gothic"/>
-              <a:ea typeface="Malgun Gothic"/>
-              <a:cs typeface="Malgun Gothic"/>
-              <a:sym typeface="Malgun Gothic"/>
+              <a:latin typeface="맑은 고딕"/>
+              <a:ea typeface="맑은 고딕"/>
+              <a:cs typeface="맑은 고딕"/>
+              <a:sym typeface="맑은 고딕"/>
             </a:endParaRPr>
           </a:p>
         </p:txBody>
@@ -25097,7 +25141,7 @@
         <p:spPr>
           <a:xfrm>
             <a:off x="914400" y="1691640"/>
-            <a:ext cx="10607040" cy="4926330"/>
+            <a:ext cx="10607040" cy="5002510"/>
           </a:xfrm>
           <a:prstGeom prst="rect">
             <a:avLst/>
@@ -25108,44 +25152,45 @@
           </a:ln>
         </p:spPr>
         <p:txBody>
-          <a:bodyPr anchorCtr="0" anchor="t" bIns="45700" lIns="91425" spcFirstLastPara="1" rIns="91425" wrap="square" tIns="45700">
+          <a:bodyPr wrap="square" lIns="91424" tIns="45700" rIns="91424" bIns="45700" anchor="t" anchorCtr="0">
             <a:spAutoFit/>
           </a:bodyPr>
           <a:lstStyle/>
           <a:p>
-            <a:pPr indent="0" lvl="0" marL="0" marR="0" rtl="0" algn="l">
-              <a:spcBef>
-                <a:spcPts val="0"/>
-              </a:spcBef>
-              <a:spcAft>
-                <a:spcPts val="0"/>
-              </a:spcAft>
-              <a:buNone/>
-            </a:pPr>
-            <a:r>
-              <a:rPr b="1" i="0" lang="en-US" sz="2200" u="none" cap="none" strike="noStrike">
-                <a:solidFill>
-                  <a:srgbClr val="2A78D6"/>
+            <a:pPr marL="0" marR="0" lvl="0" indent="0" algn="l" rtl="0">
+              <a:spcBef>
+                <a:spcPts val="0"/>
+              </a:spcBef>
+              <a:spcAft>
+                <a:spcPts val="0"/>
+              </a:spcAft>
+              <a:buNone/>
+              <a:defRPr/>
+            </a:pPr>
+            <a:r>
+              <a:rPr lang="en-US" sz="2200" b="1" i="0" u="none" strike="noStrike" cap="none">
+                <a:solidFill>
+                  <a:srgbClr val="2a78d6"/>
                 </a:solidFill>
                 <a:latin typeface="맑은 고딕"/>
                 <a:ea typeface="맑은 고딕"/>
-                <a:cs typeface="Malgun Gothic"/>
-                <a:sym typeface="Malgun Gothic"/>
+                <a:cs typeface="맑은 고딕"/>
+                <a:sym typeface="맑은 고딕"/>
               </a:rPr>
               <a:t>확인한 것</a:t>
             </a:r>
-            <a:endParaRPr b="1" i="0" sz="2200" u="none" cap="none" strike="noStrike">
+            <a:endParaRPr lang="en-US" sz="2200" b="1" i="0" u="none" strike="noStrike" cap="none">
               <a:solidFill>
-                <a:srgbClr val="2A78D6"/>
+                <a:srgbClr val="2a78d6"/>
               </a:solidFill>
-              <a:latin typeface="Malgun Gothic"/>
-              <a:ea typeface="Malgun Gothic"/>
-              <a:cs typeface="Malgun Gothic"/>
-              <a:sym typeface="Malgun Gothic"/>
+              <a:latin typeface="맑은 고딕"/>
+              <a:ea typeface="맑은 고딕"/>
+              <a:cs typeface="맑은 고딕"/>
+              <a:sym typeface="맑은 고딕"/>
             </a:endParaRPr>
           </a:p>
           <a:p>
-            <a:pPr indent="0" lvl="0" marL="0" marR="0" rtl="0" algn="l">
+            <a:pPr marL="0" marR="0" lvl="0" indent="0" algn="l" rtl="0">
               <a:spcBef>
                 <a:spcPts val="600"/>
               </a:spcBef>
@@ -25153,31 +25198,32 @@
                 <a:spcPts val="0"/>
               </a:spcAft>
               <a:buNone/>
-            </a:pPr>
-            <a:r>
-              <a:rPr b="1" i="0" lang="en-US" sz="2000" u="none" cap="none" strike="noStrike">
+              <a:defRPr/>
+            </a:pPr>
+            <a:r>
+              <a:rPr lang="en-US" sz="2000" b="1" i="0" u="none" strike="noStrike" cap="none">
                 <a:solidFill>
                   <a:srgbClr val="202020"/>
                 </a:solidFill>
                 <a:latin typeface="맑은 고딕"/>
                 <a:ea typeface="맑은 고딕"/>
-                <a:cs typeface="Malgun Gothic"/>
-                <a:sym typeface="Malgun Gothic"/>
+                <a:cs typeface="맑은 고딕"/>
+                <a:sym typeface="맑은 고딕"/>
               </a:rPr>
               <a:t>· 활동량 평균이 아니라 "생활 패턴의 불규칙함"이 위험군을 가른다</a:t>
             </a:r>
-            <a:endParaRPr b="1" i="0" sz="2000" u="none" cap="none" strike="noStrike">
+            <a:endParaRPr lang="en-US" sz="2000" b="1" i="0" u="none" strike="noStrike" cap="none">
               <a:solidFill>
                 <a:srgbClr val="202020"/>
               </a:solidFill>
-              <a:latin typeface="Malgun Gothic"/>
-              <a:ea typeface="Malgun Gothic"/>
-              <a:cs typeface="Malgun Gothic"/>
-              <a:sym typeface="Malgun Gothic"/>
+              <a:latin typeface="맑은 고딕"/>
+              <a:ea typeface="맑은 고딕"/>
+              <a:cs typeface="맑은 고딕"/>
+              <a:sym typeface="맑은 고딕"/>
             </a:endParaRPr>
           </a:p>
           <a:p>
-            <a:pPr indent="0" lvl="0" marL="0" marR="0" rtl="0" algn="l">
+            <a:pPr marL="0" marR="0" lvl="0" indent="0" algn="l" rtl="0">
               <a:spcBef>
                 <a:spcPts val="600"/>
               </a:spcBef>
@@ -25185,31 +25231,32 @@
                 <a:spcPts val="0"/>
               </a:spcAft>
               <a:buNone/>
-            </a:pPr>
-            <a:r>
-              <a:rPr b="1" i="0" lang="en-US" sz="2000" u="none" cap="none" strike="noStrike">
+              <a:defRPr/>
+            </a:pPr>
+            <a:r>
+              <a:rPr lang="en-US" sz="2000" b="1" i="0" u="none" strike="noStrike" cap="none">
                 <a:solidFill>
                   <a:srgbClr val="202020"/>
                 </a:solidFill>
                 <a:latin typeface="맑은 고딕"/>
                 <a:ea typeface="맑은 고딕"/>
-                <a:cs typeface="Malgun Gothic"/>
-                <a:sym typeface="Malgun Gothic"/>
+                <a:cs typeface="맑은 고딕"/>
+                <a:sym typeface="맑은 고딕"/>
               </a:rPr>
               <a:t>· 그 구분 능력은 우연이 아니다 (우연일 확률 0.6%)</a:t>
             </a:r>
-            <a:endParaRPr b="1" i="0" sz="2000" u="none" cap="none" strike="noStrike">
+            <a:endParaRPr lang="en-US" sz="2000" b="1" i="0" u="none" strike="noStrike" cap="none">
               <a:solidFill>
                 <a:srgbClr val="202020"/>
               </a:solidFill>
-              <a:latin typeface="Malgun Gothic"/>
-              <a:ea typeface="Malgun Gothic"/>
-              <a:cs typeface="Malgun Gothic"/>
-              <a:sym typeface="Malgun Gothic"/>
+              <a:latin typeface="맑은 고딕"/>
+              <a:ea typeface="맑은 고딕"/>
+              <a:cs typeface="맑은 고딕"/>
+              <a:sym typeface="맑은 고딕"/>
             </a:endParaRPr>
           </a:p>
           <a:p>
-            <a:pPr indent="0" lvl="0" marL="0" marR="0" rtl="0" algn="l">
+            <a:pPr marL="0" marR="0" lvl="0" indent="0" algn="l" rtl="0">
               <a:spcBef>
                 <a:spcPts val="600"/>
               </a:spcBef>
@@ -25217,26 +25264,20 @@
                 <a:spcPts val="0"/>
               </a:spcAft>
               <a:buNone/>
-            </a:pPr>
-            <a:r>
-              <a:rPr>
-                <a:latin typeface="맑은 고딕"/>
-                <a:ea typeface="맑은 고딕"/>
-              </a:rPr>
-              <a:t/>
-            </a:r>
-            <a:endParaRPr b="1" i="0" sz="1800" u="none" cap="none" strike="noStrike">
+              <a:defRPr/>
+            </a:pPr>
+            <a:endParaRPr sz="1800" b="1" i="0" u="none" strike="noStrike" cap="none">
               <a:solidFill>
                 <a:srgbClr val="202020"/>
               </a:solidFill>
-              <a:latin typeface="Malgun Gothic"/>
-              <a:ea typeface="Malgun Gothic"/>
-              <a:cs typeface="Malgun Gothic"/>
-              <a:sym typeface="Malgun Gothic"/>
+              <a:latin typeface="맑은 고딕"/>
+              <a:ea typeface="맑은 고딕"/>
+              <a:cs typeface="맑은 고딕"/>
+              <a:sym typeface="맑은 고딕"/>
             </a:endParaRPr>
           </a:p>
           <a:p>
-            <a:pPr indent="0" lvl="0" marL="0" marR="0" rtl="0" algn="l">
+            <a:pPr marL="0" marR="0" lvl="0" indent="0" algn="l" rtl="0">
               <a:spcBef>
                 <a:spcPts val="600"/>
               </a:spcBef>
@@ -25244,31 +25285,32 @@
                 <a:spcPts val="0"/>
               </a:spcAft>
               <a:buNone/>
-            </a:pPr>
-            <a:r>
-              <a:rPr b="1" i="0" lang="en-US" sz="2200" u="none" cap="none" strike="noStrike">
-                <a:solidFill>
-                  <a:srgbClr val="2A78D6"/>
+              <a:defRPr/>
+            </a:pPr>
+            <a:r>
+              <a:rPr lang="en-US" sz="2200" b="1" i="0" u="none" strike="noStrike" cap="none">
+                <a:solidFill>
+                  <a:srgbClr val="2a78d6"/>
                 </a:solidFill>
                 <a:latin typeface="맑은 고딕"/>
                 <a:ea typeface="맑은 고딕"/>
-                <a:cs typeface="Malgun Gothic"/>
-                <a:sym typeface="Malgun Gothic"/>
+                <a:cs typeface="맑은 고딕"/>
+                <a:sym typeface="맑은 고딕"/>
               </a:rPr>
               <a:t>한계</a:t>
             </a:r>
-            <a:endParaRPr b="1" i="0" sz="2200" u="none" cap="none" strike="noStrike">
+            <a:endParaRPr lang="en-US" sz="2200" b="1" i="0" u="none" strike="noStrike" cap="none">
               <a:solidFill>
-                <a:srgbClr val="2A78D6"/>
+                <a:srgbClr val="2a78d6"/>
               </a:solidFill>
-              <a:latin typeface="Malgun Gothic"/>
-              <a:ea typeface="Malgun Gothic"/>
-              <a:cs typeface="Malgun Gothic"/>
-              <a:sym typeface="Malgun Gothic"/>
+              <a:latin typeface="맑은 고딕"/>
+              <a:ea typeface="맑은 고딕"/>
+              <a:cs typeface="맑은 고딕"/>
+              <a:sym typeface="맑은 고딕"/>
             </a:endParaRPr>
           </a:p>
           <a:p>
-            <a:pPr indent="0" lvl="0" marL="0" marR="0" rtl="0" algn="l">
+            <a:pPr marL="0" marR="0" lvl="0" indent="0" algn="l" rtl="0">
               <a:spcBef>
                 <a:spcPts val="600"/>
               </a:spcBef>
@@ -25276,31 +25318,56 @@
                 <a:spcPts val="0"/>
               </a:spcAft>
               <a:buNone/>
-            </a:pPr>
-            <a:r>
-              <a:rPr b="1" i="0" lang="en-US" sz="2000" u="none" cap="none" strike="noStrike">
+              <a:defRPr/>
+            </a:pPr>
+            <a:r>
+              <a:rPr lang="en-US" sz="2000" b="1" i="0" u="none" strike="noStrike" cap="none">
                 <a:solidFill>
                   <a:srgbClr val="202020"/>
                 </a:solidFill>
                 <a:latin typeface="맑은 고딕"/>
                 <a:ea typeface="맑은 고딕"/>
-                <a:cs typeface="Malgun Gothic"/>
-                <a:sym typeface="Malgun Gothic"/>
+                <a:cs typeface="맑은 고딕"/>
+                <a:sym typeface="맑은 고딕"/>
               </a:rPr>
-              <a:t>· 표본 174명(치매 12명), 한 지역(광주)·한 시기 데이터 </a:t>
-            </a:r>
-            <a:endParaRPr b="1" i="0" sz="2000" u="none" cap="none" strike="noStrike">
+              <a:t>· 표본 174명(치매 12명), 한 지역·</a:t>
+            </a:r>
+            <a:r>
+              <a:rPr lang="ko-KR" altLang="en-US" sz="2000" b="1" i="0" u="none" strike="noStrike" cap="none">
+                <a:solidFill>
+                  <a:srgbClr val="202020"/>
+                </a:solidFill>
+                <a:latin typeface="맑은 고딕"/>
+                <a:ea typeface="맑은 고딕"/>
+                <a:cs typeface="맑은 고딕"/>
+                <a:sym typeface="맑은 고딕"/>
+              </a:rPr>
+              <a:t>일시적인</a:t>
+            </a:r>
+            <a:r>
+              <a:rPr lang="en-US" sz="2000" b="1" i="0" u="none" strike="noStrike" cap="none">
+                <a:solidFill>
+                  <a:srgbClr val="202020"/>
+                </a:solidFill>
+                <a:latin typeface="맑은 고딕"/>
+                <a:ea typeface="맑은 고딕"/>
+                <a:cs typeface="맑은 고딕"/>
+                <a:sym typeface="맑은 고딕"/>
+              </a:rPr>
+              <a:t> 데이터 </a:t>
+            </a:r>
+            <a:endParaRPr lang="en-US" sz="2000" b="1" i="0" u="none" strike="noStrike" cap="none">
               <a:solidFill>
                 <a:srgbClr val="202020"/>
               </a:solidFill>
-              <a:latin typeface="Malgun Gothic"/>
-              <a:ea typeface="Malgun Gothic"/>
-              <a:cs typeface="Malgun Gothic"/>
-              <a:sym typeface="Malgun Gothic"/>
+              <a:latin typeface="맑은 고딕"/>
+              <a:ea typeface="맑은 고딕"/>
+              <a:cs typeface="맑은 고딕"/>
+              <a:sym typeface="맑은 고딕"/>
             </a:endParaRPr>
           </a:p>
           <a:p>
-            <a:pPr indent="0" lvl="0" marL="0" marR="0" rtl="0" algn="l">
+            <a:pPr marL="0" marR="0" lvl="0" indent="0" algn="l" rtl="0">
               <a:spcBef>
                 <a:spcPts val="600"/>
               </a:spcBef>
@@ -25308,31 +25375,56 @@
                 <a:spcPts val="0"/>
               </a:spcAft>
               <a:buNone/>
-            </a:pPr>
-            <a:r>
-              <a:rPr b="1" i="0" lang="en-US" sz="2000" u="none" cap="none" strike="noStrike">
+              <a:defRPr/>
+            </a:pPr>
+            <a:r>
+              <a:rPr lang="en-US" sz="2000" b="1" i="0" u="none" strike="noStrike" cap="none">
                 <a:solidFill>
                   <a:srgbClr val="202020"/>
                 </a:solidFill>
                 <a:latin typeface="맑은 고딕"/>
                 <a:ea typeface="맑은 고딕"/>
-                <a:cs typeface="Malgun Gothic"/>
-                <a:sym typeface="Malgun Gothic"/>
+                <a:cs typeface="맑은 고딕"/>
+                <a:sym typeface="맑은 고딕"/>
               </a:rPr>
-              <a:t>		— 일반화에는 더 큰 데이터 필요(임상 실험 부족)</a:t>
-            </a:r>
-            <a:endParaRPr b="1" i="0" sz="2000" u="none" cap="none" strike="noStrike">
+              <a:t>		— 일반화에는 더 큰 데이터 필요(임상 실험</a:t>
+            </a:r>
+            <a:r>
+              <a:rPr lang="ko-KR" altLang="en-US" sz="2000" b="1" i="0" u="none" strike="noStrike" cap="none">
+                <a:solidFill>
+                  <a:srgbClr val="202020"/>
+                </a:solidFill>
+                <a:latin typeface="맑은 고딕"/>
+                <a:ea typeface="맑은 고딕"/>
+                <a:cs typeface="맑은 고딕"/>
+                <a:sym typeface="맑은 고딕"/>
+              </a:rPr>
+              <a:t> 절차</a:t>
+            </a:r>
+            <a:r>
+              <a:rPr lang="en-US" sz="2000" b="1" i="0" u="none" strike="noStrike" cap="none">
+                <a:solidFill>
+                  <a:srgbClr val="202020"/>
+                </a:solidFill>
+                <a:latin typeface="맑은 고딕"/>
+                <a:ea typeface="맑은 고딕"/>
+                <a:cs typeface="맑은 고딕"/>
+                <a:sym typeface="맑은 고딕"/>
+              </a:rPr>
+              <a:t> 부족)</a:t>
+            </a:r>
+            <a:endParaRPr lang="en-US" sz="2000" b="1" i="0" u="none" strike="noStrike" cap="none">
               <a:solidFill>
                 <a:srgbClr val="202020"/>
               </a:solidFill>
-              <a:latin typeface="Malgun Gothic"/>
-              <a:ea typeface="Malgun Gothic"/>
-              <a:cs typeface="Malgun Gothic"/>
-              <a:sym typeface="Malgun Gothic"/>
+              <a:latin typeface="맑은 고딕"/>
+              <a:ea typeface="맑은 고딕"/>
+              <a:cs typeface="맑은 고딕"/>
+              <a:sym typeface="맑은 고딕"/>
             </a:endParaRPr>
           </a:p>
           <a:p>
-            <a:pPr indent="0" lvl="0" marL="0" marR="0" rtl="0" algn="l">
+            <a:pPr marL="0" marR="0" lvl="0" indent="0" algn="l" rtl="0">
               <a:spcBef>
                 <a:spcPts val="600"/>
               </a:spcBef>
@@ -25340,31 +25432,32 @@
                 <a:spcPts val="0"/>
               </a:spcAft>
               <a:buNone/>
-            </a:pPr>
-            <a:r>
-              <a:rPr b="1" i="0" lang="en-US" sz="2000" u="none" cap="none" strike="noStrike">
+              <a:defRPr/>
+            </a:pPr>
+            <a:r>
+              <a:rPr lang="en-US" sz="2000" b="1" i="0" u="none" strike="noStrike" cap="none">
                 <a:solidFill>
                   <a:srgbClr val="202020"/>
                 </a:solidFill>
                 <a:latin typeface="맑은 고딕"/>
                 <a:ea typeface="맑은 고딕"/>
-                <a:cs typeface="Malgun Gothic"/>
-                <a:sym typeface="Malgun Gothic"/>
+                <a:cs typeface="맑은 고딕"/>
+                <a:sym typeface="맑은 고딕"/>
               </a:rPr>
               <a:t>· 경도인지장애 단독 조기 신호는 미확인 · 재현율 수치는 통계적으로 미확정</a:t>
             </a:r>
-            <a:endParaRPr b="1" i="0" sz="2000" u="none" cap="none" strike="noStrike">
+            <a:endParaRPr lang="en-US" sz="2000" b="1" i="0" u="none" strike="noStrike" cap="none">
               <a:solidFill>
                 <a:srgbClr val="202020"/>
               </a:solidFill>
-              <a:latin typeface="Malgun Gothic"/>
-              <a:ea typeface="Malgun Gothic"/>
-              <a:cs typeface="Malgun Gothic"/>
-              <a:sym typeface="Malgun Gothic"/>
+              <a:latin typeface="맑은 고딕"/>
+              <a:ea typeface="맑은 고딕"/>
+              <a:cs typeface="맑은 고딕"/>
+              <a:sym typeface="맑은 고딕"/>
             </a:endParaRPr>
           </a:p>
           <a:p>
-            <a:pPr indent="0" lvl="0" marL="0" marR="0" rtl="0" algn="l">
+            <a:pPr marL="0" marR="0" lvl="0" indent="0" algn="l" rtl="0">
               <a:spcBef>
                 <a:spcPts val="600"/>
               </a:spcBef>
@@ -25372,26 +25465,20 @@
                 <a:spcPts val="0"/>
               </a:spcAft>
               <a:buNone/>
-            </a:pPr>
-            <a:r>
-              <a:rPr>
-                <a:latin typeface="맑은 고딕"/>
-                <a:ea typeface="맑은 고딕"/>
-              </a:rPr>
-              <a:t/>
-            </a:r>
-            <a:endParaRPr b="1" i="0" sz="1800" u="none" cap="none" strike="noStrike">
+              <a:defRPr/>
+            </a:pPr>
+            <a:endParaRPr sz="1800" b="1" i="0" u="none" strike="noStrike" cap="none">
               <a:solidFill>
                 <a:srgbClr val="202020"/>
               </a:solidFill>
-              <a:latin typeface="Malgun Gothic"/>
-              <a:ea typeface="Malgun Gothic"/>
-              <a:cs typeface="Malgun Gothic"/>
-              <a:sym typeface="Malgun Gothic"/>
+              <a:latin typeface="맑은 고딕"/>
+              <a:ea typeface="맑은 고딕"/>
+              <a:cs typeface="맑은 고딕"/>
+              <a:sym typeface="맑은 고딕"/>
             </a:endParaRPr>
           </a:p>
           <a:p>
-            <a:pPr indent="0" lvl="0" marL="0" marR="0" rtl="0" algn="l">
+            <a:pPr marL="0" marR="0" lvl="0" indent="0" algn="l" rtl="0">
               <a:spcBef>
                 <a:spcPts val="600"/>
               </a:spcBef>
@@ -25399,31 +25486,32 @@
                 <a:spcPts val="0"/>
               </a:spcAft>
               <a:buNone/>
-            </a:pPr>
-            <a:r>
-              <a:rPr b="1" i="0" lang="en-US" sz="2200" u="none" cap="none" strike="noStrike">
-                <a:solidFill>
-                  <a:srgbClr val="2A78D6"/>
+              <a:defRPr/>
+            </a:pPr>
+            <a:r>
+              <a:rPr lang="en-US" sz="2200" b="1" i="0" u="none" strike="noStrike" cap="none">
+                <a:solidFill>
+                  <a:srgbClr val="2a78d6"/>
                 </a:solidFill>
                 <a:latin typeface="맑은 고딕"/>
                 <a:ea typeface="맑은 고딕"/>
-                <a:cs typeface="Malgun Gothic"/>
-                <a:sym typeface="Malgun Gothic"/>
+                <a:cs typeface="맑은 고딕"/>
+                <a:sym typeface="맑은 고딕"/>
               </a:rPr>
               <a:t>그래서 진짜 산출물은</a:t>
             </a:r>
-            <a:endParaRPr b="1" i="0" sz="2200" u="none" cap="none" strike="noStrike">
+            <a:endParaRPr lang="en-US" sz="2200" b="1" i="0" u="none" strike="noStrike" cap="none">
               <a:solidFill>
-                <a:srgbClr val="2A78D6"/>
+                <a:srgbClr val="2a78d6"/>
               </a:solidFill>
-              <a:latin typeface="Malgun Gothic"/>
-              <a:ea typeface="Malgun Gothic"/>
-              <a:cs typeface="Malgun Gothic"/>
-              <a:sym typeface="Malgun Gothic"/>
+              <a:latin typeface="맑은 고딕"/>
+              <a:ea typeface="맑은 고딕"/>
+              <a:cs typeface="맑은 고딕"/>
+              <a:sym typeface="맑은 고딕"/>
             </a:endParaRPr>
           </a:p>
           <a:p>
-            <a:pPr indent="0" lvl="0" marL="0" marR="0" rtl="0" algn="l">
+            <a:pPr marL="0" marR="0" lvl="0" indent="0" algn="l" rtl="0">
               <a:spcBef>
                 <a:spcPts val="600"/>
               </a:spcBef>
@@ -25431,31 +25519,32 @@
                 <a:spcPts val="0"/>
               </a:spcAft>
               <a:buNone/>
-            </a:pPr>
-            <a:r>
-              <a:rPr b="1" i="0" lang="en-US" sz="2000" u="none" cap="none" strike="noStrike">
+              <a:defRPr/>
+            </a:pPr>
+            <a:r>
+              <a:rPr lang="en-US" sz="2000" b="1" i="0" u="none" strike="noStrike" cap="none">
                 <a:solidFill>
                   <a:srgbClr val="104281"/>
                 </a:solidFill>
                 <a:latin typeface="맑은 고딕"/>
                 <a:ea typeface="맑은 고딕"/>
-                <a:cs typeface="Malgun Gothic"/>
-                <a:sym typeface="Malgun Gothic"/>
+                <a:cs typeface="맑은 고딕"/>
+                <a:sym typeface="맑은 고딕"/>
               </a:rPr>
-              <a:t>· "시험 문제를 미리 본 셈"인 데이터 누수 실수를 스스로 찾아 고치고, 우연 여부까지 검증한 분석 절차</a:t>
-            </a:r>
-            <a:endParaRPr b="1" i="0" sz="2000" u="none" cap="none" strike="noStrike">
+              <a:t>· "시험 문제를 미리 본 셈"인 데이터 누수 실수를 스스로 찾아 고치고, </a:t>
+            </a:r>
+            <a:endParaRPr lang="en-US" sz="2000" b="1" i="0" u="none" strike="noStrike" cap="none">
               <a:solidFill>
                 <a:srgbClr val="104281"/>
               </a:solidFill>
-              <a:latin typeface="Malgun Gothic"/>
-              <a:ea typeface="Malgun Gothic"/>
-              <a:cs typeface="Malgun Gothic"/>
-              <a:sym typeface="Malgun Gothic"/>
+              <a:latin typeface="맑은 고딕"/>
+              <a:ea typeface="맑은 고딕"/>
+              <a:cs typeface="맑은 고딕"/>
+              <a:sym typeface="맑은 고딕"/>
             </a:endParaRPr>
           </a:p>
           <a:p>
-            <a:pPr indent="0" lvl="0" marL="0" marR="0" rtl="0" algn="l">
+            <a:pPr marL="0" marR="0" lvl="0" indent="0" algn="l" rtl="0">
               <a:spcBef>
                 <a:spcPts val="600"/>
               </a:spcBef>
@@ -25463,27 +25552,61 @@
                 <a:spcPts val="0"/>
               </a:spcAft>
               <a:buNone/>
-            </a:pPr>
-            <a:r>
-              <a:rPr b="1" i="0" lang="en-US" sz="2000" u="none" cap="none" strike="noStrike">
+              <a:defRPr/>
+            </a:pPr>
+            <a:r>
+              <a:rPr lang="en-US" sz="2000" b="1" i="0" u="none" strike="noStrike" cap="none">
                 <a:solidFill>
                   <a:srgbClr val="104281"/>
                 </a:solidFill>
                 <a:latin typeface="맑은 고딕"/>
                 <a:ea typeface="맑은 고딕"/>
-                <a:cs typeface="Malgun Gothic"/>
-                <a:sym typeface="Malgun Gothic"/>
+                <a:cs typeface="맑은 고딕"/>
+                <a:sym typeface="맑은 고딕"/>
               </a:rPr>
-              <a:t>· 병원·기관의 정식 데이터가 들어오면 코드 수정 없이 그대로 재학습·재검증 가능</a:t>
-            </a:r>
-            <a:endParaRPr b="1" i="0" sz="2000" u="none" cap="none" strike="noStrike">
+              <a:t>우연 여부까지 검증한 분석 절차</a:t>
+            </a:r>
+            <a:endParaRPr lang="en-US" sz="2000" b="1" i="0" u="none" strike="noStrike" cap="none">
               <a:solidFill>
                 <a:srgbClr val="104281"/>
               </a:solidFill>
-              <a:latin typeface="Malgun Gothic"/>
-              <a:ea typeface="Malgun Gothic"/>
-              <a:cs typeface="Malgun Gothic"/>
-              <a:sym typeface="Malgun Gothic"/>
+              <a:latin typeface="맑은 고딕"/>
+              <a:ea typeface="맑은 고딕"/>
+              <a:cs typeface="맑은 고딕"/>
+              <a:sym typeface="맑은 고딕"/>
+            </a:endParaRPr>
+          </a:p>
+          <a:p>
+            <a:pPr marL="0" marR="0" lvl="0" indent="0" algn="l" rtl="0">
+              <a:spcBef>
+                <a:spcPts val="600"/>
+              </a:spcBef>
+              <a:spcAft>
+                <a:spcPts val="0"/>
+              </a:spcAft>
+              <a:buNone/>
+              <a:defRPr/>
+            </a:pPr>
+            <a:r>
+              <a:rPr lang="en-US" sz="2000" b="1" i="0" u="none" strike="noStrike" cap="none">
+                <a:solidFill>
+                  <a:srgbClr val="104281"/>
+                </a:solidFill>
+                <a:latin typeface="맑은 고딕"/>
+                <a:ea typeface="맑은 고딕"/>
+                <a:cs typeface="맑은 고딕"/>
+                <a:sym typeface="맑은 고딕"/>
+              </a:rPr>
+              <a:t>· 병원·기관의 정식 데이터가 들어오면 그대로 재학습·재검증 가능</a:t>
+            </a:r>
+            <a:endParaRPr lang="en-US" sz="2000" b="1" i="0" u="none" strike="noStrike" cap="none">
+              <a:solidFill>
+                <a:srgbClr val="104281"/>
+              </a:solidFill>
+              <a:latin typeface="맑은 고딕"/>
+              <a:ea typeface="맑은 고딕"/>
+              <a:cs typeface="맑은 고딕"/>
+              <a:sym typeface="맑은 고딕"/>
             </a:endParaRPr>
           </a:p>
         </p:txBody>
@@ -25508,40 +25631,41 @@
           </a:ln>
         </p:spPr>
         <p:txBody>
-          <a:bodyPr anchorCtr="0" anchor="t" bIns="45700" lIns="91425" spcFirstLastPara="1" rIns="91425" wrap="square" tIns="45700">
+          <a:bodyPr wrap="square" lIns="91424" tIns="45700" rIns="91424" bIns="45700" anchor="t" anchorCtr="0">
             <a:spAutoFit/>
           </a:bodyPr>
           <a:lstStyle/>
           <a:p>
-            <a:pPr indent="0" lvl="0" marL="0" marR="0" rtl="0" algn="r">
-              <a:spcBef>
-                <a:spcPts val="0"/>
-              </a:spcBef>
-              <a:spcAft>
-                <a:spcPts val="0"/>
-              </a:spcAft>
-              <a:buNone/>
-            </a:pPr>
-            <a:r>
-              <a:rPr b="0" i="0" lang="en-US" sz="1200" u="none" cap="none" strike="noStrike">
+            <a:pPr marL="0" marR="0" lvl="0" indent="0" algn="r" rtl="0">
+              <a:spcBef>
+                <a:spcPts val="0"/>
+              </a:spcBef>
+              <a:spcAft>
+                <a:spcPts val="0"/>
+              </a:spcAft>
+              <a:buNone/>
+              <a:defRPr/>
+            </a:pPr>
+            <a:r>
+              <a:rPr lang="en-US" sz="1200" b="0" i="0" u="none" strike="noStrike" cap="none">
                 <a:solidFill>
                   <a:srgbClr val="666666"/>
                 </a:solidFill>
                 <a:latin typeface="맑은 고딕"/>
                 <a:ea typeface="맑은 고딕"/>
-                <a:cs typeface="Malgun Gothic"/>
-                <a:sym typeface="Malgun Gothic"/>
+                <a:cs typeface="맑은 고딕"/>
+                <a:sym typeface="맑은 고딕"/>
               </a:rPr>
               <a:t>25</a:t>
             </a:r>
-            <a:endParaRPr b="0" i="0" sz="1200" u="none" cap="none" strike="noStrike">
+            <a:endParaRPr sz="1200" b="0" i="0" u="none" strike="noStrike" cap="none">
               <a:solidFill>
                 <a:srgbClr val="666666"/>
               </a:solidFill>
-              <a:latin typeface="Malgun Gothic"/>
-              <a:ea typeface="Malgun Gothic"/>
-              <a:cs typeface="Malgun Gothic"/>
-              <a:sym typeface="Malgun Gothic"/>
+              <a:latin typeface="맑은 고딕"/>
+              <a:ea typeface="맑은 고딕"/>
+              <a:cs typeface="맑은 고딕"/>
+              <a:sym typeface="맑은 고딕"/>
             </a:endParaRPr>
           </a:p>
         </p:txBody>
@@ -25551,15 +25675,23 @@
   <p:clrMapOvr>
     <a:masterClrMapping/>
   </p:clrMapOvr>
+  <mc:AlternateContent xmlns:mc="http://schemas.openxmlformats.org/markup-compatibility/2006">
+    <mc:Choice xmlns:p14="http://schemas.microsoft.com/office/powerpoint/2010/main" Requires="p14">
+      <p:transition xmlns:mc="http://schemas.openxmlformats.org/markup-compatibility/2006" xmlns:p14="http://schemas.microsoft.com/office/powerpoint/2010/main" mc:Ignorable="p14" p14:dur="500"/>
+    </mc:Choice>
+    <mc:Fallback>
+      <p:transition/>
+    </mc:Fallback>
+  </mc:AlternateContent>
 </p:sld>
 </file>
 
 <file path=ppt/slides/slide26.xml><?xml version="1.0" encoding="utf-8"?>
-<p:sld xmlns:a="http://schemas.openxmlformats.org/drawingml/2006/main" xmlns:r="http://schemas.openxmlformats.org/officeDocument/2006/relationships" xmlns:mc="http://schemas.openxmlformats.org/markup-compatibility/2006" xmlns:mv="urn:schemas-microsoft-com:mac:vml" xmlns:p="http://schemas.openxmlformats.org/presentationml/2006/main" xmlns:c="http://schemas.openxmlformats.org/drawingml/2006/chart" xmlns:dgm="http://schemas.openxmlformats.org/drawingml/2006/diagram" xmlns:o="urn:schemas-microsoft-com:office:office" xmlns:v="urn:schemas-microsoft-com:vml" xmlns:pvml="urn:schemas-microsoft-com:office:powerpoint" xmlns:com="http://schemas.openxmlformats.org/drawingml/2006/compatibility" xmlns:p14="http://schemas.microsoft.com/office/powerpoint/2010/main" xmlns:p15="http://schemas.microsoft.com/office/powerpoint/2012/main" xmlns:ahyp="http://schemas.microsoft.com/office/drawing/2018/hyperlinkcolor">
+<p:sld xmlns:r="http://schemas.openxmlformats.org/officeDocument/2006/relationships" xmlns:c="http://schemas.openxmlformats.org/drawingml/2006/chart" xmlns:a="http://schemas.openxmlformats.org/drawingml/2006/main" xmlns:dgm="http://schemas.openxmlformats.org/drawingml/2006/diagram" xmlns:dsp="http://schemas.microsoft.com/office/drawing/2008/diagram" xmlns:p="http://schemas.openxmlformats.org/presentationml/2006/main">
   <p:cSld>
     <p:spTree>
       <p:nvGrpSpPr>
-        <p:cNvPr id="335" name="Shape 335"/>
+        <p:cNvPr id="1" name=""/>
         <p:cNvGrpSpPr/>
         <p:nvPr/>
       </p:nvGrpSpPr>
@@ -25592,36 +25724,30 @@
             <a:noFill/>
           </a:ln>
           <a:effectLst>
-            <a:outerShdw blurRad="40000" rotWithShape="0" dir="5400000" dist="23000">
+            <a:outerShdw blurRad="40000" dist="23000" dir="5400000" rotWithShape="0">
               <a:srgbClr val="000000">
-                <a:alpha val="34902"/>
+                <a:alpha val="34900"/>
               </a:srgbClr>
             </a:outerShdw>
           </a:effectLst>
         </p:spPr>
         <p:txBody>
-          <a:bodyPr anchorCtr="0" anchor="ctr" bIns="45700" lIns="91425" spcFirstLastPara="1" rIns="91425" wrap="square" tIns="45700">
+          <a:bodyPr wrap="square" lIns="91424" tIns="45700" rIns="91424" bIns="45700" anchor="ctr" anchorCtr="0">
             <a:noAutofit/>
           </a:bodyPr>
           <a:lstStyle/>
           <a:p>
-            <a:pPr indent="0" lvl="0" marL="0" marR="0" rtl="0" algn="ctr">
-              <a:spcBef>
-                <a:spcPts val="0"/>
-              </a:spcBef>
-              <a:spcAft>
-                <a:spcPts val="0"/>
-              </a:spcAft>
-              <a:buNone/>
-            </a:pPr>
-            <a:r>
-              <a:rPr>
-                <a:latin typeface="맑은 고딕"/>
-                <a:ea typeface="맑은 고딕"/>
-              </a:rPr>
-              <a:t/>
-            </a:r>
-            <a:endParaRPr b="0" i="0" sz="1800" u="none" cap="none" strike="noStrike">
+            <a:pPr marL="0" marR="0" lvl="0" indent="0" algn="ctr" rtl="0">
+              <a:spcBef>
+                <a:spcPts val="0"/>
+              </a:spcBef>
+              <a:spcAft>
+                <a:spcPts val="0"/>
+              </a:spcAft>
+              <a:buNone/>
+              <a:defRPr/>
+            </a:pPr>
+            <a:endParaRPr sz="1800" b="0" i="0" u="none" strike="noStrike" cap="none">
               <a:solidFill>
                 <a:schemeClr val="lt1"/>
               </a:solidFill>
@@ -25653,40 +25779,41 @@
           </a:ln>
         </p:spPr>
         <p:txBody>
-          <a:bodyPr anchorCtr="0" anchor="t" bIns="45700" lIns="91425" spcFirstLastPara="1" rIns="91425" wrap="square" tIns="45700">
+          <a:bodyPr wrap="square" lIns="91424" tIns="45700" rIns="91424" bIns="45700" anchor="t" anchorCtr="0">
             <a:spAutoFit/>
           </a:bodyPr>
           <a:lstStyle/>
           <a:p>
-            <a:pPr indent="0" lvl="0" marL="0" marR="0" rtl="0" algn="l">
-              <a:spcBef>
-                <a:spcPts val="0"/>
-              </a:spcBef>
-              <a:spcAft>
-                <a:spcPts val="0"/>
-              </a:spcAft>
-              <a:buNone/>
-            </a:pPr>
-            <a:r>
-              <a:rPr b="1" i="0" lang="en-US" sz="1600" u="none" cap="none" strike="noStrike">
-                <a:solidFill>
-                  <a:srgbClr val="2A78D6"/>
+            <a:pPr marL="0" marR="0" lvl="0" indent="0" algn="l" rtl="0">
+              <a:spcBef>
+                <a:spcPts val="0"/>
+              </a:spcBef>
+              <a:spcAft>
+                <a:spcPts val="0"/>
+              </a:spcAft>
+              <a:buNone/>
+              <a:defRPr/>
+            </a:pPr>
+            <a:r>
+              <a:rPr lang="en-US" sz="1600" b="1" i="0" u="none" strike="noStrike" cap="none">
+                <a:solidFill>
+                  <a:srgbClr val="2a78d6"/>
                 </a:solidFill>
                 <a:latin typeface="맑은 고딕"/>
                 <a:ea typeface="맑은 고딕"/>
-                <a:cs typeface="Malgun Gothic"/>
-                <a:sym typeface="Malgun Gothic"/>
+                <a:cs typeface="맑은 고딕"/>
+                <a:sym typeface="맑은 고딕"/>
               </a:rPr>
               <a:t>06. 결론 및 확장</a:t>
             </a:r>
-            <a:endParaRPr b="1" i="0" sz="1600" u="none" cap="none" strike="noStrike">
+            <a:endParaRPr sz="1600" b="1" i="0" u="none" strike="noStrike" cap="none">
               <a:solidFill>
-                <a:srgbClr val="2A78D6"/>
+                <a:srgbClr val="2a78d6"/>
               </a:solidFill>
-              <a:latin typeface="Malgun Gothic"/>
-              <a:ea typeface="Malgun Gothic"/>
-              <a:cs typeface="Malgun Gothic"/>
-              <a:sym typeface="Malgun Gothic"/>
+              <a:latin typeface="맑은 고딕"/>
+              <a:ea typeface="맑은 고딕"/>
+              <a:cs typeface="맑은 고딕"/>
+              <a:sym typeface="맑은 고딕"/>
             </a:endParaRPr>
           </a:p>
         </p:txBody>
@@ -25711,40 +25838,41 @@
           </a:ln>
         </p:spPr>
         <p:txBody>
-          <a:bodyPr anchorCtr="0" anchor="t" bIns="45700" lIns="91425" spcFirstLastPara="1" rIns="91425" wrap="square" tIns="45700">
+          <a:bodyPr wrap="square" lIns="91424" tIns="45700" rIns="91424" bIns="45700" anchor="t" anchorCtr="0">
             <a:spAutoFit/>
           </a:bodyPr>
           <a:lstStyle/>
           <a:p>
-            <a:pPr indent="0" lvl="0" marL="0" marR="0" rtl="0" algn="l">
-              <a:spcBef>
-                <a:spcPts val="0"/>
-              </a:spcBef>
-              <a:spcAft>
-                <a:spcPts val="0"/>
-              </a:spcAft>
-              <a:buNone/>
-            </a:pPr>
-            <a:r>
-              <a:rPr b="1" i="0" lang="en-US" sz="3000" u="none" cap="none" strike="noStrike">
+            <a:pPr marL="0" marR="0" lvl="0" indent="0" algn="l" rtl="0">
+              <a:spcBef>
+                <a:spcPts val="0"/>
+              </a:spcBef>
+              <a:spcAft>
+                <a:spcPts val="0"/>
+              </a:spcAft>
+              <a:buNone/>
+              <a:defRPr/>
+            </a:pPr>
+            <a:r>
+              <a:rPr lang="en-US" sz="3000" b="1" i="0" u="none" strike="noStrike" cap="none">
                 <a:solidFill>
                   <a:srgbClr val="104281"/>
                 </a:solidFill>
                 <a:latin typeface="맑은 고딕"/>
                 <a:ea typeface="맑은 고딕"/>
-                <a:cs typeface="Malgun Gothic"/>
-                <a:sym typeface="Malgun Gothic"/>
+                <a:cs typeface="맑은 고딕"/>
+                <a:sym typeface="맑은 고딕"/>
               </a:rPr>
               <a:t>스크리닝에서 끝나지 않는다 — 2단계 로드맵</a:t>
             </a:r>
-            <a:endParaRPr b="1" i="0" sz="3000" u="none" cap="none" strike="noStrike">
+            <a:endParaRPr sz="3000" b="1" i="0" u="none" strike="noStrike" cap="none">
               <a:solidFill>
                 <a:srgbClr val="104281"/>
               </a:solidFill>
-              <a:latin typeface="Malgun Gothic"/>
-              <a:ea typeface="Malgun Gothic"/>
-              <a:cs typeface="Malgun Gothic"/>
-              <a:sym typeface="Malgun Gothic"/>
+              <a:latin typeface="맑은 고딕"/>
+              <a:ea typeface="맑은 고딕"/>
+              <a:cs typeface="맑은 고딕"/>
+              <a:sym typeface="맑은 고딕"/>
             </a:endParaRPr>
           </a:p>
         </p:txBody>
@@ -25769,44 +25897,45 @@
           </a:ln>
         </p:spPr>
         <p:txBody>
-          <a:bodyPr anchorCtr="0" anchor="t" bIns="45700" lIns="91425" spcFirstLastPara="1" rIns="91425" wrap="square" tIns="45700">
+          <a:bodyPr wrap="square" lIns="91424" tIns="45700" rIns="91424" bIns="45700" anchor="t" anchorCtr="0">
             <a:spAutoFit/>
           </a:bodyPr>
           <a:lstStyle/>
           <a:p>
-            <a:pPr indent="0" lvl="0" marL="0" marR="0" rtl="0" algn="l">
-              <a:spcBef>
-                <a:spcPts val="0"/>
-              </a:spcBef>
-              <a:spcAft>
-                <a:spcPts val="0"/>
-              </a:spcAft>
-              <a:buNone/>
-            </a:pPr>
-            <a:r>
-              <a:rPr b="1" i="0" lang="en-US" sz="2300" u="none" cap="none" strike="noStrike">
+            <a:pPr marL="0" marR="0" lvl="0" indent="0" algn="l" rtl="0">
+              <a:spcBef>
+                <a:spcPts val="0"/>
+              </a:spcBef>
+              <a:spcAft>
+                <a:spcPts val="0"/>
+              </a:spcAft>
+              <a:buNone/>
+              <a:defRPr/>
+            </a:pPr>
+            <a:r>
+              <a:rPr lang="en-US" sz="2300" b="1" i="0" u="none" strike="noStrike" cap="none">
                 <a:solidFill>
                   <a:srgbClr val="104281"/>
                 </a:solidFill>
                 <a:latin typeface="맑은 고딕"/>
                 <a:ea typeface="맑은 고딕"/>
-                <a:cs typeface="Malgun Gothic"/>
-                <a:sym typeface="Malgun Gothic"/>
+                <a:cs typeface="맑은 고딕"/>
+                <a:sym typeface="맑은 고딕"/>
               </a:rPr>
               <a:t>1단계 (이번 구현)  —  스크리닝</a:t>
             </a:r>
-            <a:endParaRPr b="1" i="0" sz="2300" u="none" cap="none" strike="noStrike">
+            <a:endParaRPr lang="en-US" sz="2300" b="1" i="0" u="none" strike="noStrike" cap="none">
               <a:solidFill>
                 <a:srgbClr val="104281"/>
               </a:solidFill>
-              <a:latin typeface="Malgun Gothic"/>
-              <a:ea typeface="Malgun Gothic"/>
-              <a:cs typeface="Malgun Gothic"/>
-              <a:sym typeface="Malgun Gothic"/>
+              <a:latin typeface="맑은 고딕"/>
+              <a:ea typeface="맑은 고딕"/>
+              <a:cs typeface="맑은 고딕"/>
+              <a:sym typeface="맑은 고딕"/>
             </a:endParaRPr>
           </a:p>
           <a:p>
-            <a:pPr indent="0" lvl="0" marL="0" marR="0" rtl="0" algn="l">
+            <a:pPr marL="0" marR="0" lvl="0" indent="0" algn="l" rtl="0">
               <a:spcBef>
                 <a:spcPts val="600"/>
               </a:spcBef>
@@ -25814,31 +25943,32 @@
                 <a:spcPts val="0"/>
               </a:spcAft>
               <a:buNone/>
-            </a:pPr>
-            <a:r>
-              <a:rPr b="1" i="0" lang="en-US" sz="2000" u="none" cap="none" strike="noStrike">
+              <a:defRPr/>
+            </a:pPr>
+            <a:r>
+              <a:rPr lang="en-US" sz="2000" b="1" i="0" u="none" strike="noStrike" cap="none">
                 <a:solidFill>
                   <a:srgbClr val="202020"/>
                 </a:solidFill>
                 <a:latin typeface="맑은 고딕"/>
                 <a:ea typeface="맑은 고딕"/>
-                <a:cs typeface="Malgun Gothic"/>
-                <a:sym typeface="Malgun Gothic"/>
+                <a:cs typeface="맑은 고딕"/>
+                <a:sym typeface="맑은 고딕"/>
               </a:rPr>
               <a:t>생활 기록 업로드 → 위험 신호 확인 → 치매안심센터 연결</a:t>
             </a:r>
-            <a:endParaRPr b="1" i="0" sz="2000" u="none" cap="none" strike="noStrike">
+            <a:endParaRPr lang="en-US" sz="2000" b="1" i="0" u="none" strike="noStrike" cap="none">
               <a:solidFill>
                 <a:srgbClr val="202020"/>
               </a:solidFill>
-              <a:latin typeface="Malgun Gothic"/>
-              <a:ea typeface="Malgun Gothic"/>
-              <a:cs typeface="Malgun Gothic"/>
-              <a:sym typeface="Malgun Gothic"/>
+              <a:latin typeface="맑은 고딕"/>
+              <a:ea typeface="맑은 고딕"/>
+              <a:cs typeface="맑은 고딕"/>
+              <a:sym typeface="맑은 고딕"/>
             </a:endParaRPr>
           </a:p>
           <a:p>
-            <a:pPr indent="0" lvl="0" marL="0" marR="0" rtl="0" algn="l">
+            <a:pPr marL="0" marR="0" lvl="0" indent="0" algn="l" rtl="0">
               <a:spcBef>
                 <a:spcPts val="600"/>
               </a:spcBef>
@@ -25846,26 +25976,20 @@
                 <a:spcPts val="0"/>
               </a:spcAft>
               <a:buNone/>
-            </a:pPr>
-            <a:r>
-              <a:rPr>
-                <a:latin typeface="맑은 고딕"/>
-                <a:ea typeface="맑은 고딕"/>
-              </a:rPr>
-              <a:t/>
-            </a:r>
-            <a:endParaRPr b="1" i="0" sz="1800" u="none" cap="none" strike="noStrike">
+              <a:defRPr/>
+            </a:pPr>
+            <a:endParaRPr sz="1800" b="1" i="0" u="none" strike="noStrike" cap="none">
               <a:solidFill>
                 <a:srgbClr val="202020"/>
               </a:solidFill>
-              <a:latin typeface="Malgun Gothic"/>
-              <a:ea typeface="Malgun Gothic"/>
-              <a:cs typeface="Malgun Gothic"/>
-              <a:sym typeface="Malgun Gothic"/>
+              <a:latin typeface="맑은 고딕"/>
+              <a:ea typeface="맑은 고딕"/>
+              <a:cs typeface="맑은 고딕"/>
+              <a:sym typeface="맑은 고딕"/>
             </a:endParaRPr>
           </a:p>
           <a:p>
-            <a:pPr indent="0" lvl="0" marL="0" marR="0" rtl="0" algn="l">
+            <a:pPr marL="0" marR="0" lvl="0" indent="0" algn="l" rtl="0">
               <a:spcBef>
                 <a:spcPts val="600"/>
               </a:spcBef>
@@ -25873,31 +25997,32 @@
                 <a:spcPts val="0"/>
               </a:spcAft>
               <a:buNone/>
-            </a:pPr>
-            <a:r>
-              <a:rPr b="1" i="0" lang="en-US" sz="2300" u="none" cap="none" strike="noStrike">
+              <a:defRPr/>
+            </a:pPr>
+            <a:r>
+              <a:rPr lang="en-US" sz="2300" b="1" i="0" u="none" strike="noStrike" cap="none">
                 <a:solidFill>
                   <a:srgbClr val="104281"/>
                 </a:solidFill>
                 <a:latin typeface="맑은 고딕"/>
                 <a:ea typeface="맑은 고딕"/>
-                <a:cs typeface="Malgun Gothic"/>
-                <a:sym typeface="Malgun Gothic"/>
+                <a:cs typeface="맑은 고딕"/>
+                <a:sym typeface="맑은 고딕"/>
               </a:rPr>
               <a:t>2단계 (사업 확장 방향)  —  웨어러블 연계 모니터링</a:t>
             </a:r>
-            <a:endParaRPr b="1" i="0" sz="2300" u="none" cap="none" strike="noStrike">
+            <a:endParaRPr lang="en-US" sz="2300" b="1" i="0" u="none" strike="noStrike" cap="none">
               <a:solidFill>
                 <a:srgbClr val="104281"/>
               </a:solidFill>
-              <a:latin typeface="Malgun Gothic"/>
-              <a:ea typeface="Malgun Gothic"/>
-              <a:cs typeface="Malgun Gothic"/>
-              <a:sym typeface="Malgun Gothic"/>
+              <a:latin typeface="맑은 고딕"/>
+              <a:ea typeface="맑은 고딕"/>
+              <a:cs typeface="맑은 고딕"/>
+              <a:sym typeface="맑은 고딕"/>
             </a:endParaRPr>
           </a:p>
           <a:p>
-            <a:pPr indent="0" lvl="0" marL="0" marR="0" rtl="0" algn="l">
+            <a:pPr marL="0" marR="0" lvl="0" indent="0" algn="l" rtl="0">
               <a:spcBef>
                 <a:spcPts val="600"/>
               </a:spcBef>
@@ -25905,31 +26030,44 @@
                 <a:spcPts val="0"/>
               </a:spcAft>
               <a:buNone/>
-            </a:pPr>
-            <a:r>
-              <a:rPr b="1" i="0" lang="en-US" sz="2000" u="none" cap="none" strike="noStrike">
+              <a:defRPr/>
+            </a:pPr>
+            <a:r>
+              <a:rPr lang="en-US" sz="2000" b="1" i="0" u="none" strike="noStrike" cap="none">
                 <a:solidFill>
                   <a:srgbClr val="202020"/>
                 </a:solidFill>
                 <a:latin typeface="맑은 고딕"/>
                 <a:ea typeface="맑은 고딕"/>
-                <a:cs typeface="Malgun Gothic"/>
-                <a:sym typeface="Malgun Gothic"/>
+                <a:cs typeface="맑은 고딕"/>
+                <a:sym typeface="맑은 고딕"/>
               </a:rPr>
-              <a:t>· 위험군 판정자가 웨어러블을 계속 착용, 악화 시점을 놓치지 않고 재안내</a:t>
-            </a:r>
-            <a:endParaRPr b="1" i="0" sz="2000" u="none" cap="none" strike="noStrike">
+              <a:t>· 위험군 판정자가 웨어러블을 계속 착용, 악화 시점을 놓치지 않고 재안</a:t>
+            </a:r>
+            <a:r>
+              <a:rPr lang="ko-KR" altLang="en-US" sz="2000" b="1" i="0" u="none" strike="noStrike" cap="none">
+                <a:solidFill>
+                  <a:srgbClr val="202020"/>
+                </a:solidFill>
+                <a:latin typeface="맑은 고딕"/>
+                <a:ea typeface="맑은 고딕"/>
+                <a:cs typeface="맑은 고딕"/>
+                <a:sym typeface="맑은 고딕"/>
+              </a:rPr>
+              <a:t>내</a:t>
+            </a:r>
+            <a:endParaRPr lang="ko-KR" altLang="en-US" sz="2000" b="1" i="0" u="none" strike="noStrike" cap="none">
               <a:solidFill>
                 <a:srgbClr val="202020"/>
               </a:solidFill>
-              <a:latin typeface="Malgun Gothic"/>
-              <a:ea typeface="Malgun Gothic"/>
-              <a:cs typeface="Malgun Gothic"/>
-              <a:sym typeface="Malgun Gothic"/>
+              <a:latin typeface="맑은 고딕"/>
+              <a:ea typeface="맑은 고딕"/>
+              <a:cs typeface="맑은 고딕"/>
+              <a:sym typeface="맑은 고딕"/>
             </a:endParaRPr>
           </a:p>
           <a:p>
-            <a:pPr indent="0" lvl="0" marL="0" marR="0" rtl="0" algn="l">
+            <a:pPr marL="0" marR="0" lvl="0" indent="0" algn="l" rtl="0">
               <a:spcBef>
                 <a:spcPts val="600"/>
               </a:spcBef>
@@ -25937,31 +26075,32 @@
                 <a:spcPts val="0"/>
               </a:spcAft>
               <a:buNone/>
-            </a:pPr>
-            <a:r>
-              <a:rPr b="1" i="0" lang="en-US" sz="2000" u="none" cap="none" strike="noStrike">
+              <a:defRPr/>
+            </a:pPr>
+            <a:r>
+              <a:rPr lang="en-US" sz="2000" b="1" i="0" u="none" strike="noStrike" cap="none">
                 <a:solidFill>
                   <a:srgbClr val="202020"/>
                 </a:solidFill>
                 <a:latin typeface="맑은 고딕"/>
                 <a:ea typeface="맑은 고딕"/>
-                <a:cs typeface="Malgun Gothic"/>
-                <a:sym typeface="Malgun Gothic"/>
+                <a:cs typeface="맑은 고딕"/>
+                <a:sym typeface="맑은 고딕"/>
               </a:rPr>
               <a:t>· 데이터 적재·재학습 루프는 이번에 구현 완료 </a:t>
             </a:r>
-            <a:endParaRPr b="1" i="0" sz="2000" u="none" cap="none" strike="noStrike">
+            <a:endParaRPr lang="en-US" sz="2000" b="1" i="0" u="none" strike="noStrike" cap="none">
               <a:solidFill>
                 <a:srgbClr val="202020"/>
               </a:solidFill>
-              <a:latin typeface="Malgun Gothic"/>
-              <a:ea typeface="Malgun Gothic"/>
-              <a:cs typeface="Malgun Gothic"/>
-              <a:sym typeface="Malgun Gothic"/>
+              <a:latin typeface="맑은 고딕"/>
+              <a:ea typeface="맑은 고딕"/>
+              <a:cs typeface="맑은 고딕"/>
+              <a:sym typeface="맑은 고딕"/>
             </a:endParaRPr>
           </a:p>
           <a:p>
-            <a:pPr indent="0" lvl="0" marL="0" marR="0" rtl="0" algn="l">
+            <a:pPr marL="0" marR="0" lvl="0" indent="0" algn="l" rtl="0">
               <a:spcBef>
                 <a:spcPts val="600"/>
               </a:spcBef>
@@ -25969,31 +26108,32 @@
                 <a:spcPts val="0"/>
               </a:spcAft>
               <a:buNone/>
-            </a:pPr>
-            <a:r>
-              <a:rPr b="1" i="0" lang="en-US" sz="2000" u="none" cap="none" strike="noStrike">
+              <a:defRPr/>
+            </a:pPr>
+            <a:r>
+              <a:rPr lang="en-US" sz="2000" b="1" i="0" u="none" strike="noStrike" cap="none">
                 <a:solidFill>
                   <a:srgbClr val="202020"/>
                 </a:solidFill>
                 <a:latin typeface="맑은 고딕"/>
                 <a:ea typeface="맑은 고딕"/>
-                <a:cs typeface="Malgun Gothic"/>
-                <a:sym typeface="Malgun Gothic"/>
+                <a:cs typeface="맑은 고딕"/>
+                <a:sym typeface="맑은 고딕"/>
               </a:rPr>
               <a:t>			— 검진 결과가 연결될수록 모델이 계속 좋아지는 구조</a:t>
             </a:r>
-            <a:endParaRPr b="1" i="0" sz="2000" u="none" cap="none" strike="noStrike">
+            <a:endParaRPr lang="en-US" sz="2000" b="1" i="0" u="none" strike="noStrike" cap="none">
               <a:solidFill>
                 <a:srgbClr val="202020"/>
               </a:solidFill>
-              <a:latin typeface="Malgun Gothic"/>
-              <a:ea typeface="Malgun Gothic"/>
-              <a:cs typeface="Malgun Gothic"/>
-              <a:sym typeface="Malgun Gothic"/>
+              <a:latin typeface="맑은 고딕"/>
+              <a:ea typeface="맑은 고딕"/>
+              <a:cs typeface="맑은 고딕"/>
+              <a:sym typeface="맑은 고딕"/>
             </a:endParaRPr>
           </a:p>
           <a:p>
-            <a:pPr indent="0" lvl="0" marL="0" marR="0" rtl="0" algn="l">
+            <a:pPr marL="0" marR="0" lvl="0" indent="0" algn="l" rtl="0">
               <a:spcBef>
                 <a:spcPts val="600"/>
               </a:spcBef>
@@ -26001,31 +26141,32 @@
                 <a:spcPts val="0"/>
               </a:spcAft>
               <a:buNone/>
-            </a:pPr>
-            <a:r>
-              <a:rPr b="1" i="0" lang="en-US" sz="2000" u="none" cap="none" strike="noStrike">
+              <a:defRPr/>
+            </a:pPr>
+            <a:r>
+              <a:rPr lang="en-US" sz="2000" b="1" i="0" u="none" strike="noStrike" cap="none">
                 <a:solidFill>
                   <a:srgbClr val="202020"/>
                 </a:solidFill>
                 <a:latin typeface="맑은 고딕"/>
                 <a:ea typeface="맑은 고딕"/>
-                <a:cs typeface="Malgun Gothic"/>
-                <a:sym typeface="Malgun Gothic"/>
+                <a:cs typeface="맑은 고딕"/>
+                <a:sym typeface="맑은 고딕"/>
               </a:rPr>
               <a:t>· 요양기관·치매안심센터 제휴, 개인/기관용 구독형 대시보드</a:t>
             </a:r>
-            <a:endParaRPr b="1" i="0" sz="2000" u="none" cap="none" strike="noStrike">
+            <a:endParaRPr lang="en-US" sz="2000" b="1" i="0" u="none" strike="noStrike" cap="none">
               <a:solidFill>
                 <a:srgbClr val="202020"/>
               </a:solidFill>
-              <a:latin typeface="Malgun Gothic"/>
-              <a:ea typeface="Malgun Gothic"/>
-              <a:cs typeface="Malgun Gothic"/>
-              <a:sym typeface="Malgun Gothic"/>
+              <a:latin typeface="맑은 고딕"/>
+              <a:ea typeface="맑은 고딕"/>
+              <a:cs typeface="맑은 고딕"/>
+              <a:sym typeface="맑은 고딕"/>
             </a:endParaRPr>
           </a:p>
           <a:p>
-            <a:pPr indent="0" lvl="0" marL="0" marR="0" rtl="0" algn="l">
+            <a:pPr marL="0" marR="0" lvl="0" indent="0" algn="l" rtl="0">
               <a:spcBef>
                 <a:spcPts val="600"/>
               </a:spcBef>
@@ -26033,26 +26174,20 @@
                 <a:spcPts val="0"/>
               </a:spcAft>
               <a:buNone/>
-            </a:pPr>
-            <a:r>
-              <a:rPr>
-                <a:latin typeface="맑은 고딕"/>
-                <a:ea typeface="맑은 고딕"/>
-              </a:rPr>
-              <a:t/>
-            </a:r>
-            <a:endParaRPr b="1" i="0" sz="1800" u="none" cap="none" strike="noStrike">
+              <a:defRPr/>
+            </a:pPr>
+            <a:endParaRPr sz="1800" b="1" i="0" u="none" strike="noStrike" cap="none">
               <a:solidFill>
                 <a:srgbClr val="202020"/>
               </a:solidFill>
-              <a:latin typeface="Malgun Gothic"/>
-              <a:ea typeface="Malgun Gothic"/>
-              <a:cs typeface="Malgun Gothic"/>
-              <a:sym typeface="Malgun Gothic"/>
+              <a:latin typeface="맑은 고딕"/>
+              <a:ea typeface="맑은 고딕"/>
+              <a:cs typeface="맑은 고딕"/>
+              <a:sym typeface="맑은 고딕"/>
             </a:endParaRPr>
           </a:p>
           <a:p>
-            <a:pPr indent="0" lvl="0" marL="0" marR="0" rtl="0" algn="l">
+            <a:pPr marL="0" marR="0" lvl="0" indent="0" algn="l" rtl="0">
               <a:spcBef>
                 <a:spcPts val="600"/>
               </a:spcBef>
@@ -26060,27 +26195,28 @@
                 <a:spcPts val="0"/>
               </a:spcAft>
               <a:buNone/>
-            </a:pPr>
-            <a:r>
-              <a:rPr b="1" i="0" lang="en-US" sz="2000" u="none" cap="none" strike="noStrike">
-                <a:solidFill>
-                  <a:srgbClr val="FF0000"/>
+              <a:defRPr/>
+            </a:pPr>
+            <a:r>
+              <a:rPr lang="en-US" sz="2000" b="1" i="0" u="none" strike="noStrike" cap="none">
+                <a:solidFill>
+                  <a:srgbClr val="ff0000"/>
                 </a:solidFill>
                 <a:latin typeface="맑은 고딕"/>
                 <a:ea typeface="맑은 고딕"/>
-                <a:cs typeface="Malgun Gothic"/>
-                <a:sym typeface="Malgun Gothic"/>
+                <a:cs typeface="맑은 고딕"/>
+                <a:sym typeface="맑은 고딕"/>
               </a:rPr>
               <a:t>필요한 것: 더 큰 정식 데이터 · 나이/성별/학력 정보 · 실제 발병 여부를 따라가는 추적 검증</a:t>
             </a:r>
-            <a:endParaRPr b="1" i="0" sz="2000" u="none" cap="none" strike="noStrike">
+            <a:endParaRPr sz="2000" b="1" i="0" u="none" strike="noStrike" cap="none">
               <a:solidFill>
-                <a:srgbClr val="FF0000"/>
+                <a:srgbClr val="ff0000"/>
               </a:solidFill>
-              <a:latin typeface="Malgun Gothic"/>
-              <a:ea typeface="Malgun Gothic"/>
-              <a:cs typeface="Malgun Gothic"/>
-              <a:sym typeface="Malgun Gothic"/>
+              <a:latin typeface="맑은 고딕"/>
+              <a:ea typeface="맑은 고딕"/>
+              <a:cs typeface="맑은 고딕"/>
+              <a:sym typeface="맑은 고딕"/>
             </a:endParaRPr>
           </a:p>
         </p:txBody>
@@ -26105,40 +26241,41 @@
           </a:ln>
         </p:spPr>
         <p:txBody>
-          <a:bodyPr anchorCtr="0" anchor="t" bIns="45700" lIns="91425" spcFirstLastPara="1" rIns="91425" wrap="square" tIns="45700">
+          <a:bodyPr wrap="square" lIns="91424" tIns="45700" rIns="91424" bIns="45700" anchor="t" anchorCtr="0">
             <a:spAutoFit/>
           </a:bodyPr>
           <a:lstStyle/>
           <a:p>
-            <a:pPr indent="0" lvl="0" marL="0" marR="0" rtl="0" algn="r">
-              <a:spcBef>
-                <a:spcPts val="0"/>
-              </a:spcBef>
-              <a:spcAft>
-                <a:spcPts val="0"/>
-              </a:spcAft>
-              <a:buNone/>
-            </a:pPr>
-            <a:r>
-              <a:rPr b="0" i="0" lang="en-US" sz="1200" u="none" cap="none" strike="noStrike">
+            <a:pPr marL="0" marR="0" lvl="0" indent="0" algn="r" rtl="0">
+              <a:spcBef>
+                <a:spcPts val="0"/>
+              </a:spcBef>
+              <a:spcAft>
+                <a:spcPts val="0"/>
+              </a:spcAft>
+              <a:buNone/>
+              <a:defRPr/>
+            </a:pPr>
+            <a:r>
+              <a:rPr lang="en-US" sz="1200" b="0" i="0" u="none" strike="noStrike" cap="none">
                 <a:solidFill>
                   <a:srgbClr val="666666"/>
                 </a:solidFill>
                 <a:latin typeface="맑은 고딕"/>
                 <a:ea typeface="맑은 고딕"/>
-                <a:cs typeface="Malgun Gothic"/>
-                <a:sym typeface="Malgun Gothic"/>
+                <a:cs typeface="맑은 고딕"/>
+                <a:sym typeface="맑은 고딕"/>
               </a:rPr>
               <a:t>26</a:t>
             </a:r>
-            <a:endParaRPr b="0" i="0" sz="1200" u="none" cap="none" strike="noStrike">
+            <a:endParaRPr sz="1200" b="0" i="0" u="none" strike="noStrike" cap="none">
               <a:solidFill>
                 <a:srgbClr val="666666"/>
               </a:solidFill>
-              <a:latin typeface="Malgun Gothic"/>
-              <a:ea typeface="Malgun Gothic"/>
-              <a:cs typeface="Malgun Gothic"/>
-              <a:sym typeface="Malgun Gothic"/>
+              <a:latin typeface="맑은 고딕"/>
+              <a:ea typeface="맑은 고딕"/>
+              <a:cs typeface="맑은 고딕"/>
+              <a:sym typeface="맑은 고딕"/>
             </a:endParaRPr>
           </a:p>
         </p:txBody>
@@ -26148,6 +26285,14 @@
   <p:clrMapOvr>
     <a:masterClrMapping/>
   </p:clrMapOvr>
+  <mc:AlternateContent xmlns:mc="http://schemas.openxmlformats.org/markup-compatibility/2006">
+    <mc:Choice xmlns:p14="http://schemas.microsoft.com/office/powerpoint/2010/main" Requires="p14">
+      <p:transition xmlns:mc="http://schemas.openxmlformats.org/markup-compatibility/2006" xmlns:p14="http://schemas.microsoft.com/office/powerpoint/2010/main" mc:Ignorable="p14" p14:dur="500"/>
+    </mc:Choice>
+    <mc:Fallback>
+      <p:transition/>
+    </mc:Fallback>
+  </mc:AlternateContent>
 </p:sld>
 </file>
 
@@ -27124,11 +27269,11 @@
 </file>
 
 <file path=ppt/slides/slide4.xml><?xml version="1.0" encoding="utf-8"?>
-<p:sld xmlns:a="http://schemas.openxmlformats.org/drawingml/2006/main" xmlns:r="http://schemas.openxmlformats.org/officeDocument/2006/relationships" xmlns:mc="http://schemas.openxmlformats.org/markup-compatibility/2006" xmlns:mv="urn:schemas-microsoft-com:mac:vml" xmlns:p="http://schemas.openxmlformats.org/presentationml/2006/main" xmlns:c="http://schemas.openxmlformats.org/drawingml/2006/chart" xmlns:dgm="http://schemas.openxmlformats.org/drawingml/2006/diagram" xmlns:o="urn:schemas-microsoft-com:office:office" xmlns:v="urn:schemas-microsoft-com:vml" xmlns:pvml="urn:schemas-microsoft-com:office:powerpoint" xmlns:com="http://schemas.openxmlformats.org/drawingml/2006/compatibility" xmlns:p14="http://schemas.microsoft.com/office/powerpoint/2010/main" xmlns:p15="http://schemas.microsoft.com/office/powerpoint/2012/main" xmlns:ahyp="http://schemas.microsoft.com/office/drawing/2018/hyperlinkcolor">
+<p:sld xmlns:r="http://schemas.openxmlformats.org/officeDocument/2006/relationships" xmlns:c="http://schemas.openxmlformats.org/drawingml/2006/chart" xmlns:a="http://schemas.openxmlformats.org/drawingml/2006/main" xmlns:dgm="http://schemas.openxmlformats.org/drawingml/2006/diagram" xmlns:dsp="http://schemas.microsoft.com/office/drawing/2008/diagram" xmlns:p="http://schemas.openxmlformats.org/presentationml/2006/main">
   <p:cSld>
     <p:spTree>
       <p:nvGrpSpPr>
-        <p:cNvPr id="96" name="Shape 96"/>
+        <p:cNvPr id="1" name=""/>
         <p:cNvGrpSpPr/>
         <p:nvPr/>
       </p:nvGrpSpPr>
@@ -27161,36 +27306,30 @@
             <a:noFill/>
           </a:ln>
           <a:effectLst>
-            <a:outerShdw blurRad="40000" rotWithShape="0" dir="5400000" dist="23000">
+            <a:outerShdw blurRad="40000" dist="23000" dir="5400000" rotWithShape="0">
               <a:srgbClr val="000000">
-                <a:alpha val="34902"/>
+                <a:alpha val="34900"/>
               </a:srgbClr>
             </a:outerShdw>
           </a:effectLst>
         </p:spPr>
         <p:txBody>
-          <a:bodyPr anchorCtr="0" anchor="ctr" bIns="45700" lIns="91425" spcFirstLastPara="1" rIns="91425" wrap="square" tIns="45700">
+          <a:bodyPr wrap="square" lIns="91424" tIns="45700" rIns="91424" bIns="45700" anchor="ctr" anchorCtr="0">
             <a:noAutofit/>
           </a:bodyPr>
           <a:lstStyle/>
           <a:p>
-            <a:pPr indent="0" lvl="0" marL="0" marR="0" rtl="0" algn="ctr">
-              <a:spcBef>
-                <a:spcPts val="0"/>
-              </a:spcBef>
-              <a:spcAft>
-                <a:spcPts val="0"/>
-              </a:spcAft>
-              <a:buNone/>
-            </a:pPr>
-            <a:r>
-              <a:rPr>
-                <a:latin typeface="맑은 고딕"/>
-                <a:ea typeface="맑은 고딕"/>
-              </a:rPr>
-              <a:t/>
-            </a:r>
-            <a:endParaRPr b="0" i="0" sz="1800" u="none" cap="none" strike="noStrike">
+            <a:pPr marL="0" marR="0" lvl="0" indent="0" algn="ctr" rtl="0">
+              <a:spcBef>
+                <a:spcPts val="0"/>
+              </a:spcBef>
+              <a:spcAft>
+                <a:spcPts val="0"/>
+              </a:spcAft>
+              <a:buNone/>
+              <a:defRPr/>
+            </a:pPr>
+            <a:endParaRPr sz="1800" b="0" i="0" u="none" strike="noStrike" cap="none">
               <a:solidFill>
                 <a:schemeClr val="lt1"/>
               </a:solidFill>
@@ -27211,7 +27350,7 @@
         <p:spPr>
           <a:xfrm>
             <a:off x="502920" y="292608"/>
-            <a:ext cx="10515600" cy="365760"/>
+            <a:ext cx="10515600" cy="334117"/>
           </a:xfrm>
           <a:prstGeom prst="rect">
             <a:avLst/>
@@ -27222,29 +27361,30 @@
           </a:ln>
         </p:spPr>
         <p:txBody>
-          <a:bodyPr anchorCtr="0" anchor="t" bIns="45700" lIns="91425" spcFirstLastPara="1" rIns="91425" wrap="square" tIns="45700">
+          <a:bodyPr wrap="square" lIns="91424" tIns="45700" rIns="91424" bIns="45700" anchor="t" anchorCtr="0">
             <a:spAutoFit/>
           </a:bodyPr>
           <a:lstStyle/>
           <a:p>
-            <a:pPr indent="0" lvl="0" marL="0" marR="0" rtl="0" algn="l">
-              <a:spcBef>
-                <a:spcPts val="0"/>
-              </a:spcBef>
-              <a:spcAft>
-                <a:spcPts val="0"/>
-              </a:spcAft>
-              <a:buNone/>
-            </a:pPr>
-            <a:r>
-              <a:rPr b="1" i="0" lang="en-US" sz="1600" u="none" cap="none" strike="noStrike">
-                <a:solidFill>
-                  <a:srgbClr val="2A78D6"/>
+            <a:pPr marL="0" marR="0" lvl="0" indent="0" algn="l" rtl="0">
+              <a:spcBef>
+                <a:spcPts val="0"/>
+              </a:spcBef>
+              <a:spcAft>
+                <a:spcPts val="0"/>
+              </a:spcAft>
+              <a:buNone/>
+              <a:defRPr/>
+            </a:pPr>
+            <a:r>
+              <a:rPr lang="en-US" sz="1600" b="1" i="0" u="none" strike="noStrike" cap="none">
+                <a:solidFill>
+                  <a:srgbClr val="2a78d6"/>
                 </a:solidFill>
                 <a:latin typeface="맑은 고딕"/>
                 <a:ea typeface="맑은 고딕"/>
-                <a:cs typeface="Malgun Gothic"/>
-                <a:sym typeface="Malgun Gothic"/>
+                <a:cs typeface="맑은 고딕"/>
+                <a:sym typeface="맑은 고딕"/>
               </a:rPr>
               <a:t>CONTENTS</a:t>
             </a:r>
@@ -27261,7 +27401,7 @@
         <p:spPr>
           <a:xfrm>
             <a:off x="502920" y="621792"/>
-            <a:ext cx="11155680" cy="731520"/>
+            <a:ext cx="11155680" cy="547858"/>
           </a:xfrm>
           <a:prstGeom prst="rect">
             <a:avLst/>
@@ -27272,29 +27412,30 @@
           </a:ln>
         </p:spPr>
         <p:txBody>
-          <a:bodyPr anchorCtr="0" anchor="t" bIns="45700" lIns="91425" spcFirstLastPara="1" rIns="91425" wrap="square" tIns="45700">
+          <a:bodyPr wrap="square" lIns="91424" tIns="45700" rIns="91424" bIns="45700" anchor="t" anchorCtr="0">
             <a:spAutoFit/>
           </a:bodyPr>
           <a:lstStyle/>
           <a:p>
-            <a:pPr indent="0" lvl="0" marL="0" marR="0" rtl="0" algn="l">
-              <a:spcBef>
-                <a:spcPts val="0"/>
-              </a:spcBef>
-              <a:spcAft>
-                <a:spcPts val="0"/>
-              </a:spcAft>
-              <a:buNone/>
-            </a:pPr>
-            <a:r>
-              <a:rPr b="1" i="0" lang="en-US" sz="3000" u="none" cap="none" strike="noStrike">
+            <a:pPr marL="0" marR="0" lvl="0" indent="0" algn="l" rtl="0">
+              <a:spcBef>
+                <a:spcPts val="0"/>
+              </a:spcBef>
+              <a:spcAft>
+                <a:spcPts val="0"/>
+              </a:spcAft>
+              <a:buNone/>
+              <a:defRPr/>
+            </a:pPr>
+            <a:r>
+              <a:rPr lang="en-US" sz="3000" b="1" i="0" u="none" strike="noStrike" cap="none">
                 <a:solidFill>
                   <a:srgbClr val="104281"/>
                 </a:solidFill>
                 <a:latin typeface="맑은 고딕"/>
                 <a:ea typeface="맑은 고딕"/>
-                <a:cs typeface="Malgun Gothic"/>
-                <a:sym typeface="Malgun Gothic"/>
+                <a:cs typeface="맑은 고딕"/>
+                <a:sym typeface="맑은 고딕"/>
               </a:rPr>
               <a:t>발표 순서</a:t>
             </a:r>
@@ -27310,8 +27451,8 @@
         </p:nvSpPr>
         <p:spPr>
           <a:xfrm>
-            <a:off x="1097280" y="2000200"/>
-            <a:ext cx="9601200" cy="457200"/>
+            <a:off x="1021080" y="1625140"/>
+            <a:ext cx="9601200" cy="392234"/>
           </a:xfrm>
           <a:prstGeom prst="rect">
             <a:avLst/>
@@ -27322,29 +27463,30 @@
           </a:ln>
         </p:spPr>
         <p:txBody>
-          <a:bodyPr anchorCtr="0" anchor="t" bIns="45700" lIns="91425" spcFirstLastPara="1" rIns="91425" wrap="square" tIns="45700">
+          <a:bodyPr wrap="square" lIns="91424" tIns="45700" rIns="91424" bIns="45700" anchor="t" anchorCtr="0">
             <a:spAutoFit/>
           </a:bodyPr>
           <a:lstStyle/>
           <a:p>
-            <a:pPr indent="0" lvl="0" marL="0" marR="0" rtl="0" algn="l">
-              <a:spcBef>
-                <a:spcPts val="0"/>
-              </a:spcBef>
-              <a:spcAft>
-                <a:spcPts val="0"/>
-              </a:spcAft>
-              <a:buNone/>
-            </a:pPr>
-            <a:r>
-              <a:rPr b="1" i="0" lang="en-US" sz="2000" u="none" cap="none" strike="noStrike">
+            <a:pPr marL="0" marR="0" lvl="0" indent="0" algn="l" rtl="0">
+              <a:spcBef>
+                <a:spcPts val="0"/>
+              </a:spcBef>
+              <a:spcAft>
+                <a:spcPts val="0"/>
+              </a:spcAft>
+              <a:buNone/>
+              <a:defRPr/>
+            </a:pPr>
+            <a:r>
+              <a:rPr lang="en-US" sz="2000" b="1" i="0" u="none" strike="noStrike" cap="none">
                 <a:solidFill>
                   <a:srgbClr val="202020"/>
                 </a:solidFill>
                 <a:latin typeface="맑은 고딕"/>
                 <a:ea typeface="맑은 고딕"/>
-                <a:cs typeface="Malgun Gothic"/>
-                <a:sym typeface="Malgun Gothic"/>
+                <a:cs typeface="맑은 고딕"/>
+                <a:sym typeface="맑은 고딕"/>
               </a:rPr>
               <a:t>01  문제의식 — 왜 치매인가</a:t>
             </a:r>
@@ -27360,8 +27502,8 @@
         </p:nvSpPr>
         <p:spPr>
           <a:xfrm>
-            <a:off x="1600200" y="2384248"/>
-            <a:ext cx="9144000" cy="365760"/>
+            <a:off x="1524000" y="2009188"/>
+            <a:ext cx="9144000" cy="337977"/>
           </a:xfrm>
           <a:prstGeom prst="rect">
             <a:avLst/>
@@ -27372,40 +27514,53 @@
           </a:ln>
         </p:spPr>
         <p:txBody>
-          <a:bodyPr anchorCtr="0" anchor="t" bIns="45700" lIns="91425" spcFirstLastPara="1" rIns="91425" wrap="square" tIns="45700">
+          <a:bodyPr wrap="square" lIns="91424" tIns="45700" rIns="91424" bIns="45700" anchor="t" anchorCtr="0">
             <a:spAutoFit/>
           </a:bodyPr>
           <a:lstStyle/>
           <a:p>
-            <a:pPr indent="0" lvl="0" marL="0" marR="0" rtl="0" algn="l">
-              <a:spcBef>
-                <a:spcPts val="0"/>
-              </a:spcBef>
-              <a:spcAft>
-                <a:spcPts val="0"/>
-              </a:spcAft>
-              <a:buNone/>
-            </a:pPr>
-            <a:r>
-              <a:rPr b="1" i="0" lang="en-US" sz="1600" u="none" cap="none" strike="noStrike">
+            <a:pPr marL="0" marR="0" lvl="0" indent="0" algn="l" rtl="0">
+              <a:spcBef>
+                <a:spcPts val="0"/>
+              </a:spcBef>
+              <a:spcAft>
+                <a:spcPts val="0"/>
+              </a:spcAft>
+              <a:buNone/>
+              <a:defRPr/>
+            </a:pPr>
+            <a:r>
+              <a:rPr lang="en-US" sz="1600" b="1" i="0" u="none" strike="noStrike" cap="none">
                 <a:solidFill>
                   <a:srgbClr val="666666"/>
                 </a:solidFill>
                 <a:latin typeface="맑은 고딕"/>
                 <a:ea typeface="맑은 고딕"/>
-                <a:cs typeface="Malgun Gothic"/>
-                <a:sym typeface="Malgun Gothic"/>
+                <a:cs typeface="맑은 고딕"/>
+                <a:sym typeface="맑은 고딕"/>
               </a:rPr>
-              <a:t>다른 만성질환과 비교해도 유독 심각한 질환</a:t>
-            </a:r>
-            <a:endParaRPr b="1" i="0" sz="1600" u="none" cap="none" strike="noStrike">
+              <a:t>다른 만성질환과 비교</a:t>
+            </a:r>
+            <a:r>
+              <a:rPr lang="ko-KR" altLang="en-US" sz="1600" b="1" i="0" u="none" strike="noStrike" cap="none">
+                <a:solidFill>
+                  <a:srgbClr val="666666"/>
+                </a:solidFill>
+                <a:latin typeface="맑은 고딕"/>
+                <a:ea typeface="맑은 고딕"/>
+                <a:cs typeface="맑은 고딕"/>
+                <a:sym typeface="맑은 고딕"/>
+              </a:rPr>
+              <a:t> 및 질병 양상 통계분석</a:t>
+            </a:r>
+            <a:endParaRPr lang="ko-KR" altLang="en-US" sz="1600" b="1" i="0" u="none" strike="noStrike" cap="none">
               <a:solidFill>
                 <a:srgbClr val="666666"/>
               </a:solidFill>
-              <a:latin typeface="Malgun Gothic"/>
-              <a:ea typeface="Malgun Gothic"/>
-              <a:cs typeface="Malgun Gothic"/>
-              <a:sym typeface="Malgun Gothic"/>
+              <a:latin typeface="맑은 고딕"/>
+              <a:ea typeface="맑은 고딕"/>
+              <a:cs typeface="맑은 고딕"/>
+              <a:sym typeface="맑은 고딕"/>
             </a:endParaRPr>
           </a:p>
         </p:txBody>
@@ -27418,8 +27573,8 @@
         </p:nvSpPr>
         <p:spPr>
           <a:xfrm>
-            <a:off x="1097280" y="2804872"/>
-            <a:ext cx="9601200" cy="457200"/>
+            <a:off x="1021080" y="2429812"/>
+            <a:ext cx="9601200" cy="393603"/>
           </a:xfrm>
           <a:prstGeom prst="rect">
             <a:avLst/>
@@ -27430,29 +27585,30 @@
           </a:ln>
         </p:spPr>
         <p:txBody>
-          <a:bodyPr anchorCtr="0" anchor="t" bIns="45700" lIns="91425" spcFirstLastPara="1" rIns="91425" wrap="square" tIns="45700">
+          <a:bodyPr wrap="square" lIns="91424" tIns="45700" rIns="91424" bIns="45700" anchor="t" anchorCtr="0">
             <a:spAutoFit/>
           </a:bodyPr>
           <a:lstStyle/>
           <a:p>
-            <a:pPr indent="0" lvl="0" marL="0" marR="0" rtl="0" algn="l">
-              <a:spcBef>
-                <a:spcPts val="0"/>
-              </a:spcBef>
-              <a:spcAft>
-                <a:spcPts val="0"/>
-              </a:spcAft>
-              <a:buNone/>
-            </a:pPr>
-            <a:r>
-              <a:rPr b="1" i="0" lang="en-US" sz="2000" u="none" cap="none" strike="noStrike">
+            <a:pPr marL="0" marR="0" lvl="0" indent="0" algn="l" rtl="0">
+              <a:spcBef>
+                <a:spcPts val="0"/>
+              </a:spcBef>
+              <a:spcAft>
+                <a:spcPts val="0"/>
+              </a:spcAft>
+              <a:buNone/>
+              <a:defRPr/>
+            </a:pPr>
+            <a:r>
+              <a:rPr lang="en-US" sz="2000" b="1" i="0" u="none" strike="noStrike" cap="none">
                 <a:solidFill>
                   <a:srgbClr val="202020"/>
                 </a:solidFill>
                 <a:latin typeface="맑은 고딕"/>
                 <a:ea typeface="맑은 고딕"/>
-                <a:cs typeface="Malgun Gothic"/>
-                <a:sym typeface="Malgun Gothic"/>
+                <a:cs typeface="맑은 고딕"/>
+                <a:sym typeface="맑은 고딕"/>
               </a:rPr>
               <a:t>02  데이터와 분석 질문</a:t>
             </a:r>
@@ -27468,8 +27624,8 @@
         </p:nvSpPr>
         <p:spPr>
           <a:xfrm>
-            <a:off x="1600200" y="3188920"/>
-            <a:ext cx="9144000" cy="365760"/>
+            <a:off x="1524000" y="2813860"/>
+            <a:ext cx="9144000" cy="336990"/>
           </a:xfrm>
           <a:prstGeom prst="rect">
             <a:avLst/>
@@ -27480,29 +27636,30 @@
           </a:ln>
         </p:spPr>
         <p:txBody>
-          <a:bodyPr anchorCtr="0" anchor="t" bIns="45700" lIns="91425" spcFirstLastPara="1" rIns="91425" wrap="square" tIns="45700">
+          <a:bodyPr wrap="square" lIns="91424" tIns="45700" rIns="91424" bIns="45700" anchor="t" anchorCtr="0">
             <a:spAutoFit/>
           </a:bodyPr>
           <a:lstStyle/>
           <a:p>
-            <a:pPr indent="0" lvl="0" marL="0" marR="0" rtl="0" algn="l">
-              <a:spcBef>
-                <a:spcPts val="0"/>
-              </a:spcBef>
-              <a:spcAft>
-                <a:spcPts val="0"/>
-              </a:spcAft>
-              <a:buNone/>
-            </a:pPr>
-            <a:r>
-              <a:rPr b="1" i="0" lang="en-US" sz="1600" u="none" cap="none" strike="noStrike">
+            <a:pPr marL="0" marR="0" lvl="0" indent="0" algn="l" rtl="0">
+              <a:spcBef>
+                <a:spcPts val="0"/>
+              </a:spcBef>
+              <a:spcAft>
+                <a:spcPts val="0"/>
+              </a:spcAft>
+              <a:buNone/>
+              <a:defRPr/>
+            </a:pPr>
+            <a:r>
+              <a:rPr lang="en-US" sz="1600" b="1" i="0" u="none" strike="noStrike" cap="none">
                 <a:solidFill>
                   <a:srgbClr val="666666"/>
                 </a:solidFill>
                 <a:latin typeface="맑은 고딕"/>
                 <a:ea typeface="맑은 고딕"/>
-                <a:cs typeface="Malgun Gothic"/>
-                <a:sym typeface="Malgun Gothic"/>
+                <a:cs typeface="맑은 고딕"/>
+                <a:sym typeface="맑은 고딕"/>
               </a:rPr>
               <a:t>AI Hub 웨어러블 라이프로그 174명, Q1~Q5</a:t>
             </a:r>
@@ -27518,8 +27675,8 @@
         </p:nvSpPr>
         <p:spPr>
           <a:xfrm>
-            <a:off x="1097280" y="3609544"/>
-            <a:ext cx="9601200" cy="457200"/>
+            <a:off x="1021080" y="3234484"/>
+            <a:ext cx="9601200" cy="392616"/>
           </a:xfrm>
           <a:prstGeom prst="rect">
             <a:avLst/>
@@ -27530,29 +27687,30 @@
           </a:ln>
         </p:spPr>
         <p:txBody>
-          <a:bodyPr anchorCtr="0" anchor="t" bIns="45700" lIns="91425" spcFirstLastPara="1" rIns="91425" wrap="square" tIns="45700">
+          <a:bodyPr wrap="square" lIns="91424" tIns="45700" rIns="91424" bIns="45700" anchor="t" anchorCtr="0">
             <a:spAutoFit/>
           </a:bodyPr>
           <a:lstStyle/>
           <a:p>
-            <a:pPr indent="0" lvl="0" marL="0" marR="0" rtl="0" algn="l">
-              <a:spcBef>
-                <a:spcPts val="0"/>
-              </a:spcBef>
-              <a:spcAft>
-                <a:spcPts val="0"/>
-              </a:spcAft>
-              <a:buNone/>
-            </a:pPr>
-            <a:r>
-              <a:rPr b="1" i="0" lang="en-US" sz="2000" u="none" cap="none" strike="noStrike">
+            <a:pPr marL="0" marR="0" lvl="0" indent="0" algn="l" rtl="0">
+              <a:spcBef>
+                <a:spcPts val="0"/>
+              </a:spcBef>
+              <a:spcAft>
+                <a:spcPts val="0"/>
+              </a:spcAft>
+              <a:buNone/>
+              <a:defRPr/>
+            </a:pPr>
+            <a:r>
+              <a:rPr lang="en-US" sz="2000" b="1" i="0" u="none" strike="noStrike" cap="none">
                 <a:solidFill>
                   <a:srgbClr val="202020"/>
                 </a:solidFill>
                 <a:latin typeface="맑은 고딕"/>
                 <a:ea typeface="맑은 고딕"/>
-                <a:cs typeface="Malgun Gothic"/>
-                <a:sym typeface="Malgun Gothic"/>
+                <a:cs typeface="맑은 고딕"/>
+                <a:sym typeface="맑은 고딕"/>
               </a:rPr>
               <a:t>03  분석 결과</a:t>
             </a:r>
@@ -27568,8 +27726,8 @@
         </p:nvSpPr>
         <p:spPr>
           <a:xfrm>
-            <a:off x="1600200" y="3993591"/>
-            <a:ext cx="9144000" cy="365760"/>
+            <a:off x="1524000" y="3618531"/>
+            <a:ext cx="9144000" cy="338359"/>
           </a:xfrm>
           <a:prstGeom prst="rect">
             <a:avLst/>
@@ -27580,29 +27738,30 @@
           </a:ln>
         </p:spPr>
         <p:txBody>
-          <a:bodyPr anchorCtr="0" anchor="t" bIns="45700" lIns="91425" spcFirstLastPara="1" rIns="91425" wrap="square" tIns="45700">
+          <a:bodyPr wrap="square" lIns="91424" tIns="45700" rIns="91424" bIns="45700" anchor="t" anchorCtr="0">
             <a:spAutoFit/>
           </a:bodyPr>
           <a:lstStyle/>
           <a:p>
-            <a:pPr indent="0" lvl="0" marL="0" marR="0" rtl="0" algn="l">
-              <a:spcBef>
-                <a:spcPts val="0"/>
-              </a:spcBef>
-              <a:spcAft>
-                <a:spcPts val="0"/>
-              </a:spcAft>
-              <a:buNone/>
-            </a:pPr>
-            <a:r>
-              <a:rPr b="1" i="0" lang="en-US" sz="1600" u="none" cap="none" strike="noStrike">
+            <a:pPr marL="0" marR="0" lvl="0" indent="0" algn="l" rtl="0">
+              <a:spcBef>
+                <a:spcPts val="0"/>
+              </a:spcBef>
+              <a:spcAft>
+                <a:spcPts val="0"/>
+              </a:spcAft>
+              <a:buNone/>
+              <a:defRPr/>
+            </a:pPr>
+            <a:r>
+              <a:rPr lang="en-US" sz="1600" b="1" i="0" u="none" strike="noStrike" cap="none">
                 <a:solidFill>
                   <a:srgbClr val="666666"/>
                 </a:solidFill>
                 <a:latin typeface="맑은 고딕"/>
                 <a:ea typeface="맑은 고딕"/>
-                <a:cs typeface="Malgun Gothic"/>
-                <a:sym typeface="Malgun Gothic"/>
+                <a:cs typeface="맑은 고딕"/>
+                <a:sym typeface="맑은 고딕"/>
               </a:rPr>
               <a:t>핵심 발견: 활동량이 아니라 '패턴의 불규칙함'</a:t>
             </a:r>
@@ -27618,8 +27777,8 @@
         </p:nvSpPr>
         <p:spPr>
           <a:xfrm>
-            <a:off x="1097280" y="4414215"/>
-            <a:ext cx="9601200" cy="457200"/>
+            <a:off x="1021080" y="4039155"/>
+            <a:ext cx="9601200" cy="393985"/>
           </a:xfrm>
           <a:prstGeom prst="rect">
             <a:avLst/>
@@ -27630,33 +27789,54 @@
           </a:ln>
         </p:spPr>
         <p:txBody>
-          <a:bodyPr anchorCtr="0" anchor="t" bIns="45700" lIns="91425" spcFirstLastPara="1" rIns="91425" wrap="square" tIns="45700">
+          <a:bodyPr wrap="square" lIns="91424" tIns="45700" rIns="91424" bIns="45700" anchor="t" anchorCtr="0">
             <a:spAutoFit/>
           </a:bodyPr>
           <a:lstStyle/>
           <a:p>
-            <a:pPr indent="0" lvl="0" marL="0" marR="0" rtl="0" algn="l">
-              <a:spcBef>
-                <a:spcPts val="0"/>
-              </a:spcBef>
-              <a:spcAft>
-                <a:spcPts val="0"/>
-              </a:spcAft>
-              <a:buNone/>
-            </a:pPr>
-            <a:r>
-              <a:rPr b="1" i="0" lang="en-US" sz="2000" u="none" cap="none" strike="noStrike">
+            <a:pPr marL="0" marR="0" lvl="0" indent="0" algn="l" rtl="0">
+              <a:spcBef>
+                <a:spcPts val="0"/>
+              </a:spcBef>
+              <a:spcAft>
+                <a:spcPts val="0"/>
+              </a:spcAft>
+              <a:buNone/>
+              <a:defRPr/>
+            </a:pPr>
+            <a:r>
+              <a:rPr lang="en-US" sz="2000" b="1" i="0" u="none" strike="noStrike" cap="none">
                 <a:solidFill>
                   <a:srgbClr val="202020"/>
                 </a:solidFill>
                 <a:latin typeface="맑은 고딕"/>
                 <a:ea typeface="맑은 고딕"/>
-                <a:cs typeface="Malgun Gothic"/>
-                <a:sym typeface="Malgun Gothic"/>
+                <a:cs typeface="맑은 고딕"/>
+                <a:sym typeface="맑은 고딕"/>
               </a:rPr>
-              <a:t>04  검증 — 스스로에게 던진 두 가지 질문</a:t>
-            </a:r>
-            <a:endParaRPr/>
+              <a:t>04  검증 — </a:t>
+            </a:r>
+            <a:r>
+              <a:rPr lang="ko-KR" altLang="en-US" sz="2000" b="1" i="0" u="none" strike="noStrike" cap="none">
+                <a:solidFill>
+                  <a:srgbClr val="202020"/>
+                </a:solidFill>
+                <a:latin typeface="맑은 고딕"/>
+                <a:ea typeface="맑은 고딕"/>
+                <a:cs typeface="맑은 고딕"/>
+                <a:sym typeface="맑은 고딕"/>
+              </a:rPr>
+              <a:t>분석 질문에 대한 답변</a:t>
+            </a:r>
+            <a:endParaRPr lang="ko-KR" altLang="en-US" sz="2000" b="1" i="0" u="none" strike="noStrike" cap="none">
+              <a:solidFill>
+                <a:srgbClr val="202020"/>
+              </a:solidFill>
+              <a:latin typeface="맑은 고딕"/>
+              <a:ea typeface="맑은 고딕"/>
+              <a:cs typeface="맑은 고딕"/>
+              <a:sym typeface="맑은 고딕"/>
+            </a:endParaRPr>
           </a:p>
         </p:txBody>
       </p:sp>
@@ -27668,8 +27848,8 @@
         </p:nvSpPr>
         <p:spPr>
           <a:xfrm>
-            <a:off x="1600200" y="4798264"/>
-            <a:ext cx="9144000" cy="365760"/>
+            <a:off x="1524000" y="4423204"/>
+            <a:ext cx="9144000" cy="337371"/>
           </a:xfrm>
           <a:prstGeom prst="rect">
             <a:avLst/>
@@ -27680,33 +27860,66 @@
           </a:ln>
         </p:spPr>
         <p:txBody>
-          <a:bodyPr anchorCtr="0" anchor="t" bIns="45700" lIns="91425" spcFirstLastPara="1" rIns="91425" wrap="square" tIns="45700">
+          <a:bodyPr wrap="square" lIns="91424" tIns="45700" rIns="91424" bIns="45700" anchor="t" anchorCtr="0">
             <a:spAutoFit/>
           </a:bodyPr>
           <a:lstStyle/>
           <a:p>
-            <a:pPr indent="0" lvl="0" marL="0" marR="0" rtl="0" algn="l">
-              <a:spcBef>
-                <a:spcPts val="0"/>
-              </a:spcBef>
-              <a:spcAft>
-                <a:spcPts val="0"/>
-              </a:spcAft>
-              <a:buNone/>
-            </a:pPr>
-            <a:r>
-              <a:rPr b="1" i="0" lang="en-US" sz="1600" u="none" cap="none" strike="noStrike">
+            <a:pPr marL="0" marR="0" lvl="0" indent="0" algn="l" rtl="0">
+              <a:spcBef>
+                <a:spcPts val="0"/>
+              </a:spcBef>
+              <a:spcAft>
+                <a:spcPts val="0"/>
+              </a:spcAft>
+              <a:buNone/>
+              <a:defRPr/>
+            </a:pPr>
+            <a:r>
+              <a:rPr lang="en-US" sz="1600" b="1" i="0" u="none" strike="noStrike" cap="none">
                 <a:solidFill>
                   <a:srgbClr val="666666"/>
                 </a:solidFill>
                 <a:latin typeface="맑은 고딕"/>
                 <a:ea typeface="맑은 고딕"/>
-                <a:cs typeface="Malgun Gothic"/>
-                <a:sym typeface="Malgun Gothic"/>
+                <a:cs typeface="맑은 고딕"/>
+                <a:sym typeface="맑은 고딕"/>
               </a:rPr>
-              <a:t>치매를 빼도 남는가 / 우연은 아닌가</a:t>
-            </a:r>
-            <a:endParaRPr/>
+              <a:t>치매를 </a:t>
+            </a:r>
+            <a:r>
+              <a:rPr lang="ko-KR" altLang="en-US" sz="1600" b="1" i="0" u="none" strike="noStrike" cap="none">
+                <a:solidFill>
+                  <a:srgbClr val="666666"/>
+                </a:solidFill>
+                <a:latin typeface="맑은 고딕"/>
+                <a:ea typeface="맑은 고딕"/>
+                <a:cs typeface="맑은 고딕"/>
+                <a:sym typeface="맑은 고딕"/>
+              </a:rPr>
+              <a:t>제외했을 때의 정확도</a:t>
+            </a:r>
+            <a:r>
+              <a:rPr lang="en-US" sz="1600" b="1" i="0" u="none" strike="noStrike" cap="none">
+                <a:solidFill>
+                  <a:srgbClr val="666666"/>
+                </a:solidFill>
+                <a:latin typeface="맑은 고딕"/>
+                <a:ea typeface="맑은 고딕"/>
+                <a:cs typeface="맑은 고딕"/>
+                <a:sym typeface="맑은 고딕"/>
+              </a:rPr>
+              <a:t> / 우연은 아닌가</a:t>
+            </a:r>
+            <a:endParaRPr lang="en-US" sz="1600" b="1" i="0" u="none" strike="noStrike" cap="none">
+              <a:solidFill>
+                <a:srgbClr val="666666"/>
+              </a:solidFill>
+              <a:latin typeface="맑은 고딕"/>
+              <a:ea typeface="맑은 고딕"/>
+              <a:cs typeface="맑은 고딕"/>
+              <a:sym typeface="맑은 고딕"/>
+            </a:endParaRPr>
           </a:p>
         </p:txBody>
       </p:sp>
@@ -27718,8 +27931,8 @@
         </p:nvSpPr>
         <p:spPr>
           <a:xfrm>
-            <a:off x="1097280" y="5218888"/>
-            <a:ext cx="9601200" cy="457200"/>
+            <a:off x="1021080" y="4843828"/>
+            <a:ext cx="9601200" cy="392997"/>
           </a:xfrm>
           <a:prstGeom prst="rect">
             <a:avLst/>
@@ -27730,29 +27943,30 @@
           </a:ln>
         </p:spPr>
         <p:txBody>
-          <a:bodyPr anchorCtr="0" anchor="t" bIns="45700" lIns="91425" spcFirstLastPara="1" rIns="91425" wrap="square" tIns="45700">
+          <a:bodyPr wrap="square" lIns="91424" tIns="45700" rIns="91424" bIns="45700" anchor="t" anchorCtr="0">
             <a:spAutoFit/>
           </a:bodyPr>
           <a:lstStyle/>
           <a:p>
-            <a:pPr indent="0" lvl="0" marL="0" marR="0" rtl="0" algn="l">
-              <a:spcBef>
-                <a:spcPts val="0"/>
-              </a:spcBef>
-              <a:spcAft>
-                <a:spcPts val="0"/>
-              </a:spcAft>
-              <a:buNone/>
-            </a:pPr>
-            <a:r>
-              <a:rPr b="1" i="0" lang="en-US" sz="2000" u="none" cap="none" strike="noStrike">
+            <a:pPr marL="0" marR="0" lvl="0" indent="0" algn="l" rtl="0">
+              <a:spcBef>
+                <a:spcPts val="0"/>
+              </a:spcBef>
+              <a:spcAft>
+                <a:spcPts val="0"/>
+              </a:spcAft>
+              <a:buNone/>
+              <a:defRPr/>
+            </a:pPr>
+            <a:r>
+              <a:rPr lang="en-US" sz="2000" b="1" i="0" u="none" strike="noStrike" cap="none">
                 <a:solidFill>
                   <a:srgbClr val="202020"/>
                 </a:solidFill>
                 <a:latin typeface="맑은 고딕"/>
                 <a:ea typeface="맑은 고딕"/>
-                <a:cs typeface="Malgun Gothic"/>
-                <a:sym typeface="Malgun Gothic"/>
+                <a:cs typeface="맑은 고딕"/>
+                <a:sym typeface="맑은 고딕"/>
               </a:rPr>
               <a:t>05  서비스 시연</a:t>
             </a:r>
@@ -27768,8 +27982,8 @@
         </p:nvSpPr>
         <p:spPr>
           <a:xfrm>
-            <a:off x="1600200" y="5602936"/>
-            <a:ext cx="9144000" cy="365760"/>
+            <a:off x="1524000" y="5227876"/>
+            <a:ext cx="9144000" cy="338738"/>
           </a:xfrm>
           <a:prstGeom prst="rect">
             <a:avLst/>
@@ -27780,33 +27994,66 @@
           </a:ln>
         </p:spPr>
         <p:txBody>
-          <a:bodyPr anchorCtr="0" anchor="t" bIns="45700" lIns="91425" spcFirstLastPara="1" rIns="91425" wrap="square" tIns="45700">
+          <a:bodyPr wrap="square" lIns="91424" tIns="45700" rIns="91424" bIns="45700" anchor="t" anchorCtr="0">
             <a:spAutoFit/>
           </a:bodyPr>
           <a:lstStyle/>
           <a:p>
-            <a:pPr indent="0" lvl="0" marL="0" marR="0" rtl="0" algn="l">
-              <a:spcBef>
-                <a:spcPts val="0"/>
-              </a:spcBef>
-              <a:spcAft>
-                <a:spcPts val="0"/>
-              </a:spcAft>
-              <a:buNone/>
-            </a:pPr>
-            <a:r>
-              <a:rPr b="1" i="0" lang="en-US" sz="1600" u="none" cap="none" strike="noStrike">
+            <a:pPr marL="0" marR="0" lvl="0" indent="0" algn="l" rtl="0">
+              <a:spcBef>
+                <a:spcPts val="0"/>
+              </a:spcBef>
+              <a:spcAft>
+                <a:spcPts val="0"/>
+              </a:spcAft>
+              <a:buNone/>
+              <a:defRPr/>
+            </a:pPr>
+            <a:r>
+              <a:rPr lang="en-US" sz="1600" b="1" i="0" u="none" strike="noStrike" cap="none">
                 <a:solidFill>
                   <a:srgbClr val="666666"/>
                 </a:solidFill>
                 <a:latin typeface="맑은 고딕"/>
                 <a:ea typeface="맑은 고딕"/>
-                <a:cs typeface="Malgun Gothic"/>
-                <a:sym typeface="Malgun Gothic"/>
+                <a:cs typeface="맑은 고딕"/>
+                <a:sym typeface="맑은 고딕"/>
               </a:rPr>
-              <a:t>업로드 → 위험 점수 → 치매안심센터 지도 안내</a:t>
-            </a:r>
-            <a:endParaRPr/>
+              <a:t>업로드 → 위험 점수</a:t>
+            </a:r>
+            <a:r>
+              <a:rPr lang="ko-KR" altLang="en-US" sz="1600" b="1" i="0" u="none" strike="noStrike" cap="none">
+                <a:solidFill>
+                  <a:srgbClr val="666666"/>
+                </a:solidFill>
+                <a:latin typeface="맑은 고딕"/>
+                <a:ea typeface="맑은 고딕"/>
+                <a:cs typeface="맑은 고딕"/>
+                <a:sym typeface="맑은 고딕"/>
+              </a:rPr>
+              <a:t> 및 결과 분석</a:t>
+            </a:r>
+            <a:r>
+              <a:rPr lang="en-US" sz="1600" b="1" i="0" u="none" strike="noStrike" cap="none">
+                <a:solidFill>
+                  <a:srgbClr val="666666"/>
+                </a:solidFill>
+                <a:latin typeface="맑은 고딕"/>
+                <a:ea typeface="맑은 고딕"/>
+                <a:cs typeface="맑은 고딕"/>
+                <a:sym typeface="맑은 고딕"/>
+              </a:rPr>
+              <a:t> → 치매안심센터 지도 안내</a:t>
+            </a:r>
+            <a:endParaRPr lang="en-US" sz="1600" b="1" i="0" u="none" strike="noStrike" cap="none">
+              <a:solidFill>
+                <a:srgbClr val="666666"/>
+              </a:solidFill>
+              <a:latin typeface="맑은 고딕"/>
+              <a:ea typeface="맑은 고딕"/>
+              <a:cs typeface="맑은 고딕"/>
+              <a:sym typeface="맑은 고딕"/>
+            </a:endParaRPr>
           </a:p>
         </p:txBody>
       </p:sp>
@@ -27818,8 +28065,8 @@
         </p:nvSpPr>
         <p:spPr>
           <a:xfrm>
-            <a:off x="1097280" y="6023559"/>
-            <a:ext cx="9601200" cy="457200"/>
+            <a:off x="1021080" y="5648499"/>
+            <a:ext cx="9601200" cy="394366"/>
           </a:xfrm>
           <a:prstGeom prst="rect">
             <a:avLst/>
@@ -27830,91 +28077,42 @@
           </a:ln>
         </p:spPr>
         <p:txBody>
-          <a:bodyPr anchorCtr="0" anchor="t" bIns="45700" lIns="91425" spcFirstLastPara="1" rIns="91425" wrap="square" tIns="45700">
+          <a:bodyPr wrap="square" lIns="91424" tIns="45700" rIns="91424" bIns="45700" anchor="t" anchorCtr="0">
             <a:spAutoFit/>
           </a:bodyPr>
           <a:lstStyle/>
           <a:p>
-            <a:pPr indent="0" lvl="0" marL="0" marR="0" rtl="0" algn="l">
-              <a:spcBef>
-                <a:spcPts val="0"/>
-              </a:spcBef>
-              <a:spcAft>
-                <a:spcPts val="0"/>
-              </a:spcAft>
-              <a:buNone/>
-            </a:pPr>
-            <a:r>
-              <a:rPr b="1" i="0" lang="en-US" sz="2000" u="none" cap="none" strike="noStrike">
+            <a:pPr marL="0" marR="0" lvl="0" indent="0" algn="l" rtl="0">
+              <a:spcBef>
+                <a:spcPts val="0"/>
+              </a:spcBef>
+              <a:spcAft>
+                <a:spcPts val="0"/>
+              </a:spcAft>
+              <a:buNone/>
+              <a:defRPr/>
+            </a:pPr>
+            <a:r>
+              <a:rPr lang="en-US" sz="2000" b="1" i="0" u="none" strike="noStrike" cap="none">
                 <a:solidFill>
                   <a:srgbClr val="202020"/>
                 </a:solidFill>
                 <a:latin typeface="맑은 고딕"/>
                 <a:ea typeface="맑은 고딕"/>
-                <a:cs typeface="Malgun Gothic"/>
-                <a:sym typeface="Malgun Gothic"/>
+                <a:cs typeface="맑은 고딕"/>
+                <a:sym typeface="맑은 고딕"/>
               </a:rPr>
               <a:t>06  결론과 한계, 확장 방향</a:t>
             </a:r>
-            <a:endParaRPr b="1" i="0" sz="2000" u="none" cap="none" strike="noStrike">
+            <a:endParaRPr sz="2000" b="1" i="0" u="none" strike="noStrike" cap="none">
               <a:solidFill>
                 <a:srgbClr val="202020"/>
               </a:solidFill>
-              <a:latin typeface="Malgun Gothic"/>
-              <a:ea typeface="Malgun Gothic"/>
-              <a:cs typeface="Malgun Gothic"/>
-              <a:sym typeface="Malgun Gothic"/>
+              <a:latin typeface="맑은 고딕"/>
+              <a:ea typeface="맑은 고딕"/>
+              <a:cs typeface="맑은 고딕"/>
+              <a:sym typeface="맑은 고딕"/>
             </a:endParaRPr>
-          </a:p>
-        </p:txBody>
-      </p:sp>
-      <p:sp>
-        <p:nvSpPr>
-          <p:cNvPr id="111" name="Google Shape;111;p2"/>
-          <p:cNvSpPr txBox="1"/>
-          <p:nvPr/>
-        </p:nvSpPr>
-        <p:spPr>
-          <a:xfrm>
-            <a:off x="1097280" y="1390650"/>
-            <a:ext cx="10058400" cy="365760"/>
-          </a:xfrm>
-          <a:prstGeom prst="rect">
-            <a:avLst/>
-          </a:prstGeom>
-          <a:noFill/>
-          <a:ln>
-            <a:noFill/>
-          </a:ln>
-        </p:spPr>
-        <p:txBody>
-          <a:bodyPr anchorCtr="0" anchor="t" bIns="45700" lIns="91425" spcFirstLastPara="1" rIns="91425" wrap="square" tIns="45700">
-            <a:spAutoFit/>
-          </a:bodyPr>
-          <a:lstStyle/>
-          <a:p>
-            <a:pPr indent="0" lvl="0" marL="0" marR="0" rtl="0" algn="l">
-              <a:spcBef>
-                <a:spcPts val="0"/>
-              </a:spcBef>
-              <a:spcAft>
-                <a:spcPts val="0"/>
-              </a:spcAft>
-              <a:buNone/>
-            </a:pPr>
-            <a:r>
-              <a:rPr b="1" i="0" lang="en-US" sz="1600" u="none" cap="none" strike="noStrike">
-                <a:solidFill>
-                  <a:srgbClr val="666666"/>
-                </a:solidFill>
-                <a:latin typeface="맑은 고딕"/>
-                <a:ea typeface="맑은 고딕"/>
-                <a:cs typeface="Malgun Gothic"/>
-                <a:sym typeface="Malgun Gothic"/>
-              </a:rPr>
-              <a:t>찾아조  |  이제민(팀장·총괄) · 조성기(전처리 및 모델링) · 박용민(데이터 수집) · 정상천(통계 및 시각화)</a:t>
-            </a:r>
-            <a:endParaRPr/>
           </a:p>
         </p:txBody>
       </p:sp>
@@ -27927,7 +28125,7 @@
         <p:spPr>
           <a:xfrm>
             <a:off x="11475720" y="6446520"/>
-            <a:ext cx="640080" cy="320040"/>
+            <a:ext cx="640080" cy="266680"/>
           </a:xfrm>
           <a:prstGeom prst="rect">
             <a:avLst/>
@@ -27938,29 +28136,30 @@
           </a:ln>
         </p:spPr>
         <p:txBody>
-          <a:bodyPr anchorCtr="0" anchor="t" bIns="45700" lIns="91425" spcFirstLastPara="1" rIns="91425" wrap="square" tIns="45700">
+          <a:bodyPr wrap="square" lIns="91424" tIns="45700" rIns="91424" bIns="45700" anchor="t" anchorCtr="0">
             <a:spAutoFit/>
           </a:bodyPr>
           <a:lstStyle/>
           <a:p>
-            <a:pPr indent="0" lvl="0" marL="0" marR="0" rtl="0" algn="r">
-              <a:spcBef>
-                <a:spcPts val="0"/>
-              </a:spcBef>
-              <a:spcAft>
-                <a:spcPts val="0"/>
-              </a:spcAft>
-              <a:buNone/>
-            </a:pPr>
-            <a:r>
-              <a:rPr b="0" i="0" lang="en-US" sz="1200" u="none" cap="none" strike="noStrike">
+            <a:pPr marL="0" marR="0" lvl="0" indent="0" algn="r" rtl="0">
+              <a:spcBef>
+                <a:spcPts val="0"/>
+              </a:spcBef>
+              <a:spcAft>
+                <a:spcPts val="0"/>
+              </a:spcAft>
+              <a:buNone/>
+              <a:defRPr/>
+            </a:pPr>
+            <a:r>
+              <a:rPr lang="en-US" sz="1200" b="0" i="0" u="none" strike="noStrike" cap="none">
                 <a:solidFill>
                   <a:srgbClr val="666666"/>
                 </a:solidFill>
                 <a:latin typeface="맑은 고딕"/>
                 <a:ea typeface="맑은 고딕"/>
-                <a:cs typeface="Malgun Gothic"/>
-                <a:sym typeface="Malgun Gothic"/>
+                <a:cs typeface="맑은 고딕"/>
+                <a:sym typeface="맑은 고딕"/>
               </a:rPr>
               <a:t>4</a:t>
             </a:r>
@@ -27973,15 +28172,23 @@
   <p:clrMapOvr>
     <a:masterClrMapping/>
   </p:clrMapOvr>
+  <mc:AlternateContent xmlns:mc="http://schemas.openxmlformats.org/markup-compatibility/2006">
+    <mc:Choice xmlns:p14="http://schemas.microsoft.com/office/powerpoint/2010/main" Requires="p14">
+      <p:transition xmlns:mc="http://schemas.openxmlformats.org/markup-compatibility/2006" xmlns:p14="http://schemas.microsoft.com/office/powerpoint/2010/main" mc:Ignorable="p14" p14:dur="500"/>
+    </mc:Choice>
+    <mc:Fallback>
+      <p:transition/>
+    </mc:Fallback>
+  </mc:AlternateContent>
 </p:sld>
 </file>
 
 <file path=ppt/slides/slide5.xml><?xml version="1.0" encoding="utf-8"?>
-<p:sld xmlns:a="http://schemas.openxmlformats.org/drawingml/2006/main" xmlns:r="http://schemas.openxmlformats.org/officeDocument/2006/relationships" xmlns:mc="http://schemas.openxmlformats.org/markup-compatibility/2006" xmlns:mv="urn:schemas-microsoft-com:mac:vml" xmlns:p="http://schemas.openxmlformats.org/presentationml/2006/main" xmlns:c="http://schemas.openxmlformats.org/drawingml/2006/chart" xmlns:dgm="http://schemas.openxmlformats.org/drawingml/2006/diagram" xmlns:o="urn:schemas-microsoft-com:office:office" xmlns:v="urn:schemas-microsoft-com:vml" xmlns:pvml="urn:schemas-microsoft-com:office:powerpoint" xmlns:com="http://schemas.openxmlformats.org/drawingml/2006/compatibility" xmlns:p14="http://schemas.microsoft.com/office/powerpoint/2010/main" xmlns:p15="http://schemas.microsoft.com/office/powerpoint/2012/main" xmlns:ahyp="http://schemas.microsoft.com/office/drawing/2018/hyperlinkcolor">
+<p:sld xmlns:r="http://schemas.openxmlformats.org/officeDocument/2006/relationships" xmlns:c="http://schemas.openxmlformats.org/drawingml/2006/chart" xmlns:a="http://schemas.openxmlformats.org/drawingml/2006/main" xmlns:dgm="http://schemas.openxmlformats.org/drawingml/2006/diagram" xmlns:dsp="http://schemas.microsoft.com/office/drawing/2008/diagram" xmlns:p="http://schemas.openxmlformats.org/presentationml/2006/main">
   <p:cSld>
     <p:spTree>
       <p:nvGrpSpPr>
-        <p:cNvPr id="117" name="Shape 117"/>
+        <p:cNvPr id="1" name=""/>
         <p:cNvGrpSpPr/>
         <p:nvPr/>
       </p:nvGrpSpPr>
@@ -28014,36 +28221,30 @@
             <a:noFill/>
           </a:ln>
           <a:effectLst>
-            <a:outerShdw blurRad="40000" rotWithShape="0" dir="5400000" dist="23000">
+            <a:outerShdw blurRad="40000" dist="23000" dir="5400000" rotWithShape="0">
               <a:srgbClr val="000000">
-                <a:alpha val="34902"/>
+                <a:alpha val="34900"/>
               </a:srgbClr>
             </a:outerShdw>
           </a:effectLst>
         </p:spPr>
         <p:txBody>
-          <a:bodyPr anchorCtr="0" anchor="ctr" bIns="45700" lIns="91425" spcFirstLastPara="1" rIns="91425" wrap="square" tIns="45700">
+          <a:bodyPr wrap="square" lIns="91424" tIns="45700" rIns="91424" bIns="45700" anchor="ctr" anchorCtr="0">
             <a:noAutofit/>
           </a:bodyPr>
           <a:lstStyle/>
           <a:p>
-            <a:pPr indent="0" lvl="0" marL="0" marR="0" rtl="0" algn="ctr">
-              <a:spcBef>
-                <a:spcPts val="0"/>
-              </a:spcBef>
-              <a:spcAft>
-                <a:spcPts val="0"/>
-              </a:spcAft>
-              <a:buNone/>
-            </a:pPr>
-            <a:r>
-              <a:rPr>
-                <a:latin typeface="맑은 고딕"/>
-                <a:ea typeface="맑은 고딕"/>
-              </a:rPr>
-              <a:t/>
-            </a:r>
-            <a:endParaRPr b="0" i="0" sz="1800" u="none" cap="none" strike="noStrike">
+            <a:pPr marL="0" marR="0" lvl="0" indent="0" algn="ctr" rtl="0">
+              <a:spcBef>
+                <a:spcPts val="0"/>
+              </a:spcBef>
+              <a:spcAft>
+                <a:spcPts val="0"/>
+              </a:spcAft>
+              <a:buNone/>
+              <a:defRPr/>
+            </a:pPr>
+            <a:endParaRPr sz="1800" b="0" i="0" u="none" strike="noStrike" cap="none">
               <a:solidFill>
                 <a:schemeClr val="lt1"/>
               </a:solidFill>
@@ -28064,7 +28265,7 @@
         <p:spPr>
           <a:xfrm>
             <a:off x="502920" y="292608"/>
-            <a:ext cx="10515600" cy="365760"/>
+            <a:ext cx="10515600" cy="334117"/>
           </a:xfrm>
           <a:prstGeom prst="rect">
             <a:avLst/>
@@ -28075,29 +28276,30 @@
           </a:ln>
         </p:spPr>
         <p:txBody>
-          <a:bodyPr anchorCtr="0" anchor="t" bIns="45700" lIns="91425" spcFirstLastPara="1" rIns="91425" wrap="square" tIns="45700">
+          <a:bodyPr wrap="square" lIns="91424" tIns="45700" rIns="91424" bIns="45700" anchor="t" anchorCtr="0">
             <a:spAutoFit/>
           </a:bodyPr>
           <a:lstStyle/>
           <a:p>
-            <a:pPr indent="0" lvl="0" marL="0" marR="0" rtl="0" algn="l">
-              <a:spcBef>
-                <a:spcPts val="0"/>
-              </a:spcBef>
-              <a:spcAft>
-                <a:spcPts val="0"/>
-              </a:spcAft>
-              <a:buNone/>
-            </a:pPr>
-            <a:r>
-              <a:rPr b="1" i="0" lang="en-US" sz="1600" u="none" cap="none" strike="noStrike">
-                <a:solidFill>
-                  <a:srgbClr val="2A78D6"/>
+            <a:pPr marL="0" marR="0" lvl="0" indent="0" algn="l" rtl="0">
+              <a:spcBef>
+                <a:spcPts val="0"/>
+              </a:spcBef>
+              <a:spcAft>
+                <a:spcPts val="0"/>
+              </a:spcAft>
+              <a:buNone/>
+              <a:defRPr/>
+            </a:pPr>
+            <a:r>
+              <a:rPr lang="en-US" sz="1600" b="1" i="0" u="none" strike="noStrike" cap="none">
+                <a:solidFill>
+                  <a:srgbClr val="2a78d6"/>
                 </a:solidFill>
                 <a:latin typeface="맑은 고딕"/>
                 <a:ea typeface="맑은 고딕"/>
-                <a:cs typeface="Malgun Gothic"/>
-                <a:sym typeface="Malgun Gothic"/>
+                <a:cs typeface="맑은 고딕"/>
+                <a:sym typeface="맑은 고딕"/>
               </a:rPr>
               <a:t>01. 문제의식</a:t>
             </a:r>
@@ -28114,7 +28316,7 @@
         <p:spPr>
           <a:xfrm>
             <a:off x="502920" y="621792"/>
-            <a:ext cx="11155680" cy="731520"/>
+            <a:ext cx="11155680" cy="547858"/>
           </a:xfrm>
           <a:prstGeom prst="rect">
             <a:avLst/>
@@ -28125,48 +28327,95 @@
           </a:ln>
         </p:spPr>
         <p:txBody>
-          <a:bodyPr anchorCtr="0" anchor="t" bIns="45700" lIns="91425" spcFirstLastPara="1" rIns="91425" wrap="square" tIns="45700">
+          <a:bodyPr wrap="square" lIns="91424" tIns="45700" rIns="91424" bIns="45700" anchor="t" anchorCtr="0">
             <a:spAutoFit/>
           </a:bodyPr>
           <a:lstStyle/>
           <a:p>
-            <a:pPr indent="0" lvl="0" marL="0" marR="0" rtl="0" algn="l">
-              <a:spcBef>
-                <a:spcPts val="0"/>
-              </a:spcBef>
-              <a:spcAft>
-                <a:spcPts val="0"/>
-              </a:spcAft>
-              <a:buNone/>
-            </a:pPr>
-            <a:r>
-              <a:rPr b="1" i="0" lang="en-US" sz="3000" u="none" cap="none" strike="noStrike">
+            <a:pPr marL="0" marR="0" lvl="0" indent="0" algn="l" rtl="0">
+              <a:spcBef>
+                <a:spcPts val="0"/>
+              </a:spcBef>
+              <a:spcAft>
+                <a:spcPts val="0"/>
+              </a:spcAft>
+              <a:buNone/>
+              <a:defRPr/>
+            </a:pPr>
+            <a:r>
+              <a:rPr lang="en-US" sz="3000" b="1" i="0" u="none" strike="noStrike" cap="none">
                 <a:solidFill>
                   <a:srgbClr val="104281"/>
                 </a:solidFill>
                 <a:latin typeface="맑은 고딕"/>
                 <a:ea typeface="맑은 고딕"/>
-                <a:cs typeface="Malgun Gothic"/>
-                <a:sym typeface="Malgun Gothic"/>
+                <a:cs typeface="맑은 고딕"/>
+                <a:sym typeface="맑은 고딕"/>
               </a:rPr>
-              <a:t>치매는 국내 사망원인 6위 — 당뇨병보다 높다</a:t>
-            </a:r>
-            <a:endParaRPr/>
+              <a:t>치매는 국내 사망원인 6위 — </a:t>
+            </a:r>
+            <a:r>
+              <a:rPr lang="ko-KR" altLang="en-US" sz="3000" b="1" i="0" u="none" strike="noStrike" cap="none">
+                <a:solidFill>
+                  <a:srgbClr val="104281"/>
+                </a:solidFill>
+                <a:latin typeface="맑은 고딕"/>
+                <a:ea typeface="맑은 고딕"/>
+                <a:cs typeface="맑은 고딕"/>
+                <a:sym typeface="맑은 고딕"/>
+              </a:rPr>
+              <a:t>만성질환 중 </a:t>
+            </a:r>
+            <a:r>
+              <a:rPr lang="en-US" altLang="ko-KR" sz="3000" b="1" i="0" u="none" strike="noStrike" cap="none">
+                <a:solidFill>
+                  <a:srgbClr val="104281"/>
+                </a:solidFill>
+                <a:latin typeface="맑은 고딕"/>
+                <a:ea typeface="맑은 고딕"/>
+                <a:cs typeface="맑은 고딕"/>
+                <a:sym typeface="맑은 고딕"/>
+              </a:rPr>
+              <a:t>2</a:t>
+            </a:r>
+            <a:r>
+              <a:rPr lang="ko-KR" altLang="en-US" sz="3000" b="1" i="0" u="none" strike="noStrike" cap="none">
+                <a:solidFill>
+                  <a:srgbClr val="104281"/>
+                </a:solidFill>
+                <a:latin typeface="맑은 고딕"/>
+                <a:ea typeface="맑은 고딕"/>
+                <a:cs typeface="맑은 고딕"/>
+                <a:sym typeface="맑은 고딕"/>
+              </a:rPr>
+              <a:t>위</a:t>
+            </a:r>
+            <a:endParaRPr lang="ko-KR" altLang="en-US" sz="3000" b="1" i="0" u="none" strike="noStrike" cap="none">
+              <a:solidFill>
+                <a:srgbClr val="104281"/>
+              </a:solidFill>
+              <a:latin typeface="맑은 고딕"/>
+              <a:ea typeface="맑은 고딕"/>
+              <a:cs typeface="맑은 고딕"/>
+              <a:sym typeface="맑은 고딕"/>
+            </a:endParaRPr>
           </a:p>
         </p:txBody>
       </p:sp>
       <p:pic>
         <p:nvPicPr>
-          <p:cNvPr descr="ppt_3_death_rank.png" id="121" name="Google Shape;121;p3"/>
-          <p:cNvPicPr preferRelativeResize="0"/>
+          <p:cNvPr id="121" name="Google Shape;121;p3" descr="ppt_3_death_rank.png"/>
+          <p:cNvPicPr/>
           <p:nvPr/>
         </p:nvPicPr>
         <p:blipFill rotWithShape="1">
           <a:blip r:embed="rId3">
             <a:alphaModFix/>
           </a:blip>
-          <a:srcRect b="0" l="0" r="0" t="0"/>
-          <a:stretch/>
+          <a:srcRect/>
+          <a:stretch>
+            <a:fillRect/>
+          </a:stretch>
         </p:blipFill>
         <p:spPr>
           <a:xfrm>
@@ -28191,7 +28440,7 @@
         <p:spPr>
           <a:xfrm>
             <a:off x="11475720" y="6446520"/>
-            <a:ext cx="640080" cy="320040"/>
+            <a:ext cx="640080" cy="266680"/>
           </a:xfrm>
           <a:prstGeom prst="rect">
             <a:avLst/>
@@ -28202,29 +28451,30 @@
           </a:ln>
         </p:spPr>
         <p:txBody>
-          <a:bodyPr anchorCtr="0" anchor="t" bIns="45700" lIns="91425" spcFirstLastPara="1" rIns="91425" wrap="square" tIns="45700">
+          <a:bodyPr wrap="square" lIns="91424" tIns="45700" rIns="91424" bIns="45700" anchor="t" anchorCtr="0">
             <a:spAutoFit/>
           </a:bodyPr>
           <a:lstStyle/>
           <a:p>
-            <a:pPr indent="0" lvl="0" marL="0" marR="0" rtl="0" algn="r">
-              <a:spcBef>
-                <a:spcPts val="0"/>
-              </a:spcBef>
-              <a:spcAft>
-                <a:spcPts val="0"/>
-              </a:spcAft>
-              <a:buNone/>
-            </a:pPr>
-            <a:r>
-              <a:rPr b="0" i="0" lang="en-US" sz="1200" u="none" cap="none" strike="noStrike">
+            <a:pPr marL="0" marR="0" lvl="0" indent="0" algn="r" rtl="0">
+              <a:spcBef>
+                <a:spcPts val="0"/>
+              </a:spcBef>
+              <a:spcAft>
+                <a:spcPts val="0"/>
+              </a:spcAft>
+              <a:buNone/>
+              <a:defRPr/>
+            </a:pPr>
+            <a:r>
+              <a:rPr lang="en-US" sz="1200" b="0" i="0" u="none" strike="noStrike" cap="none">
                 <a:solidFill>
                   <a:srgbClr val="666666"/>
                 </a:solidFill>
                 <a:latin typeface="맑은 고딕"/>
                 <a:ea typeface="맑은 고딕"/>
-                <a:cs typeface="Malgun Gothic"/>
-                <a:sym typeface="Malgun Gothic"/>
+                <a:cs typeface="맑은 고딕"/>
+                <a:sym typeface="맑은 고딕"/>
               </a:rPr>
               <a:t>5</a:t>
             </a:r>
@@ -28237,6 +28487,14 @@
   <p:clrMapOvr>
     <a:masterClrMapping/>
   </p:clrMapOvr>
+  <mc:AlternateContent xmlns:mc="http://schemas.openxmlformats.org/markup-compatibility/2006">
+    <mc:Choice xmlns:p14="http://schemas.microsoft.com/office/powerpoint/2010/main" Requires="p14">
+      <p:transition xmlns:mc="http://schemas.openxmlformats.org/markup-compatibility/2006" xmlns:p14="http://schemas.microsoft.com/office/powerpoint/2010/main" mc:Ignorable="p14" p14:dur="500"/>
+    </mc:Choice>
+    <mc:Fallback>
+      <p:transition/>
+    </mc:Fallback>
+  </mc:AlternateContent>
 </p:sld>
 </file>
 
@@ -28846,11 +29104,11 @@
 </file>
 
 <file path=ppt/slides/slide8.xml><?xml version="1.0" encoding="utf-8"?>
-<p:sld xmlns:a="http://schemas.openxmlformats.org/drawingml/2006/main" xmlns:r="http://schemas.openxmlformats.org/officeDocument/2006/relationships" xmlns:mc="http://schemas.openxmlformats.org/markup-compatibility/2006" xmlns:mv="urn:schemas-microsoft-com:mac:vml" xmlns:p="http://schemas.openxmlformats.org/presentationml/2006/main" xmlns:c="http://schemas.openxmlformats.org/drawingml/2006/chart" xmlns:dgm="http://schemas.openxmlformats.org/drawingml/2006/diagram" xmlns:o="urn:schemas-microsoft-com:office:office" xmlns:v="urn:schemas-microsoft-com:vml" xmlns:pvml="urn:schemas-microsoft-com:office:powerpoint" xmlns:com="http://schemas.openxmlformats.org/drawingml/2006/compatibility" xmlns:p14="http://schemas.microsoft.com/office/powerpoint/2010/main" xmlns:p15="http://schemas.microsoft.com/office/powerpoint/2012/main" xmlns:ahyp="http://schemas.microsoft.com/office/drawing/2018/hyperlinkcolor">
+<p:sld xmlns:r="http://schemas.openxmlformats.org/officeDocument/2006/relationships" xmlns:c="http://schemas.openxmlformats.org/drawingml/2006/chart" xmlns:a="http://schemas.openxmlformats.org/drawingml/2006/main" xmlns:dgm="http://schemas.openxmlformats.org/drawingml/2006/diagram" xmlns:dsp="http://schemas.microsoft.com/office/drawing/2008/diagram" xmlns:p="http://schemas.openxmlformats.org/presentationml/2006/main">
   <p:cSld>
     <p:spTree>
       <p:nvGrpSpPr>
-        <p:cNvPr id="148" name="Shape 148"/>
+        <p:cNvPr id="1" name=""/>
         <p:cNvGrpSpPr/>
         <p:nvPr/>
       </p:nvGrpSpPr>
@@ -28883,36 +29141,30 @@
             <a:noFill/>
           </a:ln>
           <a:effectLst>
-            <a:outerShdw blurRad="40000" rotWithShape="0" dir="5400000" dist="23000">
+            <a:outerShdw blurRad="40000" dist="23000" dir="5400000" rotWithShape="0">
               <a:srgbClr val="000000">
-                <a:alpha val="34902"/>
+                <a:alpha val="34900"/>
               </a:srgbClr>
             </a:outerShdw>
           </a:effectLst>
         </p:spPr>
         <p:txBody>
-          <a:bodyPr anchorCtr="0" anchor="ctr" bIns="45700" lIns="91425" spcFirstLastPara="1" rIns="91425" wrap="square" tIns="45700">
+          <a:bodyPr wrap="square" lIns="91424" tIns="45700" rIns="91424" bIns="45700" anchor="ctr" anchorCtr="0">
             <a:noAutofit/>
           </a:bodyPr>
           <a:lstStyle/>
           <a:p>
-            <a:pPr indent="0" lvl="0" marL="0" marR="0" rtl="0" algn="ctr">
-              <a:spcBef>
-                <a:spcPts val="0"/>
-              </a:spcBef>
-              <a:spcAft>
-                <a:spcPts val="0"/>
-              </a:spcAft>
-              <a:buNone/>
-            </a:pPr>
-            <a:r>
-              <a:rPr>
-                <a:latin typeface="맑은 고딕"/>
-                <a:ea typeface="맑은 고딕"/>
-              </a:rPr>
-              <a:t/>
-            </a:r>
-            <a:endParaRPr b="0" i="0" sz="1800" u="none" cap="none" strike="noStrike">
+            <a:pPr marL="0" marR="0" lvl="0" indent="0" algn="ctr" rtl="0">
+              <a:spcBef>
+                <a:spcPts val="0"/>
+              </a:spcBef>
+              <a:spcAft>
+                <a:spcPts val="0"/>
+              </a:spcAft>
+              <a:buNone/>
+              <a:defRPr/>
+            </a:pPr>
+            <a:endParaRPr sz="1800" b="0" i="0" u="none" strike="noStrike" cap="none">
               <a:solidFill>
                 <a:schemeClr val="lt1"/>
               </a:solidFill>
@@ -28944,40 +29196,41 @@
           </a:ln>
         </p:spPr>
         <p:txBody>
-          <a:bodyPr anchorCtr="0" anchor="t" bIns="45700" lIns="91425" spcFirstLastPara="1" rIns="91425" wrap="square" tIns="45700">
+          <a:bodyPr wrap="square" lIns="91424" tIns="45700" rIns="91424" bIns="45700" anchor="t" anchorCtr="0">
             <a:spAutoFit/>
           </a:bodyPr>
           <a:lstStyle/>
           <a:p>
-            <a:pPr indent="0" lvl="0" marL="0" marR="0" rtl="0" algn="l">
-              <a:spcBef>
-                <a:spcPts val="0"/>
-              </a:spcBef>
-              <a:spcAft>
-                <a:spcPts val="0"/>
-              </a:spcAft>
-              <a:buNone/>
-            </a:pPr>
-            <a:r>
-              <a:rPr b="1" i="0" lang="en-US" sz="1600" u="none" cap="none" strike="noStrike">
-                <a:solidFill>
-                  <a:srgbClr val="2A78D6"/>
+            <a:pPr marL="0" marR="0" lvl="0" indent="0" algn="l" rtl="0">
+              <a:spcBef>
+                <a:spcPts val="0"/>
+              </a:spcBef>
+              <a:spcAft>
+                <a:spcPts val="0"/>
+              </a:spcAft>
+              <a:buNone/>
+              <a:defRPr/>
+            </a:pPr>
+            <a:r>
+              <a:rPr lang="en-US" sz="1600" b="1" i="0" u="none" strike="noStrike" cap="none">
+                <a:solidFill>
+                  <a:srgbClr val="2a78d6"/>
                 </a:solidFill>
                 <a:latin typeface="맑은 고딕"/>
                 <a:ea typeface="맑은 고딕"/>
-                <a:cs typeface="Malgun Gothic"/>
-                <a:sym typeface="Malgun Gothic"/>
+                <a:cs typeface="맑은 고딕"/>
+                <a:sym typeface="맑은 고딕"/>
               </a:rPr>
               <a:t>01. 문제의식</a:t>
             </a:r>
-            <a:endParaRPr b="1" i="0" sz="1600" u="none" cap="none" strike="noStrike">
+            <a:endParaRPr sz="1600" b="1" i="0" u="none" strike="noStrike" cap="none">
               <a:solidFill>
-                <a:srgbClr val="2A78D6"/>
+                <a:srgbClr val="2a78d6"/>
               </a:solidFill>
-              <a:latin typeface="Malgun Gothic"/>
-              <a:ea typeface="Malgun Gothic"/>
-              <a:cs typeface="Malgun Gothic"/>
-              <a:sym typeface="Malgun Gothic"/>
+              <a:latin typeface="맑은 고딕"/>
+              <a:ea typeface="맑은 고딕"/>
+              <a:cs typeface="맑은 고딕"/>
+              <a:sym typeface="맑은 고딕"/>
             </a:endParaRPr>
           </a:p>
         </p:txBody>
@@ -29002,56 +29255,59 @@
           </a:ln>
         </p:spPr>
         <p:txBody>
-          <a:bodyPr anchorCtr="0" anchor="t" bIns="45700" lIns="91425" spcFirstLastPara="1" rIns="91425" wrap="square" tIns="45700">
+          <a:bodyPr wrap="square" lIns="91424" tIns="45700" rIns="91424" bIns="45700" anchor="t" anchorCtr="0">
             <a:spAutoFit/>
           </a:bodyPr>
           <a:lstStyle/>
           <a:p>
-            <a:pPr indent="0" lvl="0" marL="0" marR="0" rtl="0" algn="l">
-              <a:spcBef>
-                <a:spcPts val="0"/>
-              </a:spcBef>
-              <a:spcAft>
-                <a:spcPts val="0"/>
-              </a:spcAft>
-              <a:buNone/>
-            </a:pPr>
-            <a:r>
-              <a:rPr b="1" i="0" lang="en-US" sz="3000" u="none" cap="none" strike="noStrike">
+            <a:pPr marL="0" marR="0" lvl="0" indent="0" algn="l" rtl="0">
+              <a:spcBef>
+                <a:spcPts val="0"/>
+              </a:spcBef>
+              <a:spcAft>
+                <a:spcPts val="0"/>
+              </a:spcAft>
+              <a:buNone/>
+              <a:defRPr/>
+            </a:pPr>
+            <a:r>
+              <a:rPr lang="en-US" sz="3000" b="1" i="0" u="none" strike="noStrike" cap="none">
                 <a:solidFill>
                   <a:srgbClr val="104281"/>
                 </a:solidFill>
                 <a:latin typeface="맑은 고딕"/>
                 <a:ea typeface="맑은 고딕"/>
-                <a:cs typeface="Malgun Gothic"/>
-                <a:sym typeface="Malgun Gothic"/>
+                <a:cs typeface="맑은 고딕"/>
+                <a:sym typeface="맑은 고딕"/>
               </a:rPr>
               <a:t>환자는 늘고, 위험은 균등하지 않다</a:t>
             </a:r>
-            <a:endParaRPr b="1" i="0" sz="3000" u="none" cap="none" strike="noStrike">
+            <a:endParaRPr sz="3000" b="1" i="0" u="none" strike="noStrike" cap="none">
               <a:solidFill>
                 <a:srgbClr val="104281"/>
               </a:solidFill>
-              <a:latin typeface="Malgun Gothic"/>
-              <a:ea typeface="Malgun Gothic"/>
-              <a:cs typeface="Malgun Gothic"/>
-              <a:sym typeface="Malgun Gothic"/>
+              <a:latin typeface="맑은 고딕"/>
+              <a:ea typeface="맑은 고딕"/>
+              <a:cs typeface="맑은 고딕"/>
+              <a:sym typeface="맑은 고딕"/>
             </a:endParaRPr>
           </a:p>
         </p:txBody>
       </p:sp>
       <p:pic>
         <p:nvPicPr>
-          <p:cNvPr descr="07_risk_factors_by_demographic.png" id="152" name="Google Shape;152;p6"/>
-          <p:cNvPicPr preferRelativeResize="0"/>
+          <p:cNvPr id="152" name="Google Shape;152;p6" descr="07_risk_factors_by_demographic.png"/>
+          <p:cNvPicPr/>
           <p:nvPr/>
         </p:nvPicPr>
         <p:blipFill rotWithShape="1">
           <a:blip r:embed="rId3">
             <a:alphaModFix/>
           </a:blip>
-          <a:srcRect b="0" l="0" r="0" t="0"/>
-          <a:stretch/>
+          <a:srcRect/>
+          <a:stretch>
+            <a:fillRect/>
+          </a:stretch>
         </p:blipFill>
         <p:spPr>
           <a:xfrm>
@@ -29087,40 +29343,53 @@
           </a:ln>
         </p:spPr>
         <p:txBody>
-          <a:bodyPr anchorCtr="0" anchor="t" bIns="45700" lIns="91425" spcFirstLastPara="1" rIns="91425" wrap="square" tIns="45700">
+          <a:bodyPr wrap="square" lIns="91424" tIns="45700" rIns="91424" bIns="45700" anchor="t" anchorCtr="0">
             <a:spAutoFit/>
           </a:bodyPr>
           <a:lstStyle/>
           <a:p>
-            <a:pPr indent="0" lvl="0" marL="0" marR="0" rtl="0" algn="ctr">
-              <a:spcBef>
-                <a:spcPts val="0"/>
-              </a:spcBef>
-              <a:spcAft>
-                <a:spcPts val="0"/>
-              </a:spcAft>
-              <a:buNone/>
-            </a:pPr>
-            <a:r>
-              <a:rPr b="1" i="0" lang="en-US" sz="2000" u="none" cap="none" strike="noStrike">
-                <a:solidFill>
-                  <a:srgbClr val="FF0000"/>
+            <a:pPr marL="0" marR="0" lvl="0" indent="0" algn="ctr" rtl="0">
+              <a:spcBef>
+                <a:spcPts val="0"/>
+              </a:spcBef>
+              <a:spcAft>
+                <a:spcPts val="0"/>
+              </a:spcAft>
+              <a:buNone/>
+              <a:defRPr/>
+            </a:pPr>
+            <a:r>
+              <a:rPr lang="en-US" sz="2000" b="1" i="0" u="none" strike="noStrike" cap="none">
+                <a:solidFill>
+                  <a:srgbClr val="ff0000"/>
                 </a:solidFill>
                 <a:latin typeface="맑은 고딕"/>
                 <a:ea typeface="맑은 고딕"/>
-                <a:cs typeface="Malgun Gothic"/>
-                <a:sym typeface="Malgun Gothic"/>
+                <a:cs typeface="맑은 고딕"/>
+                <a:sym typeface="맑은 고딕"/>
               </a:rPr>
-              <a:t>병원 검진이 어려운 환경일수록 위험이 높은 역설</a:t>
-            </a:r>
-            <a:endParaRPr b="1" i="0" sz="2000" u="none" cap="none" strike="noStrike">
+              <a:t>병원 검진이 어려운 환경일수록 </a:t>
+            </a:r>
+            <a:r>
+              <a:rPr lang="ko-KR" altLang="en-US" sz="2000" b="1" i="0" u="none" strike="noStrike" cap="none">
+                <a:solidFill>
+                  <a:srgbClr val="ff0000"/>
+                </a:solidFill>
+                <a:latin typeface="맑은 고딕"/>
+                <a:ea typeface="맑은 고딕"/>
+                <a:cs typeface="맑은 고딕"/>
+                <a:sym typeface="맑은 고딕"/>
+              </a:rPr>
+              <a:t>발병 위험이 높음</a:t>
+            </a:r>
+            <a:endParaRPr lang="ko-KR" altLang="en-US" sz="2000" b="1" i="0" u="none" strike="noStrike" cap="none">
               <a:solidFill>
-                <a:srgbClr val="FF0000"/>
+                <a:srgbClr val="ff0000"/>
               </a:solidFill>
-              <a:latin typeface="Malgun Gothic"/>
-              <a:ea typeface="Malgun Gothic"/>
-              <a:cs typeface="Malgun Gothic"/>
-              <a:sym typeface="Malgun Gothic"/>
+              <a:latin typeface="맑은 고딕"/>
+              <a:ea typeface="맑은 고딕"/>
+              <a:cs typeface="맑은 고딕"/>
+              <a:sym typeface="맑은 고딕"/>
             </a:endParaRPr>
           </a:p>
         </p:txBody>
@@ -29145,40 +29414,41 @@
           </a:ln>
         </p:spPr>
         <p:txBody>
-          <a:bodyPr anchorCtr="0" anchor="t" bIns="45700" lIns="91425" spcFirstLastPara="1" rIns="91425" wrap="square" tIns="45700">
+          <a:bodyPr wrap="square" lIns="91424" tIns="45700" rIns="91424" bIns="45700" anchor="t" anchorCtr="0">
             <a:spAutoFit/>
           </a:bodyPr>
           <a:lstStyle/>
           <a:p>
-            <a:pPr indent="0" lvl="0" marL="0" marR="0" rtl="0" algn="r">
-              <a:spcBef>
-                <a:spcPts val="0"/>
-              </a:spcBef>
-              <a:spcAft>
-                <a:spcPts val="0"/>
-              </a:spcAft>
-              <a:buNone/>
-            </a:pPr>
-            <a:r>
-              <a:rPr b="0" i="0" lang="en-US" sz="1200" u="none" cap="none" strike="noStrike">
+            <a:pPr marL="0" marR="0" lvl="0" indent="0" algn="r" rtl="0">
+              <a:spcBef>
+                <a:spcPts val="0"/>
+              </a:spcBef>
+              <a:spcAft>
+                <a:spcPts val="0"/>
+              </a:spcAft>
+              <a:buNone/>
+              <a:defRPr/>
+            </a:pPr>
+            <a:r>
+              <a:rPr lang="en-US" sz="1200" b="0" i="0" u="none" strike="noStrike" cap="none">
                 <a:solidFill>
                   <a:srgbClr val="666666"/>
                 </a:solidFill>
                 <a:latin typeface="맑은 고딕"/>
                 <a:ea typeface="맑은 고딕"/>
-                <a:cs typeface="Malgun Gothic"/>
-                <a:sym typeface="Malgun Gothic"/>
+                <a:cs typeface="맑은 고딕"/>
+                <a:sym typeface="맑은 고딕"/>
               </a:rPr>
               <a:t>8</a:t>
             </a:r>
-            <a:endParaRPr b="0" i="0" sz="1200" u="none" cap="none" strike="noStrike">
+            <a:endParaRPr sz="1200" b="0" i="0" u="none" strike="noStrike" cap="none">
               <a:solidFill>
                 <a:srgbClr val="666666"/>
               </a:solidFill>
-              <a:latin typeface="Malgun Gothic"/>
-              <a:ea typeface="Malgun Gothic"/>
-              <a:cs typeface="Malgun Gothic"/>
-              <a:sym typeface="Malgun Gothic"/>
+              <a:latin typeface="맑은 고딕"/>
+              <a:ea typeface="맑은 고딕"/>
+              <a:cs typeface="맑은 고딕"/>
+              <a:sym typeface="맑은 고딕"/>
             </a:endParaRPr>
           </a:p>
         </p:txBody>
@@ -29188,15 +29458,23 @@
   <p:clrMapOvr>
     <a:masterClrMapping/>
   </p:clrMapOvr>
+  <mc:AlternateContent xmlns:mc="http://schemas.openxmlformats.org/markup-compatibility/2006">
+    <mc:Choice xmlns:p14="http://schemas.microsoft.com/office/powerpoint/2010/main" Requires="p14">
+      <p:transition xmlns:mc="http://schemas.openxmlformats.org/markup-compatibility/2006" xmlns:p14="http://schemas.microsoft.com/office/powerpoint/2010/main" mc:Ignorable="p14" p14:dur="500"/>
+    </mc:Choice>
+    <mc:Fallback>
+      <p:transition/>
+    </mc:Fallback>
+  </mc:AlternateContent>
 </p:sld>
 </file>
 
 <file path=ppt/slides/slide9.xml><?xml version="1.0" encoding="utf-8"?>
-<p:sld xmlns:a="http://schemas.openxmlformats.org/drawingml/2006/main" xmlns:r="http://schemas.openxmlformats.org/officeDocument/2006/relationships" xmlns:mc="http://schemas.openxmlformats.org/markup-compatibility/2006" xmlns:mv="urn:schemas-microsoft-com:mac:vml" xmlns:p="http://schemas.openxmlformats.org/presentationml/2006/main" xmlns:c="http://schemas.openxmlformats.org/drawingml/2006/chart" xmlns:dgm="http://schemas.openxmlformats.org/drawingml/2006/diagram" xmlns:o="urn:schemas-microsoft-com:office:office" xmlns:v="urn:schemas-microsoft-com:vml" xmlns:pvml="urn:schemas-microsoft-com:office:powerpoint" xmlns:com="http://schemas.openxmlformats.org/drawingml/2006/compatibility" xmlns:p14="http://schemas.microsoft.com/office/powerpoint/2010/main" xmlns:p15="http://schemas.microsoft.com/office/powerpoint/2012/main" xmlns:ahyp="http://schemas.microsoft.com/office/drawing/2018/hyperlinkcolor">
+<p:sld xmlns:r="http://schemas.openxmlformats.org/officeDocument/2006/relationships" xmlns:c="http://schemas.openxmlformats.org/drawingml/2006/chart" xmlns:a="http://schemas.openxmlformats.org/drawingml/2006/main" xmlns:dgm="http://schemas.openxmlformats.org/drawingml/2006/diagram" xmlns:dsp="http://schemas.microsoft.com/office/drawing/2008/diagram" xmlns:p="http://schemas.openxmlformats.org/presentationml/2006/main">
   <p:cSld>
     <p:spTree>
       <p:nvGrpSpPr>
-        <p:cNvPr id="158" name="Shape 158"/>
+        <p:cNvPr id="1" name=""/>
         <p:cNvGrpSpPr/>
         <p:nvPr/>
       </p:nvGrpSpPr>
@@ -29229,36 +29507,30 @@
             <a:noFill/>
           </a:ln>
           <a:effectLst>
-            <a:outerShdw blurRad="40000" rotWithShape="0" dir="5400000" dist="23000">
+            <a:outerShdw blurRad="40000" dist="23000" dir="5400000" rotWithShape="0">
               <a:srgbClr val="000000">
-                <a:alpha val="34902"/>
+                <a:alpha val="34900"/>
               </a:srgbClr>
             </a:outerShdw>
           </a:effectLst>
         </p:spPr>
         <p:txBody>
-          <a:bodyPr anchorCtr="0" anchor="ctr" bIns="45700" lIns="91425" spcFirstLastPara="1" rIns="91425" wrap="square" tIns="45700">
+          <a:bodyPr wrap="square" lIns="91424" tIns="45700" rIns="91424" bIns="45700" anchor="ctr" anchorCtr="0">
             <a:noAutofit/>
           </a:bodyPr>
           <a:lstStyle/>
           <a:p>
-            <a:pPr indent="0" lvl="0" marL="0" marR="0" rtl="0" algn="ctr">
-              <a:spcBef>
-                <a:spcPts val="0"/>
-              </a:spcBef>
-              <a:spcAft>
-                <a:spcPts val="0"/>
-              </a:spcAft>
-              <a:buNone/>
-            </a:pPr>
-            <a:r>
-              <a:rPr>
-                <a:latin typeface="맑은 고딕"/>
-                <a:ea typeface="맑은 고딕"/>
-              </a:rPr>
-              <a:t/>
-            </a:r>
-            <a:endParaRPr b="0" i="0" sz="1800" u="none" cap="none" strike="noStrike">
+            <a:pPr marL="0" marR="0" lvl="0" indent="0" algn="ctr" rtl="0">
+              <a:spcBef>
+                <a:spcPts val="0"/>
+              </a:spcBef>
+              <a:spcAft>
+                <a:spcPts val="0"/>
+              </a:spcAft>
+              <a:buNone/>
+              <a:defRPr/>
+            </a:pPr>
+            <a:endParaRPr sz="1800" b="0" i="0" u="none" strike="noStrike" cap="none">
               <a:solidFill>
                 <a:schemeClr val="lt1"/>
               </a:solidFill>
@@ -29290,40 +29562,41 @@
           </a:ln>
         </p:spPr>
         <p:txBody>
-          <a:bodyPr anchorCtr="0" anchor="t" bIns="45700" lIns="91425" spcFirstLastPara="1" rIns="91425" wrap="square" tIns="45700">
+          <a:bodyPr wrap="square" lIns="91424" tIns="45700" rIns="91424" bIns="45700" anchor="t" anchorCtr="0">
             <a:spAutoFit/>
           </a:bodyPr>
           <a:lstStyle/>
           <a:p>
-            <a:pPr indent="0" lvl="0" marL="0" marR="0" rtl="0" algn="l">
-              <a:spcBef>
-                <a:spcPts val="0"/>
-              </a:spcBef>
-              <a:spcAft>
-                <a:spcPts val="0"/>
-              </a:spcAft>
-              <a:buNone/>
-            </a:pPr>
-            <a:r>
-              <a:rPr b="1" i="0" lang="en-US" sz="1600" u="none" cap="none" strike="noStrike">
-                <a:solidFill>
-                  <a:srgbClr val="2A78D6"/>
+            <a:pPr marL="0" marR="0" lvl="0" indent="0" algn="l" rtl="0">
+              <a:spcBef>
+                <a:spcPts val="0"/>
+              </a:spcBef>
+              <a:spcAft>
+                <a:spcPts val="0"/>
+              </a:spcAft>
+              <a:buNone/>
+              <a:defRPr/>
+            </a:pPr>
+            <a:r>
+              <a:rPr lang="en-US" sz="1600" b="1" i="0" u="none" strike="noStrike" cap="none">
+                <a:solidFill>
+                  <a:srgbClr val="2a78d6"/>
                 </a:solidFill>
                 <a:latin typeface="맑은 고딕"/>
                 <a:ea typeface="맑은 고딕"/>
-                <a:cs typeface="Malgun Gothic"/>
-                <a:sym typeface="Malgun Gothic"/>
+                <a:cs typeface="맑은 고딕"/>
+                <a:sym typeface="맑은 고딕"/>
               </a:rPr>
               <a:t>01. 문제의식</a:t>
             </a:r>
-            <a:endParaRPr b="1" i="0" sz="1600" u="none" cap="none" strike="noStrike">
+            <a:endParaRPr sz="1600" b="1" i="0" u="none" strike="noStrike" cap="none">
               <a:solidFill>
-                <a:srgbClr val="2A78D6"/>
+                <a:srgbClr val="2a78d6"/>
               </a:solidFill>
-              <a:latin typeface="Malgun Gothic"/>
-              <a:ea typeface="Malgun Gothic"/>
-              <a:cs typeface="Malgun Gothic"/>
-              <a:sym typeface="Malgun Gothic"/>
+              <a:latin typeface="맑은 고딕"/>
+              <a:ea typeface="맑은 고딕"/>
+              <a:cs typeface="맑은 고딕"/>
+              <a:sym typeface="맑은 고딕"/>
             </a:endParaRPr>
           </a:p>
         </p:txBody>
@@ -29348,40 +29621,53 @@
           </a:ln>
         </p:spPr>
         <p:txBody>
-          <a:bodyPr anchorCtr="0" anchor="t" bIns="45700" lIns="91425" spcFirstLastPara="1" rIns="91425" wrap="square" tIns="45700">
+          <a:bodyPr wrap="square" lIns="91424" tIns="45700" rIns="91424" bIns="45700" anchor="t" anchorCtr="0">
             <a:spAutoFit/>
           </a:bodyPr>
           <a:lstStyle/>
           <a:p>
-            <a:pPr indent="0" lvl="0" marL="0" marR="0" rtl="0" algn="l">
-              <a:spcBef>
-                <a:spcPts val="0"/>
-              </a:spcBef>
-              <a:spcAft>
-                <a:spcPts val="0"/>
-              </a:spcAft>
-              <a:buNone/>
-            </a:pPr>
-            <a:r>
-              <a:rPr b="1" i="0" lang="en-US" sz="3000" u="none" cap="none" strike="noStrike">
+            <a:pPr marL="0" marR="0" lvl="0" indent="0" algn="l" rtl="0">
+              <a:spcBef>
+                <a:spcPts val="0"/>
+              </a:spcBef>
+              <a:spcAft>
+                <a:spcPts val="0"/>
+              </a:spcAft>
+              <a:buNone/>
+              <a:defRPr/>
+            </a:pPr>
+            <a:r>
+              <a:rPr lang="en-US" sz="3000" b="1" i="0" u="none" strike="noStrike" cap="none">
                 <a:solidFill>
                   <a:srgbClr val="104281"/>
                 </a:solidFill>
                 <a:latin typeface="맑은 고딕"/>
                 <a:ea typeface="맑은 고딕"/>
-                <a:cs typeface="Malgun Gothic"/>
-                <a:sym typeface="Malgun Gothic"/>
+                <a:cs typeface="맑은 고딕"/>
+                <a:sym typeface="맑은 고딕"/>
               </a:rPr>
-              <a:t>우리의 접근 — 병원에 가기 전, 생활 기록으로 먼저 찾는다</a:t>
-            </a:r>
-            <a:endParaRPr b="1" i="0" sz="3000" u="none" cap="none" strike="noStrike">
+              <a:t>우리의 접근 — 병원에 가기 전, 생활 기록으로 먼저 찾</a:t>
+            </a:r>
+            <a:r>
+              <a:rPr lang="ko-KR" altLang="en-US" sz="3000" b="1" i="0" u="none" strike="noStrike" cap="none">
+                <a:solidFill>
+                  <a:srgbClr val="104281"/>
+                </a:solidFill>
+                <a:latin typeface="맑은 고딕"/>
+                <a:ea typeface="맑은 고딕"/>
+                <a:cs typeface="맑은 고딕"/>
+                <a:sym typeface="맑은 고딕"/>
+              </a:rPr>
+              <a:t>도록</a:t>
+            </a:r>
+            <a:endParaRPr lang="ko-KR" altLang="en-US" sz="3000" b="1" i="0" u="none" strike="noStrike" cap="none">
               <a:solidFill>
                 <a:srgbClr val="104281"/>
               </a:solidFill>
-              <a:latin typeface="Malgun Gothic"/>
-              <a:ea typeface="Malgun Gothic"/>
-              <a:cs typeface="Malgun Gothic"/>
-              <a:sym typeface="Malgun Gothic"/>
+              <a:latin typeface="맑은 고딕"/>
+              <a:ea typeface="맑은 고딕"/>
+              <a:cs typeface="맑은 고딕"/>
+              <a:sym typeface="맑은 고딕"/>
             </a:endParaRPr>
           </a:p>
         </p:txBody>
@@ -29406,44 +29692,45 @@
           </a:ln>
         </p:spPr>
         <p:txBody>
-          <a:bodyPr anchorCtr="0" anchor="t" bIns="45700" lIns="91425" spcFirstLastPara="1" rIns="91425" wrap="square" tIns="45700">
+          <a:bodyPr wrap="square" lIns="91424" tIns="45700" rIns="91424" bIns="45700" anchor="t" anchorCtr="0">
             <a:spAutoFit/>
           </a:bodyPr>
           <a:lstStyle/>
           <a:p>
-            <a:pPr indent="0" lvl="0" marL="0" marR="0" rtl="0" algn="l">
-              <a:spcBef>
-                <a:spcPts val="0"/>
-              </a:spcBef>
-              <a:spcAft>
-                <a:spcPts val="0"/>
-              </a:spcAft>
-              <a:buNone/>
-            </a:pPr>
-            <a:r>
-              <a:rPr b="1" i="0" lang="en-US" sz="2300" u="none" cap="none" strike="noStrike">
+            <a:pPr marL="0" marR="0" lvl="0" indent="0" algn="l" rtl="0">
+              <a:spcBef>
+                <a:spcPts val="0"/>
+              </a:spcBef>
+              <a:spcAft>
+                <a:spcPts val="0"/>
+              </a:spcAft>
+              <a:buNone/>
+              <a:defRPr/>
+            </a:pPr>
+            <a:r>
+              <a:rPr lang="en-US" sz="2300" b="1" i="0" u="none" strike="noStrike" cap="none">
                 <a:solidFill>
                   <a:srgbClr val="202020"/>
                 </a:solidFill>
                 <a:latin typeface="맑은 고딕"/>
                 <a:ea typeface="맑은 고딕"/>
-                <a:cs typeface="Malgun Gothic"/>
-                <a:sym typeface="Malgun Gothic"/>
+                <a:cs typeface="맑은 고딕"/>
+                <a:sym typeface="맑은 고딕"/>
               </a:rPr>
               <a:t>경도인지장애(MCI) — 기억력은 떨어졌지만 아직 혼자 일상생활이 가능한, 치매 바로 전 단계</a:t>
             </a:r>
-            <a:endParaRPr b="1" i="0" sz="2300" u="none" cap="none" strike="noStrike">
+            <a:endParaRPr lang="en-US" sz="2300" b="1" i="0" u="none" strike="noStrike" cap="none">
               <a:solidFill>
                 <a:srgbClr val="202020"/>
               </a:solidFill>
-              <a:latin typeface="Malgun Gothic"/>
-              <a:ea typeface="Malgun Gothic"/>
-              <a:cs typeface="Malgun Gothic"/>
-              <a:sym typeface="Malgun Gothic"/>
+              <a:latin typeface="맑은 고딕"/>
+              <a:ea typeface="맑은 고딕"/>
+              <a:cs typeface="맑은 고딕"/>
+              <a:sym typeface="맑은 고딕"/>
             </a:endParaRPr>
           </a:p>
           <a:p>
-            <a:pPr indent="0" lvl="0" marL="0" marR="0" rtl="0" algn="l">
+            <a:pPr marL="0" marR="0" lvl="0" indent="0" algn="l" rtl="0">
               <a:spcBef>
                 <a:spcPts val="600"/>
               </a:spcBef>
@@ -29451,26 +29738,20 @@
                 <a:spcPts val="0"/>
               </a:spcAft>
               <a:buNone/>
-            </a:pPr>
-            <a:r>
-              <a:rPr>
-                <a:latin typeface="맑은 고딕"/>
-                <a:ea typeface="맑은 고딕"/>
-              </a:rPr>
-              <a:t/>
-            </a:r>
-            <a:endParaRPr b="1" i="0" sz="2300" u="none" cap="none" strike="noStrike">
+              <a:defRPr/>
+            </a:pPr>
+            <a:endParaRPr sz="2300" b="1" i="0" u="none" strike="noStrike" cap="none">
               <a:solidFill>
                 <a:srgbClr val="202020"/>
               </a:solidFill>
-              <a:latin typeface="Malgun Gothic"/>
-              <a:ea typeface="Malgun Gothic"/>
-              <a:cs typeface="Malgun Gothic"/>
-              <a:sym typeface="Malgun Gothic"/>
+              <a:latin typeface="맑은 고딕"/>
+              <a:ea typeface="맑은 고딕"/>
+              <a:cs typeface="맑은 고딕"/>
+              <a:sym typeface="맑은 고딕"/>
             </a:endParaRPr>
           </a:p>
           <a:p>
-            <a:pPr indent="0" lvl="0" marL="0" marR="0" rtl="0" algn="l">
+            <a:pPr marL="0" marR="0" lvl="0" indent="0" algn="l" rtl="0">
               <a:spcBef>
                 <a:spcPts val="600"/>
               </a:spcBef>
@@ -29478,31 +29759,32 @@
                 <a:spcPts val="0"/>
               </a:spcAft>
               <a:buNone/>
-            </a:pPr>
-            <a:r>
-              <a:rPr b="1" i="0" lang="en-US" sz="2300" u="none" cap="none" strike="noStrike">
+              <a:defRPr/>
+            </a:pPr>
+            <a:r>
+              <a:rPr lang="en-US" sz="2300" b="1" i="0" u="none" strike="noStrike" cap="none">
                 <a:solidFill>
                   <a:srgbClr val="202020"/>
                 </a:solidFill>
                 <a:latin typeface="맑은 고딕"/>
                 <a:ea typeface="맑은 고딕"/>
-                <a:cs typeface="Malgun Gothic"/>
-                <a:sym typeface="Malgun Gothic"/>
+                <a:cs typeface="맑은 고딕"/>
+                <a:sym typeface="맑은 고딕"/>
               </a:rPr>
               <a:t>이 단계에서 발견해야 진행을 늦출 수 있다 (연 10~15%가 치매로 진행)</a:t>
             </a:r>
-            <a:endParaRPr b="1" i="0" sz="2300" u="none" cap="none" strike="noStrike">
+            <a:endParaRPr lang="en-US" sz="2300" b="1" i="0" u="none" strike="noStrike" cap="none">
               <a:solidFill>
                 <a:srgbClr val="202020"/>
               </a:solidFill>
-              <a:latin typeface="Malgun Gothic"/>
-              <a:ea typeface="Malgun Gothic"/>
-              <a:cs typeface="Malgun Gothic"/>
-              <a:sym typeface="Malgun Gothic"/>
+              <a:latin typeface="맑은 고딕"/>
+              <a:ea typeface="맑은 고딕"/>
+              <a:cs typeface="맑은 고딕"/>
+              <a:sym typeface="맑은 고딕"/>
             </a:endParaRPr>
           </a:p>
           <a:p>
-            <a:pPr indent="0" lvl="0" marL="0" marR="0" rtl="0" algn="l">
+            <a:pPr marL="0" marR="0" lvl="0" indent="0" algn="l" rtl="0">
               <a:spcBef>
                 <a:spcPts val="600"/>
               </a:spcBef>
@@ -29510,26 +29792,20 @@
                 <a:spcPts val="0"/>
               </a:spcAft>
               <a:buNone/>
-            </a:pPr>
-            <a:r>
-              <a:rPr>
-                <a:latin typeface="맑은 고딕"/>
-                <a:ea typeface="맑은 고딕"/>
-              </a:rPr>
-              <a:t/>
-            </a:r>
-            <a:endParaRPr b="1" i="0" sz="2300" u="none" cap="none" strike="noStrike">
+              <a:defRPr/>
+            </a:pPr>
+            <a:endParaRPr sz="2300" b="1" i="0" u="none" strike="noStrike" cap="none">
               <a:solidFill>
                 <a:srgbClr val="202020"/>
               </a:solidFill>
-              <a:latin typeface="Malgun Gothic"/>
-              <a:ea typeface="Malgun Gothic"/>
-              <a:cs typeface="Malgun Gothic"/>
-              <a:sym typeface="Malgun Gothic"/>
+              <a:latin typeface="맑은 고딕"/>
+              <a:ea typeface="맑은 고딕"/>
+              <a:cs typeface="맑은 고딕"/>
+              <a:sym typeface="맑은 고딕"/>
             </a:endParaRPr>
           </a:p>
           <a:p>
-            <a:pPr indent="0" lvl="0" marL="0" marR="0" rtl="0" algn="l">
+            <a:pPr marL="0" marR="0" lvl="0" indent="0" algn="l" rtl="0">
               <a:spcBef>
                 <a:spcPts val="600"/>
               </a:spcBef>
@@ -29537,31 +29813,32 @@
                 <a:spcPts val="0"/>
               </a:spcAft>
               <a:buNone/>
-            </a:pPr>
-            <a:r>
-              <a:rPr b="1" i="0" lang="en-US" sz="2300" u="none" cap="none" strike="noStrike">
+              <a:defRPr/>
+            </a:pPr>
+            <a:r>
+              <a:rPr lang="en-US" sz="2300" b="1" i="0" u="none" strike="noStrike" cap="none">
                 <a:solidFill>
                   <a:srgbClr val="202020"/>
                 </a:solidFill>
                 <a:latin typeface="맑은 고딕"/>
                 <a:ea typeface="맑은 고딕"/>
-                <a:cs typeface="Malgun Gothic"/>
-                <a:sym typeface="Malgun Gothic"/>
+                <a:cs typeface="맑은 고딕"/>
+                <a:sym typeface="맑은 고딕"/>
               </a:rPr>
               <a:t>그러나 병원 검진이 어려운 사람일수록 발견이 늦다</a:t>
             </a:r>
-            <a:endParaRPr b="1" i="0" sz="2300" u="none" cap="none" strike="noStrike">
+            <a:endParaRPr lang="en-US" sz="2300" b="1" i="0" u="none" strike="noStrike" cap="none">
               <a:solidFill>
                 <a:srgbClr val="202020"/>
               </a:solidFill>
-              <a:latin typeface="Malgun Gothic"/>
-              <a:ea typeface="Malgun Gothic"/>
-              <a:cs typeface="Malgun Gothic"/>
-              <a:sym typeface="Malgun Gothic"/>
+              <a:latin typeface="맑은 고딕"/>
+              <a:ea typeface="맑은 고딕"/>
+              <a:cs typeface="맑은 고딕"/>
+              <a:sym typeface="맑은 고딕"/>
             </a:endParaRPr>
           </a:p>
           <a:p>
-            <a:pPr indent="0" lvl="0" marL="0" marR="0" rtl="0" algn="l">
+            <a:pPr marL="0" marR="0" lvl="0" indent="0" algn="l" rtl="0">
               <a:spcBef>
                 <a:spcPts val="600"/>
               </a:spcBef>
@@ -29569,26 +29846,20 @@
                 <a:spcPts val="0"/>
               </a:spcAft>
               <a:buNone/>
-            </a:pPr>
-            <a:r>
-              <a:rPr>
-                <a:latin typeface="맑은 고딕"/>
-                <a:ea typeface="맑은 고딕"/>
-              </a:rPr>
-              <a:t/>
-            </a:r>
-            <a:endParaRPr b="1" i="0" sz="1900" u="none" cap="none" strike="noStrike">
+              <a:defRPr/>
+            </a:pPr>
+            <a:endParaRPr sz="1900" b="1" i="0" u="none" strike="noStrike" cap="none">
               <a:solidFill>
                 <a:srgbClr val="202020"/>
               </a:solidFill>
-              <a:latin typeface="Malgun Gothic"/>
-              <a:ea typeface="Malgun Gothic"/>
-              <a:cs typeface="Malgun Gothic"/>
-              <a:sym typeface="Malgun Gothic"/>
+              <a:latin typeface="맑은 고딕"/>
+              <a:ea typeface="맑은 고딕"/>
+              <a:cs typeface="맑은 고딕"/>
+              <a:sym typeface="맑은 고딕"/>
             </a:endParaRPr>
           </a:p>
           <a:p>
-            <a:pPr indent="0" lvl="0" marL="0" marR="0" rtl="0" algn="l">
+            <a:pPr marL="0" marR="0" lvl="0" indent="0" algn="l" rtl="0">
               <a:spcBef>
                 <a:spcPts val="600"/>
               </a:spcBef>
@@ -29596,31 +29867,32 @@
                 <a:spcPts val="0"/>
               </a:spcAft>
               <a:buNone/>
-            </a:pPr>
-            <a:r>
-              <a:rPr b="1" i="0" lang="en-US" sz="2300" u="none" cap="none" strike="noStrike">
+              <a:defRPr/>
+            </a:pPr>
+            <a:r>
+              <a:rPr lang="en-US" sz="2300" b="1" i="0" u="none" strike="noStrike" cap="none">
                 <a:solidFill>
                   <a:srgbClr val="104281"/>
                 </a:solidFill>
                 <a:latin typeface="맑은 고딕"/>
                 <a:ea typeface="맑은 고딕"/>
-                <a:cs typeface="Malgun Gothic"/>
-                <a:sym typeface="Malgun Gothic"/>
+                <a:cs typeface="맑은 고딕"/>
+                <a:sym typeface="맑은 고딕"/>
               </a:rPr>
               <a:t>→ 웨어러블이 자동으로 쌓는 활동·수면 기록만으로 위험 신호를 잡아내,</a:t>
             </a:r>
-            <a:endParaRPr b="1" i="0" sz="2300" u="none" cap="none" strike="noStrike">
+            <a:endParaRPr lang="en-US" sz="2300" b="1" i="0" u="none" strike="noStrike" cap="none">
               <a:solidFill>
                 <a:srgbClr val="104281"/>
               </a:solidFill>
-              <a:latin typeface="Malgun Gothic"/>
-              <a:ea typeface="Malgun Gothic"/>
-              <a:cs typeface="Malgun Gothic"/>
-              <a:sym typeface="Malgun Gothic"/>
+              <a:latin typeface="맑은 고딕"/>
+              <a:ea typeface="맑은 고딕"/>
+              <a:cs typeface="맑은 고딕"/>
+              <a:sym typeface="맑은 고딕"/>
             </a:endParaRPr>
           </a:p>
           <a:p>
-            <a:pPr indent="0" lvl="0" marL="0" marR="0" rtl="0" algn="l">
+            <a:pPr marL="0" marR="0" lvl="0" indent="0" algn="l" rtl="0">
               <a:spcBef>
                 <a:spcPts val="600"/>
               </a:spcBef>
@@ -29628,31 +29900,44 @@
                 <a:spcPts val="0"/>
               </a:spcAft>
               <a:buNone/>
-            </a:pPr>
-            <a:r>
-              <a:rPr b="1" i="0" lang="en-US" sz="2300" u="none" cap="none" strike="noStrike">
+              <a:defRPr/>
+            </a:pPr>
+            <a:r>
+              <a:rPr lang="en-US" sz="2300" b="1" i="0" u="none" strike="noStrike" cap="none">
                 <a:solidFill>
                   <a:srgbClr val="104281"/>
                 </a:solidFill>
                 <a:latin typeface="맑은 고딕"/>
                 <a:ea typeface="맑은 고딕"/>
-                <a:cs typeface="Malgun Gothic"/>
-                <a:sym typeface="Malgun Gothic"/>
+                <a:cs typeface="맑은 고딕"/>
+                <a:sym typeface="맑은 고딕"/>
               </a:rPr>
-              <a:t>   "병원에 가볼 이유가 있는지"를 먼저 알려주는 스크리닝 도구</a:t>
-            </a:r>
-            <a:endParaRPr b="1" i="0" sz="2300" u="none" cap="none" strike="noStrike">
+              <a:t>   "병원에 가볼 이유가 있는지"를 먼저 알려주는 </a:t>
+            </a:r>
+            <a:r>
+              <a:rPr lang="ko-KR" altLang="en-US" sz="2300" b="1" i="0" u="none" strike="noStrike" cap="none">
+                <a:solidFill>
+                  <a:srgbClr val="104281"/>
+                </a:solidFill>
+                <a:latin typeface="맑은 고딕"/>
+                <a:ea typeface="맑은 고딕"/>
+                <a:cs typeface="맑은 고딕"/>
+                <a:sym typeface="맑은 고딕"/>
+              </a:rPr>
+              <a:t>조기 발견 모델 개발</a:t>
+            </a:r>
+            <a:endParaRPr lang="ko-KR" altLang="en-US" sz="2300" b="1" i="0" u="none" strike="noStrike" cap="none">
               <a:solidFill>
                 <a:srgbClr val="104281"/>
               </a:solidFill>
-              <a:latin typeface="Malgun Gothic"/>
-              <a:ea typeface="Malgun Gothic"/>
-              <a:cs typeface="Malgun Gothic"/>
-              <a:sym typeface="Malgun Gothic"/>
+              <a:latin typeface="맑은 고딕"/>
+              <a:ea typeface="맑은 고딕"/>
+              <a:cs typeface="맑은 고딕"/>
+              <a:sym typeface="맑은 고딕"/>
             </a:endParaRPr>
           </a:p>
           <a:p>
-            <a:pPr indent="0" lvl="0" marL="0" marR="0" rtl="0" algn="l">
+            <a:pPr marL="0" marR="0" lvl="0" indent="0" algn="l" rtl="0">
               <a:spcBef>
                 <a:spcPts val="600"/>
               </a:spcBef>
@@ -29660,26 +29945,20 @@
                 <a:spcPts val="0"/>
               </a:spcAft>
               <a:buNone/>
-            </a:pPr>
-            <a:r>
-              <a:rPr>
-                <a:latin typeface="맑은 고딕"/>
-                <a:ea typeface="맑은 고딕"/>
-              </a:rPr>
-              <a:t/>
-            </a:r>
-            <a:endParaRPr b="1" i="0" sz="1900" u="none" cap="none" strike="noStrike">
+              <a:defRPr/>
+            </a:pPr>
+            <a:endParaRPr sz="1900" b="1" i="0" u="none" strike="noStrike" cap="none">
               <a:solidFill>
                 <a:srgbClr val="202020"/>
               </a:solidFill>
-              <a:latin typeface="Malgun Gothic"/>
-              <a:ea typeface="Malgun Gothic"/>
-              <a:cs typeface="Malgun Gothic"/>
-              <a:sym typeface="Malgun Gothic"/>
+              <a:latin typeface="맑은 고딕"/>
+              <a:ea typeface="맑은 고딕"/>
+              <a:cs typeface="맑은 고딕"/>
+              <a:sym typeface="맑은 고딕"/>
             </a:endParaRPr>
           </a:p>
           <a:p>
-            <a:pPr indent="0" lvl="0" marL="0" marR="0" rtl="0" algn="l">
+            <a:pPr marL="0" marR="0" lvl="0" indent="0" algn="l" rtl="0">
               <a:spcBef>
                 <a:spcPts val="600"/>
               </a:spcBef>
@@ -29687,27 +29966,52 @@
                 <a:spcPts val="0"/>
               </a:spcAft>
               <a:buNone/>
-            </a:pPr>
-            <a:r>
-              <a:rPr b="1" i="0" lang="en-US" sz="2000" u="none" cap="none" strike="noStrike">
-                <a:solidFill>
-                  <a:srgbClr val="FF0000"/>
+              <a:defRPr/>
+            </a:pPr>
+            <a:r>
+              <a:rPr lang="en-US" sz="2000" b="1" i="0" u="none" strike="noStrike" cap="none">
+                <a:solidFill>
+                  <a:srgbClr val="ff0000"/>
                 </a:solidFill>
                 <a:latin typeface="맑은 고딕"/>
                 <a:ea typeface="맑은 고딕"/>
-                <a:cs typeface="Malgun Gothic"/>
-                <a:sym typeface="Malgun Gothic"/>
+                <a:cs typeface="맑은 고딕"/>
+                <a:sym typeface="맑은 고딕"/>
               </a:rPr>
-              <a:t>진단이 아니라 스크리닝 — 진단·치료는 전적으로 의료기관의 영역</a:t>
-            </a:r>
-            <a:endParaRPr b="1" i="0" sz="2000" u="none" cap="none" strike="noStrike">
+              <a:t>진단이 아</a:t>
+            </a:r>
+            <a:r>
+              <a:rPr lang="ko-KR" altLang="en-US" sz="2000" b="1" i="0" u="none" strike="noStrike" cap="none">
+                <a:solidFill>
+                  <a:srgbClr val="ff0000"/>
+                </a:solidFill>
+                <a:latin typeface="맑은 고딕"/>
+                <a:ea typeface="맑은 고딕"/>
+                <a:cs typeface="맑은 고딕"/>
+                <a:sym typeface="맑은 고딕"/>
+              </a:rPr>
+              <a:t>닌</a:t>
+            </a:r>
+            <a:r>
+              <a:rPr lang="en-US" sz="2000" b="1" i="0" u="none" strike="noStrike" cap="none">
+                <a:solidFill>
+                  <a:srgbClr val="ff0000"/>
+                </a:solidFill>
+                <a:latin typeface="맑은 고딕"/>
+                <a:ea typeface="맑은 고딕"/>
+                <a:cs typeface="맑은 고딕"/>
+                <a:sym typeface="맑은 고딕"/>
+              </a:rPr>
+              <a:t> 스크리닝 — 진단·치료는 전적으로 의료기관의 영역</a:t>
+            </a:r>
+            <a:endParaRPr lang="en-US" sz="2000" b="1" i="0" u="none" strike="noStrike" cap="none">
               <a:solidFill>
-                <a:srgbClr val="FF0000"/>
+                <a:srgbClr val="ff0000"/>
               </a:solidFill>
-              <a:latin typeface="Malgun Gothic"/>
-              <a:ea typeface="Malgun Gothic"/>
-              <a:cs typeface="Malgun Gothic"/>
-              <a:sym typeface="Malgun Gothic"/>
+              <a:latin typeface="맑은 고딕"/>
+              <a:ea typeface="맑은 고딕"/>
+              <a:cs typeface="맑은 고딕"/>
+              <a:sym typeface="맑은 고딕"/>
             </a:endParaRPr>
           </a:p>
         </p:txBody>
@@ -29732,40 +30036,41 @@
           </a:ln>
         </p:spPr>
         <p:txBody>
-          <a:bodyPr anchorCtr="0" anchor="t" bIns="45700" lIns="91425" spcFirstLastPara="1" rIns="91425" wrap="square" tIns="45700">
+          <a:bodyPr wrap="square" lIns="91424" tIns="45700" rIns="91424" bIns="45700" anchor="t" anchorCtr="0">
             <a:spAutoFit/>
           </a:bodyPr>
           <a:lstStyle/>
           <a:p>
-            <a:pPr indent="0" lvl="0" marL="0" marR="0" rtl="0" algn="r">
-              <a:spcBef>
-                <a:spcPts val="0"/>
-              </a:spcBef>
-              <a:spcAft>
-                <a:spcPts val="0"/>
-              </a:spcAft>
-              <a:buNone/>
-            </a:pPr>
-            <a:r>
-              <a:rPr b="0" i="0" lang="en-US" sz="1200" u="none" cap="none" strike="noStrike">
+            <a:pPr marL="0" marR="0" lvl="0" indent="0" algn="r" rtl="0">
+              <a:spcBef>
+                <a:spcPts val="0"/>
+              </a:spcBef>
+              <a:spcAft>
+                <a:spcPts val="0"/>
+              </a:spcAft>
+              <a:buNone/>
+              <a:defRPr/>
+            </a:pPr>
+            <a:r>
+              <a:rPr lang="en-US" sz="1200" b="0" i="0" u="none" strike="noStrike" cap="none">
                 <a:solidFill>
                   <a:srgbClr val="666666"/>
                 </a:solidFill>
                 <a:latin typeface="맑은 고딕"/>
                 <a:ea typeface="맑은 고딕"/>
-                <a:cs typeface="Malgun Gothic"/>
-                <a:sym typeface="Malgun Gothic"/>
+                <a:cs typeface="맑은 고딕"/>
+                <a:sym typeface="맑은 고딕"/>
               </a:rPr>
               <a:t>9</a:t>
             </a:r>
-            <a:endParaRPr b="0" i="0" sz="1200" u="none" cap="none" strike="noStrike">
+            <a:endParaRPr sz="1200" b="0" i="0" u="none" strike="noStrike" cap="none">
               <a:solidFill>
                 <a:srgbClr val="666666"/>
               </a:solidFill>
-              <a:latin typeface="Malgun Gothic"/>
-              <a:ea typeface="Malgun Gothic"/>
-              <a:cs typeface="Malgun Gothic"/>
-              <a:sym typeface="Malgun Gothic"/>
+              <a:latin typeface="맑은 고딕"/>
+              <a:ea typeface="맑은 고딕"/>
+              <a:cs typeface="맑은 고딕"/>
+              <a:sym typeface="맑은 고딕"/>
             </a:endParaRPr>
           </a:p>
         </p:txBody>
@@ -29775,6 +30080,14 @@
   <p:clrMapOvr>
     <a:masterClrMapping/>
   </p:clrMapOvr>
+  <mc:AlternateContent xmlns:mc="http://schemas.openxmlformats.org/markup-compatibility/2006">
+    <mc:Choice xmlns:p14="http://schemas.microsoft.com/office/powerpoint/2010/main" Requires="p14">
+      <p:transition xmlns:mc="http://schemas.openxmlformats.org/markup-compatibility/2006" xmlns:p14="http://schemas.microsoft.com/office/powerpoint/2010/main" mc:Ignorable="p14" p14:dur="500"/>
+    </mc:Choice>
+    <mc:Fallback>
+      <p:transition/>
+    </mc:Fallback>
+  </mc:AlternateContent>
 </p:sld>
 </file>
 

--- a/발표자료_최종본_v6.pptx
+++ b/발표자료_최종본_v6.pptx
@@ -17176,7 +17176,7 @@
                 <a:cs typeface="Malgun Gothic"/>
                 <a:sym typeface="Malgun Gothic"/>
               </a:rPr>
-              <a:t>15</a:t>
+              <a:t>14</a:t>
             </a:r>
             <a:endParaRPr/>
           </a:p>
@@ -17888,7 +17888,7 @@
                 <a:cs typeface="맑은 고딕"/>
                 <a:sym typeface="맑은 고딕"/>
               </a:rPr>
-              <a:t>14</a:t>
+              <a:t>15</a:t>
             </a:r>
             <a:endParaRPr/>
           </a:p>
